--- a/presentation/highways_high_streets.pptx
+++ b/presentation/highways_high_streets.pptx
@@ -19,6 +19,12 @@
     <p:sldId id="267" r:id="rId19"/>
     <p:sldId id="268" r:id="rId20"/>
     <p:sldId id="269" r:id="rId21"/>
+    <p:sldId id="270" r:id="rId22"/>
+    <p:sldId id="271" r:id="rId23"/>
+    <p:sldId id="272" r:id="rId24"/>
+    <p:sldId id="273" r:id="rId25"/>
+    <p:sldId id="274" r:id="rId26"/>
+    <p:sldId id="275" r:id="rId27"/>
   </p:sldIdLst>
   <p:sldSz cx="12191695" cy="6858000" type="screen4x3"/>
   <p:notesSz cx="6858000" cy="9144000"/>
@@ -1588,6 +1594,659 @@
 </c:chartSpace>
 </file>
 
+<file path=ppt/charts/chart5.xml><?xml version="1.0" encoding="utf-8"?>
+<c:chartSpace xmlns:c="http://schemas.openxmlformats.org/drawingml/2006/chart" xmlns:a="http://schemas.openxmlformats.org/drawingml/2006/main" xmlns:r="http://schemas.openxmlformats.org/officeDocument/2006/relationships">
+  <c:date1904 val="0"/>
+  <c:chart>
+    <c:autoTitleDeleted val="0"/>
+    <c:plotArea>
+      <c:barChart>
+        <c:barDir val="col"/>
+        <c:grouping val="clustered"/>
+        <c:ser>
+          <c:idx val="0"/>
+          <c:order val="0"/>
+          <c:tx>
+            <c:strRef>
+              <c:f>Sheet1!$B$1</c:f>
+              <c:strCache>
+                <c:ptCount val="1"/>
+                <c:pt idx="0">
+                  <c:v>Weigh-in-motion</c:v>
+                </c:pt>
+              </c:strCache>
+            </c:strRef>
+          </c:tx>
+          <c:spPr>
+            <a:solidFill>
+              <a:srgbClr val="3A7D5C"/>
+            </a:solidFill>
+          </c:spPr>
+          <c:cat>
+            <c:strRef>
+              <c:f>Sheet1!$A$2:$A$5</c:f>
+              <c:strCache>
+                <c:ptCount val="4"/>
+                <c:pt idx="0">
+                  <c:v>Malaba (A1)</c:v>
+                </c:pt>
+                <c:pt idx="1">
+                  <c:v>Elegu (A6)</c:v>
+                </c:pt>
+                <c:pt idx="2">
+                  <c:v>Katuna (A2)</c:v>
+                </c:pt>
+                <c:pt idx="3">
+                  <c:v>Hoima (A9)</c:v>
+                </c:pt>
+              </c:strCache>
+            </c:strRef>
+          </c:cat>
+          <c:val>
+            <c:numRef>
+              <c:f>Sheet1!$B$2:$B$5</c:f>
+              <c:numCache>
+                <c:formatCode>General</c:formatCode>
+                <c:ptCount val="4"/>
+                <c:pt idx="0">
+                  <c:v>16.0</c:v>
+                </c:pt>
+                <c:pt idx="1">
+                  <c:v>8.0</c:v>
+                </c:pt>
+                <c:pt idx="2">
+                  <c:v>16.0</c:v>
+                </c:pt>
+                <c:pt idx="3">
+                  <c:v>0.0</c:v>
+                </c:pt>
+              </c:numCache>
+            </c:numRef>
+          </c:val>
+        </c:ser>
+        <c:ser>
+          <c:idx val="1"/>
+          <c:order val="1"/>
+          <c:tx>
+            <c:strRef>
+              <c:f>Sheet1!$C$1</c:f>
+              <c:strCache>
+                <c:ptCount val="1"/>
+                <c:pt idx="0">
+                  <c:v>No police stops</c:v>
+                </c:pt>
+              </c:strCache>
+            </c:strRef>
+          </c:tx>
+          <c:spPr>
+            <a:solidFill>
+              <a:srgbClr val="4E7C8A"/>
+            </a:solidFill>
+          </c:spPr>
+          <c:cat>
+            <c:strRef>
+              <c:f>Sheet1!$A$2:$A$5</c:f>
+              <c:strCache>
+                <c:ptCount val="4"/>
+                <c:pt idx="0">
+                  <c:v>Malaba (A1)</c:v>
+                </c:pt>
+                <c:pt idx="1">
+                  <c:v>Elegu (A6)</c:v>
+                </c:pt>
+                <c:pt idx="2">
+                  <c:v>Katuna (A2)</c:v>
+                </c:pt>
+                <c:pt idx="3">
+                  <c:v>Hoima (A9)</c:v>
+                </c:pt>
+              </c:strCache>
+            </c:strRef>
+          </c:cat>
+          <c:val>
+            <c:numRef>
+              <c:f>Sheet1!$C$2:$C$5</c:f>
+              <c:numCache>
+                <c:formatCode>General</c:formatCode>
+                <c:ptCount val="4"/>
+                <c:pt idx="0">
+                  <c:v>10.0</c:v>
+                </c:pt>
+                <c:pt idx="1">
+                  <c:v>15.0</c:v>
+                </c:pt>
+                <c:pt idx="2">
+                  <c:v>9.0</c:v>
+                </c:pt>
+                <c:pt idx="3">
+                  <c:v>4.0</c:v>
+                </c:pt>
+              </c:numCache>
+            </c:numRef>
+          </c:val>
+        </c:ser>
+        <c:ser>
+          <c:idx val="2"/>
+          <c:order val="2"/>
+          <c:tx>
+            <c:strRef>
+              <c:f>Sheet1!$D$1</c:f>
+              <c:strCache>
+                <c:ptCount val="1"/>
+                <c:pt idx="0">
+                  <c:v>Bypass 2 worst towns</c:v>
+                </c:pt>
+              </c:strCache>
+            </c:strRef>
+          </c:tx>
+          <c:spPr>
+            <a:solidFill>
+              <a:srgbClr val="D9A441"/>
+            </a:solidFill>
+          </c:spPr>
+          <c:cat>
+            <c:strRef>
+              <c:f>Sheet1!$A$2:$A$5</c:f>
+              <c:strCache>
+                <c:ptCount val="4"/>
+                <c:pt idx="0">
+                  <c:v>Malaba (A1)</c:v>
+                </c:pt>
+                <c:pt idx="1">
+                  <c:v>Elegu (A6)</c:v>
+                </c:pt>
+                <c:pt idx="2">
+                  <c:v>Katuna (A2)</c:v>
+                </c:pt>
+                <c:pt idx="3">
+                  <c:v>Hoima (A9)</c:v>
+                </c:pt>
+              </c:strCache>
+            </c:strRef>
+          </c:cat>
+          <c:val>
+            <c:numRef>
+              <c:f>Sheet1!$D$2:$D$5</c:f>
+              <c:numCache>
+                <c:formatCode>General</c:formatCode>
+                <c:ptCount val="4"/>
+                <c:pt idx="0">
+                  <c:v>3.8</c:v>
+                </c:pt>
+                <c:pt idx="1">
+                  <c:v>2.0</c:v>
+                </c:pt>
+                <c:pt idx="2">
+                  <c:v>4.7</c:v>
+                </c:pt>
+                <c:pt idx="3">
+                  <c:v>0.0</c:v>
+                </c:pt>
+              </c:numCache>
+            </c:numRef>
+          </c:val>
+        </c:ser>
+        <c:ser>
+          <c:idx val="3"/>
+          <c:order val="3"/>
+          <c:tx>
+            <c:strRef>
+              <c:f>Sheet1!$E$1</c:f>
+              <c:strCache>
+                <c:ptCount val="1"/>
+                <c:pt idx="0">
+                  <c:v>Service roads, all settlements</c:v>
+                </c:pt>
+              </c:strCache>
+            </c:strRef>
+          </c:tx>
+          <c:spPr>
+            <a:solidFill>
+              <a:srgbClr val="C4532D"/>
+            </a:solidFill>
+          </c:spPr>
+          <c:cat>
+            <c:strRef>
+              <c:f>Sheet1!$A$2:$A$5</c:f>
+              <c:strCache>
+                <c:ptCount val="4"/>
+                <c:pt idx="0">
+                  <c:v>Malaba (A1)</c:v>
+                </c:pt>
+                <c:pt idx="1">
+                  <c:v>Elegu (A6)</c:v>
+                </c:pt>
+                <c:pt idx="2">
+                  <c:v>Katuna (A2)</c:v>
+                </c:pt>
+                <c:pt idx="3">
+                  <c:v>Hoima (A9)</c:v>
+                </c:pt>
+              </c:strCache>
+            </c:strRef>
+          </c:cat>
+          <c:val>
+            <c:numRef>
+              <c:f>Sheet1!$E$2:$E$5</c:f>
+              <c:numCache>
+                <c:formatCode>General</c:formatCode>
+                <c:ptCount val="4"/>
+                <c:pt idx="0">
+                  <c:v>10.5</c:v>
+                </c:pt>
+                <c:pt idx="1">
+                  <c:v>15.5</c:v>
+                </c:pt>
+                <c:pt idx="2">
+                  <c:v>16.9</c:v>
+                </c:pt>
+                <c:pt idx="3">
+                  <c:v>9.8</c:v>
+                </c:pt>
+              </c:numCache>
+            </c:numRef>
+          </c:val>
+        </c:ser>
+        <c:dLbls>
+          <c:numFmt formatCode="0" sourceLinked="0"/>
+          <c:txPr>
+            <a:bodyPr/>
+            <a:lstStyle/>
+            <a:p>
+              <a:pPr>
+                <a:defRPr sz="1100">
+                  <a:solidFill>
+                    <a:srgbClr val="1E2528"/>
+                  </a:solidFill>
+                </a:defRPr>
+              </a:pPr>
+            </a:p>
+          </c:txPr>
+          <c:dLblPos val="outEnd"/>
+          <c:showLegendKey val="0"/>
+          <c:showVal val="1"/>
+          <c:showCatName val="0"/>
+          <c:showSerName val="0"/>
+          <c:showPercent val="0"/>
+          <c:showBubbleSize val="0"/>
+          <c:showLeaderLines val="1"/>
+        </c:dLbls>
+        <c:gapWidth val="60"/>
+        <c:overlap val="-5"/>
+        <c:axId val="-2068027336"/>
+        <c:axId val="-2113994440"/>
+      </c:barChart>
+      <c:catAx>
+        <c:axId val="-2068027336"/>
+        <c:scaling>
+          <c:orientation val="minMax"/>
+        </c:scaling>
+        <c:delete val="0"/>
+        <c:axPos val="b"/>
+        <c:majorTickMark val="out"/>
+        <c:minorTickMark val="none"/>
+        <c:tickLblPos val="nextTo"/>
+        <c:spPr>
+          <a:ln>
+            <a:solidFill>
+              <a:srgbClr val="B8C7C4"/>
+            </a:solidFill>
+          </a:ln>
+        </c:spPr>
+        <c:txPr>
+          <a:bodyPr/>
+          <a:lstStyle/>
+          <a:p>
+            <a:pPr>
+              <a:defRPr sz="1200"/>
+            </a:pPr>
+          </a:p>
+        </c:txPr>
+        <c:crossAx val="-2113994440"/>
+        <c:crosses val="autoZero"/>
+        <c:auto val="1"/>
+        <c:lblAlgn val="ctr"/>
+        <c:lblOffset val="100"/>
+        <c:noMultiLvlLbl val="0"/>
+      </c:catAx>
+      <c:valAx>
+        <c:axId val="-2113994440"/>
+        <c:scaling/>
+        <c:delete val="0"/>
+        <c:axPos val="l"/>
+        <c:majorGridlines>
+          <c:spPr>
+            <a:ln>
+              <a:solidFill>
+                <a:srgbClr val="E3E7E6"/>
+              </a:solidFill>
+            </a:ln>
+          </c:spPr>
+        </c:majorGridlines>
+        <c:majorTickMark val="out"/>
+        <c:minorTickMark val="none"/>
+        <c:tickLblPos val="nextTo"/>
+        <c:spPr>
+          <a:ln>
+            <a:noFill/>
+          </a:ln>
+        </c:spPr>
+        <c:txPr>
+          <a:bodyPr/>
+          <a:lstStyle/>
+          <a:p>
+            <a:pPr>
+              <a:defRPr sz="1100"/>
+            </a:pPr>
+          </a:p>
+        </c:txPr>
+        <c:crossAx val="-2068027336"/>
+        <c:crosses val="autoZero"/>
+      </c:valAx>
+    </c:plotArea>
+    <c:legend>
+      <c:legendPos val="t"/>
+      <c:overlay val="0"/>
+      <c:txPr>
+        <a:bodyPr/>
+        <a:lstStyle/>
+        <a:p>
+          <a:pPr>
+            <a:defRPr sz="1200"/>
+          </a:pPr>
+        </a:p>
+      </c:txPr>
+    </c:legend>
+    <c:dispBlanksAs val="gap"/>
+  </c:chart>
+  <c:txPr>
+    <a:bodyPr/>
+    <a:lstStyle/>
+    <a:p>
+      <a:pPr>
+        <a:defRPr sz="1200">
+          <a:solidFill>
+            <a:srgbClr val="5B6770"/>
+          </a:solidFill>
+          <a:latin typeface="Calibri"/>
+        </a:defRPr>
+      </a:pPr>
+      <a:endParaRPr lang="en-US"/>
+    </a:p>
+  </c:txPr>
+  <c:externalData r:id="rId1">
+    <c:autoUpdate val="0"/>
+  </c:externalData>
+</c:chartSpace>
+</file>
+
+<file path=ppt/charts/chart6.xml><?xml version="1.0" encoding="utf-8"?>
+<c:chartSpace xmlns:c="http://schemas.openxmlformats.org/drawingml/2006/chart" xmlns:a="http://schemas.openxmlformats.org/drawingml/2006/main" xmlns:r="http://schemas.openxmlformats.org/officeDocument/2006/relationships">
+  <c:date1904 val="0"/>
+  <c:chart>
+    <c:autoTitleDeleted val="0"/>
+    <c:plotArea>
+      <c:barChart>
+        <c:barDir val="bar"/>
+        <c:grouping val="clustered"/>
+        <c:ser>
+          <c:idx val="0"/>
+          <c:order val="0"/>
+          <c:tx>
+            <c:strRef>
+              <c:f>Sheet1!$B$1</c:f>
+              <c:strCache>
+                <c:ptCount val="1"/>
+                <c:pt idx="0">
+                  <c:v>Share of people</c:v>
+                </c:pt>
+              </c:strCache>
+            </c:strRef>
+          </c:tx>
+          <c:spPr>
+            <a:solidFill>
+              <a:srgbClr val="D9A441"/>
+            </a:solidFill>
+          </c:spPr>
+          <c:cat>
+            <c:strRef>
+              <c:f>Sheet1!$A$2:$A$5</c:f>
+              <c:strCache>
+                <c:ptCount val="4"/>
+                <c:pt idx="0">
+                  <c:v>Malaba (A1)</c:v>
+                </c:pt>
+                <c:pt idx="1">
+                  <c:v>Elegu (A6)</c:v>
+                </c:pt>
+                <c:pt idx="2">
+                  <c:v>Katuna (A2)</c:v>
+                </c:pt>
+                <c:pt idx="3">
+                  <c:v>Hoima (A9)</c:v>
+                </c:pt>
+              </c:strCache>
+            </c:strRef>
+          </c:cat>
+          <c:val>
+            <c:numRef>
+              <c:f>Sheet1!$B$2:$B$5</c:f>
+              <c:numCache>
+                <c:formatCode>General</c:formatCode>
+                <c:ptCount val="4"/>
+                <c:pt idx="0">
+                  <c:v>0.49</c:v>
+                </c:pt>
+                <c:pt idx="1">
+                  <c:v>0.57</c:v>
+                </c:pt>
+                <c:pt idx="2">
+                  <c:v>0.51</c:v>
+                </c:pt>
+                <c:pt idx="3">
+                  <c:v>0.66</c:v>
+                </c:pt>
+              </c:numCache>
+            </c:numRef>
+          </c:val>
+        </c:ser>
+        <c:ser>
+          <c:idx val="1"/>
+          <c:order val="1"/>
+          <c:tx>
+            <c:strRef>
+              <c:f>Sheet1!$C$1</c:f>
+              <c:strCache>
+                <c:ptCount val="1"/>
+                <c:pt idx="0">
+                  <c:v>Share of exposure</c:v>
+                </c:pt>
+              </c:strCache>
+            </c:strRef>
+          </c:tx>
+          <c:spPr>
+            <a:solidFill>
+              <a:srgbClr val="C4532D"/>
+            </a:solidFill>
+          </c:spPr>
+          <c:cat>
+            <c:strRef>
+              <c:f>Sheet1!$A$2:$A$5</c:f>
+              <c:strCache>
+                <c:ptCount val="4"/>
+                <c:pt idx="0">
+                  <c:v>Malaba (A1)</c:v>
+                </c:pt>
+                <c:pt idx="1">
+                  <c:v>Elegu (A6)</c:v>
+                </c:pt>
+                <c:pt idx="2">
+                  <c:v>Katuna (A2)</c:v>
+                </c:pt>
+                <c:pt idx="3">
+                  <c:v>Hoima (A9)</c:v>
+                </c:pt>
+              </c:strCache>
+            </c:strRef>
+          </c:cat>
+          <c:val>
+            <c:numRef>
+              <c:f>Sheet1!$C$2:$C$5</c:f>
+              <c:numCache>
+                <c:formatCode>General</c:formatCode>
+                <c:ptCount val="4"/>
+                <c:pt idx="0">
+                  <c:v>0.66</c:v>
+                </c:pt>
+                <c:pt idx="1">
+                  <c:v>0.73</c:v>
+                </c:pt>
+                <c:pt idx="2">
+                  <c:v>0.7</c:v>
+                </c:pt>
+                <c:pt idx="3">
+                  <c:v>0.81</c:v>
+                </c:pt>
+              </c:numCache>
+            </c:numRef>
+          </c:val>
+        </c:ser>
+        <c:dLbls>
+          <c:numFmt formatCode="0%" sourceLinked="0"/>
+          <c:txPr>
+            <a:bodyPr/>
+            <a:lstStyle/>
+            <a:p>
+              <a:pPr>
+                <a:defRPr sz="1200">
+                  <a:solidFill>
+                    <a:srgbClr val="1E2528"/>
+                  </a:solidFill>
+                </a:defRPr>
+              </a:pPr>
+            </a:p>
+          </c:txPr>
+          <c:dLblPos val="outEnd"/>
+          <c:showLegendKey val="0"/>
+          <c:showVal val="1"/>
+          <c:showCatName val="0"/>
+          <c:showSerName val="0"/>
+          <c:showPercent val="0"/>
+          <c:showBubbleSize val="0"/>
+          <c:showLeaderLines val="1"/>
+        </c:dLbls>
+        <c:gapWidth val="55"/>
+        <c:overlap val="-5"/>
+        <c:axId val="-2068027336"/>
+        <c:axId val="-2113994440"/>
+      </c:barChart>
+      <c:catAx>
+        <c:axId val="-2068027336"/>
+        <c:scaling>
+          <c:orientation val="maxMin"/>
+        </c:scaling>
+        <c:delete val="0"/>
+        <c:axPos val="l"/>
+        <c:majorTickMark val="out"/>
+        <c:minorTickMark val="none"/>
+        <c:tickLblPos val="nextTo"/>
+        <c:spPr>
+          <a:ln>
+            <a:solidFill>
+              <a:srgbClr val="B8C7C4"/>
+            </a:solidFill>
+          </a:ln>
+        </c:spPr>
+        <c:txPr>
+          <a:bodyPr/>
+          <a:lstStyle/>
+          <a:p>
+            <a:pPr>
+              <a:defRPr sz="1200"/>
+            </a:pPr>
+          </a:p>
+        </c:txPr>
+        <c:crossAx val="-2113994440"/>
+        <c:crosses val="autoZero"/>
+        <c:auto val="1"/>
+        <c:lblAlgn val="ctr"/>
+        <c:lblOffset val="100"/>
+        <c:noMultiLvlLbl val="0"/>
+      </c:catAx>
+      <c:valAx>
+        <c:axId val="-2113994440"/>
+        <c:scaling>
+          <c:max val="1.0"/>
+        </c:scaling>
+        <c:delete val="0"/>
+        <c:axPos val="b"/>
+        <c:majorGridlines>
+          <c:spPr>
+            <a:ln>
+              <a:solidFill>
+                <a:srgbClr val="E3E7E6"/>
+              </a:solidFill>
+            </a:ln>
+          </c:spPr>
+        </c:majorGridlines>
+        <c:numFmt formatCode="0%" sourceLinked="0"/>
+        <c:majorTickMark val="out"/>
+        <c:minorTickMark val="none"/>
+        <c:tickLblPos val="nextTo"/>
+        <c:spPr>
+          <a:ln>
+            <a:noFill/>
+          </a:ln>
+        </c:spPr>
+        <c:txPr>
+          <a:bodyPr/>
+          <a:lstStyle/>
+          <a:p>
+            <a:pPr>
+              <a:defRPr sz="1100"/>
+            </a:pPr>
+          </a:p>
+        </c:txPr>
+        <c:crossAx val="-2068027336"/>
+        <c:crosses val="autoZero"/>
+      </c:valAx>
+    </c:plotArea>
+    <c:legend>
+      <c:legendPos val="t"/>
+      <c:overlay val="0"/>
+      <c:txPr>
+        <a:bodyPr/>
+        <a:lstStyle/>
+        <a:p>
+          <a:pPr>
+            <a:defRPr sz="1200"/>
+          </a:pPr>
+        </a:p>
+      </c:txPr>
+    </c:legend>
+    <c:dispBlanksAs val="gap"/>
+  </c:chart>
+  <c:txPr>
+    <a:bodyPr/>
+    <a:lstStyle/>
+    <a:p>
+      <a:pPr>
+        <a:defRPr sz="1200">
+          <a:solidFill>
+            <a:srgbClr val="5B6770"/>
+          </a:solidFill>
+          <a:latin typeface="Calibri"/>
+        </a:defRPr>
+      </a:pPr>
+      <a:endParaRPr lang="en-US"/>
+    </a:p>
+  </c:txPr>
+  <c:externalData r:id="rId1">
+    <c:autoUpdate val="0"/>
+  </c:externalData>
+</c:chartSpace>
+</file>
+
 <file path=ppt/notesMasters/notesMaster1.xml><?xml version="1.0" encoding="utf-8"?>
 <p:notesMaster xmlns:a="http://schemas.openxmlformats.org/drawingml/2006/main" xmlns:p="http://schemas.openxmlformats.org/presentationml/2006/main" xmlns:r="http://schemas.openxmlformats.org/officeDocument/2006/relationships">
   <p:cSld>
@@ -2008,6 +2667,146 @@
 </p:notes>
 </file>
 
+<file path=ppt/notesSlides/notesSlide10.xml><?xml version="1.0" encoding="utf-8"?>
+<p:notes xmlns:a="http://schemas.openxmlformats.org/drawingml/2006/main" xmlns:p="http://schemas.openxmlformats.org/presentationml/2006/main" xmlns:r="http://schemas.openxmlformats.org/officeDocument/2006/relationships">
+  <p:cSld>
+    <p:spTree>
+      <p:nvGrpSpPr>
+        <p:cNvPr id="1" name=""/>
+        <p:cNvGrpSpPr/>
+        <p:nvPr/>
+      </p:nvGrpSpPr>
+      <p:grpSpPr>
+        <a:xfrm>
+          <a:off x="0" y="0"/>
+          <a:ext cx="0" cy="0"/>
+          <a:chOff x="0" y="0"/>
+          <a:chExt cx="0" cy="0"/>
+        </a:xfrm>
+      </p:grpSpPr>
+      <p:sp>
+        <p:nvSpPr>
+          <p:cNvPr id="2" name="Slide Image Placeholder 1"/>
+          <p:cNvSpPr>
+            <a:spLocks noGrp="1"/>
+          </p:cNvSpPr>
+          <p:nvPr>
+            <p:ph type="sldImg" idx="2"/>
+          </p:nvPr>
+        </p:nvSpPr>
+        <p:spPr/>
+      </p:sp>
+      <p:sp>
+        <p:nvSpPr>
+          <p:cNvPr id="3" name="Notes Placeholder 2"/>
+          <p:cNvSpPr>
+            <a:spLocks noGrp="1"/>
+          </p:cNvSpPr>
+          <p:nvPr>
+            <p:ph type="body" idx="3" sz="quarter"/>
+          </p:nvPr>
+        </p:nvSpPr>
+        <p:spPr/>
+        <p:txBody>
+          <a:bodyPr/>
+          <a:lstStyle/>
+          <a:p>
+            <a:r>
+              <a:t>scripts/23_rail.py. Alignments minimise length x grade above 1.5% x built-up share inside 25 km of each road; screening only. Capital cost from the eastern SGR contract (EUR 2.7 bn for 273 km). 30% of each road's truck freight moved (15-50%). Kenya's Naivasha-Malaba SGR link is not built, which the through-traffic case needs.</a:t>
+            </a:r>
+          </a:p>
+        </p:txBody>
+      </p:sp>
+      <p:sp>
+        <p:nvSpPr>
+          <p:cNvPr id="4" name="Slide Number Placeholder 3"/>
+          <p:cNvSpPr>
+            <a:spLocks noGrp="1"/>
+          </p:cNvSpPr>
+          <p:nvPr>
+            <p:ph type="sldNum" idx="5" sz="quarter"/>
+          </p:nvPr>
+        </p:nvSpPr>
+        <p:spPr/>
+      </p:sp>
+    </p:spTree>
+  </p:cSld>
+  <p:clrMapOvr>
+    <a:masterClrMapping/>
+  </p:clrMapOvr>
+</p:notes>
+</file>
+
+<file path=ppt/notesSlides/notesSlide11.xml><?xml version="1.0" encoding="utf-8"?>
+<p:notes xmlns:a="http://schemas.openxmlformats.org/drawingml/2006/main" xmlns:p="http://schemas.openxmlformats.org/presentationml/2006/main" xmlns:r="http://schemas.openxmlformats.org/officeDocument/2006/relationships">
+  <p:cSld>
+    <p:spTree>
+      <p:nvGrpSpPr>
+        <p:cNvPr id="1" name=""/>
+        <p:cNvGrpSpPr/>
+        <p:nvPr/>
+      </p:nvGrpSpPr>
+      <p:grpSpPr>
+        <a:xfrm>
+          <a:off x="0" y="0"/>
+          <a:ext cx="0" cy="0"/>
+          <a:chOff x="0" y="0"/>
+          <a:chExt cx="0" cy="0"/>
+        </a:xfrm>
+      </p:grpSpPr>
+      <p:sp>
+        <p:nvSpPr>
+          <p:cNvPr id="2" name="Slide Image Placeholder 1"/>
+          <p:cNvSpPr>
+            <a:spLocks noGrp="1"/>
+          </p:cNvSpPr>
+          <p:nvPr>
+            <p:ph type="sldImg" idx="2"/>
+          </p:nvPr>
+        </p:nvSpPr>
+        <p:spPr/>
+      </p:sp>
+      <p:sp>
+        <p:nvSpPr>
+          <p:cNvPr id="3" name="Notes Placeholder 2"/>
+          <p:cNvSpPr>
+            <a:spLocks noGrp="1"/>
+          </p:cNvSpPr>
+          <p:nvPr>
+            <p:ph type="body" idx="3" sz="quarter"/>
+          </p:nvPr>
+        </p:nvSpPr>
+        <p:spPr/>
+        <p:txBody>
+          <a:bodyPr/>
+          <a:lstStyle/>
+          <a:p>
+            <a:r>
+              <a:t>These are implications from a light-traffic model, not project appraisals. The weighbridge saving assumes about ten minutes per stop, which is itself an assumption with a wide range.</a:t>
+            </a:r>
+          </a:p>
+        </p:txBody>
+      </p:sp>
+      <p:sp>
+        <p:nvSpPr>
+          <p:cNvPr id="4" name="Slide Number Placeholder 3"/>
+          <p:cNvSpPr>
+            <a:spLocks noGrp="1"/>
+          </p:cNvSpPr>
+          <p:nvPr>
+            <p:ph type="sldNum" idx="5" sz="quarter"/>
+          </p:nvPr>
+        </p:nvSpPr>
+        <p:spPr/>
+      </p:sp>
+    </p:spTree>
+  </p:cSld>
+  <p:clrMapOvr>
+    <a:masterClrMapping/>
+  </p:clrMapOvr>
+</p:notes>
+</file>
+
 <file path=ppt/notesSlides/notesSlide2.xml><?xml version="1.0" encoding="utf-8"?>
 <p:notes xmlns:a="http://schemas.openxmlformats.org/drawingml/2006/main" xmlns:p="http://schemas.openxmlformats.org/presentationml/2006/main" xmlns:r="http://schemas.openxmlformats.org/officeDocument/2006/relationships">
   <p:cSld>
@@ -2403,7 +3202,7 @@
           <a:lstStyle/>
           <a:p>
             <a:r>
-              <a:t>Numbers come from outputs/hotspots_mapped.csv. Close-ups of each hotspot are in figures/m03_hotspots.png and figures/hotspots/, and one atlas sheet per corridor in figures/m05_atlas_*.png.</a:t>
+              <a:t>figures/a2_corridor_race.gif, from scripts/13_animations.py.</a:t>
             </a:r>
           </a:p>
         </p:txBody>
@@ -2473,7 +3272,7 @@
           <a:lstStyle/>
           <a:p>
             <a:r>
-              <a:t>Hectares within 300 m, 2000 to 2020: Elegu 855 to 1,437; Hoima 477 to 748; Katuna 1,188 to 1,704; Malaba 1,078 to 1,370. GHSL's projection gives only +5–9% for 2020–2026, far slower than the observed trend, so it probably understates recent building.</a:t>
+              <a:t>Numbers come from outputs/hotspots_mapped.csv. Close-ups of each hotspot are in figures/m03_hotspots.png and figures/hotspots/, and one atlas sheet per corridor in figures/m05_atlas_*.png.</a:t>
             </a:r>
           </a:p>
         </p:txBody>
@@ -2543,7 +3342,7 @@
           <a:lstStyle/>
           <a:p>
             <a:r>
-              <a:t>These are implications from a light-traffic model, not project appraisals. The weighbridge saving assumes about ten minutes per stop, which is itself an assumption with a wide range.</a:t>
+              <a:t>Hectares within 300 m, 2000 to 2020: Elegu 855 to 1,437; Hoima 477 to 748; Katuna 1,188 to 1,704; Malaba 1,078 to 1,370. GHSL's projection gives only +5–9% for 2020–2026, far slower than the observed trend, so it probably understates recent building.</a:t>
             </a:r>
           </a:p>
         </p:txBody>
@@ -5751,7 +6550,7 @@
     <p:bg>
       <p:bgPr>
         <a:solidFill>
-          <a:srgbClr val="FFFFFF"/>
+          <a:srgbClr val="17252A"/>
         </a:solidFill>
         <a:effectLst/>
       </p:bgPr>
@@ -5763,9 +6562,119 @@
         <p:nvPr/>
       </p:nvGrpSpPr>
       <p:grpSpPr/>
+      <p:sp>
+        <p:nvSpPr>
+          <p:cNvPr id="2" name="TextBox 1"/>
+          <p:cNvSpPr txBox="1"/>
+          <p:nvPr/>
+        </p:nvSpPr>
+        <p:spPr>
+          <a:xfrm>
+            <a:off x="548640" y="457200"/>
+            <a:ext cx="4754880" cy="1280160"/>
+          </a:xfrm>
+          <a:prstGeom prst="rect">
+            <a:avLst/>
+          </a:prstGeom>
+          <a:noFill/>
+        </p:spPr>
+        <p:txBody>
+          <a:bodyPr wrap="square" lIns="0" rIns="0" tIns="0" bIns="0" anchor="t">
+            <a:spAutoFit/>
+          </a:bodyPr>
+          <a:lstStyle/>
+          <a:p>
+            <a:pPr algn="l">
+              <a:spcAft>
+                <a:spcPts val="0"/>
+              </a:spcAft>
+            </a:pPr>
+            <a:r>
+              <a:rPr sz="3200" b="1" i="0">
+                <a:solidFill>
+                  <a:srgbClr val="FFFFFF"/>
+                </a:solidFill>
+                <a:latin typeface="Cambria"/>
+              </a:rPr>
+              <a:t>The same truck, five roads</a:t>
+            </a:r>
+          </a:p>
+        </p:txBody>
+      </p:sp>
+      <p:sp>
+        <p:nvSpPr>
+          <p:cNvPr id="3" name="TextBox 2"/>
+          <p:cNvSpPr txBox="1"/>
+          <p:nvPr/>
+        </p:nvSpPr>
+        <p:spPr>
+          <a:xfrm>
+            <a:off x="548640" y="1828800"/>
+            <a:ext cx="4572000" cy="2926080"/>
+          </a:xfrm>
+          <a:prstGeom prst="rect">
+            <a:avLst/>
+          </a:prstGeom>
+          <a:noFill/>
+        </p:spPr>
+        <p:txBody>
+          <a:bodyPr wrap="square" lIns="0" rIns="0" tIns="0" bIns="0" anchor="t">
+            <a:spAutoFit/>
+          </a:bodyPr>
+          <a:lstStyle/>
+          <a:p>
+            <a:pPr algn="l">
+              <a:spcAft>
+                <a:spcPts val="1200"/>
+              </a:spcAft>
+            </a:pPr>
+            <a:r>
+              <a:rPr sz="1600" b="0" i="0">
+                <a:solidFill>
+                  <a:srgbClr val="B8C7C4"/>
+                </a:solidFill>
+                <a:latin typeface="Calibri"/>
+              </a:rPr>
+              <a:t>A loaded truck leaves Kampala on each corridor at the same moment, next to a truck on open road.</a:t>
+            </a:r>
+          </a:p>
+          <a:p>
+            <a:pPr algn="l">
+              <a:spcAft>
+                <a:spcPts val="1200"/>
+              </a:spcAft>
+            </a:pPr>
+            <a:r>
+              <a:rPr sz="1600" b="0" i="0">
+                <a:solidFill>
+                  <a:srgbClr val="B8C7C4"/>
+                </a:solidFill>
+                <a:latin typeface="Calibri"/>
+              </a:rPr>
+              <a:t>Each road colours in with the delay it causes: towns, weighbridges, humps and hills.</a:t>
+            </a:r>
+          </a:p>
+          <a:p>
+            <a:pPr algn="l">
+              <a:spcAft>
+                <a:spcPts val="1200"/>
+              </a:spcAft>
+            </a:pPr>
+            <a:r>
+              <a:rPr sz="1600" b="0" i="1">
+                <a:solidFill>
+                  <a:srgbClr val="D9A441"/>
+                </a:solidFill>
+                <a:latin typeface="Calibri"/>
+              </a:rPr>
+              <a:t>The animation plays in slide-show mode.</a:t>
+            </a:r>
+          </a:p>
+        </p:txBody>
+      </p:sp>
       <p:pic>
         <p:nvPicPr>
-          <p:cNvPr id="2" name="Picture 1" descr="m02.png"/>
+          <p:cNvPr id="4" name="Picture 3" descr="a2_corridor_race.gif"/>
           <p:cNvPicPr>
             <a:picLocks noChangeAspect="1"/>
           </p:cNvPicPr>
@@ -5779,655 +6688,14 @@
         </p:blipFill>
         <p:spPr>
           <a:xfrm>
-            <a:off x="365760" y="320040"/>
-            <a:ext cx="6417070" cy="6217920"/>
+            <a:off x="5760720" y="320040"/>
+            <a:ext cx="5829300" cy="6217920"/>
           </a:xfrm>
           <a:prstGeom prst="rect">
             <a:avLst/>
           </a:prstGeom>
         </p:spPr>
       </p:pic>
-      <p:sp>
-        <p:nvSpPr>
-          <p:cNvPr id="3" name="TextBox 2"/>
-          <p:cNvSpPr txBox="1"/>
-          <p:nvPr/>
-        </p:nvSpPr>
-        <p:spPr>
-          <a:xfrm>
-            <a:off x="7086600" y="411480"/>
-            <a:ext cx="4663440" cy="1280160"/>
-          </a:xfrm>
-          <a:prstGeom prst="rect">
-            <a:avLst/>
-          </a:prstGeom>
-          <a:noFill/>
-        </p:spPr>
-        <p:txBody>
-          <a:bodyPr wrap="square" lIns="0" rIns="0" tIns="0" bIns="0" anchor="t">
-            <a:spAutoFit/>
-          </a:bodyPr>
-          <a:lstStyle/>
-          <a:p>
-            <a:pPr algn="l">
-              <a:spcAft>
-                <a:spcPts val="0"/>
-              </a:spcAft>
-            </a:pPr>
-            <a:r>
-              <a:rPr sz="2800" b="1" i="0">
-                <a:solidFill>
-                  <a:srgbClr val="1E2528"/>
-                </a:solidFill>
-                <a:latin typeface="Cambria"/>
-              </a:rPr>
-              <a:t>Result 3 · Delay concentrates at a few points</a:t>
-            </a:r>
-          </a:p>
-        </p:txBody>
-      </p:sp>
-      <p:sp>
-        <p:nvSpPr>
-          <p:cNvPr id="4" name="TextBox 3"/>
-          <p:cNvSpPr txBox="1"/>
-          <p:nvPr/>
-        </p:nvSpPr>
-        <p:spPr>
-          <a:xfrm>
-            <a:off x="7086600" y="1783080"/>
-            <a:ext cx="4663440" cy="548640"/>
-          </a:xfrm>
-          <a:prstGeom prst="rect">
-            <a:avLst/>
-          </a:prstGeom>
-          <a:noFill/>
-        </p:spPr>
-        <p:txBody>
-          <a:bodyPr wrap="square" lIns="0" rIns="0" tIns="0" bIns="0" anchor="t">
-            <a:spAutoFit/>
-          </a:bodyPr>
-          <a:lstStyle/>
-          <a:p>
-            <a:pPr algn="l">
-              <a:spcAft>
-                <a:spcPts val="0"/>
-              </a:spcAft>
-            </a:pPr>
-            <a:r>
-              <a:rPr sz="1400" b="0" i="0">
-                <a:solidFill>
-                  <a:srgbClr val="5B6770"/>
-                </a:solidFill>
-                <a:latin typeface="Calibri"/>
-              </a:rPr>
-              <a:t>Truck minutes lost per km vs open road; numbered: the worst 2 km stretches</a:t>
-            </a:r>
-          </a:p>
-        </p:txBody>
-      </p:sp>
-      <p:sp>
-        <p:nvSpPr>
-          <p:cNvPr id="5" name="Oval 4"/>
-          <p:cNvSpPr/>
-          <p:nvPr/>
-        </p:nvSpPr>
-        <p:spPr>
-          <a:xfrm>
-            <a:off x="7086600" y="2560320"/>
-            <a:ext cx="457200" cy="457200"/>
-          </a:xfrm>
-          <a:prstGeom prst="ellipse">
-            <a:avLst/>
-          </a:prstGeom>
-          <a:solidFill>
-            <a:srgbClr val="17252A"/>
-          </a:solidFill>
-          <a:ln>
-            <a:noFill/>
-          </a:ln>
-          <a:effectLst/>
-        </p:spPr>
-        <p:style>
-          <a:lnRef idx="1">
-            <a:schemeClr val="accent1"/>
-          </a:lnRef>
-          <a:fillRef idx="3">
-            <a:schemeClr val="accent1"/>
-          </a:fillRef>
-          <a:effectRef idx="2">
-            <a:schemeClr val="accent1"/>
-          </a:effectRef>
-          <a:fontRef idx="minor">
-            <a:schemeClr val="lt1"/>
-          </a:fontRef>
-        </p:style>
-        <p:txBody>
-          <a:bodyPr rtlCol="0" anchor="ctr" lIns="0" rIns="0" tIns="0" bIns="0"/>
-          <a:lstStyle/>
-          <a:p>
-            <a:pPr algn="ctr"/>
-            <a:r>
-              <a:rPr sz="1500" b="1">
-                <a:solidFill>
-                  <a:srgbClr val="FFFFFF"/>
-                </a:solidFill>
-                <a:latin typeface="Calibri"/>
-              </a:rPr>
-              <a:t>1</a:t>
-            </a:r>
-          </a:p>
-        </p:txBody>
-      </p:sp>
-      <p:sp>
-        <p:nvSpPr>
-          <p:cNvPr id="6" name="TextBox 5"/>
-          <p:cNvSpPr txBox="1"/>
-          <p:nvPr/>
-        </p:nvSpPr>
-        <p:spPr>
-          <a:xfrm>
-            <a:off x="7726679" y="2514600"/>
-            <a:ext cx="4023360" cy="320040"/>
-          </a:xfrm>
-          <a:prstGeom prst="rect">
-            <a:avLst/>
-          </a:prstGeom>
-          <a:noFill/>
-        </p:spPr>
-        <p:txBody>
-          <a:bodyPr wrap="square" lIns="0" rIns="0" tIns="0" bIns="0" anchor="t">
-            <a:spAutoFit/>
-          </a:bodyPr>
-          <a:lstStyle/>
-          <a:p>
-            <a:pPr algn="l">
-              <a:spcAft>
-                <a:spcPts val="0"/>
-              </a:spcAft>
-            </a:pPr>
-            <a:r>
-              <a:rPr sz="1600" b="1" i="0">
-                <a:solidFill>
-                  <a:srgbClr val="1E2528"/>
-                </a:solidFill>
-                <a:latin typeface="Calibri"/>
-              </a:rPr>
-              <a:t>Nakawa, Kampala end of A1</a:t>
-            </a:r>
-          </a:p>
-        </p:txBody>
-      </p:sp>
-      <p:sp>
-        <p:nvSpPr>
-          <p:cNvPr id="7" name="TextBox 6"/>
-          <p:cNvSpPr txBox="1"/>
-          <p:nvPr/>
-        </p:nvSpPr>
-        <p:spPr>
-          <a:xfrm>
-            <a:off x="7726679" y="2843784"/>
-            <a:ext cx="4023360" cy="365760"/>
-          </a:xfrm>
-          <a:prstGeom prst="rect">
-            <a:avLst/>
-          </a:prstGeom>
-          <a:noFill/>
-        </p:spPr>
-        <p:txBody>
-          <a:bodyPr wrap="square" lIns="0" rIns="0" tIns="0" bIns="0" anchor="t">
-            <a:spAutoFit/>
-          </a:bodyPr>
-          <a:lstStyle/>
-          <a:p>
-            <a:pPr algn="l">
-              <a:spcAft>
-                <a:spcPts val="0"/>
-              </a:spcAft>
-            </a:pPr>
-            <a:r>
-              <a:rPr sz="1300" b="0" i="0">
-                <a:solidFill>
-                  <a:srgbClr val="5B6770"/>
-                </a:solidFill>
-                <a:latin typeface="Calibri"/>
-              </a:rPr>
-              <a:t>+8.5 truck / +7.6 car min · signals and crossings</a:t>
-            </a:r>
-          </a:p>
-        </p:txBody>
-      </p:sp>
-      <p:sp>
-        <p:nvSpPr>
-          <p:cNvPr id="8" name="Oval 7"/>
-          <p:cNvSpPr/>
-          <p:nvPr/>
-        </p:nvSpPr>
-        <p:spPr>
-          <a:xfrm>
-            <a:off x="7086600" y="3383279"/>
-            <a:ext cx="457200" cy="457200"/>
-          </a:xfrm>
-          <a:prstGeom prst="ellipse">
-            <a:avLst/>
-          </a:prstGeom>
-          <a:solidFill>
-            <a:srgbClr val="17252A"/>
-          </a:solidFill>
-          <a:ln>
-            <a:noFill/>
-          </a:ln>
-          <a:effectLst/>
-        </p:spPr>
-        <p:style>
-          <a:lnRef idx="1">
-            <a:schemeClr val="accent1"/>
-          </a:lnRef>
-          <a:fillRef idx="3">
-            <a:schemeClr val="accent1"/>
-          </a:fillRef>
-          <a:effectRef idx="2">
-            <a:schemeClr val="accent1"/>
-          </a:effectRef>
-          <a:fontRef idx="minor">
-            <a:schemeClr val="lt1"/>
-          </a:fontRef>
-        </p:style>
-        <p:txBody>
-          <a:bodyPr rtlCol="0" anchor="ctr" lIns="0" rIns="0" tIns="0" bIns="0"/>
-          <a:lstStyle/>
-          <a:p>
-            <a:pPr algn="ctr"/>
-            <a:r>
-              <a:rPr sz="1500" b="1">
-                <a:solidFill>
-                  <a:srgbClr val="FFFFFF"/>
-                </a:solidFill>
-                <a:latin typeface="Calibri"/>
-              </a:rPr>
-              <a:t>6</a:t>
-            </a:r>
-          </a:p>
-        </p:txBody>
-      </p:sp>
-      <p:sp>
-        <p:nvSpPr>
-          <p:cNvPr id="9" name="TextBox 8"/>
-          <p:cNvSpPr txBox="1"/>
-          <p:nvPr/>
-        </p:nvSpPr>
-        <p:spPr>
-          <a:xfrm>
-            <a:off x="7726679" y="3337560"/>
-            <a:ext cx="4023360" cy="320040"/>
-          </a:xfrm>
-          <a:prstGeom prst="rect">
-            <a:avLst/>
-          </a:prstGeom>
-          <a:noFill/>
-        </p:spPr>
-        <p:txBody>
-          <a:bodyPr wrap="square" lIns="0" rIns="0" tIns="0" bIns="0" anchor="t">
-            <a:spAutoFit/>
-          </a:bodyPr>
-          <a:lstStyle/>
-          <a:p>
-            <a:pPr algn="l">
-              <a:spcAft>
-                <a:spcPts val="0"/>
-              </a:spcAft>
-            </a:pPr>
-            <a:r>
-              <a:rPr sz="1600" b="1" i="0">
-                <a:solidFill>
-                  <a:srgbClr val="1E2528"/>
-                </a:solidFill>
-                <a:latin typeface="Calibri"/>
-              </a:rPr>
-              <a:t>Lukaya, A2</a:t>
-            </a:r>
-          </a:p>
-        </p:txBody>
-      </p:sp>
-      <p:sp>
-        <p:nvSpPr>
-          <p:cNvPr id="10" name="TextBox 9"/>
-          <p:cNvSpPr txBox="1"/>
-          <p:nvPr/>
-        </p:nvSpPr>
-        <p:spPr>
-          <a:xfrm>
-            <a:off x="7726679" y="3666744"/>
-            <a:ext cx="4023360" cy="365760"/>
-          </a:xfrm>
-          <a:prstGeom prst="rect">
-            <a:avLst/>
-          </a:prstGeom>
-          <a:noFill/>
-        </p:spPr>
-        <p:txBody>
-          <a:bodyPr wrap="square" lIns="0" rIns="0" tIns="0" bIns="0" anchor="t">
-            <a:spAutoFit/>
-          </a:bodyPr>
-          <a:lstStyle/>
-          <a:p>
-            <a:pPr algn="l">
-              <a:spcAft>
-                <a:spcPts val="0"/>
-              </a:spcAft>
-            </a:pPr>
-            <a:r>
-              <a:rPr sz="1300" b="0" i="0">
-                <a:solidFill>
-                  <a:srgbClr val="5B6770"/>
-                </a:solidFill>
-                <a:latin typeface="Calibri"/>
-              </a:rPr>
-              <a:t>+11.9 truck min · weighbridge</a:t>
-            </a:r>
-          </a:p>
-        </p:txBody>
-      </p:sp>
-      <p:sp>
-        <p:nvSpPr>
-          <p:cNvPr id="11" name="Oval 10"/>
-          <p:cNvSpPr/>
-          <p:nvPr/>
-        </p:nvSpPr>
-        <p:spPr>
-          <a:xfrm>
-            <a:off x="7086600" y="4206240"/>
-            <a:ext cx="457200" cy="457200"/>
-          </a:xfrm>
-          <a:prstGeom prst="ellipse">
-            <a:avLst/>
-          </a:prstGeom>
-          <a:solidFill>
-            <a:srgbClr val="17252A"/>
-          </a:solidFill>
-          <a:ln>
-            <a:noFill/>
-          </a:ln>
-          <a:effectLst/>
-        </p:spPr>
-        <p:style>
-          <a:lnRef idx="1">
-            <a:schemeClr val="accent1"/>
-          </a:lnRef>
-          <a:fillRef idx="3">
-            <a:schemeClr val="accent1"/>
-          </a:fillRef>
-          <a:effectRef idx="2">
-            <a:schemeClr val="accent1"/>
-          </a:effectRef>
-          <a:fontRef idx="minor">
-            <a:schemeClr val="lt1"/>
-          </a:fontRef>
-        </p:style>
-        <p:txBody>
-          <a:bodyPr rtlCol="0" anchor="ctr" lIns="0" rIns="0" tIns="0" bIns="0"/>
-          <a:lstStyle/>
-          <a:p>
-            <a:pPr algn="ctr"/>
-            <a:r>
-              <a:rPr sz="1500" b="1">
-                <a:solidFill>
-                  <a:srgbClr val="FFFFFF"/>
-                </a:solidFill>
-                <a:latin typeface="Calibri"/>
-              </a:rPr>
-              <a:t>2</a:t>
-            </a:r>
-          </a:p>
-        </p:txBody>
-      </p:sp>
-      <p:sp>
-        <p:nvSpPr>
-          <p:cNvPr id="12" name="TextBox 11"/>
-          <p:cNvSpPr txBox="1"/>
-          <p:nvPr/>
-        </p:nvSpPr>
-        <p:spPr>
-          <a:xfrm>
-            <a:off x="7726679" y="4160520"/>
-            <a:ext cx="4023360" cy="320040"/>
-          </a:xfrm>
-          <a:prstGeom prst="rect">
-            <a:avLst/>
-          </a:prstGeom>
-          <a:noFill/>
-        </p:spPr>
-        <p:txBody>
-          <a:bodyPr wrap="square" lIns="0" rIns="0" tIns="0" bIns="0" anchor="t">
-            <a:spAutoFit/>
-          </a:bodyPr>
-          <a:lstStyle/>
-          <a:p>
-            <a:pPr algn="l">
-              <a:spcAft>
-                <a:spcPts val="0"/>
-              </a:spcAft>
-            </a:pPr>
-            <a:r>
-              <a:rPr sz="1600" b="1" i="0">
-                <a:solidFill>
-                  <a:srgbClr val="1E2528"/>
-                </a:solidFill>
-                <a:latin typeface="Calibri"/>
-              </a:rPr>
-              <a:t>Magamaga, A1</a:t>
-            </a:r>
-          </a:p>
-        </p:txBody>
-      </p:sp>
-      <p:sp>
-        <p:nvSpPr>
-          <p:cNvPr id="13" name="TextBox 12"/>
-          <p:cNvSpPr txBox="1"/>
-          <p:nvPr/>
-        </p:nvSpPr>
-        <p:spPr>
-          <a:xfrm>
-            <a:off x="7726679" y="4489704"/>
-            <a:ext cx="4023360" cy="365760"/>
-          </a:xfrm>
-          <a:prstGeom prst="rect">
-            <a:avLst/>
-          </a:prstGeom>
-          <a:noFill/>
-        </p:spPr>
-        <p:txBody>
-          <a:bodyPr wrap="square" lIns="0" rIns="0" tIns="0" bIns="0" anchor="t">
-            <a:spAutoFit/>
-          </a:bodyPr>
-          <a:lstStyle/>
-          <a:p>
-            <a:pPr algn="l">
-              <a:spcAft>
-                <a:spcPts val="0"/>
-              </a:spcAft>
-            </a:pPr>
-            <a:r>
-              <a:rPr sz="1300" b="0" i="0">
-                <a:solidFill>
-                  <a:srgbClr val="5B6770"/>
-                </a:solidFill>
-                <a:latin typeface="Calibri"/>
-              </a:rPr>
-              <a:t>+12.3 truck min · weighbridge, police post</a:t>
-            </a:r>
-          </a:p>
-        </p:txBody>
-      </p:sp>
-      <p:sp>
-        <p:nvSpPr>
-          <p:cNvPr id="14" name="Oval 13"/>
-          <p:cNvSpPr/>
-          <p:nvPr/>
-        </p:nvSpPr>
-        <p:spPr>
-          <a:xfrm>
-            <a:off x="7086600" y="5029200"/>
-            <a:ext cx="457200" cy="457200"/>
-          </a:xfrm>
-          <a:prstGeom prst="ellipse">
-            <a:avLst/>
-          </a:prstGeom>
-          <a:solidFill>
-            <a:srgbClr val="17252A"/>
-          </a:solidFill>
-          <a:ln>
-            <a:noFill/>
-          </a:ln>
-          <a:effectLst/>
-        </p:spPr>
-        <p:style>
-          <a:lnRef idx="1">
-            <a:schemeClr val="accent1"/>
-          </a:lnRef>
-          <a:fillRef idx="3">
-            <a:schemeClr val="accent1"/>
-          </a:fillRef>
-          <a:effectRef idx="2">
-            <a:schemeClr val="accent1"/>
-          </a:effectRef>
-          <a:fontRef idx="minor">
-            <a:schemeClr val="lt1"/>
-          </a:fontRef>
-        </p:style>
-        <p:txBody>
-          <a:bodyPr rtlCol="0" anchor="ctr" lIns="0" rIns="0" tIns="0" bIns="0"/>
-          <a:lstStyle/>
-          <a:p>
-            <a:pPr algn="ctr"/>
-            <a:r>
-              <a:rPr sz="1500" b="1">
-                <a:solidFill>
-                  <a:srgbClr val="FFFFFF"/>
-                </a:solidFill>
-                <a:latin typeface="Calibri"/>
-              </a:rPr>
-              <a:t>5</a:t>
-            </a:r>
-          </a:p>
-        </p:txBody>
-      </p:sp>
-      <p:sp>
-        <p:nvSpPr>
-          <p:cNvPr id="15" name="TextBox 14"/>
-          <p:cNvSpPr txBox="1"/>
-          <p:nvPr/>
-        </p:nvSpPr>
-        <p:spPr>
-          <a:xfrm>
-            <a:off x="7726679" y="4983480"/>
-            <a:ext cx="4023360" cy="320040"/>
-          </a:xfrm>
-          <a:prstGeom prst="rect">
-            <a:avLst/>
-          </a:prstGeom>
-          <a:noFill/>
-        </p:spPr>
-        <p:txBody>
-          <a:bodyPr wrap="square" lIns="0" rIns="0" tIns="0" bIns="0" anchor="t">
-            <a:spAutoFit/>
-          </a:bodyPr>
-          <a:lstStyle/>
-          <a:p>
-            <a:pPr algn="l">
-              <a:spcAft>
-                <a:spcPts val="0"/>
-              </a:spcAft>
-            </a:pPr>
-            <a:r>
-              <a:rPr sz="1600" b="1" i="0">
-                <a:solidFill>
-                  <a:srgbClr val="1E2528"/>
-                </a:solidFill>
-                <a:latin typeface="Calibri"/>
-              </a:rPr>
-              <a:t>Elegu border</a:t>
-            </a:r>
-          </a:p>
-        </p:txBody>
-      </p:sp>
-      <p:sp>
-        <p:nvSpPr>
-          <p:cNvPr id="16" name="TextBox 15"/>
-          <p:cNvSpPr txBox="1"/>
-          <p:nvPr/>
-        </p:nvSpPr>
-        <p:spPr>
-          <a:xfrm>
-            <a:off x="7726679" y="5312664"/>
-            <a:ext cx="4023360" cy="365760"/>
-          </a:xfrm>
-          <a:prstGeom prst="rect">
-            <a:avLst/>
-          </a:prstGeom>
-          <a:noFill/>
-        </p:spPr>
-        <p:txBody>
-          <a:bodyPr wrap="square" lIns="0" rIns="0" tIns="0" bIns="0" anchor="t">
-            <a:spAutoFit/>
-          </a:bodyPr>
-          <a:lstStyle/>
-          <a:p>
-            <a:pPr algn="l">
-              <a:spcAft>
-                <a:spcPts val="0"/>
-              </a:spcAft>
-            </a:pPr>
-            <a:r>
-              <a:rPr sz="1300" b="0" i="0">
-                <a:solidFill>
-                  <a:srgbClr val="5B6770"/>
-                </a:solidFill>
-                <a:latin typeface="Calibri"/>
-              </a:rPr>
-              <a:t>+4.0 truck min · police posts</a:t>
-            </a:r>
-          </a:p>
-        </p:txBody>
-      </p:sp>
-      <p:sp>
-        <p:nvSpPr>
-          <p:cNvPr id="17" name="TextBox 16"/>
-          <p:cNvSpPr txBox="1"/>
-          <p:nvPr/>
-        </p:nvSpPr>
-        <p:spPr>
-          <a:xfrm>
-            <a:off x="7086600" y="5852160"/>
-            <a:ext cx="4663440" cy="640080"/>
-          </a:xfrm>
-          <a:prstGeom prst="rect">
-            <a:avLst/>
-          </a:prstGeom>
-          <a:noFill/>
-        </p:spPr>
-        <p:txBody>
-          <a:bodyPr wrap="square" lIns="0" rIns="0" tIns="0" bIns="0" anchor="t">
-            <a:spAutoFit/>
-          </a:bodyPr>
-          <a:lstStyle/>
-          <a:p>
-            <a:pPr algn="l">
-              <a:spcAft>
-                <a:spcPts val="0"/>
-              </a:spcAft>
-            </a:pPr>
-            <a:r>
-              <a:rPr sz="1400" b="0" i="1">
-                <a:solidFill>
-                  <a:srgbClr val="C4532D"/>
-                </a:solidFill>
-                <a:latin typeface="Calibri"/>
-              </a:rPr>
-              <a:t>Eight of the ten worst stretches are led by weighbridges, police posts or signals; the other two are in Hoima town.</a:t>
-            </a:r>
-          </a:p>
-        </p:txBody>
-      </p:sp>
     </p:spTree>
   </p:cSld>
   <p:clrMapOvr>
@@ -6454,120 +6722,24 @@
         <p:nvPr/>
       </p:nvGrpSpPr>
       <p:grpSpPr/>
-      <p:sp>
-        <p:nvSpPr>
-          <p:cNvPr id="2" name="TextBox 1"/>
-          <p:cNvSpPr txBox="1"/>
-          <p:nvPr/>
-        </p:nvSpPr>
-        <p:spPr>
-          <a:xfrm>
-            <a:off x="548640" y="411480"/>
-            <a:ext cx="11064240" cy="731520"/>
-          </a:xfrm>
-          <a:prstGeom prst="rect">
-            <a:avLst/>
-          </a:prstGeom>
-          <a:noFill/>
-        </p:spPr>
-        <p:txBody>
-          <a:bodyPr wrap="square" lIns="0" rIns="0" tIns="0" bIns="0" anchor="t">
-            <a:spAutoFit/>
-          </a:bodyPr>
-          <a:lstStyle/>
-          <a:p>
-            <a:pPr algn="l">
-              <a:spcAft>
-                <a:spcPts val="0"/>
-              </a:spcAft>
-            </a:pPr>
-            <a:r>
-              <a:rPr sz="3400" b="1" i="0">
-                <a:solidFill>
-                  <a:srgbClr val="1E2528"/>
-                </a:solidFill>
-                <a:latin typeface="Cambria"/>
-              </a:rPr>
-              <a:t>Result 4 · The roadside filled in fast, between towns</a:t>
-            </a:r>
-          </a:p>
-        </p:txBody>
-      </p:sp>
-      <p:sp>
-        <p:nvSpPr>
-          <p:cNvPr id="3" name="TextBox 2"/>
-          <p:cNvSpPr txBox="1"/>
-          <p:nvPr/>
-        </p:nvSpPr>
-        <p:spPr>
-          <a:xfrm>
-            <a:off x="548640" y="1115568"/>
-            <a:ext cx="11064240" cy="457200"/>
-          </a:xfrm>
-          <a:prstGeom prst="rect">
-            <a:avLst/>
-          </a:prstGeom>
-          <a:noFill/>
-        </p:spPr>
-        <p:txBody>
-          <a:bodyPr wrap="square" lIns="0" rIns="0" tIns="0" bIns="0" anchor="t">
-            <a:spAutoFit/>
-          </a:bodyPr>
-          <a:lstStyle/>
-          <a:p>
-            <a:pPr algn="l">
-              <a:spcAft>
-                <a:spcPts val="0"/>
-              </a:spcAft>
-            </a:pPr>
-            <a:r>
-              <a:rPr sz="1600" b="0" i="0">
-                <a:solidFill>
-                  <a:srgbClr val="5B6770"/>
-                </a:solidFill>
-                <a:latin typeface="Calibri"/>
-              </a:rPr>
-              <a:t>Built-up land within 300 m of the road, 2000–2020 (GHSL)</a:t>
-            </a:r>
-          </a:p>
-        </p:txBody>
-      </p:sp>
-      <p:graphicFrame>
-        <p:nvGraphicFramePr>
-          <p:cNvPr id="4" name="Chart 3"/>
-          <p:cNvGraphicFramePr>
-            <a:graphicFrameLocks noGrp="1"/>
-          </p:cNvGraphicFramePr>
-          <p:nvPr/>
-        </p:nvGraphicFramePr>
-        <p:xfrm>
-          <a:off x="457200" y="1691640"/>
-          <a:ext cx="4114800" cy="4572000"/>
-        </p:xfrm>
-        <a:graphic>
-          <a:graphicData uri="http://schemas.openxmlformats.org/drawingml/2006/chart">
-            <c:chart xmlns:c="http://schemas.openxmlformats.org/drawingml/2006/chart" r:id="rId2"/>
-          </a:graphicData>
-        </a:graphic>
-      </p:graphicFrame>
       <p:pic>
         <p:nvPicPr>
-          <p:cNvPr id="5" name="Picture 4" descr="m04_grid.png"/>
+          <p:cNvPr id="2" name="Picture 1" descr="m02.png"/>
           <p:cNvPicPr>
             <a:picLocks noChangeAspect="1"/>
           </p:cNvPicPr>
           <p:nvPr/>
         </p:nvPicPr>
         <p:blipFill>
-          <a:blip r:embed="rId3"/>
+          <a:blip r:embed="rId2"/>
           <a:stretch>
             <a:fillRect/>
           </a:stretch>
         </p:blipFill>
         <p:spPr>
           <a:xfrm>
-            <a:off x="4800600" y="1691640"/>
-            <a:ext cx="4118846" cy="4572000"/>
+            <a:off x="365760" y="320040"/>
+            <a:ext cx="6417070" cy="6217920"/>
           </a:xfrm>
           <a:prstGeom prst="rect">
             <a:avLst/>
@@ -6576,14 +6748,14 @@
       </p:pic>
       <p:sp>
         <p:nvSpPr>
-          <p:cNvPr id="6" name="TextBox 5"/>
+          <p:cNvPr id="3" name="TextBox 2"/>
           <p:cNvSpPr txBox="1"/>
           <p:nvPr/>
         </p:nvSpPr>
         <p:spPr>
           <a:xfrm>
-            <a:off x="9098280" y="1783080"/>
-            <a:ext cx="2560320" cy="4480560"/>
+            <a:off x="7086600" y="411480"/>
+            <a:ext cx="4663440" cy="1280160"/>
           </a:xfrm>
           <a:prstGeom prst="rect">
             <a:avLst/>
@@ -6598,79 +6770,31 @@
           <a:p>
             <a:pPr algn="l">
               <a:spcAft>
-                <a:spcPts val="1000"/>
-              </a:spcAft>
-            </a:pPr>
-            <a:r>
-              <a:rPr sz="3000" b="1" i="0">
-                <a:solidFill>
-                  <a:srgbClr val="C4532D"/>
+                <a:spcPts val="0"/>
+              </a:spcAft>
+            </a:pPr>
+            <a:r>
+              <a:rPr sz="2800" b="1" i="0">
+                <a:solidFill>
+                  <a:srgbClr val="1E2528"/>
                 </a:solidFill>
                 <a:latin typeface="Cambria"/>
               </a:rPr>
-              <a:t>+27% to +68%</a:t>
-            </a:r>
-          </a:p>
-          <a:p>
-            <a:pPr algn="l">
-              <a:spcAft>
-                <a:spcPts val="1000"/>
-              </a:spcAft>
-            </a:pPr>
-            <a:r>
-              <a:rPr sz="1500" b="0" i="0">
-                <a:solidFill>
-                  <a:srgbClr val="1E2528"/>
-                </a:solidFill>
-                <a:latin typeface="Calibri"/>
-              </a:rPr>
-              <a:t>roadside built-up land in 20 years, fastest on the Elegu and Hoima roads.</a:t>
-            </a:r>
-          </a:p>
-          <a:p>
-            <a:pPr algn="l">
-              <a:spcAft>
-                <a:spcPts val="1000"/>
-              </a:spcAft>
-            </a:pPr>
-            <a:r>
-              <a:rPr sz="1500" b="0" i="0">
-                <a:solidFill>
-                  <a:srgbClr val="5B6770"/>
-                </a:solidFill>
-                <a:latin typeface="Calibri"/>
-              </a:rPr>
-              <a:t>Settlements between towns roughly doubled on the A6 and A9; towns grew only 13–20%.</a:t>
-            </a:r>
-          </a:p>
-          <a:p>
-            <a:pPr algn="l">
-              <a:spcAft>
-                <a:spcPts val="1000"/>
-              </a:spcAft>
-            </a:pPr>
-            <a:r>
-              <a:rPr sz="1500" b="0" i="0">
-                <a:solidFill>
-                  <a:srgbClr val="5B6770"/>
-                </a:solidFill>
-                <a:latin typeface="Calibri"/>
-              </a:rPr>
-              <a:t>New friction is appearing on what used to be open road.</a:t>
-            </a:r>
-          </a:p>
-        </p:txBody>
-      </p:sp>
-      <p:sp>
-        <p:nvSpPr>
-          <p:cNvPr id="7" name="TextBox 6"/>
+              <a:t>Result 3 · Delay concentrates at a few points</a:t>
+            </a:r>
+          </a:p>
+        </p:txBody>
+      </p:sp>
+      <p:sp>
+        <p:nvSpPr>
+          <p:cNvPr id="4" name="TextBox 3"/>
           <p:cNvSpPr txBox="1"/>
           <p:nvPr/>
         </p:nvSpPr>
         <p:spPr>
           <a:xfrm>
-            <a:off x="548640" y="6400800"/>
-            <a:ext cx="11064240" cy="274320"/>
+            <a:off x="7086600" y="1783080"/>
+            <a:ext cx="4663440" cy="548640"/>
           </a:xfrm>
           <a:prstGeom prst="rect">
             <a:avLst/>
@@ -6689,13 +6813,576 @@
               </a:spcAft>
             </a:pPr>
             <a:r>
-              <a:rPr sz="1000" b="0" i="0">
+              <a:rPr sz="1400" b="0" i="0">
                 <a:solidFill>
                   <a:srgbClr val="5B6770"/>
                 </a:solidFill>
                 <a:latin typeface="Calibri"/>
               </a:rPr>
-              <a:t>Maps: each corridor's fastest-growing 5 km; grey built by 2000, orange built 2000–2020. Open-road growth (150–225%) is from a very small base and not charted.</a:t>
+              <a:t>Truck minutes lost per km vs open road; numbered: the worst 2 km stretches</a:t>
+            </a:r>
+          </a:p>
+        </p:txBody>
+      </p:sp>
+      <p:sp>
+        <p:nvSpPr>
+          <p:cNvPr id="5" name="Oval 4"/>
+          <p:cNvSpPr/>
+          <p:nvPr/>
+        </p:nvSpPr>
+        <p:spPr>
+          <a:xfrm>
+            <a:off x="7086600" y="2560320"/>
+            <a:ext cx="457200" cy="457200"/>
+          </a:xfrm>
+          <a:prstGeom prst="ellipse">
+            <a:avLst/>
+          </a:prstGeom>
+          <a:solidFill>
+            <a:srgbClr val="17252A"/>
+          </a:solidFill>
+          <a:ln>
+            <a:noFill/>
+          </a:ln>
+          <a:effectLst/>
+        </p:spPr>
+        <p:style>
+          <a:lnRef idx="1">
+            <a:schemeClr val="accent1"/>
+          </a:lnRef>
+          <a:fillRef idx="3">
+            <a:schemeClr val="accent1"/>
+          </a:fillRef>
+          <a:effectRef idx="2">
+            <a:schemeClr val="accent1"/>
+          </a:effectRef>
+          <a:fontRef idx="minor">
+            <a:schemeClr val="lt1"/>
+          </a:fontRef>
+        </p:style>
+        <p:txBody>
+          <a:bodyPr rtlCol="0" anchor="ctr" lIns="0" rIns="0" tIns="0" bIns="0"/>
+          <a:lstStyle/>
+          <a:p>
+            <a:pPr algn="ctr"/>
+            <a:r>
+              <a:rPr sz="1500" b="1">
+                <a:solidFill>
+                  <a:srgbClr val="FFFFFF"/>
+                </a:solidFill>
+                <a:latin typeface="Calibri"/>
+              </a:rPr>
+              <a:t>1</a:t>
+            </a:r>
+          </a:p>
+        </p:txBody>
+      </p:sp>
+      <p:sp>
+        <p:nvSpPr>
+          <p:cNvPr id="6" name="TextBox 5"/>
+          <p:cNvSpPr txBox="1"/>
+          <p:nvPr/>
+        </p:nvSpPr>
+        <p:spPr>
+          <a:xfrm>
+            <a:off x="7726679" y="2514600"/>
+            <a:ext cx="4023360" cy="320040"/>
+          </a:xfrm>
+          <a:prstGeom prst="rect">
+            <a:avLst/>
+          </a:prstGeom>
+          <a:noFill/>
+        </p:spPr>
+        <p:txBody>
+          <a:bodyPr wrap="square" lIns="0" rIns="0" tIns="0" bIns="0" anchor="t">
+            <a:spAutoFit/>
+          </a:bodyPr>
+          <a:lstStyle/>
+          <a:p>
+            <a:pPr algn="l">
+              <a:spcAft>
+                <a:spcPts val="0"/>
+              </a:spcAft>
+            </a:pPr>
+            <a:r>
+              <a:rPr sz="1600" b="1" i="0">
+                <a:solidFill>
+                  <a:srgbClr val="1E2528"/>
+                </a:solidFill>
+                <a:latin typeface="Calibri"/>
+              </a:rPr>
+              <a:t>Nakawa, Kampala end of A1</a:t>
+            </a:r>
+          </a:p>
+        </p:txBody>
+      </p:sp>
+      <p:sp>
+        <p:nvSpPr>
+          <p:cNvPr id="7" name="TextBox 6"/>
+          <p:cNvSpPr txBox="1"/>
+          <p:nvPr/>
+        </p:nvSpPr>
+        <p:spPr>
+          <a:xfrm>
+            <a:off x="7726679" y="2843784"/>
+            <a:ext cx="4023360" cy="365760"/>
+          </a:xfrm>
+          <a:prstGeom prst="rect">
+            <a:avLst/>
+          </a:prstGeom>
+          <a:noFill/>
+        </p:spPr>
+        <p:txBody>
+          <a:bodyPr wrap="square" lIns="0" rIns="0" tIns="0" bIns="0" anchor="t">
+            <a:spAutoFit/>
+          </a:bodyPr>
+          <a:lstStyle/>
+          <a:p>
+            <a:pPr algn="l">
+              <a:spcAft>
+                <a:spcPts val="0"/>
+              </a:spcAft>
+            </a:pPr>
+            <a:r>
+              <a:rPr sz="1300" b="0" i="0">
+                <a:solidFill>
+                  <a:srgbClr val="5B6770"/>
+                </a:solidFill>
+                <a:latin typeface="Calibri"/>
+              </a:rPr>
+              <a:t>+8.5 truck / +7.6 car min · signals and crossings</a:t>
+            </a:r>
+          </a:p>
+        </p:txBody>
+      </p:sp>
+      <p:sp>
+        <p:nvSpPr>
+          <p:cNvPr id="8" name="Oval 7"/>
+          <p:cNvSpPr/>
+          <p:nvPr/>
+        </p:nvSpPr>
+        <p:spPr>
+          <a:xfrm>
+            <a:off x="7086600" y="3383279"/>
+            <a:ext cx="457200" cy="457200"/>
+          </a:xfrm>
+          <a:prstGeom prst="ellipse">
+            <a:avLst/>
+          </a:prstGeom>
+          <a:solidFill>
+            <a:srgbClr val="17252A"/>
+          </a:solidFill>
+          <a:ln>
+            <a:noFill/>
+          </a:ln>
+          <a:effectLst/>
+        </p:spPr>
+        <p:style>
+          <a:lnRef idx="1">
+            <a:schemeClr val="accent1"/>
+          </a:lnRef>
+          <a:fillRef idx="3">
+            <a:schemeClr val="accent1"/>
+          </a:fillRef>
+          <a:effectRef idx="2">
+            <a:schemeClr val="accent1"/>
+          </a:effectRef>
+          <a:fontRef idx="minor">
+            <a:schemeClr val="lt1"/>
+          </a:fontRef>
+        </p:style>
+        <p:txBody>
+          <a:bodyPr rtlCol="0" anchor="ctr" lIns="0" rIns="0" tIns="0" bIns="0"/>
+          <a:lstStyle/>
+          <a:p>
+            <a:pPr algn="ctr"/>
+            <a:r>
+              <a:rPr sz="1500" b="1">
+                <a:solidFill>
+                  <a:srgbClr val="FFFFFF"/>
+                </a:solidFill>
+                <a:latin typeface="Calibri"/>
+              </a:rPr>
+              <a:t>6</a:t>
+            </a:r>
+          </a:p>
+        </p:txBody>
+      </p:sp>
+      <p:sp>
+        <p:nvSpPr>
+          <p:cNvPr id="9" name="TextBox 8"/>
+          <p:cNvSpPr txBox="1"/>
+          <p:nvPr/>
+        </p:nvSpPr>
+        <p:spPr>
+          <a:xfrm>
+            <a:off x="7726679" y="3337560"/>
+            <a:ext cx="4023360" cy="320040"/>
+          </a:xfrm>
+          <a:prstGeom prst="rect">
+            <a:avLst/>
+          </a:prstGeom>
+          <a:noFill/>
+        </p:spPr>
+        <p:txBody>
+          <a:bodyPr wrap="square" lIns="0" rIns="0" tIns="0" bIns="0" anchor="t">
+            <a:spAutoFit/>
+          </a:bodyPr>
+          <a:lstStyle/>
+          <a:p>
+            <a:pPr algn="l">
+              <a:spcAft>
+                <a:spcPts val="0"/>
+              </a:spcAft>
+            </a:pPr>
+            <a:r>
+              <a:rPr sz="1600" b="1" i="0">
+                <a:solidFill>
+                  <a:srgbClr val="1E2528"/>
+                </a:solidFill>
+                <a:latin typeface="Calibri"/>
+              </a:rPr>
+              <a:t>Lukaya, A2</a:t>
+            </a:r>
+          </a:p>
+        </p:txBody>
+      </p:sp>
+      <p:sp>
+        <p:nvSpPr>
+          <p:cNvPr id="10" name="TextBox 9"/>
+          <p:cNvSpPr txBox="1"/>
+          <p:nvPr/>
+        </p:nvSpPr>
+        <p:spPr>
+          <a:xfrm>
+            <a:off x="7726679" y="3666744"/>
+            <a:ext cx="4023360" cy="365760"/>
+          </a:xfrm>
+          <a:prstGeom prst="rect">
+            <a:avLst/>
+          </a:prstGeom>
+          <a:noFill/>
+        </p:spPr>
+        <p:txBody>
+          <a:bodyPr wrap="square" lIns="0" rIns="0" tIns="0" bIns="0" anchor="t">
+            <a:spAutoFit/>
+          </a:bodyPr>
+          <a:lstStyle/>
+          <a:p>
+            <a:pPr algn="l">
+              <a:spcAft>
+                <a:spcPts val="0"/>
+              </a:spcAft>
+            </a:pPr>
+            <a:r>
+              <a:rPr sz="1300" b="0" i="0">
+                <a:solidFill>
+                  <a:srgbClr val="5B6770"/>
+                </a:solidFill>
+                <a:latin typeface="Calibri"/>
+              </a:rPr>
+              <a:t>+11.9 truck min · weighbridge</a:t>
+            </a:r>
+          </a:p>
+        </p:txBody>
+      </p:sp>
+      <p:sp>
+        <p:nvSpPr>
+          <p:cNvPr id="11" name="Oval 10"/>
+          <p:cNvSpPr/>
+          <p:nvPr/>
+        </p:nvSpPr>
+        <p:spPr>
+          <a:xfrm>
+            <a:off x="7086600" y="4206240"/>
+            <a:ext cx="457200" cy="457200"/>
+          </a:xfrm>
+          <a:prstGeom prst="ellipse">
+            <a:avLst/>
+          </a:prstGeom>
+          <a:solidFill>
+            <a:srgbClr val="17252A"/>
+          </a:solidFill>
+          <a:ln>
+            <a:noFill/>
+          </a:ln>
+          <a:effectLst/>
+        </p:spPr>
+        <p:style>
+          <a:lnRef idx="1">
+            <a:schemeClr val="accent1"/>
+          </a:lnRef>
+          <a:fillRef idx="3">
+            <a:schemeClr val="accent1"/>
+          </a:fillRef>
+          <a:effectRef idx="2">
+            <a:schemeClr val="accent1"/>
+          </a:effectRef>
+          <a:fontRef idx="minor">
+            <a:schemeClr val="lt1"/>
+          </a:fontRef>
+        </p:style>
+        <p:txBody>
+          <a:bodyPr rtlCol="0" anchor="ctr" lIns="0" rIns="0" tIns="0" bIns="0"/>
+          <a:lstStyle/>
+          <a:p>
+            <a:pPr algn="ctr"/>
+            <a:r>
+              <a:rPr sz="1500" b="1">
+                <a:solidFill>
+                  <a:srgbClr val="FFFFFF"/>
+                </a:solidFill>
+                <a:latin typeface="Calibri"/>
+              </a:rPr>
+              <a:t>2</a:t>
+            </a:r>
+          </a:p>
+        </p:txBody>
+      </p:sp>
+      <p:sp>
+        <p:nvSpPr>
+          <p:cNvPr id="12" name="TextBox 11"/>
+          <p:cNvSpPr txBox="1"/>
+          <p:nvPr/>
+        </p:nvSpPr>
+        <p:spPr>
+          <a:xfrm>
+            <a:off x="7726679" y="4160520"/>
+            <a:ext cx="4023360" cy="320040"/>
+          </a:xfrm>
+          <a:prstGeom prst="rect">
+            <a:avLst/>
+          </a:prstGeom>
+          <a:noFill/>
+        </p:spPr>
+        <p:txBody>
+          <a:bodyPr wrap="square" lIns="0" rIns="0" tIns="0" bIns="0" anchor="t">
+            <a:spAutoFit/>
+          </a:bodyPr>
+          <a:lstStyle/>
+          <a:p>
+            <a:pPr algn="l">
+              <a:spcAft>
+                <a:spcPts val="0"/>
+              </a:spcAft>
+            </a:pPr>
+            <a:r>
+              <a:rPr sz="1600" b="1" i="0">
+                <a:solidFill>
+                  <a:srgbClr val="1E2528"/>
+                </a:solidFill>
+                <a:latin typeface="Calibri"/>
+              </a:rPr>
+              <a:t>Magamaga, A1</a:t>
+            </a:r>
+          </a:p>
+        </p:txBody>
+      </p:sp>
+      <p:sp>
+        <p:nvSpPr>
+          <p:cNvPr id="13" name="TextBox 12"/>
+          <p:cNvSpPr txBox="1"/>
+          <p:nvPr/>
+        </p:nvSpPr>
+        <p:spPr>
+          <a:xfrm>
+            <a:off x="7726679" y="4489704"/>
+            <a:ext cx="4023360" cy="365760"/>
+          </a:xfrm>
+          <a:prstGeom prst="rect">
+            <a:avLst/>
+          </a:prstGeom>
+          <a:noFill/>
+        </p:spPr>
+        <p:txBody>
+          <a:bodyPr wrap="square" lIns="0" rIns="0" tIns="0" bIns="0" anchor="t">
+            <a:spAutoFit/>
+          </a:bodyPr>
+          <a:lstStyle/>
+          <a:p>
+            <a:pPr algn="l">
+              <a:spcAft>
+                <a:spcPts val="0"/>
+              </a:spcAft>
+            </a:pPr>
+            <a:r>
+              <a:rPr sz="1300" b="0" i="0">
+                <a:solidFill>
+                  <a:srgbClr val="5B6770"/>
+                </a:solidFill>
+                <a:latin typeface="Calibri"/>
+              </a:rPr>
+              <a:t>+12.3 truck min · weighbridge, police post</a:t>
+            </a:r>
+          </a:p>
+        </p:txBody>
+      </p:sp>
+      <p:sp>
+        <p:nvSpPr>
+          <p:cNvPr id="14" name="Oval 13"/>
+          <p:cNvSpPr/>
+          <p:nvPr/>
+        </p:nvSpPr>
+        <p:spPr>
+          <a:xfrm>
+            <a:off x="7086600" y="5029200"/>
+            <a:ext cx="457200" cy="457200"/>
+          </a:xfrm>
+          <a:prstGeom prst="ellipse">
+            <a:avLst/>
+          </a:prstGeom>
+          <a:solidFill>
+            <a:srgbClr val="17252A"/>
+          </a:solidFill>
+          <a:ln>
+            <a:noFill/>
+          </a:ln>
+          <a:effectLst/>
+        </p:spPr>
+        <p:style>
+          <a:lnRef idx="1">
+            <a:schemeClr val="accent1"/>
+          </a:lnRef>
+          <a:fillRef idx="3">
+            <a:schemeClr val="accent1"/>
+          </a:fillRef>
+          <a:effectRef idx="2">
+            <a:schemeClr val="accent1"/>
+          </a:effectRef>
+          <a:fontRef idx="minor">
+            <a:schemeClr val="lt1"/>
+          </a:fontRef>
+        </p:style>
+        <p:txBody>
+          <a:bodyPr rtlCol="0" anchor="ctr" lIns="0" rIns="0" tIns="0" bIns="0"/>
+          <a:lstStyle/>
+          <a:p>
+            <a:pPr algn="ctr"/>
+            <a:r>
+              <a:rPr sz="1500" b="1">
+                <a:solidFill>
+                  <a:srgbClr val="FFFFFF"/>
+                </a:solidFill>
+                <a:latin typeface="Calibri"/>
+              </a:rPr>
+              <a:t>5</a:t>
+            </a:r>
+          </a:p>
+        </p:txBody>
+      </p:sp>
+      <p:sp>
+        <p:nvSpPr>
+          <p:cNvPr id="15" name="TextBox 14"/>
+          <p:cNvSpPr txBox="1"/>
+          <p:nvPr/>
+        </p:nvSpPr>
+        <p:spPr>
+          <a:xfrm>
+            <a:off x="7726679" y="4983480"/>
+            <a:ext cx="4023360" cy="320040"/>
+          </a:xfrm>
+          <a:prstGeom prst="rect">
+            <a:avLst/>
+          </a:prstGeom>
+          <a:noFill/>
+        </p:spPr>
+        <p:txBody>
+          <a:bodyPr wrap="square" lIns="0" rIns="0" tIns="0" bIns="0" anchor="t">
+            <a:spAutoFit/>
+          </a:bodyPr>
+          <a:lstStyle/>
+          <a:p>
+            <a:pPr algn="l">
+              <a:spcAft>
+                <a:spcPts val="0"/>
+              </a:spcAft>
+            </a:pPr>
+            <a:r>
+              <a:rPr sz="1600" b="1" i="0">
+                <a:solidFill>
+                  <a:srgbClr val="1E2528"/>
+                </a:solidFill>
+                <a:latin typeface="Calibri"/>
+              </a:rPr>
+              <a:t>Elegu border</a:t>
+            </a:r>
+          </a:p>
+        </p:txBody>
+      </p:sp>
+      <p:sp>
+        <p:nvSpPr>
+          <p:cNvPr id="16" name="TextBox 15"/>
+          <p:cNvSpPr txBox="1"/>
+          <p:nvPr/>
+        </p:nvSpPr>
+        <p:spPr>
+          <a:xfrm>
+            <a:off x="7726679" y="5312664"/>
+            <a:ext cx="4023360" cy="365760"/>
+          </a:xfrm>
+          <a:prstGeom prst="rect">
+            <a:avLst/>
+          </a:prstGeom>
+          <a:noFill/>
+        </p:spPr>
+        <p:txBody>
+          <a:bodyPr wrap="square" lIns="0" rIns="0" tIns="0" bIns="0" anchor="t">
+            <a:spAutoFit/>
+          </a:bodyPr>
+          <a:lstStyle/>
+          <a:p>
+            <a:pPr algn="l">
+              <a:spcAft>
+                <a:spcPts val="0"/>
+              </a:spcAft>
+            </a:pPr>
+            <a:r>
+              <a:rPr sz="1300" b="0" i="0">
+                <a:solidFill>
+                  <a:srgbClr val="5B6770"/>
+                </a:solidFill>
+                <a:latin typeface="Calibri"/>
+              </a:rPr>
+              <a:t>+4.0 truck min · police posts</a:t>
+            </a:r>
+          </a:p>
+        </p:txBody>
+      </p:sp>
+      <p:sp>
+        <p:nvSpPr>
+          <p:cNvPr id="17" name="TextBox 16"/>
+          <p:cNvSpPr txBox="1"/>
+          <p:nvPr/>
+        </p:nvSpPr>
+        <p:spPr>
+          <a:xfrm>
+            <a:off x="7086600" y="5852160"/>
+            <a:ext cx="4663440" cy="640080"/>
+          </a:xfrm>
+          <a:prstGeom prst="rect">
+            <a:avLst/>
+          </a:prstGeom>
+          <a:noFill/>
+        </p:spPr>
+        <p:txBody>
+          <a:bodyPr wrap="square" lIns="0" rIns="0" tIns="0" bIns="0" anchor="t">
+            <a:spAutoFit/>
+          </a:bodyPr>
+          <a:lstStyle/>
+          <a:p>
+            <a:pPr algn="l">
+              <a:spcAft>
+                <a:spcPts val="0"/>
+              </a:spcAft>
+            </a:pPr>
+            <a:r>
+              <a:rPr sz="1400" b="0" i="1">
+                <a:solidFill>
+                  <a:srgbClr val="C4532D"/>
+                </a:solidFill>
+                <a:latin typeface="Calibri"/>
+              </a:rPr>
+              <a:t>Eight of the ten worst stretches are led by weighbridges, police posts or signals; the other two are in Hoima town.</a:t>
             </a:r>
           </a:p>
         </p:txBody>
@@ -6760,7 +7447,7 @@
                 </a:solidFill>
                 <a:latin typeface="Cambria"/>
               </a:rPr>
-              <a:t>Discussion</a:t>
+              <a:t>Result 4 · The roadside filled in fast, between towns</a:t>
             </a:r>
           </a:p>
         </p:txBody>
@@ -6799,110 +7486,53 @@
                 </a:solidFill>
                 <a:latin typeface="Calibri"/>
               </a:rPr>
-              <a:t>What the results suggest for corridor policy</a:t>
-            </a:r>
-          </a:p>
-        </p:txBody>
-      </p:sp>
-      <p:sp>
-        <p:nvSpPr>
-          <p:cNvPr id="4" name="Rounded Rectangle 3"/>
-          <p:cNvSpPr/>
-          <p:nvPr/>
-        </p:nvSpPr>
-        <p:spPr>
-          <a:xfrm>
-            <a:off x="548640" y="1783080"/>
-            <a:ext cx="5440680" cy="2103120"/>
-          </a:xfrm>
-          <a:prstGeom prst="roundRect">
-            <a:avLst>
-              <a:gd name="adj" fmla="val 6000"/>
-            </a:avLst>
-          </a:prstGeom>
-          <a:solidFill>
-            <a:srgbClr val="EEF2F0"/>
-          </a:solidFill>
-          <a:ln>
-            <a:noFill/>
-          </a:ln>
-          <a:effectLst/>
-        </p:spPr>
-        <p:style>
-          <a:lnRef idx="1">
-            <a:schemeClr val="accent1"/>
-          </a:lnRef>
-          <a:fillRef idx="3">
-            <a:schemeClr val="accent1"/>
-          </a:fillRef>
-          <a:effectRef idx="2">
-            <a:schemeClr val="accent1"/>
-          </a:effectRef>
-          <a:fontRef idx="minor">
-            <a:schemeClr val="lt1"/>
-          </a:fontRef>
-        </p:style>
-        <p:txBody>
-          <a:bodyPr rtlCol="0" anchor="ctr"/>
-          <a:lstStyle/>
-          <a:p>
-            <a:pPr algn="ctr"/>
-          </a:p>
-        </p:txBody>
-      </p:sp>
-      <p:sp>
-        <p:nvSpPr>
-          <p:cNvPr id="5" name="Oval 4"/>
-          <p:cNvSpPr/>
-          <p:nvPr/>
-        </p:nvSpPr>
-        <p:spPr>
-          <a:xfrm>
-            <a:off x="822959" y="2057400"/>
-            <a:ext cx="457200" cy="457200"/>
-          </a:xfrm>
-          <a:prstGeom prst="ellipse">
-            <a:avLst/>
-          </a:prstGeom>
-          <a:solidFill>
-            <a:srgbClr val="C4532D"/>
-          </a:solidFill>
-          <a:ln>
-            <a:noFill/>
-          </a:ln>
-          <a:effectLst/>
-        </p:spPr>
-        <p:style>
-          <a:lnRef idx="1">
-            <a:schemeClr val="accent1"/>
-          </a:lnRef>
-          <a:fillRef idx="3">
-            <a:schemeClr val="accent1"/>
-          </a:fillRef>
-          <a:effectRef idx="2">
-            <a:schemeClr val="accent1"/>
-          </a:effectRef>
-          <a:fontRef idx="minor">
-            <a:schemeClr val="lt1"/>
-          </a:fontRef>
-        </p:style>
-        <p:txBody>
-          <a:bodyPr rtlCol="0" anchor="ctr" lIns="0" rIns="0" tIns="0" bIns="0"/>
-          <a:lstStyle/>
-          <a:p>
-            <a:pPr algn="ctr"/>
-            <a:r>
-              <a:rPr sz="1500" b="1">
-                <a:solidFill>
-                  <a:srgbClr val="FFFFFF"/>
-                </a:solidFill>
-                <a:latin typeface="Calibri"/>
-              </a:rPr>
-              <a:t>1</a:t>
-            </a:r>
-          </a:p>
-        </p:txBody>
-      </p:sp>
+              <a:t>Built-up land within 300 m of the road, 2000–2020 (GHSL)</a:t>
+            </a:r>
+          </a:p>
+        </p:txBody>
+      </p:sp>
+      <p:graphicFrame>
+        <p:nvGraphicFramePr>
+          <p:cNvPr id="4" name="Chart 3"/>
+          <p:cNvGraphicFramePr>
+            <a:graphicFrameLocks noGrp="1"/>
+          </p:cNvGraphicFramePr>
+          <p:nvPr/>
+        </p:nvGraphicFramePr>
+        <p:xfrm>
+          <a:off x="457200" y="1691640"/>
+          <a:ext cx="4114800" cy="4572000"/>
+        </p:xfrm>
+        <a:graphic>
+          <a:graphicData uri="http://schemas.openxmlformats.org/drawingml/2006/chart">
+            <c:chart xmlns:c="http://schemas.openxmlformats.org/drawingml/2006/chart" r:id="rId2"/>
+          </a:graphicData>
+        </a:graphic>
+      </p:graphicFrame>
+      <p:pic>
+        <p:nvPicPr>
+          <p:cNvPr id="5" name="Picture 4" descr="m04_grid.png"/>
+          <p:cNvPicPr>
+            <a:picLocks noChangeAspect="1"/>
+          </p:cNvPicPr>
+          <p:nvPr/>
+        </p:nvPicPr>
+        <p:blipFill>
+          <a:blip r:embed="rId3"/>
+          <a:stretch>
+            <a:fillRect/>
+          </a:stretch>
+        </p:blipFill>
+        <p:spPr>
+          <a:xfrm>
+            <a:off x="4800600" y="1691640"/>
+            <a:ext cx="4118846" cy="4572000"/>
+          </a:xfrm>
+          <a:prstGeom prst="rect">
+            <a:avLst/>
+          </a:prstGeom>
+        </p:spPr>
+      </p:pic>
       <p:sp>
         <p:nvSpPr>
           <p:cNvPr id="6" name="TextBox 5"/>
@@ -6911,8 +7541,8 @@
         </p:nvSpPr>
         <p:spPr>
           <a:xfrm>
-            <a:off x="1463040" y="2084831"/>
-            <a:ext cx="4297680" cy="411480"/>
+            <a:off x="9098280" y="1783080"/>
+            <a:ext cx="2560320" cy="4480560"/>
           </a:xfrm>
           <a:prstGeom prst="rect">
             <a:avLst/>
@@ -6927,17 +7557,65 @@
           <a:p>
             <a:pPr algn="l">
               <a:spcAft>
-                <a:spcPts val="0"/>
-              </a:spcAft>
-            </a:pPr>
-            <a:r>
-              <a:rPr sz="1900" b="1" i="0">
+                <a:spcPts val="1000"/>
+              </a:spcAft>
+            </a:pPr>
+            <a:r>
+              <a:rPr sz="3000" b="1" i="0">
+                <a:solidFill>
+                  <a:srgbClr val="C4532D"/>
+                </a:solidFill>
+                <a:latin typeface="Cambria"/>
+              </a:rPr>
+              <a:t>+27% to +68%</a:t>
+            </a:r>
+          </a:p>
+          <a:p>
+            <a:pPr algn="l">
+              <a:spcAft>
+                <a:spcPts val="1000"/>
+              </a:spcAft>
+            </a:pPr>
+            <a:r>
+              <a:rPr sz="1500" b="0" i="0">
                 <a:solidFill>
                   <a:srgbClr val="1E2528"/>
                 </a:solidFill>
-                <a:latin typeface="Cambria"/>
-              </a:rPr>
-              <a:t>Settlement is the chronic problem</a:t>
+                <a:latin typeface="Calibri"/>
+              </a:rPr>
+              <a:t>roadside built-up land in 20 years, fastest on the Elegu and Hoima roads.</a:t>
+            </a:r>
+          </a:p>
+          <a:p>
+            <a:pPr algn="l">
+              <a:spcAft>
+                <a:spcPts val="1000"/>
+              </a:spcAft>
+            </a:pPr>
+            <a:r>
+              <a:rPr sz="1500" b="0" i="0">
+                <a:solidFill>
+                  <a:srgbClr val="5B6770"/>
+                </a:solidFill>
+                <a:latin typeface="Calibri"/>
+              </a:rPr>
+              <a:t>Settlements between towns roughly doubled on the A6 and A9; towns grew only 13–20%.</a:t>
+            </a:r>
+          </a:p>
+          <a:p>
+            <a:pPr algn="l">
+              <a:spcAft>
+                <a:spcPts val="1000"/>
+              </a:spcAft>
+            </a:pPr>
+            <a:r>
+              <a:rPr sz="1500" b="0" i="0">
+                <a:solidFill>
+                  <a:srgbClr val="5B6770"/>
+                </a:solidFill>
+                <a:latin typeface="Calibri"/>
+              </a:rPr>
+              <a:t>New friction is appearing on what used to be open road.</a:t>
             </a:r>
           </a:p>
         </p:txBody>
@@ -6950,8 +7628,8 @@
         </p:nvSpPr>
         <p:spPr>
           <a:xfrm>
-            <a:off x="1463040" y="2560320"/>
-            <a:ext cx="4297680" cy="1280160"/>
+            <a:off x="548640" y="6400800"/>
+            <a:ext cx="11064240" cy="274320"/>
           </a:xfrm>
           <a:prstGeom prst="rect">
             <a:avLst/>
@@ -6970,544 +7648,13 @@
               </a:spcAft>
             </a:pPr>
             <a:r>
-              <a:rPr sz="1400" b="0" i="0">
+              <a:rPr sz="1000" b="0" i="0">
                 <a:solidFill>
                   <a:srgbClr val="5B6770"/>
                 </a:solidFill>
                 <a:latin typeface="Calibri"/>
               </a:rPr>
-              <a:t>Roadside activity costs the most time on three of four roads and is growing fastest where it is newest. Access management, service roads and planned trading centres off the carriageway address the cause, not the symptom.</a:t>
-            </a:r>
-          </a:p>
-        </p:txBody>
-      </p:sp>
-      <p:sp>
-        <p:nvSpPr>
-          <p:cNvPr id="8" name="Rounded Rectangle 7"/>
-          <p:cNvSpPr/>
-          <p:nvPr/>
-        </p:nvSpPr>
-        <p:spPr>
-          <a:xfrm>
-            <a:off x="6172200" y="1783080"/>
-            <a:ext cx="5440680" cy="2103120"/>
-          </a:xfrm>
-          <a:prstGeom prst="roundRect">
-            <a:avLst>
-              <a:gd name="adj" fmla="val 6000"/>
-            </a:avLst>
-          </a:prstGeom>
-          <a:solidFill>
-            <a:srgbClr val="EEF2F0"/>
-          </a:solidFill>
-          <a:ln>
-            <a:noFill/>
-          </a:ln>
-          <a:effectLst/>
-        </p:spPr>
-        <p:style>
-          <a:lnRef idx="1">
-            <a:schemeClr val="accent1"/>
-          </a:lnRef>
-          <a:fillRef idx="3">
-            <a:schemeClr val="accent1"/>
-          </a:fillRef>
-          <a:effectRef idx="2">
-            <a:schemeClr val="accent1"/>
-          </a:effectRef>
-          <a:fontRef idx="minor">
-            <a:schemeClr val="lt1"/>
-          </a:fontRef>
-        </p:style>
-        <p:txBody>
-          <a:bodyPr rtlCol="0" anchor="ctr"/>
-          <a:lstStyle/>
-          <a:p>
-            <a:pPr algn="ctr"/>
-          </a:p>
-        </p:txBody>
-      </p:sp>
-      <p:sp>
-        <p:nvSpPr>
-          <p:cNvPr id="9" name="Oval 8"/>
-          <p:cNvSpPr/>
-          <p:nvPr/>
-        </p:nvSpPr>
-        <p:spPr>
-          <a:xfrm>
-            <a:off x="6446520" y="2057400"/>
-            <a:ext cx="457200" cy="457200"/>
-          </a:xfrm>
-          <a:prstGeom prst="ellipse">
-            <a:avLst/>
-          </a:prstGeom>
-          <a:solidFill>
-            <a:srgbClr val="17252A"/>
-          </a:solidFill>
-          <a:ln>
-            <a:noFill/>
-          </a:ln>
-          <a:effectLst/>
-        </p:spPr>
-        <p:style>
-          <a:lnRef idx="1">
-            <a:schemeClr val="accent1"/>
-          </a:lnRef>
-          <a:fillRef idx="3">
-            <a:schemeClr val="accent1"/>
-          </a:fillRef>
-          <a:effectRef idx="2">
-            <a:schemeClr val="accent1"/>
-          </a:effectRef>
-          <a:fontRef idx="minor">
-            <a:schemeClr val="lt1"/>
-          </a:fontRef>
-        </p:style>
-        <p:txBody>
-          <a:bodyPr rtlCol="0" anchor="ctr" lIns="0" rIns="0" tIns="0" bIns="0"/>
-          <a:lstStyle/>
-          <a:p>
-            <a:pPr algn="ctr"/>
-            <a:r>
-              <a:rPr sz="1500" b="1">
-                <a:solidFill>
-                  <a:srgbClr val="FFFFFF"/>
-                </a:solidFill>
-                <a:latin typeface="Calibri"/>
-              </a:rPr>
-              <a:t>2</a:t>
-            </a:r>
-          </a:p>
-        </p:txBody>
-      </p:sp>
-      <p:sp>
-        <p:nvSpPr>
-          <p:cNvPr id="10" name="TextBox 9"/>
-          <p:cNvSpPr txBox="1"/>
-          <p:nvPr/>
-        </p:nvSpPr>
-        <p:spPr>
-          <a:xfrm>
-            <a:off x="7086600" y="2084831"/>
-            <a:ext cx="4297680" cy="411480"/>
-          </a:xfrm>
-          <a:prstGeom prst="rect">
-            <a:avLst/>
-          </a:prstGeom>
-          <a:noFill/>
-        </p:spPr>
-        <p:txBody>
-          <a:bodyPr wrap="square" lIns="0" rIns="0" tIns="0" bIns="0" anchor="t">
-            <a:spAutoFit/>
-          </a:bodyPr>
-          <a:lstStyle/>
-          <a:p>
-            <a:pPr algn="l">
-              <a:spcAft>
-                <a:spcPts val="0"/>
-              </a:spcAft>
-            </a:pPr>
-            <a:r>
-              <a:rPr sz="1900" b="1" i="0">
-                <a:solidFill>
-                  <a:srgbClr val="1E2528"/>
-                </a:solidFill>
-                <a:latin typeface="Cambria"/>
-              </a:rPr>
-              <a:t>Controls are the cheap wins</a:t>
-            </a:r>
-          </a:p>
-        </p:txBody>
-      </p:sp>
-      <p:sp>
-        <p:nvSpPr>
-          <p:cNvPr id="11" name="TextBox 10"/>
-          <p:cNvSpPr txBox="1"/>
-          <p:nvPr/>
-        </p:nvSpPr>
-        <p:spPr>
-          <a:xfrm>
-            <a:off x="7086600" y="2560320"/>
-            <a:ext cx="4297680" cy="1280160"/>
-          </a:xfrm>
-          <a:prstGeom prst="rect">
-            <a:avLst/>
-          </a:prstGeom>
-          <a:noFill/>
-        </p:spPr>
-        <p:txBody>
-          <a:bodyPr wrap="square" lIns="0" rIns="0" tIns="0" bIns="0" anchor="t">
-            <a:spAutoFit/>
-          </a:bodyPr>
-          <a:lstStyle/>
-          <a:p>
-            <a:pPr algn="l">
-              <a:spcAft>
-                <a:spcPts val="0"/>
-              </a:spcAft>
-            </a:pPr>
-            <a:r>
-              <a:rPr sz="1400" b="0" i="0">
-                <a:solidFill>
-                  <a:srgbClr val="5B6770"/>
-                </a:solidFill>
-                <a:latin typeface="Calibri"/>
-              </a:rPr>
-              <a:t>Weighbridges and police posts produce the worst single stretches. Weigh-in-motion screening and fewer stops could save 10–20 truck minutes per trip on the A1 and A2.</a:t>
-            </a:r>
-          </a:p>
-        </p:txBody>
-      </p:sp>
-      <p:sp>
-        <p:nvSpPr>
-          <p:cNvPr id="12" name="Rounded Rectangle 11"/>
-          <p:cNvSpPr/>
-          <p:nvPr/>
-        </p:nvSpPr>
-        <p:spPr>
-          <a:xfrm>
-            <a:off x="548640" y="4069080"/>
-            <a:ext cx="5440680" cy="2103120"/>
-          </a:xfrm>
-          <a:prstGeom prst="roundRect">
-            <a:avLst>
-              <a:gd name="adj" fmla="val 6000"/>
-            </a:avLst>
-          </a:prstGeom>
-          <a:solidFill>
-            <a:srgbClr val="EEF2F0"/>
-          </a:solidFill>
-          <a:ln>
-            <a:noFill/>
-          </a:ln>
-          <a:effectLst/>
-        </p:spPr>
-        <p:style>
-          <a:lnRef idx="1">
-            <a:schemeClr val="accent1"/>
-          </a:lnRef>
-          <a:fillRef idx="3">
-            <a:schemeClr val="accent1"/>
-          </a:fillRef>
-          <a:effectRef idx="2">
-            <a:schemeClr val="accent1"/>
-          </a:effectRef>
-          <a:fontRef idx="minor">
-            <a:schemeClr val="lt1"/>
-          </a:fontRef>
-        </p:style>
-        <p:txBody>
-          <a:bodyPr rtlCol="0" anchor="ctr"/>
-          <a:lstStyle/>
-          <a:p>
-            <a:pPr algn="ctr"/>
-          </a:p>
-        </p:txBody>
-      </p:sp>
-      <p:sp>
-        <p:nvSpPr>
-          <p:cNvPr id="13" name="Oval 12"/>
-          <p:cNvSpPr/>
-          <p:nvPr/>
-        </p:nvSpPr>
-        <p:spPr>
-          <a:xfrm>
-            <a:off x="822959" y="4343400"/>
-            <a:ext cx="457200" cy="457200"/>
-          </a:xfrm>
-          <a:prstGeom prst="ellipse">
-            <a:avLst/>
-          </a:prstGeom>
-          <a:solidFill>
-            <a:srgbClr val="3A7D5C"/>
-          </a:solidFill>
-          <a:ln>
-            <a:noFill/>
-          </a:ln>
-          <a:effectLst/>
-        </p:spPr>
-        <p:style>
-          <a:lnRef idx="1">
-            <a:schemeClr val="accent1"/>
-          </a:lnRef>
-          <a:fillRef idx="3">
-            <a:schemeClr val="accent1"/>
-          </a:fillRef>
-          <a:effectRef idx="2">
-            <a:schemeClr val="accent1"/>
-          </a:effectRef>
-          <a:fontRef idx="minor">
-            <a:schemeClr val="lt1"/>
-          </a:fontRef>
-        </p:style>
-        <p:txBody>
-          <a:bodyPr rtlCol="0" anchor="ctr" lIns="0" rIns="0" tIns="0" bIns="0"/>
-          <a:lstStyle/>
-          <a:p>
-            <a:pPr algn="ctr"/>
-            <a:r>
-              <a:rPr sz="1500" b="1">
-                <a:solidFill>
-                  <a:srgbClr val="FFFFFF"/>
-                </a:solidFill>
-                <a:latin typeface="Calibri"/>
-              </a:rPr>
-              <a:t>3</a:t>
-            </a:r>
-          </a:p>
-        </p:txBody>
-      </p:sp>
-      <p:sp>
-        <p:nvSpPr>
-          <p:cNvPr id="14" name="TextBox 13"/>
-          <p:cNvSpPr txBox="1"/>
-          <p:nvPr/>
-        </p:nvSpPr>
-        <p:spPr>
-          <a:xfrm>
-            <a:off x="1463040" y="4370832"/>
-            <a:ext cx="4297680" cy="411480"/>
-          </a:xfrm>
-          <a:prstGeom prst="rect">
-            <a:avLst/>
-          </a:prstGeom>
-          <a:noFill/>
-        </p:spPr>
-        <p:txBody>
-          <a:bodyPr wrap="square" lIns="0" rIns="0" tIns="0" bIns="0" anchor="t">
-            <a:spAutoFit/>
-          </a:bodyPr>
-          <a:lstStyle/>
-          <a:p>
-            <a:pPr algn="l">
-              <a:spcAft>
-                <a:spcPts val="0"/>
-              </a:spcAft>
-            </a:pPr>
-            <a:r>
-              <a:rPr sz="1900" b="1" i="0">
-                <a:solidFill>
-                  <a:srgbClr val="1E2528"/>
-                </a:solidFill>
-                <a:latin typeface="Cambria"/>
-              </a:rPr>
-              <a:t>Kampala's problem is congestion</a:t>
-            </a:r>
-          </a:p>
-        </p:txBody>
-      </p:sp>
-      <p:sp>
-        <p:nvSpPr>
-          <p:cNvPr id="15" name="TextBox 14"/>
-          <p:cNvSpPr txBox="1"/>
-          <p:nvPr/>
-        </p:nvSpPr>
-        <p:spPr>
-          <a:xfrm>
-            <a:off x="1463040" y="4846320"/>
-            <a:ext cx="4297680" cy="1280160"/>
-          </a:xfrm>
-          <a:prstGeom prst="rect">
-            <a:avLst/>
-          </a:prstGeom>
-          <a:noFill/>
-        </p:spPr>
-        <p:txBody>
-          <a:bodyPr wrap="square" lIns="0" rIns="0" tIns="0" bIns="0" anchor="t">
-            <a:spAutoFit/>
-          </a:bodyPr>
-          <a:lstStyle/>
-          <a:p>
-            <a:pPr algn="l">
-              <a:spcAft>
-                <a:spcPts val="0"/>
-              </a:spcAft>
-            </a:pPr>
-            <a:r>
-              <a:rPr sz="1400" b="0" i="0">
-                <a:solidFill>
-                  <a:srgbClr val="5B6770"/>
-                </a:solidFill>
-                <a:latin typeface="Calibri"/>
-              </a:rPr>
-              <a:t>The gap between modelled and observed Kampala–Jinja trips is congestion. The expressway and urban traffic management matter there more than roadside fixes.</a:t>
-            </a:r>
-          </a:p>
-        </p:txBody>
-      </p:sp>
-      <p:sp>
-        <p:nvSpPr>
-          <p:cNvPr id="16" name="Rounded Rectangle 15"/>
-          <p:cNvSpPr/>
-          <p:nvPr/>
-        </p:nvSpPr>
-        <p:spPr>
-          <a:xfrm>
-            <a:off x="6172200" y="4069080"/>
-            <a:ext cx="5440680" cy="2103120"/>
-          </a:xfrm>
-          <a:prstGeom prst="roundRect">
-            <a:avLst>
-              <a:gd name="adj" fmla="val 6000"/>
-            </a:avLst>
-          </a:prstGeom>
-          <a:solidFill>
-            <a:srgbClr val="EEF2F0"/>
-          </a:solidFill>
-          <a:ln>
-            <a:noFill/>
-          </a:ln>
-          <a:effectLst/>
-        </p:spPr>
-        <p:style>
-          <a:lnRef idx="1">
-            <a:schemeClr val="accent1"/>
-          </a:lnRef>
-          <a:fillRef idx="3">
-            <a:schemeClr val="accent1"/>
-          </a:fillRef>
-          <a:effectRef idx="2">
-            <a:schemeClr val="accent1"/>
-          </a:effectRef>
-          <a:fontRef idx="minor">
-            <a:schemeClr val="lt1"/>
-          </a:fontRef>
-        </p:style>
-        <p:txBody>
-          <a:bodyPr rtlCol="0" anchor="ctr"/>
-          <a:lstStyle/>
-          <a:p>
-            <a:pPr algn="ctr"/>
-          </a:p>
-        </p:txBody>
-      </p:sp>
-      <p:sp>
-        <p:nvSpPr>
-          <p:cNvPr id="17" name="Oval 16"/>
-          <p:cNvSpPr/>
-          <p:nvPr/>
-        </p:nvSpPr>
-        <p:spPr>
-          <a:xfrm>
-            <a:off x="6446520" y="4343400"/>
-            <a:ext cx="457200" cy="457200"/>
-          </a:xfrm>
-          <a:prstGeom prst="ellipse">
-            <a:avLst/>
-          </a:prstGeom>
-          <a:solidFill>
-            <a:srgbClr val="D9A441"/>
-          </a:solidFill>
-          <a:ln>
-            <a:noFill/>
-          </a:ln>
-          <a:effectLst/>
-        </p:spPr>
-        <p:style>
-          <a:lnRef idx="1">
-            <a:schemeClr val="accent1"/>
-          </a:lnRef>
-          <a:fillRef idx="3">
-            <a:schemeClr val="accent1"/>
-          </a:fillRef>
-          <a:effectRef idx="2">
-            <a:schemeClr val="accent1"/>
-          </a:effectRef>
-          <a:fontRef idx="minor">
-            <a:schemeClr val="lt1"/>
-          </a:fontRef>
-        </p:style>
-        <p:txBody>
-          <a:bodyPr rtlCol="0" anchor="ctr" lIns="0" rIns="0" tIns="0" bIns="0"/>
-          <a:lstStyle/>
-          <a:p>
-            <a:pPr algn="ctr"/>
-            <a:r>
-              <a:rPr sz="1500" b="1">
-                <a:solidFill>
-                  <a:srgbClr val="FFFFFF"/>
-                </a:solidFill>
-                <a:latin typeface="Calibri"/>
-              </a:rPr>
-              <a:t>4</a:t>
-            </a:r>
-          </a:p>
-        </p:txBody>
-      </p:sp>
-      <p:sp>
-        <p:nvSpPr>
-          <p:cNvPr id="18" name="TextBox 17"/>
-          <p:cNvSpPr txBox="1"/>
-          <p:nvPr/>
-        </p:nvSpPr>
-        <p:spPr>
-          <a:xfrm>
-            <a:off x="7086600" y="4370832"/>
-            <a:ext cx="4297680" cy="411480"/>
-          </a:xfrm>
-          <a:prstGeom prst="rect">
-            <a:avLst/>
-          </a:prstGeom>
-          <a:noFill/>
-        </p:spPr>
-        <p:txBody>
-          <a:bodyPr wrap="square" lIns="0" rIns="0" tIns="0" bIns="0" anchor="t">
-            <a:spAutoFit/>
-          </a:bodyPr>
-          <a:lstStyle/>
-          <a:p>
-            <a:pPr algn="l">
-              <a:spcAft>
-                <a:spcPts val="0"/>
-              </a:spcAft>
-            </a:pPr>
-            <a:r>
-              <a:rPr sz="1900" b="1" i="0">
-                <a:solidFill>
-                  <a:srgbClr val="1E2528"/>
-                </a:solidFill>
-                <a:latin typeface="Cambria"/>
-              </a:rPr>
-              <a:t>Growth outpaces the road</a:t>
-            </a:r>
-          </a:p>
-        </p:txBody>
-      </p:sp>
-      <p:sp>
-        <p:nvSpPr>
-          <p:cNvPr id="19" name="TextBox 18"/>
-          <p:cNvSpPr txBox="1"/>
-          <p:nvPr/>
-        </p:nvSpPr>
-        <p:spPr>
-          <a:xfrm>
-            <a:off x="7086600" y="4846320"/>
-            <a:ext cx="4297680" cy="1280160"/>
-          </a:xfrm>
-          <a:prstGeom prst="rect">
-            <a:avLst/>
-          </a:prstGeom>
-          <a:noFill/>
-        </p:spPr>
-        <p:txBody>
-          <a:bodyPr wrap="square" lIns="0" rIns="0" tIns="0" bIns="0" anchor="t">
-            <a:spAutoFit/>
-          </a:bodyPr>
-          <a:lstStyle/>
-          <a:p>
-            <a:pPr algn="l">
-              <a:spcAft>
-                <a:spcPts val="0"/>
-              </a:spcAft>
-            </a:pPr>
-            <a:r>
-              <a:rPr sz="1400" b="0" i="0">
-                <a:solidFill>
-                  <a:srgbClr val="5B6770"/>
-                </a:solidFill>
-                <a:latin typeface="Calibri"/>
-              </a:rPr>
-              <a:t>At 27–68% in 20 years, today's open road is tomorrow's settlement. Land-use control along the corridors is time-critical.</a:t>
+              <a:t>Maps: each corridor's fastest-growing 5 km; grey built by 2000, orange built 2000–2020. Open-road growth (150–225%) is from a very small base and not charted.</a:t>
             </a:r>
           </a:p>
         </p:txBody>
@@ -7572,67 +7719,21 @@
                 </a:solidFill>
                 <a:latin typeface="Cambria"/>
               </a:rPr>
-              <a:t>Limitations and next steps</a:t>
-            </a:r>
-          </a:p>
-        </p:txBody>
-      </p:sp>
-      <p:sp>
-        <p:nvSpPr>
-          <p:cNvPr id="3" name="Rounded Rectangle 2"/>
-          <p:cNvSpPr/>
-          <p:nvPr/>
-        </p:nvSpPr>
-        <p:spPr>
-          <a:xfrm>
-            <a:off x="548640" y="1417320"/>
-            <a:ext cx="6675120" cy="1051560"/>
-          </a:xfrm>
-          <a:prstGeom prst="roundRect">
-            <a:avLst>
-              <a:gd name="adj" fmla="val 6000"/>
-            </a:avLst>
-          </a:prstGeom>
-          <a:solidFill>
-            <a:srgbClr val="EEF2F0"/>
-          </a:solidFill>
-          <a:ln>
-            <a:noFill/>
-          </a:ln>
-          <a:effectLst/>
-        </p:spPr>
-        <p:style>
-          <a:lnRef idx="1">
-            <a:schemeClr val="accent1"/>
-          </a:lnRef>
-          <a:fillRef idx="3">
-            <a:schemeClr val="accent1"/>
-          </a:fillRef>
-          <a:effectRef idx="2">
-            <a:schemeClr val="accent1"/>
-          </a:effectRef>
-          <a:fontRef idx="minor">
-            <a:schemeClr val="lt1"/>
-          </a:fontRef>
-        </p:style>
-        <p:txBody>
-          <a:bodyPr rtlCol="0" anchor="ctr"/>
-          <a:lstStyle/>
-          <a:p>
-            <a:pPr algn="ctr"/>
-          </a:p>
-        </p:txBody>
-      </p:sp>
-      <p:sp>
-        <p:nvSpPr>
-          <p:cNvPr id="4" name="TextBox 3"/>
+              <a:t>Twenty years of roadside building</a:t>
+            </a:r>
+          </a:p>
+        </p:txBody>
+      </p:sp>
+      <p:sp>
+        <p:nvSpPr>
+          <p:cNvPr id="3" name="TextBox 2"/>
           <p:cNvSpPr txBox="1"/>
           <p:nvPr/>
         </p:nvSpPr>
         <p:spPr>
           <a:xfrm>
-            <a:off x="822960" y="1554480"/>
-            <a:ext cx="6217920" cy="365760"/>
+            <a:off x="548640" y="1115568"/>
+            <a:ext cx="11064240" cy="457200"/>
           </a:xfrm>
           <a:prstGeom prst="rect">
             <a:avLst/>
@@ -7651,17 +7752,41 @@
               </a:spcAft>
             </a:pPr>
             <a:r>
-              <a:rPr sz="1700" b="1" i="0">
-                <a:solidFill>
-                  <a:srgbClr val="1E2528"/>
+              <a:rPr sz="1600" b="0" i="0">
+                <a:solidFill>
+                  <a:srgbClr val="5B6770"/>
                 </a:solidFill>
                 <a:latin typeface="Calibri"/>
               </a:rPr>
-              <a:t>Congestion is not modelled</a:t>
-            </a:r>
-          </a:p>
-        </p:txBody>
-      </p:sp>
+              <a:t>Each corridor's fastest-growing stretch, 2000–2020 (GHSL, observed)</a:t>
+            </a:r>
+          </a:p>
+        </p:txBody>
+      </p:sp>
+      <p:pic>
+        <p:nvPicPr>
+          <p:cNvPr id="4" name="Picture 3" descr="a1_roadside_growth.gif"/>
+          <p:cNvPicPr>
+            <a:picLocks noChangeAspect="1"/>
+          </p:cNvPicPr>
+          <p:nvPr/>
+        </p:nvPicPr>
+        <p:blipFill>
+          <a:blip r:embed="rId2"/>
+          <a:stretch>
+            <a:fillRect/>
+          </a:stretch>
+        </p:blipFill>
+        <p:spPr>
+          <a:xfrm>
+            <a:off x="548640" y="1783080"/>
+            <a:ext cx="11064240" cy="3872484"/>
+          </a:xfrm>
+          <a:prstGeom prst="rect">
+            <a:avLst/>
+          </a:prstGeom>
+        </p:spPr>
+      </p:pic>
       <p:sp>
         <p:nvSpPr>
           <p:cNvPr id="5" name="TextBox 4"/>
@@ -7670,8 +7795,8 @@
         </p:nvSpPr>
         <p:spPr>
           <a:xfrm>
-            <a:off x="822960" y="1920240"/>
-            <a:ext cx="6217920" cy="502920"/>
+            <a:off x="548640" y="6400800"/>
+            <a:ext cx="11064240" cy="274320"/>
           </a:xfrm>
           <a:prstGeom prst="rect">
             <a:avLst/>
@@ -7690,550 +7815,13 @@
               </a:spcAft>
             </a:pPr>
             <a:r>
-              <a:rPr sz="1400" b="0" i="0">
+              <a:rPr sz="1000" b="0" i="0">
                 <a:solidFill>
                   <a:srgbClr val="5B6770"/>
                 </a:solidFill>
                 <a:latin typeface="Calibri"/>
               </a:rPr>
-              <a:t>Results describe light traffic; peak-hour delay near Kampala is larger.</a:t>
-            </a:r>
-          </a:p>
-        </p:txBody>
-      </p:sp>
-      <p:sp>
-        <p:nvSpPr>
-          <p:cNvPr id="6" name="Rounded Rectangle 5"/>
-          <p:cNvSpPr/>
-          <p:nvPr/>
-        </p:nvSpPr>
-        <p:spPr>
-          <a:xfrm>
-            <a:off x="548640" y="2606040"/>
-            <a:ext cx="6675120" cy="1051560"/>
-          </a:xfrm>
-          <a:prstGeom prst="roundRect">
-            <a:avLst>
-              <a:gd name="adj" fmla="val 6000"/>
-            </a:avLst>
-          </a:prstGeom>
-          <a:solidFill>
-            <a:srgbClr val="EEF2F0"/>
-          </a:solidFill>
-          <a:ln>
-            <a:noFill/>
-          </a:ln>
-          <a:effectLst/>
-        </p:spPr>
-        <p:style>
-          <a:lnRef idx="1">
-            <a:schemeClr val="accent1"/>
-          </a:lnRef>
-          <a:fillRef idx="3">
-            <a:schemeClr val="accent1"/>
-          </a:fillRef>
-          <a:effectRef idx="2">
-            <a:schemeClr val="accent1"/>
-          </a:effectRef>
-          <a:fontRef idx="minor">
-            <a:schemeClr val="lt1"/>
-          </a:fontRef>
-        </p:style>
-        <p:txBody>
-          <a:bodyPr rtlCol="0" anchor="ctr"/>
-          <a:lstStyle/>
-          <a:p>
-            <a:pPr algn="ctr"/>
-          </a:p>
-        </p:txBody>
-      </p:sp>
-      <p:sp>
-        <p:nvSpPr>
-          <p:cNvPr id="7" name="TextBox 6"/>
-          <p:cNvSpPr txBox="1"/>
-          <p:nvPr/>
-        </p:nvSpPr>
-        <p:spPr>
-          <a:xfrm>
-            <a:off x="822960" y="2743200"/>
-            <a:ext cx="6217920" cy="365760"/>
-          </a:xfrm>
-          <a:prstGeom prst="rect">
-            <a:avLst/>
-          </a:prstGeom>
-          <a:noFill/>
-        </p:spPr>
-        <p:txBody>
-          <a:bodyPr wrap="square" lIns="0" rIns="0" tIns="0" bIns="0" anchor="t">
-            <a:spAutoFit/>
-          </a:bodyPr>
-          <a:lstStyle/>
-          <a:p>
-            <a:pPr algn="l">
-              <a:spcAft>
-                <a:spcPts val="0"/>
-              </a:spcAft>
-            </a:pPr>
-            <a:r>
-              <a:rPr sz="1700" b="1" i="0">
-                <a:solidFill>
-                  <a:srgbClr val="1E2528"/>
-                </a:solidFill>
-                <a:latin typeface="Calibri"/>
-              </a:rPr>
-              <a:t>Speed humps are under-mapped</a:t>
-            </a:r>
-          </a:p>
-        </p:txBody>
-      </p:sp>
-      <p:sp>
-        <p:nvSpPr>
-          <p:cNvPr id="8" name="TextBox 7"/>
-          <p:cNvSpPr txBox="1"/>
-          <p:nvPr/>
-        </p:nvSpPr>
-        <p:spPr>
-          <a:xfrm>
-            <a:off x="822960" y="3108960"/>
-            <a:ext cx="6217920" cy="502920"/>
-          </a:xfrm>
-          <a:prstGeom prst="rect">
-            <a:avLst/>
-          </a:prstGeom>
-          <a:noFill/>
-        </p:spPr>
-        <p:txBody>
-          <a:bodyPr wrap="square" lIns="0" rIns="0" tIns="0" bIns="0" anchor="t">
-            <a:spAutoFit/>
-          </a:bodyPr>
-          <a:lstStyle/>
-          <a:p>
-            <a:pPr algn="l">
-              <a:spcAft>
-                <a:spcPts val="0"/>
-              </a:spcAft>
-            </a:pPr>
-            <a:r>
-              <a:rPr sz="1400" b="0" i="0">
-                <a:solidFill>
-                  <a:srgbClr val="5B6770"/>
-                </a:solidFill>
-                <a:latin typeface="Calibri"/>
-              </a:rPr>
-              <a:t>OSM holds &lt; 60 on all four roads; one per town piece is assumed (range 0–2).</a:t>
-            </a:r>
-          </a:p>
-        </p:txBody>
-      </p:sp>
-      <p:sp>
-        <p:nvSpPr>
-          <p:cNvPr id="9" name="Rounded Rectangle 8"/>
-          <p:cNvSpPr/>
-          <p:nvPr/>
-        </p:nvSpPr>
-        <p:spPr>
-          <a:xfrm>
-            <a:off x="548640" y="3794760"/>
-            <a:ext cx="6675120" cy="1051560"/>
-          </a:xfrm>
-          <a:prstGeom prst="roundRect">
-            <a:avLst>
-              <a:gd name="adj" fmla="val 6000"/>
-            </a:avLst>
-          </a:prstGeom>
-          <a:solidFill>
-            <a:srgbClr val="EEF2F0"/>
-          </a:solidFill>
-          <a:ln>
-            <a:noFill/>
-          </a:ln>
-          <a:effectLst/>
-        </p:spPr>
-        <p:style>
-          <a:lnRef idx="1">
-            <a:schemeClr val="accent1"/>
-          </a:lnRef>
-          <a:fillRef idx="3">
-            <a:schemeClr val="accent1"/>
-          </a:fillRef>
-          <a:effectRef idx="2">
-            <a:schemeClr val="accent1"/>
-          </a:effectRef>
-          <a:fontRef idx="minor">
-            <a:schemeClr val="lt1"/>
-          </a:fontRef>
-        </p:style>
-        <p:txBody>
-          <a:bodyPr rtlCol="0" anchor="ctr"/>
-          <a:lstStyle/>
-          <a:p>
-            <a:pPr algn="ctr"/>
-          </a:p>
-        </p:txBody>
-      </p:sp>
-      <p:sp>
-        <p:nvSpPr>
-          <p:cNvPr id="10" name="TextBox 9"/>
-          <p:cNvSpPr txBox="1"/>
-          <p:nvPr/>
-        </p:nvSpPr>
-        <p:spPr>
-          <a:xfrm>
-            <a:off x="822960" y="3931920"/>
-            <a:ext cx="6217920" cy="365760"/>
-          </a:xfrm>
-          <a:prstGeom prst="rect">
-            <a:avLst/>
-          </a:prstGeom>
-          <a:noFill/>
-        </p:spPr>
-        <p:txBody>
-          <a:bodyPr wrap="square" lIns="0" rIns="0" tIns="0" bIns="0" anchor="t">
-            <a:spAutoFit/>
-          </a:bodyPr>
-          <a:lstStyle/>
-          <a:p>
-            <a:pPr algn="l">
-              <a:spcAft>
-                <a:spcPts val="0"/>
-              </a:spcAft>
-            </a:pPr>
-            <a:r>
-              <a:rPr sz="1700" b="1" i="0">
-                <a:solidFill>
-                  <a:srgbClr val="1E2528"/>
-                </a:solidFill>
-                <a:latin typeface="Calibri"/>
-              </a:rPr>
-              <a:t>Stop times are assumptions</a:t>
-            </a:r>
-          </a:p>
-        </p:txBody>
-      </p:sp>
-      <p:sp>
-        <p:nvSpPr>
-          <p:cNvPr id="11" name="TextBox 10"/>
-          <p:cNvSpPr txBox="1"/>
-          <p:nvPr/>
-        </p:nvSpPr>
-        <p:spPr>
-          <a:xfrm>
-            <a:off x="822960" y="4297680"/>
-            <a:ext cx="6217920" cy="502920"/>
-          </a:xfrm>
-          <a:prstGeom prst="rect">
-            <a:avLst/>
-          </a:prstGeom>
-          <a:noFill/>
-        </p:spPr>
-        <p:txBody>
-          <a:bodyPr wrap="square" lIns="0" rIns="0" tIns="0" bIns="0" anchor="t">
-            <a:spAutoFit/>
-          </a:bodyPr>
-          <a:lstStyle/>
-          <a:p>
-            <a:pPr algn="l">
-              <a:spcAft>
-                <a:spcPts val="0"/>
-              </a:spcAft>
-            </a:pPr>
-            <a:r>
-              <a:rPr sz="1400" b="0" i="0">
-                <a:solidFill>
-                  <a:srgbClr val="5B6770"/>
-                </a:solidFill>
-                <a:latin typeface="Calibri"/>
-              </a:rPr>
-              <a:t>Police posts 0–5 min, weighbridges ~10 min; rankings on the A1 depend on them.</a:t>
-            </a:r>
-          </a:p>
-        </p:txBody>
-      </p:sp>
-      <p:sp>
-        <p:nvSpPr>
-          <p:cNvPr id="12" name="Rounded Rectangle 11"/>
-          <p:cNvSpPr/>
-          <p:nvPr/>
-        </p:nvSpPr>
-        <p:spPr>
-          <a:xfrm>
-            <a:off x="548640" y="4983480"/>
-            <a:ext cx="6675120" cy="1051560"/>
-          </a:xfrm>
-          <a:prstGeom prst="roundRect">
-            <a:avLst>
-              <a:gd name="adj" fmla="val 6000"/>
-            </a:avLst>
-          </a:prstGeom>
-          <a:solidFill>
-            <a:srgbClr val="EEF2F0"/>
-          </a:solidFill>
-          <a:ln>
-            <a:noFill/>
-          </a:ln>
-          <a:effectLst/>
-        </p:spPr>
-        <p:style>
-          <a:lnRef idx="1">
-            <a:schemeClr val="accent1"/>
-          </a:lnRef>
-          <a:fillRef idx="3">
-            <a:schemeClr val="accent1"/>
-          </a:fillRef>
-          <a:effectRef idx="2">
-            <a:schemeClr val="accent1"/>
-          </a:effectRef>
-          <a:fontRef idx="minor">
-            <a:schemeClr val="lt1"/>
-          </a:fontRef>
-        </p:style>
-        <p:txBody>
-          <a:bodyPr rtlCol="0" anchor="ctr"/>
-          <a:lstStyle/>
-          <a:p>
-            <a:pPr algn="ctr"/>
-          </a:p>
-        </p:txBody>
-      </p:sp>
-      <p:sp>
-        <p:nvSpPr>
-          <p:cNvPr id="13" name="TextBox 12"/>
-          <p:cNvSpPr txBox="1"/>
-          <p:nvPr/>
-        </p:nvSpPr>
-        <p:spPr>
-          <a:xfrm>
-            <a:off x="822960" y="5120640"/>
-            <a:ext cx="6217920" cy="365760"/>
-          </a:xfrm>
-          <a:prstGeom prst="rect">
-            <a:avLst/>
-          </a:prstGeom>
-          <a:noFill/>
-        </p:spPr>
-        <p:txBody>
-          <a:bodyPr wrap="square" lIns="0" rIns="0" tIns="0" bIns="0" anchor="t">
-            <a:spAutoFit/>
-          </a:bodyPr>
-          <a:lstStyle/>
-          <a:p>
-            <a:pPr algn="l">
-              <a:spcAft>
-                <a:spcPts val="0"/>
-              </a:spcAft>
-            </a:pPr>
-            <a:r>
-              <a:rPr sz="1700" b="1" i="0">
-                <a:solidFill>
-                  <a:srgbClr val="1E2528"/>
-                </a:solidFill>
-                <a:latin typeface="Calibri"/>
-              </a:rPr>
-              <a:t>Growth data end in 2020</a:t>
-            </a:r>
-          </a:p>
-        </p:txBody>
-      </p:sp>
-      <p:sp>
-        <p:nvSpPr>
-          <p:cNvPr id="14" name="TextBox 13"/>
-          <p:cNvSpPr txBox="1"/>
-          <p:nvPr/>
-        </p:nvSpPr>
-        <p:spPr>
-          <a:xfrm>
-            <a:off x="822960" y="5486400"/>
-            <a:ext cx="6217920" cy="502920"/>
-          </a:xfrm>
-          <a:prstGeom prst="rect">
-            <a:avLst/>
-          </a:prstGeom>
-          <a:noFill/>
-        </p:spPr>
-        <p:txBody>
-          <a:bodyPr wrap="square" lIns="0" rIns="0" tIns="0" bIns="0" anchor="t">
-            <a:spAutoFit/>
-          </a:bodyPr>
-          <a:lstStyle/>
-          <a:p>
-            <a:pPr algn="l">
-              <a:spcAft>
-                <a:spcPts val="0"/>
-              </a:spcAft>
-            </a:pPr>
-            <a:r>
-              <a:rPr sz="1400" b="0" i="0">
-                <a:solidFill>
-                  <a:srgbClr val="5B6770"/>
-                </a:solidFill>
-                <a:latin typeface="Calibri"/>
-              </a:rPr>
-              <a:t>GHSL's projection to 2026 is slower than the observed trend; Open Buildings Temporal would extend it.</a:t>
-            </a:r>
-          </a:p>
-        </p:txBody>
-      </p:sp>
-      <p:sp>
-        <p:nvSpPr>
-          <p:cNvPr id="15" name="Rounded Rectangle 14"/>
-          <p:cNvSpPr/>
-          <p:nvPr/>
-        </p:nvSpPr>
-        <p:spPr>
-          <a:xfrm>
-            <a:off x="7589520" y="1417320"/>
-            <a:ext cx="4023360" cy="4617720"/>
-          </a:xfrm>
-          <a:prstGeom prst="roundRect">
-            <a:avLst>
-              <a:gd name="adj" fmla="val 6000"/>
-            </a:avLst>
-          </a:prstGeom>
-          <a:solidFill>
-            <a:srgbClr val="17252A"/>
-          </a:solidFill>
-          <a:ln>
-            <a:noFill/>
-          </a:ln>
-          <a:effectLst/>
-        </p:spPr>
-        <p:style>
-          <a:lnRef idx="1">
-            <a:schemeClr val="accent1"/>
-          </a:lnRef>
-          <a:fillRef idx="3">
-            <a:schemeClr val="accent1"/>
-          </a:fillRef>
-          <a:effectRef idx="2">
-            <a:schemeClr val="accent1"/>
-          </a:effectRef>
-          <a:fontRef idx="minor">
-            <a:schemeClr val="lt1"/>
-          </a:fontRef>
-        </p:style>
-        <p:txBody>
-          <a:bodyPr rtlCol="0" anchor="ctr"/>
-          <a:lstStyle/>
-          <a:p>
-            <a:pPr algn="ctr"/>
-          </a:p>
-        </p:txBody>
-      </p:sp>
-      <p:sp>
-        <p:nvSpPr>
-          <p:cNvPr id="16" name="TextBox 15"/>
-          <p:cNvSpPr txBox="1"/>
-          <p:nvPr/>
-        </p:nvSpPr>
-        <p:spPr>
-          <a:xfrm>
-            <a:off x="7909560" y="1691640"/>
-            <a:ext cx="3474720" cy="4206240"/>
-          </a:xfrm>
-          <a:prstGeom prst="rect">
-            <a:avLst/>
-          </a:prstGeom>
-          <a:noFill/>
-        </p:spPr>
-        <p:txBody>
-          <a:bodyPr wrap="square" lIns="0" rIns="0" tIns="0" bIns="0" anchor="t">
-            <a:spAutoFit/>
-          </a:bodyPr>
-          <a:lstStyle/>
-          <a:p>
-            <a:pPr algn="l">
-              <a:spcAft>
-                <a:spcPts val="1200"/>
-              </a:spcAft>
-            </a:pPr>
-            <a:r>
-              <a:rPr sz="2200" b="1" i="0">
-                <a:solidFill>
-                  <a:srgbClr val="FFFFFF"/>
-                </a:solidFill>
-                <a:latin typeface="Cambria"/>
-              </a:rPr>
-              <a:t>Next steps</a:t>
-            </a:r>
-          </a:p>
-          <a:p>
-            <a:pPr algn="l">
-              <a:spcAft>
-                <a:spcPts val="1200"/>
-              </a:spcAft>
-            </a:pPr>
-            <a:r>
-              <a:rPr sz="1500" b="0" i="0">
-                <a:solidFill>
-                  <a:srgbClr val="B8C7C4"/>
-                </a:solidFill>
-                <a:latin typeface="Calibri"/>
-              </a:rPr>
-              <a:t>Report cause rankings with their Monte Carlo shares</a:t>
-            </a:r>
-          </a:p>
-          <a:p>
-            <a:pPr algn="l">
-              <a:spcAft>
-                <a:spcPts val="1200"/>
-              </a:spcAft>
-            </a:pPr>
-            <a:r>
-              <a:rPr sz="1500" b="0" i="0">
-                <a:solidFill>
-                  <a:srgbClr val="B8C7C4"/>
-                </a:solidFill>
-                <a:latin typeface="Calibri"/>
-              </a:rPr>
-              <a:t>Swap GLO-30 for FABDEM terrain</a:t>
-            </a:r>
-          </a:p>
-          <a:p>
-            <a:pPr algn="l">
-              <a:spcAft>
-                <a:spcPts val="1200"/>
-              </a:spcAft>
-            </a:pPr>
-            <a:r>
-              <a:rPr sz="1500" b="0" i="0">
-                <a:solidFill>
-                  <a:srgbClr val="B8C7C4"/>
-                </a:solidFill>
-                <a:latin typeface="Calibri"/>
-              </a:rPr>
-              <a:t>Observe post-2020 growth with Open Buildings 2.5D Temporal</a:t>
-            </a:r>
-          </a:p>
-          <a:p>
-            <a:pPr algn="l">
-              <a:spcAft>
-                <a:spcPts val="1200"/>
-              </a:spcAft>
-            </a:pPr>
-            <a:r>
-              <a:rPr sz="1500" b="0" i="0">
-                <a:solidFill>
-                  <a:srgbClr val="B8C7C4"/>
-                </a:solidFill>
-                <a:latin typeface="Calibri"/>
-              </a:rPr>
-              <a:t>Train the Sentinel-2 truck index on labelled chips</a:t>
-            </a:r>
-          </a:p>
-          <a:p>
-            <a:pPr algn="l">
-              <a:spcAft>
-                <a:spcPts val="1200"/>
-              </a:spcAft>
-            </a:pPr>
-            <a:r>
-              <a:rPr sz="1500" b="0" i="0">
-                <a:solidFill>
-                  <a:srgbClr val="B8C7C4"/>
-                </a:solidFill>
-                <a:latin typeface="Calibri"/>
-              </a:rPr>
-              <a:t>Write up the paper</a:t>
+              <a:t>figures/a1_roadside_growth.gif. Plays in slide-show mode. A version continued to 2026 on GHSL's projection is in figures/.</a:t>
             </a:r>
           </a:p>
         </p:txBody>
@@ -8252,7 +7840,7 @@
     <p:bg>
       <p:bgPr>
         <a:solidFill>
-          <a:srgbClr val="17252A"/>
+          <a:srgbClr val="FFFFFF"/>
         </a:solidFill>
         <a:effectLst/>
       </p:bgPr>
@@ -8272,8 +7860,8 @@
         </p:nvSpPr>
         <p:spPr>
           <a:xfrm>
-            <a:off x="640080" y="1097280"/>
-            <a:ext cx="10881360" cy="457200"/>
+            <a:off x="548640" y="411480"/>
+            <a:ext cx="11064240" cy="731520"/>
           </a:xfrm>
           <a:prstGeom prst="rect">
             <a:avLst/>
@@ -8292,13 +7880,13 @@
               </a:spcAft>
             </a:pPr>
             <a:r>
-              <a:rPr sz="1300" b="1" i="0">
-                <a:solidFill>
-                  <a:srgbClr val="D9A441"/>
-                </a:solidFill>
-                <a:latin typeface="Calibri"/>
-              </a:rPr>
-              <a:t>CONCLUSION</a:t>
+              <a:rPr sz="3400" b="1" i="0">
+                <a:solidFill>
+                  <a:srgbClr val="1E2528"/>
+                </a:solidFill>
+                <a:latin typeface="Cambria"/>
+              </a:rPr>
+              <a:t>When distance becomes time</a:t>
             </a:r>
           </a:p>
         </p:txBody>
@@ -8311,8 +7899,8 @@
         </p:nvSpPr>
         <p:spPr>
           <a:xfrm>
-            <a:off x="640080" y="1600200"/>
-            <a:ext cx="10881360" cy="1371600"/>
+            <a:off x="548640" y="1115568"/>
+            <a:ext cx="11064240" cy="457200"/>
           </a:xfrm>
           <a:prstGeom prst="rect">
             <a:avLst/>
@@ -8331,27 +7919,1236 @@
               </a:spcAft>
             </a:pPr>
             <a:r>
+              <a:rPr sz="1600" b="0" i="0">
+                <a:solidFill>
+                  <a:srgbClr val="5B6770"/>
+                </a:solidFill>
+                <a:latin typeface="Calibri"/>
+              </a:rPr>
+              <a:t>The corridors redrawn so that length is loaded-truck travel time; dots mark each hour</a:t>
+            </a:r>
+          </a:p>
+        </p:txBody>
+      </p:sp>
+      <p:pic>
+        <p:nvPicPr>
+          <p:cNvPr id="4" name="Picture 3" descr="g04.png"/>
+          <p:cNvPicPr>
+            <a:picLocks noChangeAspect="1"/>
+          </p:cNvPicPr>
+          <p:nvPr/>
+        </p:nvPicPr>
+        <p:blipFill>
+          <a:blip r:embed="rId2"/>
+          <a:stretch>
+            <a:fillRect/>
+          </a:stretch>
+        </p:blipFill>
+        <p:spPr>
+          <a:xfrm>
+            <a:off x="822960" y="1691640"/>
+            <a:ext cx="8849532" cy="4572000"/>
+          </a:xfrm>
+          <a:prstGeom prst="rect">
+            <a:avLst/>
+          </a:prstGeom>
+        </p:spPr>
+      </p:pic>
+      <p:sp>
+        <p:nvSpPr>
+          <p:cNvPr id="5" name="TextBox 4"/>
+          <p:cNvSpPr txBox="1"/>
+          <p:nvPr/>
+        </p:nvSpPr>
+        <p:spPr>
+          <a:xfrm>
+            <a:off x="548640" y="6400800"/>
+            <a:ext cx="11064240" cy="274320"/>
+          </a:xfrm>
+          <a:prstGeom prst="rect">
+            <a:avLst/>
+          </a:prstGeom>
+          <a:noFill/>
+        </p:spPr>
+        <p:txBody>
+          <a:bodyPr wrap="square" lIns="0" rIns="0" tIns="0" bIns="0" anchor="t">
+            <a:spAutoFit/>
+          </a:bodyPr>
+          <a:lstStyle/>
+          <a:p>
+            <a:pPr algn="l">
+              <a:spcAft>
+                <a:spcPts val="0"/>
+              </a:spcAft>
+            </a:pPr>
+            <a:r>
+              <a:rPr sz="1000" b="0" i="0">
+                <a:solidFill>
+                  <a:srgbClr val="5B6770"/>
+                </a:solidFill>
+                <a:latin typeface="Calibri"/>
+              </a:rPr>
+              <a:t>figures/g04_time_map.png. Grey: the roads as mapped. Towns, controls and hills stretch the lines.</a:t>
+            </a:r>
+          </a:p>
+        </p:txBody>
+      </p:sp>
+    </p:spTree>
+  </p:cSld>
+  <p:clrMapOvr>
+    <a:masterClrMapping/>
+  </p:clrMapOvr>
+</p:sld>
+</file>
+
+<file path=ppt/slides/slide15.xml><?xml version="1.0" encoding="utf-8"?>
+<p:sld xmlns:a="http://schemas.openxmlformats.org/drawingml/2006/main" xmlns:p="http://schemas.openxmlformats.org/presentationml/2006/main" xmlns:r="http://schemas.openxmlformats.org/officeDocument/2006/relationships">
+  <p:cSld>
+    <p:bg>
+      <p:bgPr>
+        <a:solidFill>
+          <a:srgbClr val="FFFFFF"/>
+        </a:solidFill>
+        <a:effectLst/>
+      </p:bgPr>
+    </p:bg>
+    <p:spTree>
+      <p:nvGrpSpPr>
+        <p:cNvPr id="1" name=""/>
+        <p:cNvGrpSpPr/>
+        <p:nvPr/>
+      </p:nvGrpSpPr>
+      <p:grpSpPr/>
+      <p:sp>
+        <p:nvSpPr>
+          <p:cNvPr id="2" name="TextBox 1"/>
+          <p:cNvSpPr txBox="1"/>
+          <p:nvPr/>
+        </p:nvSpPr>
+        <p:spPr>
+          <a:xfrm>
+            <a:off x="548640" y="411480"/>
+            <a:ext cx="11064240" cy="731520"/>
+          </a:xfrm>
+          <a:prstGeom prst="rect">
+            <a:avLst/>
+          </a:prstGeom>
+          <a:noFill/>
+        </p:spPr>
+        <p:txBody>
+          <a:bodyPr wrap="square" lIns="0" rIns="0" tIns="0" bIns="0" anchor="t">
+            <a:spAutoFit/>
+          </a:bodyPr>
+          <a:lstStyle/>
+          <a:p>
+            <a:pPr algn="l">
+              <a:spcAft>
+                <a:spcPts val="0"/>
+              </a:spcAft>
+            </a:pPr>
+            <a:r>
               <a:rPr sz="3400" b="1" i="0">
                 <a:solidFill>
-                  <a:srgbClr val="FFFFFF"/>
+                  <a:srgbClr val="1E2528"/>
                 </a:solidFill>
                 <a:latin typeface="Cambria"/>
               </a:rPr>
-              <a:t>Uganda's corridors are becoming high streets faster than they are being managed as highways.</a:t>
-            </a:r>
-          </a:p>
-        </p:txBody>
-      </p:sp>
-      <p:sp>
-        <p:nvSpPr>
-          <p:cNvPr id="4" name="Oval 3"/>
+              <a:t>Result 5 · Controls are the quickest wins</a:t>
+            </a:r>
+          </a:p>
+        </p:txBody>
+      </p:sp>
+      <p:sp>
+        <p:nvSpPr>
+          <p:cNvPr id="3" name="TextBox 2"/>
+          <p:cNvSpPr txBox="1"/>
+          <p:nvPr/>
+        </p:nvSpPr>
+        <p:spPr>
+          <a:xfrm>
+            <a:off x="548640" y="1115568"/>
+            <a:ext cx="11064240" cy="457200"/>
+          </a:xfrm>
+          <a:prstGeom prst="rect">
+            <a:avLst/>
+          </a:prstGeom>
+          <a:noFill/>
+        </p:spPr>
+        <p:txBody>
+          <a:bodyPr wrap="square" lIns="0" rIns="0" tIns="0" bIns="0" anchor="t">
+            <a:spAutoFit/>
+          </a:bodyPr>
+          <a:lstStyle/>
+          <a:p>
+            <a:pPr algn="l">
+              <a:spcAft>
+                <a:spcPts val="0"/>
+              </a:spcAft>
+            </a:pPr>
+            <a:r>
+              <a:rPr sz="1600" b="0" i="0">
+                <a:solidFill>
+                  <a:srgbClr val="5B6770"/>
+                </a:solidFill>
+                <a:latin typeface="Calibri"/>
+              </a:rPr>
+              <a:t>Truck minutes saved per trip leaving Kampala, by fix (central estimate)</a:t>
+            </a:r>
+          </a:p>
+        </p:txBody>
+      </p:sp>
+      <p:graphicFrame>
+        <p:nvGraphicFramePr>
+          <p:cNvPr id="4" name="Chart 3"/>
+          <p:cNvGraphicFramePr>
+            <a:graphicFrameLocks noGrp="1"/>
+          </p:cNvGraphicFramePr>
+          <p:nvPr/>
+        </p:nvGraphicFramePr>
+        <p:xfrm>
+          <a:off x="457200" y="1737360"/>
+          <a:ext cx="7498079" cy="4572000"/>
+        </p:xfrm>
+        <a:graphic>
+          <a:graphicData uri="http://schemas.openxmlformats.org/drawingml/2006/chart">
+            <c:chart xmlns:c="http://schemas.openxmlformats.org/drawingml/2006/chart" r:id="rId2"/>
+          </a:graphicData>
+        </a:graphic>
+      </p:graphicFrame>
+      <p:sp>
+        <p:nvSpPr>
+          <p:cNvPr id="5" name="TextBox 4"/>
+          <p:cNvSpPr txBox="1"/>
+          <p:nvPr/>
+        </p:nvSpPr>
+        <p:spPr>
+          <a:xfrm>
+            <a:off x="8321040" y="1874519"/>
+            <a:ext cx="3291840" cy="4389120"/>
+          </a:xfrm>
+          <a:prstGeom prst="rect">
+            <a:avLst/>
+          </a:prstGeom>
+          <a:noFill/>
+        </p:spPr>
+        <p:txBody>
+          <a:bodyPr wrap="square" lIns="0" rIns="0" tIns="0" bIns="0" anchor="t">
+            <a:spAutoFit/>
+          </a:bodyPr>
+          <a:lstStyle/>
+          <a:p>
+            <a:pPr algn="l">
+              <a:spcAft>
+                <a:spcPts val="1000"/>
+              </a:spcAft>
+            </a:pPr>
+            <a:r>
+              <a:rPr sz="2800" b="1" i="0">
+                <a:solidFill>
+                  <a:srgbClr val="C4532D"/>
+                </a:solidFill>
+                <a:latin typeface="Cambria"/>
+              </a:rPr>
+              <a:t>US$42 M a year</a:t>
+            </a:r>
+          </a:p>
+          <a:p>
+            <a:pPr algn="l">
+              <a:spcAft>
+                <a:spcPts val="1000"/>
+              </a:spcAft>
+            </a:pPr>
+            <a:r>
+              <a:rPr sz="1400" b="0" i="0">
+                <a:solidFill>
+                  <a:srgbClr val="1E2528"/>
+                </a:solidFill>
+                <a:latin typeface="Calibri"/>
+              </a:rPr>
+              <a:t>is what delay costs heavy trucks on the four roads at central values (range several times wider: truck counts are assumed off the A1).</a:t>
+            </a:r>
+          </a:p>
+          <a:p>
+            <a:pPr algn="l">
+              <a:spcAft>
+                <a:spcPts val="1000"/>
+              </a:spcAft>
+            </a:pPr>
+            <a:r>
+              <a:rPr sz="1400" b="0" i="0">
+                <a:solidFill>
+                  <a:srgbClr val="5B6770"/>
+                </a:solidFill>
+                <a:latin typeface="Calibri"/>
+              </a:rPr>
+              <a:t>Weigh-in-motion and ending police stops save more per trip than bypasses in light traffic. Service roads help everywhere but need 125–270 km each.</a:t>
+            </a:r>
+          </a:p>
+        </p:txBody>
+      </p:sp>
+      <p:sp>
+        <p:nvSpPr>
+          <p:cNvPr id="6" name="TextBox 5"/>
+          <p:cNvSpPr txBox="1"/>
+          <p:nvPr/>
+        </p:nvSpPr>
+        <p:spPr>
+          <a:xfrm>
+            <a:off x="548640" y="6400800"/>
+            <a:ext cx="11064240" cy="274320"/>
+          </a:xfrm>
+          <a:prstGeom prst="rect">
+            <a:avLst/>
+          </a:prstGeom>
+          <a:noFill/>
+        </p:spPr>
+        <p:txBody>
+          <a:bodyPr wrap="square" lIns="0" rIns="0" tIns="0" bIns="0" anchor="t">
+            <a:spAutoFit/>
+          </a:bodyPr>
+          <a:lstStyle/>
+          <a:p>
+            <a:pPr algn="l">
+              <a:spcAft>
+                <a:spcPts val="0"/>
+              </a:spcAft>
+            </a:pPr>
+            <a:r>
+              <a:rPr sz="1000" b="0" i="0">
+                <a:solidFill>
+                  <a:srgbClr val="5B6770"/>
+                </a:solidFill>
+                <a:latin typeface="Calibri"/>
+              </a:rPr>
+              <a:t>outputs/scenarios.csv, outputs/costs.csv (scripts 16, 17). Congestion relief from bypasses is not captured by the light-traffic model.</a:t>
+            </a:r>
+          </a:p>
+        </p:txBody>
+      </p:sp>
+    </p:spTree>
+  </p:cSld>
+  <p:clrMapOvr>
+    <a:masterClrMapping/>
+  </p:clrMapOvr>
+</p:sld>
+</file>
+
+<file path=ppt/slides/slide16.xml><?xml version="1.0" encoding="utf-8"?>
+<p:sld xmlns:a="http://schemas.openxmlformats.org/drawingml/2006/main" xmlns:p="http://schemas.openxmlformats.org/presentationml/2006/main" xmlns:r="http://schemas.openxmlformats.org/officeDocument/2006/relationships">
+  <p:cSld>
+    <p:bg>
+      <p:bgPr>
+        <a:solidFill>
+          <a:srgbClr val="FFFFFF"/>
+        </a:solidFill>
+        <a:effectLst/>
+      </p:bgPr>
+    </p:bg>
+    <p:spTree>
+      <p:nvGrpSpPr>
+        <p:cNvPr id="1" name=""/>
+        <p:cNvGrpSpPr/>
+        <p:nvPr/>
+      </p:nvGrpSpPr>
+      <p:grpSpPr/>
+      <p:sp>
+        <p:nvSpPr>
+          <p:cNvPr id="2" name="TextBox 1"/>
+          <p:cNvSpPr txBox="1"/>
+          <p:nvPr/>
+        </p:nvSpPr>
+        <p:spPr>
+          <a:xfrm>
+            <a:off x="548640" y="411480"/>
+            <a:ext cx="11064240" cy="731520"/>
+          </a:xfrm>
+          <a:prstGeom prst="rect">
+            <a:avLst/>
+          </a:prstGeom>
+          <a:noFill/>
+        </p:spPr>
+        <p:txBody>
+          <a:bodyPr wrap="square" lIns="0" rIns="0" tIns="0" bIns="0" anchor="t">
+            <a:spAutoFit/>
+          </a:bodyPr>
+          <a:lstStyle/>
+          <a:p>
+            <a:pPr algn="l">
+              <a:spcAft>
+                <a:spcPts val="0"/>
+              </a:spcAft>
+            </a:pPr>
+            <a:r>
+              <a:rPr sz="3400" b="1" i="0">
+                <a:solidFill>
+                  <a:srgbClr val="1E2528"/>
+                </a:solidFill>
+                <a:latin typeface="Cambria"/>
+              </a:rPr>
+              <a:t>Result 6 · Settlements carry most of the risk</a:t>
+            </a:r>
+          </a:p>
+        </p:txBody>
+      </p:sp>
+      <p:sp>
+        <p:nvSpPr>
+          <p:cNvPr id="3" name="TextBox 2"/>
+          <p:cNvSpPr txBox="1"/>
+          <p:nvPr/>
+        </p:nvSpPr>
+        <p:spPr>
+          <a:xfrm>
+            <a:off x="548640" y="1115568"/>
+            <a:ext cx="11064240" cy="457200"/>
+          </a:xfrm>
+          <a:prstGeom prst="rect">
+            <a:avLst/>
+          </a:prstGeom>
+          <a:noFill/>
+        </p:spPr>
+        <p:txBody>
+          <a:bodyPr wrap="square" lIns="0" rIns="0" tIns="0" bIns="0" anchor="t">
+            <a:spAutoFit/>
+          </a:bodyPr>
+          <a:lstStyle/>
+          <a:p>
+            <a:pPr algn="l">
+              <a:spcAft>
+                <a:spcPts val="0"/>
+              </a:spcAft>
+            </a:pPr>
+            <a:r>
+              <a:rPr sz="1600" b="0" i="0">
+                <a:solidFill>
+                  <a:srgbClr val="5B6770"/>
+                </a:solidFill>
+                <a:latin typeface="Calibri"/>
+              </a:rPr>
+              <a:t>Roadside settlements: share of people within 300 m vs share of exposure (people × trucks × speed⁴)</a:t>
+            </a:r>
+          </a:p>
+        </p:txBody>
+      </p:sp>
+      <p:graphicFrame>
+        <p:nvGraphicFramePr>
+          <p:cNvPr id="4" name="Chart 3"/>
+          <p:cNvGraphicFramePr>
+            <a:graphicFrameLocks noGrp="1"/>
+          </p:cNvGraphicFramePr>
+          <p:nvPr/>
+        </p:nvGraphicFramePr>
+        <p:xfrm>
+          <a:off x="457200" y="1737360"/>
+          <a:ext cx="6949440" cy="4572000"/>
+        </p:xfrm>
+        <a:graphic>
+          <a:graphicData uri="http://schemas.openxmlformats.org/drawingml/2006/chart">
+            <c:chart xmlns:c="http://schemas.openxmlformats.org/drawingml/2006/chart" r:id="rId2"/>
+          </a:graphicData>
+        </a:graphic>
+      </p:graphicFrame>
+      <p:sp>
+        <p:nvSpPr>
+          <p:cNvPr id="5" name="Rounded Rectangle 4"/>
           <p:cNvSpPr/>
           <p:nvPr/>
         </p:nvSpPr>
         <p:spPr>
           <a:xfrm>
-            <a:off x="640080" y="3429000"/>
-            <a:ext cx="502920" cy="502920"/>
+            <a:off x="7772400" y="1828800"/>
+            <a:ext cx="3840480" cy="2103120"/>
+          </a:xfrm>
+          <a:prstGeom prst="roundRect">
+            <a:avLst>
+              <a:gd name="adj" fmla="val 6000"/>
+            </a:avLst>
+          </a:prstGeom>
+          <a:solidFill>
+            <a:srgbClr val="EEF2F0"/>
+          </a:solidFill>
+          <a:ln>
+            <a:noFill/>
+          </a:ln>
+          <a:effectLst/>
+        </p:spPr>
+        <p:style>
+          <a:lnRef idx="1">
+            <a:schemeClr val="accent1"/>
+          </a:lnRef>
+          <a:fillRef idx="3">
+            <a:schemeClr val="accent1"/>
+          </a:fillRef>
+          <a:effectRef idx="2">
+            <a:schemeClr val="accent1"/>
+          </a:effectRef>
+          <a:fontRef idx="minor">
+            <a:schemeClr val="lt1"/>
+          </a:fontRef>
+        </p:style>
+        <p:txBody>
+          <a:bodyPr rtlCol="0" anchor="ctr"/>
+          <a:lstStyle/>
+          <a:p>
+            <a:pPr algn="ctr"/>
+          </a:p>
+        </p:txBody>
+      </p:sp>
+      <p:sp>
+        <p:nvSpPr>
+          <p:cNvPr id="6" name="TextBox 5"/>
+          <p:cNvSpPr txBox="1"/>
+          <p:nvPr/>
+        </p:nvSpPr>
+        <p:spPr>
+          <a:xfrm>
+            <a:off x="8046720" y="2011680"/>
+            <a:ext cx="3383280" cy="1828800"/>
+          </a:xfrm>
+          <a:prstGeom prst="rect">
+            <a:avLst/>
+          </a:prstGeom>
+          <a:noFill/>
+        </p:spPr>
+        <p:txBody>
+          <a:bodyPr wrap="square" lIns="0" rIns="0" tIns="0" bIns="0" anchor="t">
+            <a:spAutoFit/>
+          </a:bodyPr>
+          <a:lstStyle/>
+          <a:p>
+            <a:pPr algn="l">
+              <a:spcAft>
+                <a:spcPts val="600"/>
+              </a:spcAft>
+            </a:pPr>
+            <a:r>
+              <a:rPr sz="2200" b="1" i="0">
+                <a:solidFill>
+                  <a:srgbClr val="C4532D"/>
+                </a:solidFill>
+                <a:latin typeface="Cambria"/>
+              </a:rPr>
+              <a:t>Trucks run at 55–60 km/h</a:t>
+            </a:r>
+          </a:p>
+          <a:p>
+            <a:pPr algn="l">
+              <a:spcAft>
+                <a:spcPts val="600"/>
+              </a:spcAft>
+            </a:pPr>
+            <a:r>
+              <a:rPr sz="1300" b="0" i="0">
+                <a:solidFill>
+                  <a:srgbClr val="1E2528"/>
+                </a:solidFill>
+                <a:latin typeface="Calibri"/>
+              </a:rPr>
+              <a:t>through settlements that are not classed as towns, so risk concentrates where people live between towns.</a:t>
+            </a:r>
+          </a:p>
+        </p:txBody>
+      </p:sp>
+      <p:sp>
+        <p:nvSpPr>
+          <p:cNvPr id="7" name="Rounded Rectangle 6"/>
+          <p:cNvSpPr/>
+          <p:nvPr/>
+        </p:nvSpPr>
+        <p:spPr>
+          <a:xfrm>
+            <a:off x="7772400" y="4114800"/>
+            <a:ext cx="3840480" cy="2103120"/>
+          </a:xfrm>
+          <a:prstGeom prst="roundRect">
+            <a:avLst>
+              <a:gd name="adj" fmla="val 6000"/>
+            </a:avLst>
+          </a:prstGeom>
+          <a:solidFill>
+            <a:srgbClr val="EEF2F0"/>
+          </a:solidFill>
+          <a:ln>
+            <a:noFill/>
+          </a:ln>
+          <a:effectLst/>
+        </p:spPr>
+        <p:style>
+          <a:lnRef idx="1">
+            <a:schemeClr val="accent1"/>
+          </a:lnRef>
+          <a:fillRef idx="3">
+            <a:schemeClr val="accent1"/>
+          </a:fillRef>
+          <a:effectRef idx="2">
+            <a:schemeClr val="accent1"/>
+          </a:effectRef>
+          <a:fontRef idx="minor">
+            <a:schemeClr val="lt1"/>
+          </a:fontRef>
+        </p:style>
+        <p:txBody>
+          <a:bodyPr rtlCol="0" anchor="ctr"/>
+          <a:lstStyle/>
+          <a:p>
+            <a:pPr algn="ctr"/>
+          </a:p>
+        </p:txBody>
+      </p:sp>
+      <p:sp>
+        <p:nvSpPr>
+          <p:cNvPr id="8" name="TextBox 7"/>
+          <p:cNvSpPr txBox="1"/>
+          <p:nvPr/>
+        </p:nvSpPr>
+        <p:spPr>
+          <a:xfrm>
+            <a:off x="8046720" y="4297680"/>
+            <a:ext cx="3383280" cy="1828800"/>
+          </a:xfrm>
+          <a:prstGeom prst="rect">
+            <a:avLst/>
+          </a:prstGeom>
+          <a:noFill/>
+        </p:spPr>
+        <p:txBody>
+          <a:bodyPr wrap="square" lIns="0" rIns="0" tIns="0" bIns="0" anchor="t">
+            <a:spAutoFit/>
+          </a:bodyPr>
+          <a:lstStyle/>
+          <a:p>
+            <a:pPr algn="l">
+              <a:spcAft>
+                <a:spcPts val="600"/>
+              </a:spcAft>
+            </a:pPr>
+            <a:r>
+              <a:rPr sz="2200" b="1" i="0">
+                <a:solidFill>
+                  <a:srgbClr val="17252A"/>
+                </a:solidFill>
+                <a:latin typeface="Cambria"/>
+              </a:rPr>
+              <a:t>5%–8% slower</a:t>
+            </a:r>
+          </a:p>
+          <a:p>
+            <a:pPr algn="l">
+              <a:spcAft>
+                <a:spcPts val="600"/>
+              </a:spcAft>
+            </a:pPr>
+            <a:r>
+              <a:rPr sz="1300" b="0" i="0">
+                <a:solidFill>
+                  <a:srgbClr val="1E2528"/>
+                </a:solidFill>
+                <a:latin typeface="Calibri"/>
+              </a:rPr>
+              <a:t>on a bad-rain day (95th percentile, 2006–2025) than on a typical day. The Malaba road is slowed on about 87 days a year.</a:t>
+            </a:r>
+          </a:p>
+        </p:txBody>
+      </p:sp>
+      <p:sp>
+        <p:nvSpPr>
+          <p:cNvPr id="9" name="TextBox 8"/>
+          <p:cNvSpPr txBox="1"/>
+          <p:nvPr/>
+        </p:nvSpPr>
+        <p:spPr>
+          <a:xfrm>
+            <a:off x="548640" y="6400800"/>
+            <a:ext cx="11064240" cy="274320"/>
+          </a:xfrm>
+          <a:prstGeom prst="rect">
+            <a:avLst/>
+          </a:prstGeom>
+          <a:noFill/>
+        </p:spPr>
+        <p:txBody>
+          <a:bodyPr wrap="square" lIns="0" rIns="0" tIns="0" bIns="0" anchor="t">
+            <a:spAutoFit/>
+          </a:bodyPr>
+          <a:lstStyle/>
+          <a:p>
+            <a:pPr algn="l">
+              <a:spcAft>
+                <a:spcPts val="0"/>
+              </a:spcAft>
+            </a:pPr>
+            <a:r>
+              <a:rPr sz="1000" b="0" i="0">
+                <a:solidFill>
+                  <a:srgbClr val="5B6770"/>
+                </a:solidFill>
+                <a:latin typeface="Calibri"/>
+              </a:rPr>
+              <a:t>outputs/safety_by_type.csv, outputs/reliability.csv (scripts 18, 19). Exposure is not a crash rate; floods that close roads are not modelled.</a:t>
+            </a:r>
+          </a:p>
+        </p:txBody>
+      </p:sp>
+    </p:spTree>
+  </p:cSld>
+  <p:clrMapOvr>
+    <a:masterClrMapping/>
+  </p:clrMapOvr>
+</p:sld>
+</file>
+
+<file path=ppt/slides/slide17.xml><?xml version="1.0" encoding="utf-8"?>
+<p:sld xmlns:a="http://schemas.openxmlformats.org/drawingml/2006/main" xmlns:p="http://schemas.openxmlformats.org/presentationml/2006/main" xmlns:r="http://schemas.openxmlformats.org/officeDocument/2006/relationships">
+  <p:cSld>
+    <p:bg>
+      <p:bgPr>
+        <a:solidFill>
+          <a:srgbClr val="FFFFFF"/>
+        </a:solidFill>
+        <a:effectLst/>
+      </p:bgPr>
+    </p:bg>
+    <p:spTree>
+      <p:nvGrpSpPr>
+        <p:cNvPr id="1" name=""/>
+        <p:cNvGrpSpPr/>
+        <p:nvPr/>
+      </p:nvGrpSpPr>
+      <p:grpSpPr/>
+      <p:pic>
+        <p:nvPicPr>
+          <p:cNvPr id="2" name="Picture 1" descr="f12.png"/>
+          <p:cNvPicPr>
+            <a:picLocks noChangeAspect="1"/>
+          </p:cNvPicPr>
+          <p:nvPr/>
+        </p:nvPicPr>
+        <p:blipFill>
+          <a:blip r:embed="rId2"/>
+          <a:stretch>
+            <a:fillRect/>
+          </a:stretch>
+        </p:blipFill>
+        <p:spPr>
+          <a:xfrm>
+            <a:off x="365760" y="320040"/>
+            <a:ext cx="5896644" cy="6217920"/>
+          </a:xfrm>
+          <a:prstGeom prst="rect">
+            <a:avLst/>
+          </a:prstGeom>
+        </p:spPr>
+      </p:pic>
+      <p:sp>
+        <p:nvSpPr>
+          <p:cNvPr id="3" name="TextBox 2"/>
+          <p:cNvSpPr txBox="1"/>
+          <p:nvPr/>
+        </p:nvSpPr>
+        <p:spPr>
+          <a:xfrm>
+            <a:off x="6400800" y="411480"/>
+            <a:ext cx="5303520" cy="1188720"/>
+          </a:xfrm>
+          <a:prstGeom prst="rect">
+            <a:avLst/>
+          </a:prstGeom>
+          <a:noFill/>
+        </p:spPr>
+        <p:txBody>
+          <a:bodyPr wrap="square" lIns="0" rIns="0" tIns="0" bIns="0" anchor="t">
+            <a:spAutoFit/>
+          </a:bodyPr>
+          <a:lstStyle/>
+          <a:p>
+            <a:pPr algn="l">
+              <a:spcAft>
+                <a:spcPts val="0"/>
+              </a:spcAft>
+            </a:pPr>
+            <a:r>
+              <a:rPr sz="3000" b="1" i="0">
+                <a:solidFill>
+                  <a:srgbClr val="1E2528"/>
+                </a:solidFill>
+                <a:latin typeface="Cambria"/>
+              </a:rPr>
+              <a:t>Rail along the bottlenecks</a:t>
+            </a:r>
+          </a:p>
+        </p:txBody>
+      </p:sp>
+      <p:sp>
+        <p:nvSpPr>
+          <p:cNvPr id="4" name="TextBox 3"/>
+          <p:cNvSpPr txBox="1"/>
+          <p:nvPr/>
+        </p:nvSpPr>
+        <p:spPr>
+          <a:xfrm>
+            <a:off x="6400800" y="1234440"/>
+            <a:ext cx="5303520" cy="548640"/>
+          </a:xfrm>
+          <a:prstGeom prst="rect">
+            <a:avLst/>
+          </a:prstGeom>
+          <a:noFill/>
+        </p:spPr>
+        <p:txBody>
+          <a:bodyPr wrap="square" lIns="0" rIns="0" tIns="0" bIns="0" anchor="t">
+            <a:spAutoFit/>
+          </a:bodyPr>
+          <a:lstStyle/>
+          <a:p>
+            <a:pPr algn="l">
+              <a:spcAft>
+                <a:spcPts val="0"/>
+              </a:spcAft>
+            </a:pPr>
+            <a:r>
+              <a:rPr sz="1400" b="0" i="0">
+                <a:solidFill>
+                  <a:srgbClr val="5B6770"/>
+                </a:solidFill>
+                <a:latin typeface="Calibri"/>
+              </a:rPr>
+              <a:t>Least-cost screening alignments and the existing metre-gauge railway</a:t>
+            </a:r>
+          </a:p>
+        </p:txBody>
+      </p:sp>
+      <p:sp>
+        <p:nvSpPr>
+          <p:cNvPr id="5" name="TextBox 4"/>
+          <p:cNvSpPr txBox="1"/>
+          <p:nvPr/>
+        </p:nvSpPr>
+        <p:spPr>
+          <a:xfrm>
+            <a:off x="6400800" y="2011680"/>
+            <a:ext cx="1463040" cy="640080"/>
+          </a:xfrm>
+          <a:prstGeom prst="rect">
+            <a:avLst/>
+          </a:prstGeom>
+          <a:noFill/>
+        </p:spPr>
+        <p:txBody>
+          <a:bodyPr wrap="square" lIns="0" rIns="0" tIns="0" bIns="0" anchor="t">
+            <a:spAutoFit/>
+          </a:bodyPr>
+          <a:lstStyle/>
+          <a:p>
+            <a:pPr algn="l">
+              <a:spcAft>
+                <a:spcPts val="0"/>
+              </a:spcAft>
+            </a:pPr>
+            <a:r>
+              <a:rPr sz="2600" b="1" i="0">
+                <a:solidFill>
+                  <a:srgbClr val="C4532D"/>
+                </a:solidFill>
+                <a:latin typeface="Cambria"/>
+              </a:rPr>
+              <a:t>81%</a:t>
+            </a:r>
+          </a:p>
+        </p:txBody>
+      </p:sp>
+      <p:sp>
+        <p:nvSpPr>
+          <p:cNvPr id="6" name="TextBox 5"/>
+          <p:cNvSpPr txBox="1"/>
+          <p:nvPr/>
+        </p:nvSpPr>
+        <p:spPr>
+          <a:xfrm>
+            <a:off x="8001000" y="2057400"/>
+            <a:ext cx="3703320" cy="1188720"/>
+          </a:xfrm>
+          <a:prstGeom prst="rect">
+            <a:avLst/>
+          </a:prstGeom>
+          <a:noFill/>
+        </p:spPr>
+        <p:txBody>
+          <a:bodyPr wrap="square" lIns="0" rIns="0" tIns="0" bIns="0" anchor="t">
+            <a:spAutoFit/>
+          </a:bodyPr>
+          <a:lstStyle/>
+          <a:p>
+            <a:pPr algn="l">
+              <a:spcAft>
+                <a:spcPts val="0"/>
+              </a:spcAft>
+            </a:pPr>
+            <a:r>
+              <a:rPr sz="1300" b="0" i="0">
+                <a:solidFill>
+                  <a:srgbClr val="1E2528"/>
+                </a:solidFill>
+                <a:latin typeface="Calibri"/>
+              </a:rPr>
+              <a:t>of the Malaba road's truck delay lies within 10 km of the railway the SGR follows; on the other roads, 16% or less.</a:t>
+            </a:r>
+          </a:p>
+        </p:txBody>
+      </p:sp>
+      <p:sp>
+        <p:nvSpPr>
+          <p:cNvPr id="7" name="TextBox 6"/>
+          <p:cNvSpPr txBox="1"/>
+          <p:nvPr/>
+        </p:nvSpPr>
+        <p:spPr>
+          <a:xfrm>
+            <a:off x="6400800" y="3337560"/>
+            <a:ext cx="1463040" cy="640080"/>
+          </a:xfrm>
+          <a:prstGeom prst="rect">
+            <a:avLst/>
+          </a:prstGeom>
+          <a:noFill/>
+        </p:spPr>
+        <p:txBody>
+          <a:bodyPr wrap="square" lIns="0" rIns="0" tIns="0" bIns="0" anchor="t">
+            <a:spAutoFit/>
+          </a:bodyPr>
+          <a:lstStyle/>
+          <a:p>
+            <a:pPr algn="l">
+              <a:spcAft>
+                <a:spcPts val="0"/>
+              </a:spcAft>
+            </a:pPr>
+            <a:r>
+              <a:rPr sz="2600" b="1" i="0">
+                <a:solidFill>
+                  <a:srgbClr val="C4532D"/>
+                </a:solidFill>
+                <a:latin typeface="Cambria"/>
+              </a:rPr>
+              <a:t>17 h</a:t>
+            </a:r>
+          </a:p>
+        </p:txBody>
+      </p:sp>
+      <p:sp>
+        <p:nvSpPr>
+          <p:cNvPr id="8" name="TextBox 7"/>
+          <p:cNvSpPr txBox="1"/>
+          <p:nvPr/>
+        </p:nvSpPr>
+        <p:spPr>
+          <a:xfrm>
+            <a:off x="8001000" y="3383280"/>
+            <a:ext cx="3703320" cy="1188720"/>
+          </a:xfrm>
+          <a:prstGeom prst="rect">
+            <a:avLst/>
+          </a:prstGeom>
+          <a:noFill/>
+        </p:spPr>
+        <p:txBody>
+          <a:bodyPr wrap="square" lIns="0" rIns="0" tIns="0" bIns="0" anchor="t">
+            <a:spAutoFit/>
+          </a:bodyPr>
+          <a:lstStyle/>
+          <a:p>
+            <a:pPr algn="l">
+              <a:spcAft>
+                <a:spcPts val="0"/>
+              </a:spcAft>
+            </a:pPr>
+            <a:r>
+              <a:rPr sz="1300" b="0" i="0">
+                <a:solidFill>
+                  <a:srgbClr val="1E2528"/>
+                </a:solidFill>
+                <a:latin typeface="Calibri"/>
+              </a:rPr>
+              <a:t>door to door by rail for domestic freight on the eastern line, against about 5 h by truck: terminals, not line-haul, set the time.</a:t>
+            </a:r>
+          </a:p>
+        </p:txBody>
+      </p:sp>
+      <p:sp>
+        <p:nvSpPr>
+          <p:cNvPr id="9" name="TextBox 8"/>
+          <p:cNvSpPr txBox="1"/>
+          <p:nvPr/>
+        </p:nvSpPr>
+        <p:spPr>
+          <a:xfrm>
+            <a:off x="6400800" y="4663440"/>
+            <a:ext cx="1463040" cy="640080"/>
+          </a:xfrm>
+          <a:prstGeom prst="rect">
+            <a:avLst/>
+          </a:prstGeom>
+          <a:noFill/>
+        </p:spPr>
+        <p:txBody>
+          <a:bodyPr wrap="square" lIns="0" rIns="0" tIns="0" bIns="0" anchor="t">
+            <a:spAutoFit/>
+          </a:bodyPr>
+          <a:lstStyle/>
+          <a:p>
+            <a:pPr algn="l">
+              <a:spcAft>
+                <a:spcPts val="0"/>
+              </a:spcAft>
+            </a:pPr>
+            <a:r>
+              <a:rPr sz="2600" b="1" i="0">
+                <a:solidFill>
+                  <a:srgbClr val="C4532D"/>
+                </a:solidFill>
+                <a:latin typeface="Cambria"/>
+              </a:rPr>
+              <a:t>0.03</a:t>
+            </a:r>
+          </a:p>
+        </p:txBody>
+      </p:sp>
+      <p:sp>
+        <p:nvSpPr>
+          <p:cNvPr id="10" name="TextBox 9"/>
+          <p:cNvSpPr txBox="1"/>
+          <p:nvPr/>
+        </p:nvSpPr>
+        <p:spPr>
+          <a:xfrm>
+            <a:off x="8001000" y="4709160"/>
+            <a:ext cx="3703320" cy="1188720"/>
+          </a:xfrm>
+          <a:prstGeom prst="rect">
+            <a:avLst/>
+          </a:prstGeom>
+          <a:noFill/>
+        </p:spPr>
+        <p:txBody>
+          <a:bodyPr wrap="square" lIns="0" rIns="0" tIns="0" bIns="0" anchor="t">
+            <a:spAutoFit/>
+          </a:bodyPr>
+          <a:lstStyle/>
+          <a:p>
+            <a:pPr algn="l">
+              <a:spcAft>
+                <a:spcPts val="0"/>
+              </a:spcAft>
+            </a:pPr>
+            <a:r>
+              <a:rPr sz="1300" b="0" i="0">
+                <a:solidFill>
+                  <a:srgbClr val="1E2528"/>
+                </a:solidFill>
+                <a:latin typeface="Calibri"/>
+              </a:rPr>
+              <a:t>benefit/cost for the eastern SGR even with through traffic from Mombasa (up to 0.15); about 93 Mt a year needed to break even.</a:t>
+            </a:r>
+          </a:p>
+        </p:txBody>
+      </p:sp>
+      <p:sp>
+        <p:nvSpPr>
+          <p:cNvPr id="11" name="TextBox 10"/>
+          <p:cNvSpPr txBox="1"/>
+          <p:nvPr/>
+        </p:nvSpPr>
+        <p:spPr>
+          <a:xfrm>
+            <a:off x="6400800" y="5897880"/>
+            <a:ext cx="5303520" cy="548640"/>
+          </a:xfrm>
+          <a:prstGeom prst="rect">
+            <a:avLst/>
+          </a:prstGeom>
+          <a:noFill/>
+        </p:spPr>
+        <p:txBody>
+          <a:bodyPr wrap="square" lIns="0" rIns="0" tIns="0" bIns="0" anchor="t">
+            <a:spAutoFit/>
+          </a:bodyPr>
+          <a:lstStyle/>
+          <a:p>
+            <a:pPr algn="l">
+              <a:spcAft>
+                <a:spcPts val="0"/>
+              </a:spcAft>
+            </a:pPr>
+            <a:r>
+              <a:rPr sz="1200" b="0" i="1">
+                <a:solidFill>
+                  <a:srgbClr val="5B6770"/>
+                </a:solidFill>
+                <a:latin typeface="Calibri"/>
+              </a:rPr>
+              <a:t>Counting only freight costs and CO2 from today's Ugandan traffic: transit growth, passengers and congestion relief carry the case.</a:t>
+            </a:r>
+          </a:p>
+        </p:txBody>
+      </p:sp>
+    </p:spTree>
+  </p:cSld>
+  <p:clrMapOvr>
+    <a:masterClrMapping/>
+  </p:clrMapOvr>
+</p:sld>
+</file>
+
+<file path=ppt/slides/slide18.xml><?xml version="1.0" encoding="utf-8"?>
+<p:sld xmlns:a="http://schemas.openxmlformats.org/drawingml/2006/main" xmlns:p="http://schemas.openxmlformats.org/presentationml/2006/main" xmlns:r="http://schemas.openxmlformats.org/officeDocument/2006/relationships">
+  <p:cSld>
+    <p:bg>
+      <p:bgPr>
+        <a:solidFill>
+          <a:srgbClr val="FFFFFF"/>
+        </a:solidFill>
+        <a:effectLst/>
+      </p:bgPr>
+    </p:bg>
+    <p:spTree>
+      <p:nvGrpSpPr>
+        <p:cNvPr id="1" name=""/>
+        <p:cNvGrpSpPr/>
+        <p:nvPr/>
+      </p:nvGrpSpPr>
+      <p:grpSpPr/>
+      <p:sp>
+        <p:nvSpPr>
+          <p:cNvPr id="2" name="TextBox 1"/>
+          <p:cNvSpPr txBox="1"/>
+          <p:nvPr/>
+        </p:nvSpPr>
+        <p:spPr>
+          <a:xfrm>
+            <a:off x="548640" y="411480"/>
+            <a:ext cx="11064240" cy="731520"/>
+          </a:xfrm>
+          <a:prstGeom prst="rect">
+            <a:avLst/>
+          </a:prstGeom>
+          <a:noFill/>
+        </p:spPr>
+        <p:txBody>
+          <a:bodyPr wrap="square" lIns="0" rIns="0" tIns="0" bIns="0" anchor="t">
+            <a:spAutoFit/>
+          </a:bodyPr>
+          <a:lstStyle/>
+          <a:p>
+            <a:pPr algn="l">
+              <a:spcAft>
+                <a:spcPts val="0"/>
+              </a:spcAft>
+            </a:pPr>
+            <a:r>
+              <a:rPr sz="3400" b="1" i="0">
+                <a:solidFill>
+                  <a:srgbClr val="1E2528"/>
+                </a:solidFill>
+                <a:latin typeface="Cambria"/>
+              </a:rPr>
+              <a:t>Discussion</a:t>
+            </a:r>
+          </a:p>
+        </p:txBody>
+      </p:sp>
+      <p:sp>
+        <p:nvSpPr>
+          <p:cNvPr id="3" name="TextBox 2"/>
+          <p:cNvSpPr txBox="1"/>
+          <p:nvPr/>
+        </p:nvSpPr>
+        <p:spPr>
+          <a:xfrm>
+            <a:off x="548640" y="1115568"/>
+            <a:ext cx="11064240" cy="457200"/>
+          </a:xfrm>
+          <a:prstGeom prst="rect">
+            <a:avLst/>
+          </a:prstGeom>
+          <a:noFill/>
+        </p:spPr>
+        <p:txBody>
+          <a:bodyPr wrap="square" lIns="0" rIns="0" tIns="0" bIns="0" anchor="t">
+            <a:spAutoFit/>
+          </a:bodyPr>
+          <a:lstStyle/>
+          <a:p>
+            <a:pPr algn="l">
+              <a:spcAft>
+                <a:spcPts val="0"/>
+              </a:spcAft>
+            </a:pPr>
+            <a:r>
+              <a:rPr sz="1600" b="0" i="0">
+                <a:solidFill>
+                  <a:srgbClr val="5B6770"/>
+                </a:solidFill>
+                <a:latin typeface="Calibri"/>
+              </a:rPr>
+              <a:t>What the results suggest for corridor policy</a:t>
+            </a:r>
+          </a:p>
+        </p:txBody>
+      </p:sp>
+      <p:sp>
+        <p:nvSpPr>
+          <p:cNvPr id="4" name="Rounded Rectangle 3"/>
+          <p:cNvSpPr/>
+          <p:nvPr/>
+        </p:nvSpPr>
+        <p:spPr>
+          <a:xfrm>
+            <a:off x="548640" y="1783080"/>
+            <a:ext cx="5440680" cy="2103120"/>
+          </a:xfrm>
+          <a:prstGeom prst="roundRect">
+            <a:avLst>
+              <a:gd name="adj" fmla="val 6000"/>
+            </a:avLst>
+          </a:prstGeom>
+          <a:solidFill>
+            <a:srgbClr val="EEF2F0"/>
+          </a:solidFill>
+          <a:ln>
+            <a:noFill/>
+          </a:ln>
+          <a:effectLst/>
+        </p:spPr>
+        <p:style>
+          <a:lnRef idx="1">
+            <a:schemeClr val="accent1"/>
+          </a:lnRef>
+          <a:fillRef idx="3">
+            <a:schemeClr val="accent1"/>
+          </a:fillRef>
+          <a:effectRef idx="2">
+            <a:schemeClr val="accent1"/>
+          </a:effectRef>
+          <a:fontRef idx="minor">
+            <a:schemeClr val="lt1"/>
+          </a:fontRef>
+        </p:style>
+        <p:txBody>
+          <a:bodyPr rtlCol="0" anchor="ctr"/>
+          <a:lstStyle/>
+          <a:p>
+            <a:pPr algn="ctr"/>
+          </a:p>
+        </p:txBody>
+      </p:sp>
+      <p:sp>
+        <p:nvSpPr>
+          <p:cNvPr id="5" name="Oval 4"/>
+          <p:cNvSpPr/>
+          <p:nvPr/>
+        </p:nvSpPr>
+        <p:spPr>
+          <a:xfrm>
+            <a:off x="822959" y="2057400"/>
+            <a:ext cx="457200" cy="457200"/>
           </a:xfrm>
           <a:prstGeom prst="ellipse">
             <a:avLst/>
@@ -8384,7 +9181,7 @@
           <a:p>
             <a:pPr algn="ctr"/>
             <a:r>
-              <a:rPr sz="1600" b="1">
+              <a:rPr sz="1500" b="1">
                 <a:solidFill>
                   <a:srgbClr val="FFFFFF"/>
                 </a:solidFill>
@@ -8397,14 +9194,14 @@
       </p:sp>
       <p:sp>
         <p:nvSpPr>
-          <p:cNvPr id="5" name="TextBox 4"/>
+          <p:cNvPr id="6" name="TextBox 5"/>
           <p:cNvSpPr txBox="1"/>
           <p:nvPr/>
         </p:nvSpPr>
         <p:spPr>
           <a:xfrm>
-            <a:off x="1417320" y="3447288"/>
-            <a:ext cx="10058400" cy="502920"/>
+            <a:off x="1463040" y="2084831"/>
+            <a:ext cx="4297680" cy="411480"/>
           </a:xfrm>
           <a:prstGeom prst="rect">
             <a:avLst/>
@@ -8412,7 +9209,7 @@
           <a:noFill/>
         </p:spPr>
         <p:txBody>
-          <a:bodyPr wrap="square" lIns="0" rIns="0" tIns="0" bIns="0" anchor="ctr">
+          <a:bodyPr wrap="square" lIns="0" rIns="0" tIns="0" bIns="0" anchor="t">
             <a:spAutoFit/>
           </a:bodyPr>
           <a:lstStyle/>
@@ -8423,33 +9220,74 @@
               </a:spcAft>
             </a:pPr>
             <a:r>
-              <a:rPr sz="1900" b="0" i="0">
-                <a:solidFill>
-                  <a:srgbClr val="B8C7C4"/>
+              <a:rPr sz="1900" b="1" i="0">
+                <a:solidFill>
+                  <a:srgbClr val="1E2528"/>
+                </a:solidFill>
+                <a:latin typeface="Cambria"/>
+              </a:rPr>
+              <a:t>Settlement is the chronic problem</a:t>
+            </a:r>
+          </a:p>
+        </p:txBody>
+      </p:sp>
+      <p:sp>
+        <p:nvSpPr>
+          <p:cNvPr id="7" name="TextBox 6"/>
+          <p:cNvSpPr txBox="1"/>
+          <p:nvPr/>
+        </p:nvSpPr>
+        <p:spPr>
+          <a:xfrm>
+            <a:off x="1463040" y="2560320"/>
+            <a:ext cx="4297680" cy="1280160"/>
+          </a:xfrm>
+          <a:prstGeom prst="rect">
+            <a:avLst/>
+          </a:prstGeom>
+          <a:noFill/>
+        </p:spPr>
+        <p:txBody>
+          <a:bodyPr wrap="square" lIns="0" rIns="0" tIns="0" bIns="0" anchor="t">
+            <a:spAutoFit/>
+          </a:bodyPr>
+          <a:lstStyle/>
+          <a:p>
+            <a:pPr algn="l">
+              <a:spcAft>
+                <a:spcPts val="0"/>
+              </a:spcAft>
+            </a:pPr>
+            <a:r>
+              <a:rPr sz="1400" b="0" i="0">
+                <a:solidFill>
+                  <a:srgbClr val="5B6770"/>
                 </a:solidFill>
                 <a:latin typeface="Calibri"/>
               </a:rPr>
-              <a:t>Open data alone reproduce trip times within a few percent, outside Kampala.</a:t>
-            </a:r>
-          </a:p>
-        </p:txBody>
-      </p:sp>
-      <p:sp>
-        <p:nvSpPr>
-          <p:cNvPr id="6" name="Oval 5"/>
+              <a:t>Roadside activity costs the most time on three of four roads and is growing fastest where it is newest. Access management, service roads and planned trading centres off the carriageway address the cause, not the symptom.</a:t>
+            </a:r>
+          </a:p>
+        </p:txBody>
+      </p:sp>
+      <p:sp>
+        <p:nvSpPr>
+          <p:cNvPr id="8" name="Rounded Rectangle 7"/>
           <p:cNvSpPr/>
           <p:nvPr/>
         </p:nvSpPr>
         <p:spPr>
           <a:xfrm>
-            <a:off x="640080" y="4206240"/>
-            <a:ext cx="502920" cy="502920"/>
-          </a:xfrm>
-          <a:prstGeom prst="ellipse">
-            <a:avLst/>
+            <a:off x="6172200" y="1783080"/>
+            <a:ext cx="5440680" cy="2103120"/>
+          </a:xfrm>
+          <a:prstGeom prst="roundRect">
+            <a:avLst>
+              <a:gd name="adj" fmla="val 6000"/>
+            </a:avLst>
           </a:prstGeom>
           <a:solidFill>
-            <a:srgbClr val="C4532D"/>
+            <a:srgbClr val="EEF2F0"/>
           </a:solidFill>
           <a:ln>
             <a:noFill/>
@@ -8471,77 +9309,29 @@
           </a:fontRef>
         </p:style>
         <p:txBody>
-          <a:bodyPr rtlCol="0" anchor="ctr" lIns="0" rIns="0" tIns="0" bIns="0"/>
+          <a:bodyPr rtlCol="0" anchor="ctr"/>
           <a:lstStyle/>
           <a:p>
             <a:pPr algn="ctr"/>
-            <a:r>
-              <a:rPr sz="1600" b="1">
-                <a:solidFill>
-                  <a:srgbClr val="FFFFFF"/>
-                </a:solidFill>
-                <a:latin typeface="Calibri"/>
-              </a:rPr>
-              <a:t>2</a:t>
-            </a:r>
-          </a:p>
-        </p:txBody>
-      </p:sp>
-      <p:sp>
-        <p:nvSpPr>
-          <p:cNvPr id="7" name="TextBox 6"/>
-          <p:cNvSpPr txBox="1"/>
-          <p:nvPr/>
-        </p:nvSpPr>
-        <p:spPr>
-          <a:xfrm>
-            <a:off x="1417320" y="4224527"/>
-            <a:ext cx="10058400" cy="502920"/>
-          </a:xfrm>
-          <a:prstGeom prst="rect">
-            <a:avLst/>
-          </a:prstGeom>
-          <a:noFill/>
-        </p:spPr>
-        <p:txBody>
-          <a:bodyPr wrap="square" lIns="0" rIns="0" tIns="0" bIns="0" anchor="ctr">
-            <a:spAutoFit/>
-          </a:bodyPr>
-          <a:lstStyle/>
-          <a:p>
-            <a:pPr algn="l">
-              <a:spcAft>
-                <a:spcPts val="0"/>
-              </a:spcAft>
-            </a:pPr>
-            <a:r>
-              <a:rPr sz="1900" b="0" i="0">
-                <a:solidFill>
-                  <a:srgbClr val="B8C7C4"/>
-                </a:solidFill>
-                <a:latin typeface="Calibri"/>
-              </a:rPr>
-              <a:t>Roadside activity is the largest steady delay; weighbridges are the worst single points.</a:t>
-            </a:r>
-          </a:p>
-        </p:txBody>
-      </p:sp>
-      <p:sp>
-        <p:nvSpPr>
-          <p:cNvPr id="8" name="Oval 7"/>
+          </a:p>
+        </p:txBody>
+      </p:sp>
+      <p:sp>
+        <p:nvSpPr>
+          <p:cNvPr id="9" name="Oval 8"/>
           <p:cNvSpPr/>
           <p:nvPr/>
         </p:nvSpPr>
         <p:spPr>
           <a:xfrm>
-            <a:off x="640080" y="4983479"/>
-            <a:ext cx="502920" cy="502920"/>
+            <a:off x="6446520" y="2057400"/>
+            <a:ext cx="457200" cy="457200"/>
           </a:xfrm>
           <a:prstGeom prst="ellipse">
             <a:avLst/>
           </a:prstGeom>
           <a:solidFill>
-            <a:srgbClr val="C4532D"/>
+            <a:srgbClr val="17252A"/>
           </a:solidFill>
           <a:ln>
             <a:noFill/>
@@ -8568,52 +9358,13 @@
           <a:p>
             <a:pPr algn="ctr"/>
             <a:r>
-              <a:rPr sz="1600" b="1">
+              <a:rPr sz="1500" b="1">
                 <a:solidFill>
                   <a:srgbClr val="FFFFFF"/>
                 </a:solidFill>
                 <a:latin typeface="Calibri"/>
               </a:rPr>
-              <a:t>3</a:t>
-            </a:r>
-          </a:p>
-        </p:txBody>
-      </p:sp>
-      <p:sp>
-        <p:nvSpPr>
-          <p:cNvPr id="9" name="TextBox 8"/>
-          <p:cNvSpPr txBox="1"/>
-          <p:nvPr/>
-        </p:nvSpPr>
-        <p:spPr>
-          <a:xfrm>
-            <a:off x="1417320" y="5001767"/>
-            <a:ext cx="10058400" cy="502920"/>
-          </a:xfrm>
-          <a:prstGeom prst="rect">
-            <a:avLst/>
-          </a:prstGeom>
-          <a:noFill/>
-        </p:spPr>
-        <p:txBody>
-          <a:bodyPr wrap="square" lIns="0" rIns="0" tIns="0" bIns="0" anchor="ctr">
-            <a:spAutoFit/>
-          </a:bodyPr>
-          <a:lstStyle/>
-          <a:p>
-            <a:pPr algn="l">
-              <a:spcAft>
-                <a:spcPts val="0"/>
-              </a:spcAft>
-            </a:pPr>
-            <a:r>
-              <a:rPr sz="1900" b="0" i="0">
-                <a:solidFill>
-                  <a:srgbClr val="B8C7C4"/>
-                </a:solidFill>
-                <a:latin typeface="Calibri"/>
-              </a:rPr>
-              <a:t>Roadside building grew 27–68% in 2000–2020, mostly between towns.</a:t>
+              <a:t>2</a:t>
             </a:r>
           </a:p>
         </p:txBody>
@@ -8626,8 +9377,8 @@
         </p:nvSpPr>
         <p:spPr>
           <a:xfrm>
-            <a:off x="640080" y="5989320"/>
-            <a:ext cx="10881360" cy="365760"/>
+            <a:off x="7086600" y="2084831"/>
+            <a:ext cx="4297680" cy="411480"/>
           </a:xfrm>
           <a:prstGeom prst="rect">
             <a:avLst/>
@@ -8646,13 +9397,1132 @@
               </a:spcAft>
             </a:pPr>
             <a:r>
-              <a:rPr sz="1300" b="0" i="0">
+              <a:rPr sz="1900" b="1" i="0">
+                <a:solidFill>
+                  <a:srgbClr val="1E2528"/>
+                </a:solidFill>
+                <a:latin typeface="Cambria"/>
+              </a:rPr>
+              <a:t>Controls are the cheap wins</a:t>
+            </a:r>
+          </a:p>
+        </p:txBody>
+      </p:sp>
+      <p:sp>
+        <p:nvSpPr>
+          <p:cNvPr id="11" name="TextBox 10"/>
+          <p:cNvSpPr txBox="1"/>
+          <p:nvPr/>
+        </p:nvSpPr>
+        <p:spPr>
+          <a:xfrm>
+            <a:off x="7086600" y="2560320"/>
+            <a:ext cx="4297680" cy="1280160"/>
+          </a:xfrm>
+          <a:prstGeom prst="rect">
+            <a:avLst/>
+          </a:prstGeom>
+          <a:noFill/>
+        </p:spPr>
+        <p:txBody>
+          <a:bodyPr wrap="square" lIns="0" rIns="0" tIns="0" bIns="0" anchor="t">
+            <a:spAutoFit/>
+          </a:bodyPr>
+          <a:lstStyle/>
+          <a:p>
+            <a:pPr algn="l">
+              <a:spcAft>
+                <a:spcPts val="0"/>
+              </a:spcAft>
+            </a:pPr>
+            <a:r>
+              <a:rPr sz="1400" b="0" i="0">
+                <a:solidFill>
+                  <a:srgbClr val="5B6770"/>
+                </a:solidFill>
+                <a:latin typeface="Calibri"/>
+              </a:rPr>
+              <a:t>Weighbridges and police posts produce the worst single stretches. Weigh-in-motion screening saves 8–16 truck minutes per trip and ending police stops 4–15; bypasses save 2–5 in light traffic.</a:t>
+            </a:r>
+          </a:p>
+        </p:txBody>
+      </p:sp>
+      <p:sp>
+        <p:nvSpPr>
+          <p:cNvPr id="12" name="Rounded Rectangle 11"/>
+          <p:cNvSpPr/>
+          <p:nvPr/>
+        </p:nvSpPr>
+        <p:spPr>
+          <a:xfrm>
+            <a:off x="548640" y="4069080"/>
+            <a:ext cx="5440680" cy="2103120"/>
+          </a:xfrm>
+          <a:prstGeom prst="roundRect">
+            <a:avLst>
+              <a:gd name="adj" fmla="val 6000"/>
+            </a:avLst>
+          </a:prstGeom>
+          <a:solidFill>
+            <a:srgbClr val="EEF2F0"/>
+          </a:solidFill>
+          <a:ln>
+            <a:noFill/>
+          </a:ln>
+          <a:effectLst/>
+        </p:spPr>
+        <p:style>
+          <a:lnRef idx="1">
+            <a:schemeClr val="accent1"/>
+          </a:lnRef>
+          <a:fillRef idx="3">
+            <a:schemeClr val="accent1"/>
+          </a:fillRef>
+          <a:effectRef idx="2">
+            <a:schemeClr val="accent1"/>
+          </a:effectRef>
+          <a:fontRef idx="minor">
+            <a:schemeClr val="lt1"/>
+          </a:fontRef>
+        </p:style>
+        <p:txBody>
+          <a:bodyPr rtlCol="0" anchor="ctr"/>
+          <a:lstStyle/>
+          <a:p>
+            <a:pPr algn="ctr"/>
+          </a:p>
+        </p:txBody>
+      </p:sp>
+      <p:sp>
+        <p:nvSpPr>
+          <p:cNvPr id="13" name="Oval 12"/>
+          <p:cNvSpPr/>
+          <p:nvPr/>
+        </p:nvSpPr>
+        <p:spPr>
+          <a:xfrm>
+            <a:off x="822959" y="4343400"/>
+            <a:ext cx="457200" cy="457200"/>
+          </a:xfrm>
+          <a:prstGeom prst="ellipse">
+            <a:avLst/>
+          </a:prstGeom>
+          <a:solidFill>
+            <a:srgbClr val="3A7D5C"/>
+          </a:solidFill>
+          <a:ln>
+            <a:noFill/>
+          </a:ln>
+          <a:effectLst/>
+        </p:spPr>
+        <p:style>
+          <a:lnRef idx="1">
+            <a:schemeClr val="accent1"/>
+          </a:lnRef>
+          <a:fillRef idx="3">
+            <a:schemeClr val="accent1"/>
+          </a:fillRef>
+          <a:effectRef idx="2">
+            <a:schemeClr val="accent1"/>
+          </a:effectRef>
+          <a:fontRef idx="minor">
+            <a:schemeClr val="lt1"/>
+          </a:fontRef>
+        </p:style>
+        <p:txBody>
+          <a:bodyPr rtlCol="0" anchor="ctr" lIns="0" rIns="0" tIns="0" bIns="0"/>
+          <a:lstStyle/>
+          <a:p>
+            <a:pPr algn="ctr"/>
+            <a:r>
+              <a:rPr sz="1500" b="1">
+                <a:solidFill>
+                  <a:srgbClr val="FFFFFF"/>
+                </a:solidFill>
+                <a:latin typeface="Calibri"/>
+              </a:rPr>
+              <a:t>3</a:t>
+            </a:r>
+          </a:p>
+        </p:txBody>
+      </p:sp>
+      <p:sp>
+        <p:nvSpPr>
+          <p:cNvPr id="14" name="TextBox 13"/>
+          <p:cNvSpPr txBox="1"/>
+          <p:nvPr/>
+        </p:nvSpPr>
+        <p:spPr>
+          <a:xfrm>
+            <a:off x="1463040" y="4370832"/>
+            <a:ext cx="4297680" cy="411480"/>
+          </a:xfrm>
+          <a:prstGeom prst="rect">
+            <a:avLst/>
+          </a:prstGeom>
+          <a:noFill/>
+        </p:spPr>
+        <p:txBody>
+          <a:bodyPr wrap="square" lIns="0" rIns="0" tIns="0" bIns="0" anchor="t">
+            <a:spAutoFit/>
+          </a:bodyPr>
+          <a:lstStyle/>
+          <a:p>
+            <a:pPr algn="l">
+              <a:spcAft>
+                <a:spcPts val="0"/>
+              </a:spcAft>
+            </a:pPr>
+            <a:r>
+              <a:rPr sz="1900" b="1" i="0">
+                <a:solidFill>
+                  <a:srgbClr val="1E2528"/>
+                </a:solidFill>
+                <a:latin typeface="Cambria"/>
+              </a:rPr>
+              <a:t>Kampala's problem is congestion</a:t>
+            </a:r>
+          </a:p>
+        </p:txBody>
+      </p:sp>
+      <p:sp>
+        <p:nvSpPr>
+          <p:cNvPr id="15" name="TextBox 14"/>
+          <p:cNvSpPr txBox="1"/>
+          <p:nvPr/>
+        </p:nvSpPr>
+        <p:spPr>
+          <a:xfrm>
+            <a:off x="1463040" y="4846320"/>
+            <a:ext cx="4297680" cy="1280160"/>
+          </a:xfrm>
+          <a:prstGeom prst="rect">
+            <a:avLst/>
+          </a:prstGeom>
+          <a:noFill/>
+        </p:spPr>
+        <p:txBody>
+          <a:bodyPr wrap="square" lIns="0" rIns="0" tIns="0" bIns="0" anchor="t">
+            <a:spAutoFit/>
+          </a:bodyPr>
+          <a:lstStyle/>
+          <a:p>
+            <a:pPr algn="l">
+              <a:spcAft>
+                <a:spcPts val="0"/>
+              </a:spcAft>
+            </a:pPr>
+            <a:r>
+              <a:rPr sz="1400" b="0" i="0">
+                <a:solidFill>
+                  <a:srgbClr val="5B6770"/>
+                </a:solidFill>
+                <a:latin typeface="Calibri"/>
+              </a:rPr>
+              <a:t>The gap between modelled and observed Kampala–Jinja trips is congestion. The expressway and urban traffic management matter there more than roadside fixes.</a:t>
+            </a:r>
+          </a:p>
+        </p:txBody>
+      </p:sp>
+      <p:sp>
+        <p:nvSpPr>
+          <p:cNvPr id="16" name="Rounded Rectangle 15"/>
+          <p:cNvSpPr/>
+          <p:nvPr/>
+        </p:nvSpPr>
+        <p:spPr>
+          <a:xfrm>
+            <a:off x="6172200" y="4069080"/>
+            <a:ext cx="5440680" cy="2103120"/>
+          </a:xfrm>
+          <a:prstGeom prst="roundRect">
+            <a:avLst>
+              <a:gd name="adj" fmla="val 6000"/>
+            </a:avLst>
+          </a:prstGeom>
+          <a:solidFill>
+            <a:srgbClr val="EEF2F0"/>
+          </a:solidFill>
+          <a:ln>
+            <a:noFill/>
+          </a:ln>
+          <a:effectLst/>
+        </p:spPr>
+        <p:style>
+          <a:lnRef idx="1">
+            <a:schemeClr val="accent1"/>
+          </a:lnRef>
+          <a:fillRef idx="3">
+            <a:schemeClr val="accent1"/>
+          </a:fillRef>
+          <a:effectRef idx="2">
+            <a:schemeClr val="accent1"/>
+          </a:effectRef>
+          <a:fontRef idx="minor">
+            <a:schemeClr val="lt1"/>
+          </a:fontRef>
+        </p:style>
+        <p:txBody>
+          <a:bodyPr rtlCol="0" anchor="ctr"/>
+          <a:lstStyle/>
+          <a:p>
+            <a:pPr algn="ctr"/>
+          </a:p>
+        </p:txBody>
+      </p:sp>
+      <p:sp>
+        <p:nvSpPr>
+          <p:cNvPr id="17" name="Oval 16"/>
+          <p:cNvSpPr/>
+          <p:nvPr/>
+        </p:nvSpPr>
+        <p:spPr>
+          <a:xfrm>
+            <a:off x="6446520" y="4343400"/>
+            <a:ext cx="457200" cy="457200"/>
+          </a:xfrm>
+          <a:prstGeom prst="ellipse">
+            <a:avLst/>
+          </a:prstGeom>
+          <a:solidFill>
+            <a:srgbClr val="D9A441"/>
+          </a:solidFill>
+          <a:ln>
+            <a:noFill/>
+          </a:ln>
+          <a:effectLst/>
+        </p:spPr>
+        <p:style>
+          <a:lnRef idx="1">
+            <a:schemeClr val="accent1"/>
+          </a:lnRef>
+          <a:fillRef idx="3">
+            <a:schemeClr val="accent1"/>
+          </a:fillRef>
+          <a:effectRef idx="2">
+            <a:schemeClr val="accent1"/>
+          </a:effectRef>
+          <a:fontRef idx="minor">
+            <a:schemeClr val="lt1"/>
+          </a:fontRef>
+        </p:style>
+        <p:txBody>
+          <a:bodyPr rtlCol="0" anchor="ctr" lIns="0" rIns="0" tIns="0" bIns="0"/>
+          <a:lstStyle/>
+          <a:p>
+            <a:pPr algn="ctr"/>
+            <a:r>
+              <a:rPr sz="1500" b="1">
+                <a:solidFill>
+                  <a:srgbClr val="FFFFFF"/>
+                </a:solidFill>
+                <a:latin typeface="Calibri"/>
+              </a:rPr>
+              <a:t>4</a:t>
+            </a:r>
+          </a:p>
+        </p:txBody>
+      </p:sp>
+      <p:sp>
+        <p:nvSpPr>
+          <p:cNvPr id="18" name="TextBox 17"/>
+          <p:cNvSpPr txBox="1"/>
+          <p:nvPr/>
+        </p:nvSpPr>
+        <p:spPr>
+          <a:xfrm>
+            <a:off x="7086600" y="4370832"/>
+            <a:ext cx="4297680" cy="411480"/>
+          </a:xfrm>
+          <a:prstGeom prst="rect">
+            <a:avLst/>
+          </a:prstGeom>
+          <a:noFill/>
+        </p:spPr>
+        <p:txBody>
+          <a:bodyPr wrap="square" lIns="0" rIns="0" tIns="0" bIns="0" anchor="t">
+            <a:spAutoFit/>
+          </a:bodyPr>
+          <a:lstStyle/>
+          <a:p>
+            <a:pPr algn="l">
+              <a:spcAft>
+                <a:spcPts val="0"/>
+              </a:spcAft>
+            </a:pPr>
+            <a:r>
+              <a:rPr sz="1900" b="1" i="0">
+                <a:solidFill>
+                  <a:srgbClr val="1E2528"/>
+                </a:solidFill>
+                <a:latin typeface="Cambria"/>
+              </a:rPr>
+              <a:t>Growth outpaces the road</a:t>
+            </a:r>
+          </a:p>
+        </p:txBody>
+      </p:sp>
+      <p:sp>
+        <p:nvSpPr>
+          <p:cNvPr id="19" name="TextBox 18"/>
+          <p:cNvSpPr txBox="1"/>
+          <p:nvPr/>
+        </p:nvSpPr>
+        <p:spPr>
+          <a:xfrm>
+            <a:off x="7086600" y="4846320"/>
+            <a:ext cx="4297680" cy="1280160"/>
+          </a:xfrm>
+          <a:prstGeom prst="rect">
+            <a:avLst/>
+          </a:prstGeom>
+          <a:noFill/>
+        </p:spPr>
+        <p:txBody>
+          <a:bodyPr wrap="square" lIns="0" rIns="0" tIns="0" bIns="0" anchor="t">
+            <a:spAutoFit/>
+          </a:bodyPr>
+          <a:lstStyle/>
+          <a:p>
+            <a:pPr algn="l">
+              <a:spcAft>
+                <a:spcPts val="0"/>
+              </a:spcAft>
+            </a:pPr>
+            <a:r>
+              <a:rPr sz="1400" b="0" i="0">
+                <a:solidFill>
+                  <a:srgbClr val="5B6770"/>
+                </a:solidFill>
+                <a:latin typeface="Calibri"/>
+              </a:rPr>
+              <a:t>At 27–68% in 20 years, today's open road is tomorrow's settlement. Land-use control along the corridors is time-critical.</a:t>
+            </a:r>
+          </a:p>
+        </p:txBody>
+      </p:sp>
+    </p:spTree>
+  </p:cSld>
+  <p:clrMapOvr>
+    <a:masterClrMapping/>
+  </p:clrMapOvr>
+</p:sld>
+</file>
+
+<file path=ppt/slides/slide19.xml><?xml version="1.0" encoding="utf-8"?>
+<p:sld xmlns:a="http://schemas.openxmlformats.org/drawingml/2006/main" xmlns:p="http://schemas.openxmlformats.org/presentationml/2006/main" xmlns:r="http://schemas.openxmlformats.org/officeDocument/2006/relationships">
+  <p:cSld>
+    <p:bg>
+      <p:bgPr>
+        <a:solidFill>
+          <a:srgbClr val="FFFFFF"/>
+        </a:solidFill>
+        <a:effectLst/>
+      </p:bgPr>
+    </p:bg>
+    <p:spTree>
+      <p:nvGrpSpPr>
+        <p:cNvPr id="1" name=""/>
+        <p:cNvGrpSpPr/>
+        <p:nvPr/>
+      </p:nvGrpSpPr>
+      <p:grpSpPr/>
+      <p:sp>
+        <p:nvSpPr>
+          <p:cNvPr id="2" name="TextBox 1"/>
+          <p:cNvSpPr txBox="1"/>
+          <p:nvPr/>
+        </p:nvSpPr>
+        <p:spPr>
+          <a:xfrm>
+            <a:off x="548640" y="411480"/>
+            <a:ext cx="11064240" cy="731520"/>
+          </a:xfrm>
+          <a:prstGeom prst="rect">
+            <a:avLst/>
+          </a:prstGeom>
+          <a:noFill/>
+        </p:spPr>
+        <p:txBody>
+          <a:bodyPr wrap="square" lIns="0" rIns="0" tIns="0" bIns="0" anchor="t">
+            <a:spAutoFit/>
+          </a:bodyPr>
+          <a:lstStyle/>
+          <a:p>
+            <a:pPr algn="l">
+              <a:spcAft>
+                <a:spcPts val="0"/>
+              </a:spcAft>
+            </a:pPr>
+            <a:r>
+              <a:rPr sz="3400" b="1" i="0">
+                <a:solidFill>
+                  <a:srgbClr val="1E2528"/>
+                </a:solidFill>
+                <a:latin typeface="Cambria"/>
+              </a:rPr>
+              <a:t>Limitations and next steps</a:t>
+            </a:r>
+          </a:p>
+        </p:txBody>
+      </p:sp>
+      <p:sp>
+        <p:nvSpPr>
+          <p:cNvPr id="3" name="Rounded Rectangle 2"/>
+          <p:cNvSpPr/>
+          <p:nvPr/>
+        </p:nvSpPr>
+        <p:spPr>
+          <a:xfrm>
+            <a:off x="548640" y="1417320"/>
+            <a:ext cx="6675120" cy="1051560"/>
+          </a:xfrm>
+          <a:prstGeom prst="roundRect">
+            <a:avLst>
+              <a:gd name="adj" fmla="val 6000"/>
+            </a:avLst>
+          </a:prstGeom>
+          <a:solidFill>
+            <a:srgbClr val="EEF2F0"/>
+          </a:solidFill>
+          <a:ln>
+            <a:noFill/>
+          </a:ln>
+          <a:effectLst/>
+        </p:spPr>
+        <p:style>
+          <a:lnRef idx="1">
+            <a:schemeClr val="accent1"/>
+          </a:lnRef>
+          <a:fillRef idx="3">
+            <a:schemeClr val="accent1"/>
+          </a:fillRef>
+          <a:effectRef idx="2">
+            <a:schemeClr val="accent1"/>
+          </a:effectRef>
+          <a:fontRef idx="minor">
+            <a:schemeClr val="lt1"/>
+          </a:fontRef>
+        </p:style>
+        <p:txBody>
+          <a:bodyPr rtlCol="0" anchor="ctr"/>
+          <a:lstStyle/>
+          <a:p>
+            <a:pPr algn="ctr"/>
+          </a:p>
+        </p:txBody>
+      </p:sp>
+      <p:sp>
+        <p:nvSpPr>
+          <p:cNvPr id="4" name="TextBox 3"/>
+          <p:cNvSpPr txBox="1"/>
+          <p:nvPr/>
+        </p:nvSpPr>
+        <p:spPr>
+          <a:xfrm>
+            <a:off x="822960" y="1554480"/>
+            <a:ext cx="6217920" cy="365760"/>
+          </a:xfrm>
+          <a:prstGeom prst="rect">
+            <a:avLst/>
+          </a:prstGeom>
+          <a:noFill/>
+        </p:spPr>
+        <p:txBody>
+          <a:bodyPr wrap="square" lIns="0" rIns="0" tIns="0" bIns="0" anchor="t">
+            <a:spAutoFit/>
+          </a:bodyPr>
+          <a:lstStyle/>
+          <a:p>
+            <a:pPr algn="l">
+              <a:spcAft>
+                <a:spcPts val="0"/>
+              </a:spcAft>
+            </a:pPr>
+            <a:r>
+              <a:rPr sz="1700" b="1" i="0">
+                <a:solidFill>
+                  <a:srgbClr val="1E2528"/>
+                </a:solidFill>
+                <a:latin typeface="Calibri"/>
+              </a:rPr>
+              <a:t>Congestion is not modelled</a:t>
+            </a:r>
+          </a:p>
+        </p:txBody>
+      </p:sp>
+      <p:sp>
+        <p:nvSpPr>
+          <p:cNvPr id="5" name="TextBox 4"/>
+          <p:cNvSpPr txBox="1"/>
+          <p:nvPr/>
+        </p:nvSpPr>
+        <p:spPr>
+          <a:xfrm>
+            <a:off x="822960" y="1920240"/>
+            <a:ext cx="6217920" cy="502920"/>
+          </a:xfrm>
+          <a:prstGeom prst="rect">
+            <a:avLst/>
+          </a:prstGeom>
+          <a:noFill/>
+        </p:spPr>
+        <p:txBody>
+          <a:bodyPr wrap="square" lIns="0" rIns="0" tIns="0" bIns="0" anchor="t">
+            <a:spAutoFit/>
+          </a:bodyPr>
+          <a:lstStyle/>
+          <a:p>
+            <a:pPr algn="l">
+              <a:spcAft>
+                <a:spcPts val="0"/>
+              </a:spcAft>
+            </a:pPr>
+            <a:r>
+              <a:rPr sz="1400" b="0" i="0">
+                <a:solidFill>
+                  <a:srgbClr val="5B6770"/>
+                </a:solidFill>
+                <a:latin typeface="Calibri"/>
+              </a:rPr>
+              <a:t>Results describe light traffic; peak-hour delay near Kampala is larger.</a:t>
+            </a:r>
+          </a:p>
+        </p:txBody>
+      </p:sp>
+      <p:sp>
+        <p:nvSpPr>
+          <p:cNvPr id="6" name="Rounded Rectangle 5"/>
+          <p:cNvSpPr/>
+          <p:nvPr/>
+        </p:nvSpPr>
+        <p:spPr>
+          <a:xfrm>
+            <a:off x="548640" y="2606040"/>
+            <a:ext cx="6675120" cy="1051560"/>
+          </a:xfrm>
+          <a:prstGeom prst="roundRect">
+            <a:avLst>
+              <a:gd name="adj" fmla="val 6000"/>
+            </a:avLst>
+          </a:prstGeom>
+          <a:solidFill>
+            <a:srgbClr val="EEF2F0"/>
+          </a:solidFill>
+          <a:ln>
+            <a:noFill/>
+          </a:ln>
+          <a:effectLst/>
+        </p:spPr>
+        <p:style>
+          <a:lnRef idx="1">
+            <a:schemeClr val="accent1"/>
+          </a:lnRef>
+          <a:fillRef idx="3">
+            <a:schemeClr val="accent1"/>
+          </a:fillRef>
+          <a:effectRef idx="2">
+            <a:schemeClr val="accent1"/>
+          </a:effectRef>
+          <a:fontRef idx="minor">
+            <a:schemeClr val="lt1"/>
+          </a:fontRef>
+        </p:style>
+        <p:txBody>
+          <a:bodyPr rtlCol="0" anchor="ctr"/>
+          <a:lstStyle/>
+          <a:p>
+            <a:pPr algn="ctr"/>
+          </a:p>
+        </p:txBody>
+      </p:sp>
+      <p:sp>
+        <p:nvSpPr>
+          <p:cNvPr id="7" name="TextBox 6"/>
+          <p:cNvSpPr txBox="1"/>
+          <p:nvPr/>
+        </p:nvSpPr>
+        <p:spPr>
+          <a:xfrm>
+            <a:off x="822960" y="2743200"/>
+            <a:ext cx="6217920" cy="365760"/>
+          </a:xfrm>
+          <a:prstGeom prst="rect">
+            <a:avLst/>
+          </a:prstGeom>
+          <a:noFill/>
+        </p:spPr>
+        <p:txBody>
+          <a:bodyPr wrap="square" lIns="0" rIns="0" tIns="0" bIns="0" anchor="t">
+            <a:spAutoFit/>
+          </a:bodyPr>
+          <a:lstStyle/>
+          <a:p>
+            <a:pPr algn="l">
+              <a:spcAft>
+                <a:spcPts val="0"/>
+              </a:spcAft>
+            </a:pPr>
+            <a:r>
+              <a:rPr sz="1700" b="1" i="0">
+                <a:solidFill>
+                  <a:srgbClr val="1E2528"/>
+                </a:solidFill>
+                <a:latin typeface="Calibri"/>
+              </a:rPr>
+              <a:t>Speed humps are under-mapped</a:t>
+            </a:r>
+          </a:p>
+        </p:txBody>
+      </p:sp>
+      <p:sp>
+        <p:nvSpPr>
+          <p:cNvPr id="8" name="TextBox 7"/>
+          <p:cNvSpPr txBox="1"/>
+          <p:nvPr/>
+        </p:nvSpPr>
+        <p:spPr>
+          <a:xfrm>
+            <a:off x="822960" y="3108960"/>
+            <a:ext cx="6217920" cy="502920"/>
+          </a:xfrm>
+          <a:prstGeom prst="rect">
+            <a:avLst/>
+          </a:prstGeom>
+          <a:noFill/>
+        </p:spPr>
+        <p:txBody>
+          <a:bodyPr wrap="square" lIns="0" rIns="0" tIns="0" bIns="0" anchor="t">
+            <a:spAutoFit/>
+          </a:bodyPr>
+          <a:lstStyle/>
+          <a:p>
+            <a:pPr algn="l">
+              <a:spcAft>
+                <a:spcPts val="0"/>
+              </a:spcAft>
+            </a:pPr>
+            <a:r>
+              <a:rPr sz="1400" b="0" i="0">
+                <a:solidFill>
+                  <a:srgbClr val="5B6770"/>
+                </a:solidFill>
+                <a:latin typeface="Calibri"/>
+              </a:rPr>
+              <a:t>OSM holds &lt; 60 on all four roads; one per town piece is assumed (range 0–2).</a:t>
+            </a:r>
+          </a:p>
+        </p:txBody>
+      </p:sp>
+      <p:sp>
+        <p:nvSpPr>
+          <p:cNvPr id="9" name="Rounded Rectangle 8"/>
+          <p:cNvSpPr/>
+          <p:nvPr/>
+        </p:nvSpPr>
+        <p:spPr>
+          <a:xfrm>
+            <a:off x="548640" y="3794760"/>
+            <a:ext cx="6675120" cy="1051560"/>
+          </a:xfrm>
+          <a:prstGeom prst="roundRect">
+            <a:avLst>
+              <a:gd name="adj" fmla="val 6000"/>
+            </a:avLst>
+          </a:prstGeom>
+          <a:solidFill>
+            <a:srgbClr val="EEF2F0"/>
+          </a:solidFill>
+          <a:ln>
+            <a:noFill/>
+          </a:ln>
+          <a:effectLst/>
+        </p:spPr>
+        <p:style>
+          <a:lnRef idx="1">
+            <a:schemeClr val="accent1"/>
+          </a:lnRef>
+          <a:fillRef idx="3">
+            <a:schemeClr val="accent1"/>
+          </a:fillRef>
+          <a:effectRef idx="2">
+            <a:schemeClr val="accent1"/>
+          </a:effectRef>
+          <a:fontRef idx="minor">
+            <a:schemeClr val="lt1"/>
+          </a:fontRef>
+        </p:style>
+        <p:txBody>
+          <a:bodyPr rtlCol="0" anchor="ctr"/>
+          <a:lstStyle/>
+          <a:p>
+            <a:pPr algn="ctr"/>
+          </a:p>
+        </p:txBody>
+      </p:sp>
+      <p:sp>
+        <p:nvSpPr>
+          <p:cNvPr id="10" name="TextBox 9"/>
+          <p:cNvSpPr txBox="1"/>
+          <p:nvPr/>
+        </p:nvSpPr>
+        <p:spPr>
+          <a:xfrm>
+            <a:off x="822960" y="3931920"/>
+            <a:ext cx="6217920" cy="365760"/>
+          </a:xfrm>
+          <a:prstGeom prst="rect">
+            <a:avLst/>
+          </a:prstGeom>
+          <a:noFill/>
+        </p:spPr>
+        <p:txBody>
+          <a:bodyPr wrap="square" lIns="0" rIns="0" tIns="0" bIns="0" anchor="t">
+            <a:spAutoFit/>
+          </a:bodyPr>
+          <a:lstStyle/>
+          <a:p>
+            <a:pPr algn="l">
+              <a:spcAft>
+                <a:spcPts val="0"/>
+              </a:spcAft>
+            </a:pPr>
+            <a:r>
+              <a:rPr sz="1700" b="1" i="0">
+                <a:solidFill>
+                  <a:srgbClr val="1E2528"/>
+                </a:solidFill>
+                <a:latin typeface="Calibri"/>
+              </a:rPr>
+              <a:t>Stop times are assumptions</a:t>
+            </a:r>
+          </a:p>
+        </p:txBody>
+      </p:sp>
+      <p:sp>
+        <p:nvSpPr>
+          <p:cNvPr id="11" name="TextBox 10"/>
+          <p:cNvSpPr txBox="1"/>
+          <p:nvPr/>
+        </p:nvSpPr>
+        <p:spPr>
+          <a:xfrm>
+            <a:off x="822960" y="4297680"/>
+            <a:ext cx="6217920" cy="502920"/>
+          </a:xfrm>
+          <a:prstGeom prst="rect">
+            <a:avLst/>
+          </a:prstGeom>
+          <a:noFill/>
+        </p:spPr>
+        <p:txBody>
+          <a:bodyPr wrap="square" lIns="0" rIns="0" tIns="0" bIns="0" anchor="t">
+            <a:spAutoFit/>
+          </a:bodyPr>
+          <a:lstStyle/>
+          <a:p>
+            <a:pPr algn="l">
+              <a:spcAft>
+                <a:spcPts val="0"/>
+              </a:spcAft>
+            </a:pPr>
+            <a:r>
+              <a:rPr sz="1400" b="0" i="0">
+                <a:solidFill>
+                  <a:srgbClr val="5B6770"/>
+                </a:solidFill>
+                <a:latin typeface="Calibri"/>
+              </a:rPr>
+              <a:t>Police posts 0–5 min, weighbridges ~10 min; rankings on the A1 depend on them.</a:t>
+            </a:r>
+          </a:p>
+        </p:txBody>
+      </p:sp>
+      <p:sp>
+        <p:nvSpPr>
+          <p:cNvPr id="12" name="Rounded Rectangle 11"/>
+          <p:cNvSpPr/>
+          <p:nvPr/>
+        </p:nvSpPr>
+        <p:spPr>
+          <a:xfrm>
+            <a:off x="548640" y="4983480"/>
+            <a:ext cx="6675120" cy="1051560"/>
+          </a:xfrm>
+          <a:prstGeom prst="roundRect">
+            <a:avLst>
+              <a:gd name="adj" fmla="val 6000"/>
+            </a:avLst>
+          </a:prstGeom>
+          <a:solidFill>
+            <a:srgbClr val="EEF2F0"/>
+          </a:solidFill>
+          <a:ln>
+            <a:noFill/>
+          </a:ln>
+          <a:effectLst/>
+        </p:spPr>
+        <p:style>
+          <a:lnRef idx="1">
+            <a:schemeClr val="accent1"/>
+          </a:lnRef>
+          <a:fillRef idx="3">
+            <a:schemeClr val="accent1"/>
+          </a:fillRef>
+          <a:effectRef idx="2">
+            <a:schemeClr val="accent1"/>
+          </a:effectRef>
+          <a:fontRef idx="minor">
+            <a:schemeClr val="lt1"/>
+          </a:fontRef>
+        </p:style>
+        <p:txBody>
+          <a:bodyPr rtlCol="0" anchor="ctr"/>
+          <a:lstStyle/>
+          <a:p>
+            <a:pPr algn="ctr"/>
+          </a:p>
+        </p:txBody>
+      </p:sp>
+      <p:sp>
+        <p:nvSpPr>
+          <p:cNvPr id="13" name="TextBox 12"/>
+          <p:cNvSpPr txBox="1"/>
+          <p:nvPr/>
+        </p:nvSpPr>
+        <p:spPr>
+          <a:xfrm>
+            <a:off x="822960" y="5120640"/>
+            <a:ext cx="6217920" cy="365760"/>
+          </a:xfrm>
+          <a:prstGeom prst="rect">
+            <a:avLst/>
+          </a:prstGeom>
+          <a:noFill/>
+        </p:spPr>
+        <p:txBody>
+          <a:bodyPr wrap="square" lIns="0" rIns="0" tIns="0" bIns="0" anchor="t">
+            <a:spAutoFit/>
+          </a:bodyPr>
+          <a:lstStyle/>
+          <a:p>
+            <a:pPr algn="l">
+              <a:spcAft>
+                <a:spcPts val="0"/>
+              </a:spcAft>
+            </a:pPr>
+            <a:r>
+              <a:rPr sz="1700" b="1" i="0">
+                <a:solidFill>
+                  <a:srgbClr val="1E2528"/>
+                </a:solidFill>
+                <a:latin typeface="Calibri"/>
+              </a:rPr>
+              <a:t>Growth data end in 2020</a:t>
+            </a:r>
+          </a:p>
+        </p:txBody>
+      </p:sp>
+      <p:sp>
+        <p:nvSpPr>
+          <p:cNvPr id="14" name="TextBox 13"/>
+          <p:cNvSpPr txBox="1"/>
+          <p:nvPr/>
+        </p:nvSpPr>
+        <p:spPr>
+          <a:xfrm>
+            <a:off x="822960" y="5486400"/>
+            <a:ext cx="6217920" cy="502920"/>
+          </a:xfrm>
+          <a:prstGeom prst="rect">
+            <a:avLst/>
+          </a:prstGeom>
+          <a:noFill/>
+        </p:spPr>
+        <p:txBody>
+          <a:bodyPr wrap="square" lIns="0" rIns="0" tIns="0" bIns="0" anchor="t">
+            <a:spAutoFit/>
+          </a:bodyPr>
+          <a:lstStyle/>
+          <a:p>
+            <a:pPr algn="l">
+              <a:spcAft>
+                <a:spcPts val="0"/>
+              </a:spcAft>
+            </a:pPr>
+            <a:r>
+              <a:rPr sz="1400" b="0" i="0">
+                <a:solidFill>
+                  <a:srgbClr val="5B6770"/>
+                </a:solidFill>
+                <a:latin typeface="Calibri"/>
+              </a:rPr>
+              <a:t>GHSL's projection to 2026 is slower than the observed trend; Open Buildings Temporal would extend it.</a:t>
+            </a:r>
+          </a:p>
+        </p:txBody>
+      </p:sp>
+      <p:sp>
+        <p:nvSpPr>
+          <p:cNvPr id="15" name="Rounded Rectangle 14"/>
+          <p:cNvSpPr/>
+          <p:nvPr/>
+        </p:nvSpPr>
+        <p:spPr>
+          <a:xfrm>
+            <a:off x="7589520" y="1417320"/>
+            <a:ext cx="4023360" cy="4617720"/>
+          </a:xfrm>
+          <a:prstGeom prst="roundRect">
+            <a:avLst>
+              <a:gd name="adj" fmla="val 6000"/>
+            </a:avLst>
+          </a:prstGeom>
+          <a:solidFill>
+            <a:srgbClr val="17252A"/>
+          </a:solidFill>
+          <a:ln>
+            <a:noFill/>
+          </a:ln>
+          <a:effectLst/>
+        </p:spPr>
+        <p:style>
+          <a:lnRef idx="1">
+            <a:schemeClr val="accent1"/>
+          </a:lnRef>
+          <a:fillRef idx="3">
+            <a:schemeClr val="accent1"/>
+          </a:fillRef>
+          <a:effectRef idx="2">
+            <a:schemeClr val="accent1"/>
+          </a:effectRef>
+          <a:fontRef idx="minor">
+            <a:schemeClr val="lt1"/>
+          </a:fontRef>
+        </p:style>
+        <p:txBody>
+          <a:bodyPr rtlCol="0" anchor="ctr"/>
+          <a:lstStyle/>
+          <a:p>
+            <a:pPr algn="ctr"/>
+          </a:p>
+        </p:txBody>
+      </p:sp>
+      <p:sp>
+        <p:nvSpPr>
+          <p:cNvPr id="16" name="TextBox 15"/>
+          <p:cNvSpPr txBox="1"/>
+          <p:nvPr/>
+        </p:nvSpPr>
+        <p:spPr>
+          <a:xfrm>
+            <a:off x="7909560" y="1691640"/>
+            <a:ext cx="3474720" cy="4206240"/>
+          </a:xfrm>
+          <a:prstGeom prst="rect">
+            <a:avLst/>
+          </a:prstGeom>
+          <a:noFill/>
+        </p:spPr>
+        <p:txBody>
+          <a:bodyPr wrap="square" lIns="0" rIns="0" tIns="0" bIns="0" anchor="t">
+            <a:spAutoFit/>
+          </a:bodyPr>
+          <a:lstStyle/>
+          <a:p>
+            <a:pPr algn="l">
+              <a:spcAft>
+                <a:spcPts val="1200"/>
+              </a:spcAft>
+            </a:pPr>
+            <a:r>
+              <a:rPr sz="2200" b="1" i="0">
+                <a:solidFill>
+                  <a:srgbClr val="FFFFFF"/>
+                </a:solidFill>
+                <a:latin typeface="Cambria"/>
+              </a:rPr>
+              <a:t>Next steps</a:t>
+            </a:r>
+          </a:p>
+          <a:p>
+            <a:pPr algn="l">
+              <a:spcAft>
+                <a:spcPts val="1200"/>
+              </a:spcAft>
+            </a:pPr>
+            <a:r>
+              <a:rPr sz="1500" b="0" i="0">
                 <a:solidFill>
                   <a:srgbClr val="B8C7C4"/>
                 </a:solidFill>
                 <a:latin typeface="Calibri"/>
               </a:rPr>
-              <a:t>Code, outputs, maps and animations: uganda-trade-corridors repository</a:t>
+              <a:t>Report cause rankings with their Monte Carlo shares</a:t>
+            </a:r>
+          </a:p>
+          <a:p>
+            <a:pPr algn="l">
+              <a:spcAft>
+                <a:spcPts val="1200"/>
+              </a:spcAft>
+            </a:pPr>
+            <a:r>
+              <a:rPr sz="1500" b="0" i="0">
+                <a:solidFill>
+                  <a:srgbClr val="B8C7C4"/>
+                </a:solidFill>
+                <a:latin typeface="Calibri"/>
+              </a:rPr>
+              <a:t>Swap GLO-30 for FABDEM terrain</a:t>
+            </a:r>
+          </a:p>
+          <a:p>
+            <a:pPr algn="l">
+              <a:spcAft>
+                <a:spcPts val="1200"/>
+              </a:spcAft>
+            </a:pPr>
+            <a:r>
+              <a:rPr sz="1500" b="0" i="0">
+                <a:solidFill>
+                  <a:srgbClr val="B8C7C4"/>
+                </a:solidFill>
+                <a:latin typeface="Calibri"/>
+              </a:rPr>
+              <a:t>Observe post-2020 growth with Open Buildings 2.5D Temporal</a:t>
+            </a:r>
+          </a:p>
+          <a:p>
+            <a:pPr algn="l">
+              <a:spcAft>
+                <a:spcPts val="1200"/>
+              </a:spcAft>
+            </a:pPr>
+            <a:r>
+              <a:rPr sz="1500" b="0" i="0">
+                <a:solidFill>
+                  <a:srgbClr val="B8C7C4"/>
+                </a:solidFill>
+                <a:latin typeface="Calibri"/>
+              </a:rPr>
+              <a:t>Replace assumed truck counts with UNRA counts</a:t>
+            </a:r>
+          </a:p>
+          <a:p>
+            <a:pPr algn="l">
+              <a:spcAft>
+                <a:spcPts val="1200"/>
+              </a:spcAft>
+            </a:pPr>
+            <a:r>
+              <a:rPr sz="1500" b="0" i="0">
+                <a:solidFill>
+                  <a:srgbClr val="B8C7C4"/>
+                </a:solidFill>
+                <a:latin typeface="Calibri"/>
+              </a:rPr>
+              <a:t>Write up the paper</a:t>
             </a:r>
           </a:p>
         </p:txBody>
@@ -9684,6 +11554,517 @@
                 <a:latin typeface="Calibri"/>
               </a:rPr>
               <a:t>Map: corridor centrelines built from OpenStreetMap routes; squares are weighbridges, bars are border crossings.</a:t>
+            </a:r>
+          </a:p>
+        </p:txBody>
+      </p:sp>
+    </p:spTree>
+  </p:cSld>
+  <p:clrMapOvr>
+    <a:masterClrMapping/>
+  </p:clrMapOvr>
+</p:sld>
+</file>
+
+<file path=ppt/slides/slide20.xml><?xml version="1.0" encoding="utf-8"?>
+<p:sld xmlns:a="http://schemas.openxmlformats.org/drawingml/2006/main" xmlns:p="http://schemas.openxmlformats.org/presentationml/2006/main" xmlns:r="http://schemas.openxmlformats.org/officeDocument/2006/relationships">
+  <p:cSld>
+    <p:bg>
+      <p:bgPr>
+        <a:solidFill>
+          <a:srgbClr val="17252A"/>
+        </a:solidFill>
+        <a:effectLst/>
+      </p:bgPr>
+    </p:bg>
+    <p:spTree>
+      <p:nvGrpSpPr>
+        <p:cNvPr id="1" name=""/>
+        <p:cNvGrpSpPr/>
+        <p:nvPr/>
+      </p:nvGrpSpPr>
+      <p:grpSpPr/>
+      <p:sp>
+        <p:nvSpPr>
+          <p:cNvPr id="2" name="TextBox 1"/>
+          <p:cNvSpPr txBox="1"/>
+          <p:nvPr/>
+        </p:nvSpPr>
+        <p:spPr>
+          <a:xfrm>
+            <a:off x="640080" y="1097280"/>
+            <a:ext cx="10881360" cy="457200"/>
+          </a:xfrm>
+          <a:prstGeom prst="rect">
+            <a:avLst/>
+          </a:prstGeom>
+          <a:noFill/>
+        </p:spPr>
+        <p:txBody>
+          <a:bodyPr wrap="square" lIns="0" rIns="0" tIns="0" bIns="0" anchor="t">
+            <a:spAutoFit/>
+          </a:bodyPr>
+          <a:lstStyle/>
+          <a:p>
+            <a:pPr algn="l">
+              <a:spcAft>
+                <a:spcPts val="0"/>
+              </a:spcAft>
+            </a:pPr>
+            <a:r>
+              <a:rPr sz="1300" b="1" i="0">
+                <a:solidFill>
+                  <a:srgbClr val="D9A441"/>
+                </a:solidFill>
+                <a:latin typeface="Calibri"/>
+              </a:rPr>
+              <a:t>CONCLUSION</a:t>
+            </a:r>
+          </a:p>
+        </p:txBody>
+      </p:sp>
+      <p:sp>
+        <p:nvSpPr>
+          <p:cNvPr id="3" name="TextBox 2"/>
+          <p:cNvSpPr txBox="1"/>
+          <p:nvPr/>
+        </p:nvSpPr>
+        <p:spPr>
+          <a:xfrm>
+            <a:off x="640080" y="1600200"/>
+            <a:ext cx="10881360" cy="1371600"/>
+          </a:xfrm>
+          <a:prstGeom prst="rect">
+            <a:avLst/>
+          </a:prstGeom>
+          <a:noFill/>
+        </p:spPr>
+        <p:txBody>
+          <a:bodyPr wrap="square" lIns="0" rIns="0" tIns="0" bIns="0" anchor="t">
+            <a:spAutoFit/>
+          </a:bodyPr>
+          <a:lstStyle/>
+          <a:p>
+            <a:pPr algn="l">
+              <a:spcAft>
+                <a:spcPts val="0"/>
+              </a:spcAft>
+            </a:pPr>
+            <a:r>
+              <a:rPr sz="3400" b="1" i="0">
+                <a:solidFill>
+                  <a:srgbClr val="FFFFFF"/>
+                </a:solidFill>
+                <a:latin typeface="Cambria"/>
+              </a:rPr>
+              <a:t>Uganda's corridors are becoming high streets faster than they are being managed as highways.</a:t>
+            </a:r>
+          </a:p>
+        </p:txBody>
+      </p:sp>
+      <p:sp>
+        <p:nvSpPr>
+          <p:cNvPr id="4" name="Oval 3"/>
+          <p:cNvSpPr/>
+          <p:nvPr/>
+        </p:nvSpPr>
+        <p:spPr>
+          <a:xfrm>
+            <a:off x="640080" y="3246120"/>
+            <a:ext cx="502920" cy="502920"/>
+          </a:xfrm>
+          <a:prstGeom prst="ellipse">
+            <a:avLst/>
+          </a:prstGeom>
+          <a:solidFill>
+            <a:srgbClr val="C4532D"/>
+          </a:solidFill>
+          <a:ln>
+            <a:noFill/>
+          </a:ln>
+          <a:effectLst/>
+        </p:spPr>
+        <p:style>
+          <a:lnRef idx="1">
+            <a:schemeClr val="accent1"/>
+          </a:lnRef>
+          <a:fillRef idx="3">
+            <a:schemeClr val="accent1"/>
+          </a:fillRef>
+          <a:effectRef idx="2">
+            <a:schemeClr val="accent1"/>
+          </a:effectRef>
+          <a:fontRef idx="minor">
+            <a:schemeClr val="lt1"/>
+          </a:fontRef>
+        </p:style>
+        <p:txBody>
+          <a:bodyPr rtlCol="0" anchor="ctr" lIns="0" rIns="0" tIns="0" bIns="0"/>
+          <a:lstStyle/>
+          <a:p>
+            <a:pPr algn="ctr"/>
+            <a:r>
+              <a:rPr sz="1600" b="1">
+                <a:solidFill>
+                  <a:srgbClr val="FFFFFF"/>
+                </a:solidFill>
+                <a:latin typeface="Calibri"/>
+              </a:rPr>
+              <a:t>1</a:t>
+            </a:r>
+          </a:p>
+        </p:txBody>
+      </p:sp>
+      <p:sp>
+        <p:nvSpPr>
+          <p:cNvPr id="5" name="TextBox 4"/>
+          <p:cNvSpPr txBox="1"/>
+          <p:nvPr/>
+        </p:nvSpPr>
+        <p:spPr>
+          <a:xfrm>
+            <a:off x="1417320" y="3264408"/>
+            <a:ext cx="10058400" cy="502920"/>
+          </a:xfrm>
+          <a:prstGeom prst="rect">
+            <a:avLst/>
+          </a:prstGeom>
+          <a:noFill/>
+        </p:spPr>
+        <p:txBody>
+          <a:bodyPr wrap="square" lIns="0" rIns="0" tIns="0" bIns="0" anchor="ctr">
+            <a:spAutoFit/>
+          </a:bodyPr>
+          <a:lstStyle/>
+          <a:p>
+            <a:pPr algn="l">
+              <a:spcAft>
+                <a:spcPts val="0"/>
+              </a:spcAft>
+            </a:pPr>
+            <a:r>
+              <a:rPr sz="1900" b="0" i="0">
+                <a:solidFill>
+                  <a:srgbClr val="B8C7C4"/>
+                </a:solidFill>
+                <a:latin typeface="Calibri"/>
+              </a:rPr>
+              <a:t>Open data alone reproduce trip times within a few percent, outside Kampala.</a:t>
+            </a:r>
+          </a:p>
+        </p:txBody>
+      </p:sp>
+      <p:sp>
+        <p:nvSpPr>
+          <p:cNvPr id="6" name="Oval 5"/>
+          <p:cNvSpPr/>
+          <p:nvPr/>
+        </p:nvSpPr>
+        <p:spPr>
+          <a:xfrm>
+            <a:off x="640080" y="3904487"/>
+            <a:ext cx="502920" cy="502920"/>
+          </a:xfrm>
+          <a:prstGeom prst="ellipse">
+            <a:avLst/>
+          </a:prstGeom>
+          <a:solidFill>
+            <a:srgbClr val="C4532D"/>
+          </a:solidFill>
+          <a:ln>
+            <a:noFill/>
+          </a:ln>
+          <a:effectLst/>
+        </p:spPr>
+        <p:style>
+          <a:lnRef idx="1">
+            <a:schemeClr val="accent1"/>
+          </a:lnRef>
+          <a:fillRef idx="3">
+            <a:schemeClr val="accent1"/>
+          </a:fillRef>
+          <a:effectRef idx="2">
+            <a:schemeClr val="accent1"/>
+          </a:effectRef>
+          <a:fontRef idx="minor">
+            <a:schemeClr val="lt1"/>
+          </a:fontRef>
+        </p:style>
+        <p:txBody>
+          <a:bodyPr rtlCol="0" anchor="ctr" lIns="0" rIns="0" tIns="0" bIns="0"/>
+          <a:lstStyle/>
+          <a:p>
+            <a:pPr algn="ctr"/>
+            <a:r>
+              <a:rPr sz="1600" b="1">
+                <a:solidFill>
+                  <a:srgbClr val="FFFFFF"/>
+                </a:solidFill>
+                <a:latin typeface="Calibri"/>
+              </a:rPr>
+              <a:t>2</a:t>
+            </a:r>
+          </a:p>
+        </p:txBody>
+      </p:sp>
+      <p:sp>
+        <p:nvSpPr>
+          <p:cNvPr id="7" name="TextBox 6"/>
+          <p:cNvSpPr txBox="1"/>
+          <p:nvPr/>
+        </p:nvSpPr>
+        <p:spPr>
+          <a:xfrm>
+            <a:off x="1417320" y="3922775"/>
+            <a:ext cx="10058400" cy="502920"/>
+          </a:xfrm>
+          <a:prstGeom prst="rect">
+            <a:avLst/>
+          </a:prstGeom>
+          <a:noFill/>
+        </p:spPr>
+        <p:txBody>
+          <a:bodyPr wrap="square" lIns="0" rIns="0" tIns="0" bIns="0" anchor="ctr">
+            <a:spAutoFit/>
+          </a:bodyPr>
+          <a:lstStyle/>
+          <a:p>
+            <a:pPr algn="l">
+              <a:spcAft>
+                <a:spcPts val="0"/>
+              </a:spcAft>
+            </a:pPr>
+            <a:r>
+              <a:rPr sz="1900" b="0" i="0">
+                <a:solidFill>
+                  <a:srgbClr val="B8C7C4"/>
+                </a:solidFill>
+                <a:latin typeface="Calibri"/>
+              </a:rPr>
+              <a:t>Roadside activity is the largest steady delay; weighbridges are the worst single points.</a:t>
+            </a:r>
+          </a:p>
+        </p:txBody>
+      </p:sp>
+      <p:sp>
+        <p:nvSpPr>
+          <p:cNvPr id="8" name="Oval 7"/>
+          <p:cNvSpPr/>
+          <p:nvPr/>
+        </p:nvSpPr>
+        <p:spPr>
+          <a:xfrm>
+            <a:off x="640080" y="4562855"/>
+            <a:ext cx="502920" cy="502920"/>
+          </a:xfrm>
+          <a:prstGeom prst="ellipse">
+            <a:avLst/>
+          </a:prstGeom>
+          <a:solidFill>
+            <a:srgbClr val="C4532D"/>
+          </a:solidFill>
+          <a:ln>
+            <a:noFill/>
+          </a:ln>
+          <a:effectLst/>
+        </p:spPr>
+        <p:style>
+          <a:lnRef idx="1">
+            <a:schemeClr val="accent1"/>
+          </a:lnRef>
+          <a:fillRef idx="3">
+            <a:schemeClr val="accent1"/>
+          </a:fillRef>
+          <a:effectRef idx="2">
+            <a:schemeClr val="accent1"/>
+          </a:effectRef>
+          <a:fontRef idx="minor">
+            <a:schemeClr val="lt1"/>
+          </a:fontRef>
+        </p:style>
+        <p:txBody>
+          <a:bodyPr rtlCol="0" anchor="ctr" lIns="0" rIns="0" tIns="0" bIns="0"/>
+          <a:lstStyle/>
+          <a:p>
+            <a:pPr algn="ctr"/>
+            <a:r>
+              <a:rPr sz="1600" b="1">
+                <a:solidFill>
+                  <a:srgbClr val="FFFFFF"/>
+                </a:solidFill>
+                <a:latin typeface="Calibri"/>
+              </a:rPr>
+              <a:t>3</a:t>
+            </a:r>
+          </a:p>
+        </p:txBody>
+      </p:sp>
+      <p:sp>
+        <p:nvSpPr>
+          <p:cNvPr id="9" name="TextBox 8"/>
+          <p:cNvSpPr txBox="1"/>
+          <p:nvPr/>
+        </p:nvSpPr>
+        <p:spPr>
+          <a:xfrm>
+            <a:off x="1417320" y="4581143"/>
+            <a:ext cx="10058400" cy="502920"/>
+          </a:xfrm>
+          <a:prstGeom prst="rect">
+            <a:avLst/>
+          </a:prstGeom>
+          <a:noFill/>
+        </p:spPr>
+        <p:txBody>
+          <a:bodyPr wrap="square" lIns="0" rIns="0" tIns="0" bIns="0" anchor="ctr">
+            <a:spAutoFit/>
+          </a:bodyPr>
+          <a:lstStyle/>
+          <a:p>
+            <a:pPr algn="l">
+              <a:spcAft>
+                <a:spcPts val="0"/>
+              </a:spcAft>
+            </a:pPr>
+            <a:r>
+              <a:rPr sz="1900" b="0" i="0">
+                <a:solidFill>
+                  <a:srgbClr val="B8C7C4"/>
+                </a:solidFill>
+                <a:latin typeface="Calibri"/>
+              </a:rPr>
+              <a:t>Roadside building grew 27–68% in 2000–2020, mostly between towns.</a:t>
+            </a:r>
+          </a:p>
+        </p:txBody>
+      </p:sp>
+      <p:sp>
+        <p:nvSpPr>
+          <p:cNvPr id="10" name="Oval 9"/>
+          <p:cNvSpPr/>
+          <p:nvPr/>
+        </p:nvSpPr>
+        <p:spPr>
+          <a:xfrm>
+            <a:off x="640080" y="5221223"/>
+            <a:ext cx="502920" cy="502920"/>
+          </a:xfrm>
+          <a:prstGeom prst="ellipse">
+            <a:avLst/>
+          </a:prstGeom>
+          <a:solidFill>
+            <a:srgbClr val="C4532D"/>
+          </a:solidFill>
+          <a:ln>
+            <a:noFill/>
+          </a:ln>
+          <a:effectLst/>
+        </p:spPr>
+        <p:style>
+          <a:lnRef idx="1">
+            <a:schemeClr val="accent1"/>
+          </a:lnRef>
+          <a:fillRef idx="3">
+            <a:schemeClr val="accent1"/>
+          </a:fillRef>
+          <a:effectRef idx="2">
+            <a:schemeClr val="accent1"/>
+          </a:effectRef>
+          <a:fontRef idx="minor">
+            <a:schemeClr val="lt1"/>
+          </a:fontRef>
+        </p:style>
+        <p:txBody>
+          <a:bodyPr rtlCol="0" anchor="ctr" lIns="0" rIns="0" tIns="0" bIns="0"/>
+          <a:lstStyle/>
+          <a:p>
+            <a:pPr algn="ctr"/>
+            <a:r>
+              <a:rPr sz="1600" b="1">
+                <a:solidFill>
+                  <a:srgbClr val="FFFFFF"/>
+                </a:solidFill>
+                <a:latin typeface="Calibri"/>
+              </a:rPr>
+              <a:t>4</a:t>
+            </a:r>
+          </a:p>
+        </p:txBody>
+      </p:sp>
+      <p:sp>
+        <p:nvSpPr>
+          <p:cNvPr id="11" name="TextBox 10"/>
+          <p:cNvSpPr txBox="1"/>
+          <p:nvPr/>
+        </p:nvSpPr>
+        <p:spPr>
+          <a:xfrm>
+            <a:off x="1417320" y="5239511"/>
+            <a:ext cx="10058400" cy="502920"/>
+          </a:xfrm>
+          <a:prstGeom prst="rect">
+            <a:avLst/>
+          </a:prstGeom>
+          <a:noFill/>
+        </p:spPr>
+        <p:txBody>
+          <a:bodyPr wrap="square" lIns="0" rIns="0" tIns="0" bIns="0" anchor="ctr">
+            <a:spAutoFit/>
+          </a:bodyPr>
+          <a:lstStyle/>
+          <a:p>
+            <a:pPr algn="l">
+              <a:spcAft>
+                <a:spcPts val="0"/>
+              </a:spcAft>
+            </a:pPr>
+            <a:r>
+              <a:rPr sz="1900" b="0" i="0">
+                <a:solidFill>
+                  <a:srgbClr val="B8C7C4"/>
+                </a:solidFill>
+                <a:latin typeface="Calibri"/>
+              </a:rPr>
+              <a:t>Cheap fixes at controls beat bypasses; rail pays only with far more freight than today.</a:t>
+            </a:r>
+          </a:p>
+        </p:txBody>
+      </p:sp>
+      <p:sp>
+        <p:nvSpPr>
+          <p:cNvPr id="12" name="TextBox 11"/>
+          <p:cNvSpPr txBox="1"/>
+          <p:nvPr/>
+        </p:nvSpPr>
+        <p:spPr>
+          <a:xfrm>
+            <a:off x="640080" y="5989320"/>
+            <a:ext cx="10881360" cy="365760"/>
+          </a:xfrm>
+          <a:prstGeom prst="rect">
+            <a:avLst/>
+          </a:prstGeom>
+          <a:noFill/>
+        </p:spPr>
+        <p:txBody>
+          <a:bodyPr wrap="square" lIns="0" rIns="0" tIns="0" bIns="0" anchor="t">
+            <a:spAutoFit/>
+          </a:bodyPr>
+          <a:lstStyle/>
+          <a:p>
+            <a:pPr algn="l">
+              <a:spcAft>
+                <a:spcPts val="0"/>
+              </a:spcAft>
+            </a:pPr>
+            <a:r>
+              <a:rPr sz="1300" b="0" i="0">
+                <a:solidFill>
+                  <a:srgbClr val="B8C7C4"/>
+                </a:solidFill>
+                <a:latin typeface="Calibri"/>
+              </a:rPr>
+              <a:t>Code, outputs, maps and animations: uganda-trade-corridors repository</a:t>
             </a:r>
           </a:p>
         </p:txBody>

--- a/presentation/highways_high_streets.pptx
+++ b/presentation/highways_high_streets.pptx
@@ -25,6 +25,9 @@
     <p:sldId id="273" r:id="rId25"/>
     <p:sldId id="274" r:id="rId26"/>
     <p:sldId id="275" r:id="rId27"/>
+    <p:sldId id="276" r:id="rId28"/>
+    <p:sldId id="277" r:id="rId29"/>
+    <p:sldId id="278" r:id="rId30"/>
   </p:sldIdLst>
   <p:sldSz cx="12191695" cy="6858000" type="screen4x3"/>
   <p:notesSz cx="6858000" cy="9144000"/>
@@ -156,41 +159,47 @@
           </c:spPr>
           <c:cat>
             <c:strRef>
-              <c:f>Sheet1!$A$2:$A$5</c:f>
+              <c:f>Sheet1!$A$2:$A$6</c:f>
               <c:strCache>
-                <c:ptCount val="4"/>
+                <c:ptCount val="5"/>
                 <c:pt idx="0">
+                  <c:v>Kampala–Njeru</c:v>
+                </c:pt>
+                <c:pt idx="1">
                   <c:v>Kampala–Gulu</c:v>
                 </c:pt>
-                <c:pt idx="1">
+                <c:pt idx="2">
                   <c:v>Kampala–Kabale</c:v>
                 </c:pt>
-                <c:pt idx="2">
+                <c:pt idx="3">
                   <c:v>Kampala–Hoima</c:v>
                 </c:pt>
-                <c:pt idx="3">
-                  <c:v>Kampala–Njeru</c:v>
+                <c:pt idx="4">
+                  <c:v>Kampala–Fort Portal</c:v>
                 </c:pt>
               </c:strCache>
             </c:strRef>
           </c:cat>
           <c:val>
             <c:numRef>
-              <c:f>Sheet1!$B$2:$B$5</c:f>
+              <c:f>Sheet1!$B$2:$B$6</c:f>
               <c:numCache>
                 <c:formatCode>General</c:formatCode>
-                <c:ptCount val="4"/>
+                <c:ptCount val="5"/>
                 <c:pt idx="0">
-                  <c:v>266</c:v>
+                  <c:v>87.0</c:v>
                 </c:pt>
                 <c:pt idx="1">
-                  <c:v>344</c:v>
+                  <c:v>266.0</c:v>
                 </c:pt>
                 <c:pt idx="2">
-                  <c:v>164</c:v>
+                  <c:v>343.0</c:v>
                 </c:pt>
                 <c:pt idx="3">
-                  <c:v>87</c:v>
+                  <c:v>164.0</c:v>
+                </c:pt>
+                <c:pt idx="4">
+                  <c:v>228.0</c:v>
                 </c:pt>
               </c:numCache>
             </c:numRef>
@@ -217,41 +226,47 @@
           </c:spPr>
           <c:cat>
             <c:strRef>
-              <c:f>Sheet1!$A$2:$A$5</c:f>
+              <c:f>Sheet1!$A$2:$A$6</c:f>
               <c:strCache>
-                <c:ptCount val="4"/>
+                <c:ptCount val="5"/>
                 <c:pt idx="0">
+                  <c:v>Kampala–Njeru</c:v>
+                </c:pt>
+                <c:pt idx="1">
                   <c:v>Kampala–Gulu</c:v>
                 </c:pt>
-                <c:pt idx="1">
+                <c:pt idx="2">
                   <c:v>Kampala–Kabale</c:v>
                 </c:pt>
-                <c:pt idx="2">
+                <c:pt idx="3">
                   <c:v>Kampala–Hoima</c:v>
                 </c:pt>
-                <c:pt idx="3">
-                  <c:v>Kampala–Njeru</c:v>
+                <c:pt idx="4">
+                  <c:v>Kampala–Fort Portal</c:v>
                 </c:pt>
               </c:strCache>
             </c:strRef>
           </c:cat>
           <c:val>
             <c:numRef>
-              <c:f>Sheet1!$C$2:$C$5</c:f>
+              <c:f>Sheet1!$C$2:$C$6</c:f>
               <c:numCache>
                 <c:formatCode>General</c:formatCode>
-                <c:ptCount val="4"/>
+                <c:ptCount val="5"/>
                 <c:pt idx="0">
-                  <c:v>286</c:v>
+                  <c:v>66.0</c:v>
                 </c:pt>
                 <c:pt idx="1">
-                  <c:v>345</c:v>
+                  <c:v>286.0</c:v>
                 </c:pt>
                 <c:pt idx="2">
-                  <c:v>172</c:v>
+                  <c:v>345.0</c:v>
                 </c:pt>
                 <c:pt idx="3">
-                  <c:v>66</c:v>
+                  <c:v>172.0</c:v>
+                </c:pt>
+                <c:pt idx="4">
+                  <c:v>269.0</c:v>
                 </c:pt>
               </c:numCache>
             </c:numRef>
@@ -263,7 +278,7 @@
             <a:lstStyle/>
             <a:p>
               <a:pPr>
-                <a:defRPr sz="1300">
+                <a:defRPr sz="1200">
                   <a:solidFill>
                     <a:srgbClr val="1E2528"/>
                   </a:solidFill>
@@ -307,7 +322,7 @@
           <a:lstStyle/>
           <a:p>
             <a:pPr>
-              <a:defRPr sz="1200"/>
+              <a:defRPr sz="1100"/>
             </a:pPr>
           </a:p>
         </c:txPr>
@@ -347,7 +362,7 @@
           <a:lstStyle/>
           <a:p>
             <a:pPr>
-              <a:defRPr sz="1100"/>
+              <a:defRPr sz="1000"/>
             </a:pPr>
           </a:p>
         </c:txPr>
@@ -363,7 +378,7 @@
         <a:lstStyle/>
         <a:p>
           <a:pPr>
-            <a:defRPr sz="1200"/>
+            <a:defRPr sz="1100"/>
           </a:pPr>
         </a:p>
       </c:txPr>
@@ -375,7 +390,7 @@
     <a:lstStyle/>
     <a:p>
       <a:pPr>
-        <a:defRPr sz="1200">
+        <a:defRPr sz="1100">
           <a:solidFill>
             <a:srgbClr val="5B6770"/>
           </a:solidFill>
@@ -421,9 +436,9 @@
           </c:spPr>
           <c:cat>
             <c:strRef>
-              <c:f>Sheet1!$A$2:$A$5</c:f>
+              <c:f>Sheet1!$A$2:$A$6</c:f>
               <c:strCache>
-                <c:ptCount val="4"/>
+                <c:ptCount val="5"/>
                 <c:pt idx="0">
                   <c:v>Malaba (A1)</c:v>
                 </c:pt>
@@ -435,27 +450,33 @@
                 </c:pt>
                 <c:pt idx="3">
                   <c:v>Hoima (A9)</c:v>
+                </c:pt>
+                <c:pt idx="4">
+                  <c:v>Bwera (A5)</c:v>
                 </c:pt>
               </c:strCache>
             </c:strRef>
           </c:cat>
           <c:val>
             <c:numRef>
-              <c:f>Sheet1!$B$2:$B$5</c:f>
+              <c:f>Sheet1!$B$2:$B$6</c:f>
               <c:numCache>
                 <c:formatCode>General</c:formatCode>
-                <c:ptCount val="4"/>
+                <c:ptCount val="5"/>
                 <c:pt idx="0">
-                  <c:v>0.199</c:v>
+                  <c:v>0.206</c:v>
                 </c:pt>
                 <c:pt idx="1">
-                  <c:v>0.342</c:v>
+                  <c:v>0.361</c:v>
                 </c:pt>
                 <c:pt idx="2">
-                  <c:v>0.25</c:v>
+                  <c:v>0.262</c:v>
                 </c:pt>
                 <c:pt idx="3">
-                  <c:v>0.165</c:v>
+                  <c:v>0.183</c:v>
+                </c:pt>
+                <c:pt idx="4">
+                  <c:v>0.291</c:v>
                 </c:pt>
               </c:numCache>
             </c:numRef>
@@ -482,9 +503,9 @@
           </c:spPr>
           <c:cat>
             <c:strRef>
-              <c:f>Sheet1!$A$2:$A$5</c:f>
+              <c:f>Sheet1!$A$2:$A$6</c:f>
               <c:strCache>
-                <c:ptCount val="4"/>
+                <c:ptCount val="5"/>
                 <c:pt idx="0">
                   <c:v>Malaba (A1)</c:v>
                 </c:pt>
@@ -496,27 +517,33 @@
                 </c:pt>
                 <c:pt idx="3">
                   <c:v>Hoima (A9)</c:v>
+                </c:pt>
+                <c:pt idx="4">
+                  <c:v>Bwera (A5)</c:v>
                 </c:pt>
               </c:strCache>
             </c:strRef>
           </c:cat>
           <c:val>
             <c:numRef>
-              <c:f>Sheet1!$C$2:$C$5</c:f>
+              <c:f>Sheet1!$C$2:$C$6</c:f>
               <c:numCache>
                 <c:formatCode>General</c:formatCode>
-                <c:ptCount val="4"/>
+                <c:ptCount val="5"/>
                 <c:pt idx="0">
-                  <c:v>0.581</c:v>
+                  <c:v>0.574</c:v>
                 </c:pt>
                 <c:pt idx="1">
-                  <c:v>0.582</c:v>
+                  <c:v>0.564</c:v>
                 </c:pt>
                 <c:pt idx="2">
-                  <c:v>0.637</c:v>
+                  <c:v>0.629</c:v>
                 </c:pt>
                 <c:pt idx="3">
-                  <c:v>0.756</c:v>
+                  <c:v>0.738</c:v>
+                </c:pt>
+                <c:pt idx="4">
+                  <c:v>0.672</c:v>
                 </c:pt>
               </c:numCache>
             </c:numRef>
@@ -543,9 +570,9 @@
           </c:spPr>
           <c:cat>
             <c:strRef>
-              <c:f>Sheet1!$A$2:$A$5</c:f>
+              <c:f>Sheet1!$A$2:$A$6</c:f>
               <c:strCache>
-                <c:ptCount val="4"/>
+                <c:ptCount val="5"/>
                 <c:pt idx="0">
                   <c:v>Malaba (A1)</c:v>
                 </c:pt>
@@ -557,16 +584,19 @@
                 </c:pt>
                 <c:pt idx="3">
                   <c:v>Hoima (A9)</c:v>
+                </c:pt>
+                <c:pt idx="4">
+                  <c:v>Bwera (A5)</c:v>
                 </c:pt>
               </c:strCache>
             </c:strRef>
           </c:cat>
           <c:val>
             <c:numRef>
-              <c:f>Sheet1!$D$2:$D$5</c:f>
+              <c:f>Sheet1!$D$2:$D$6</c:f>
               <c:numCache>
                 <c:formatCode>General</c:formatCode>
-                <c:ptCount val="4"/>
+                <c:ptCount val="5"/>
                 <c:pt idx="0">
                   <c:v>0.22</c:v>
                 </c:pt>
@@ -574,10 +604,13 @@
                   <c:v>0.075</c:v>
                 </c:pt>
                 <c:pt idx="2">
-                  <c:v>0.113</c:v>
+                  <c:v>0.109</c:v>
                 </c:pt>
                 <c:pt idx="3">
                   <c:v>0.08</c:v>
+                </c:pt>
+                <c:pt idx="4">
+                  <c:v>0.037</c:v>
                 </c:pt>
               </c:numCache>
             </c:numRef>
@@ -590,7 +623,7 @@
             <a:lstStyle/>
             <a:p>
               <a:pPr>
-                <a:defRPr sz="1300" b="1">
+                <a:defRPr sz="1200" b="1">
                   <a:solidFill>
                     <a:srgbClr val="FFFFFF"/>
                   </a:solidFill>
@@ -747,9 +780,9 @@
           </c:spPr>
           <c:cat>
             <c:strRef>
-              <c:f>Sheet1!$A$2:$A$5</c:f>
+              <c:f>Sheet1!$A$2:$A$6</c:f>
               <c:strCache>
-                <c:ptCount val="4"/>
+                <c:ptCount val="5"/>
                 <c:pt idx="0">
                   <c:v>Malaba (A1)</c:v>
                 </c:pt>
@@ -761,27 +794,33 @@
                 </c:pt>
                 <c:pt idx="3">
                   <c:v>Hoima (A9)</c:v>
+                </c:pt>
+                <c:pt idx="4">
+                  <c:v>Bwera (A5)</c:v>
                 </c:pt>
               </c:strCache>
             </c:strRef>
           </c:cat>
           <c:val>
             <c:numRef>
-              <c:f>Sheet1!$B$2:$B$5</c:f>
+              <c:f>Sheet1!$B$2:$B$6</c:f>
               <c:numCache>
                 <c:formatCode>General</c:formatCode>
-                <c:ptCount val="4"/>
+                <c:ptCount val="5"/>
                 <c:pt idx="0">
                   <c:v>25.1</c:v>
                 </c:pt>
                 <c:pt idx="1">
-                  <c:v>29.2</c:v>
+                  <c:v>29.1</c:v>
                 </c:pt>
                 <c:pt idx="2">
-                  <c:v>34.6</c:v>
+                  <c:v>34.8</c:v>
                 </c:pt>
                 <c:pt idx="3">
                   <c:v>18.5</c:v>
+                </c:pt>
+                <c:pt idx="4">
+                  <c:v>36.9</c:v>
                 </c:pt>
               </c:numCache>
             </c:numRef>
@@ -808,9 +847,9 @@
           </c:spPr>
           <c:cat>
             <c:strRef>
-              <c:f>Sheet1!$A$2:$A$5</c:f>
+              <c:f>Sheet1!$A$2:$A$6</c:f>
               <c:strCache>
-                <c:ptCount val="4"/>
+                <c:ptCount val="5"/>
                 <c:pt idx="0">
                   <c:v>Malaba (A1)</c:v>
                 </c:pt>
@@ -822,16 +861,19 @@
                 </c:pt>
                 <c:pt idx="3">
                   <c:v>Hoima (A9)</c:v>
+                </c:pt>
+                <c:pt idx="4">
+                  <c:v>Bwera (A5)</c:v>
                 </c:pt>
               </c:strCache>
             </c:strRef>
           </c:cat>
           <c:val>
             <c:numRef>
-              <c:f>Sheet1!$C$2:$C$5</c:f>
+              <c:f>Sheet1!$C$2:$C$6</c:f>
               <c:numCache>
                 <c:formatCode>General</c:formatCode>
-                <c:ptCount val="4"/>
+                <c:ptCount val="5"/>
                 <c:pt idx="0">
                   <c:v>8.6</c:v>
                 </c:pt>
@@ -839,10 +881,13 @@
                   <c:v>13.0</c:v>
                 </c:pt>
                 <c:pt idx="2">
-                  <c:v>38.1</c:v>
+                  <c:v>38.2</c:v>
                 </c:pt>
                 <c:pt idx="3">
                   <c:v>13.7</c:v>
+                </c:pt>
+                <c:pt idx="4">
+                  <c:v>42.7</c:v>
                 </c:pt>
               </c:numCache>
             </c:numRef>
@@ -869,9 +914,9 @@
           </c:spPr>
           <c:cat>
             <c:strRef>
-              <c:f>Sheet1!$A$2:$A$5</c:f>
+              <c:f>Sheet1!$A$2:$A$6</c:f>
               <c:strCache>
-                <c:ptCount val="4"/>
+                <c:ptCount val="5"/>
                 <c:pt idx="0">
                   <c:v>Malaba (A1)</c:v>
                 </c:pt>
@@ -883,16 +928,19 @@
                 </c:pt>
                 <c:pt idx="3">
                   <c:v>Hoima (A9)</c:v>
+                </c:pt>
+                <c:pt idx="4">
+                  <c:v>Bwera (A5)</c:v>
                 </c:pt>
               </c:strCache>
             </c:strRef>
           </c:cat>
           <c:val>
             <c:numRef>
-              <c:f>Sheet1!$D$2:$D$5</c:f>
+              <c:f>Sheet1!$D$2:$D$6</c:f>
               <c:numCache>
                 <c:formatCode>General</c:formatCode>
-                <c:ptCount val="4"/>
+                <c:ptCount val="5"/>
                 <c:pt idx="0">
                   <c:v>20.0</c:v>
                 </c:pt>
@@ -903,6 +951,9 @@
                   <c:v>20.0</c:v>
                 </c:pt>
                 <c:pt idx="3">
+                  <c:v>0.0</c:v>
+                </c:pt>
+                <c:pt idx="4">
                   <c:v>0.0</c:v>
                 </c:pt>
               </c:numCache>
@@ -930,9 +981,9 @@
           </c:spPr>
           <c:cat>
             <c:strRef>
-              <c:f>Sheet1!$A$2:$A$5</c:f>
+              <c:f>Sheet1!$A$2:$A$6</c:f>
               <c:strCache>
-                <c:ptCount val="4"/>
+                <c:ptCount val="5"/>
                 <c:pt idx="0">
                   <c:v>Malaba (A1)</c:v>
                 </c:pt>
@@ -944,16 +995,19 @@
                 </c:pt>
                 <c:pt idx="3">
                   <c:v>Hoima (A9)</c:v>
+                </c:pt>
+                <c:pt idx="4">
+                  <c:v>Bwera (A5)</c:v>
                 </c:pt>
               </c:strCache>
             </c:strRef>
           </c:cat>
           <c:val>
             <c:numRef>
-              <c:f>Sheet1!$E$2:$E$5</c:f>
+              <c:f>Sheet1!$E$2:$E$6</c:f>
               <c:numCache>
                 <c:formatCode>General</c:formatCode>
-                <c:ptCount val="4"/>
+                <c:ptCount val="5"/>
                 <c:pt idx="0">
                   <c:v>19.0</c:v>
                 </c:pt>
@@ -961,9 +1015,12 @@
                   <c:v>13.0</c:v>
                 </c:pt>
                 <c:pt idx="2">
-                  <c:v>19.2</c:v>
+                  <c:v>18.6</c:v>
                 </c:pt>
                 <c:pt idx="3">
+                  <c:v>6.2</c:v>
+                </c:pt>
+                <c:pt idx="4">
                   <c:v>6.2</c:v>
                 </c:pt>
               </c:numCache>
@@ -991,9 +1048,9 @@
           </c:spPr>
           <c:cat>
             <c:strRef>
-              <c:f>Sheet1!$A$2:$A$5</c:f>
+              <c:f>Sheet1!$A$2:$A$6</c:f>
               <c:strCache>
-                <c:ptCount val="4"/>
+                <c:ptCount val="5"/>
                 <c:pt idx="0">
                   <c:v>Malaba (A1)</c:v>
                 </c:pt>
@@ -1005,16 +1062,19 @@
                 </c:pt>
                 <c:pt idx="3">
                   <c:v>Hoima (A9)</c:v>
+                </c:pt>
+                <c:pt idx="4">
+                  <c:v>Bwera (A5)</c:v>
                 </c:pt>
               </c:strCache>
             </c:strRef>
           </c:cat>
           <c:val>
             <c:numRef>
-              <c:f>Sheet1!$F$2:$F$5</c:f>
+              <c:f>Sheet1!$F$2:$F$6</c:f>
               <c:numCache>
                 <c:formatCode>General</c:formatCode>
-                <c:ptCount val="4"/>
+                <c:ptCount val="5"/>
                 <c:pt idx="0">
                   <c:v>10.0</c:v>
                 </c:pt>
@@ -1026,6 +1086,9 @@
                 </c:pt>
                 <c:pt idx="3">
                   <c:v>4.0</c:v>
+                </c:pt>
+                <c:pt idx="4">
+                  <c:v>5.0</c:v>
                 </c:pt>
               </c:numCache>
             </c:numRef>
@@ -1052,9 +1115,9 @@
           </c:spPr>
           <c:cat>
             <c:strRef>
-              <c:f>Sheet1!$A$2:$A$5</c:f>
+              <c:f>Sheet1!$A$2:$A$6</c:f>
               <c:strCache>
-                <c:ptCount val="4"/>
+                <c:ptCount val="5"/>
                 <c:pt idx="0">
                   <c:v>Malaba (A1)</c:v>
                 </c:pt>
@@ -1066,16 +1129,19 @@
                 </c:pt>
                 <c:pt idx="3">
                   <c:v>Hoima (A9)</c:v>
+                </c:pt>
+                <c:pt idx="4">
+                  <c:v>Bwera (A5)</c:v>
                 </c:pt>
               </c:strCache>
             </c:strRef>
           </c:cat>
           <c:val>
             <c:numRef>
-              <c:f>Sheet1!$G$2:$G$5</c:f>
+              <c:f>Sheet1!$G$2:$G$6</c:f>
               <c:numCache>
                 <c:formatCode>General</c:formatCode>
-                <c:ptCount val="4"/>
+                <c:ptCount val="5"/>
                 <c:pt idx="0">
                   <c:v>7.1</c:v>
                 </c:pt>
@@ -1087,6 +1153,9 @@
                 </c:pt>
                 <c:pt idx="3">
                   <c:v>4.9</c:v>
+                </c:pt>
+                <c:pt idx="4">
+                  <c:v>12.4</c:v>
                 </c:pt>
               </c:numCache>
             </c:numRef>
@@ -1113,9 +1182,9 @@
           </c:spPr>
           <c:cat>
             <c:strRef>
-              <c:f>Sheet1!$A$2:$A$5</c:f>
+              <c:f>Sheet1!$A$2:$A$6</c:f>
               <c:strCache>
-                <c:ptCount val="4"/>
+                <c:ptCount val="5"/>
                 <c:pt idx="0">
                   <c:v>Malaba (A1)</c:v>
                 </c:pt>
@@ -1127,16 +1196,19 @@
                 </c:pt>
                 <c:pt idx="3">
                   <c:v>Hoima (A9)</c:v>
+                </c:pt>
+                <c:pt idx="4">
+                  <c:v>Bwera (A5)</c:v>
                 </c:pt>
               </c:strCache>
             </c:strRef>
           </c:cat>
           <c:val>
             <c:numRef>
-              <c:f>Sheet1!$H$2:$H$5</c:f>
+              <c:f>Sheet1!$H$2:$H$6</c:f>
               <c:numCache>
                 <c:formatCode>General</c:formatCode>
-                <c:ptCount val="4"/>
+                <c:ptCount val="5"/>
                 <c:pt idx="0">
                   <c:v>10.5</c:v>
                 </c:pt>
@@ -1148,6 +1220,9 @@
                 </c:pt>
                 <c:pt idx="3">
                   <c:v>0.5</c:v>
+                </c:pt>
+                <c:pt idx="4">
+                  <c:v>2.3</c:v>
                 </c:pt>
               </c:numCache>
             </c:numRef>
@@ -1296,322 +1371,6 @@
               <c:strCache>
                 <c:ptCount val="1"/>
                 <c:pt idx="0">
-                  <c:v>Roadside settlement</c:v>
-                </c:pt>
-              </c:strCache>
-            </c:strRef>
-          </c:tx>
-          <c:spPr>
-            <a:solidFill>
-              <a:srgbClr val="D9A441"/>
-            </a:solidFill>
-          </c:spPr>
-          <c:cat>
-            <c:strRef>
-              <c:f>Sheet1!$A$2:$A$5</c:f>
-              <c:strCache>
-                <c:ptCount val="4"/>
-                <c:pt idx="0">
-                  <c:v>Elegu (A6)</c:v>
-                </c:pt>
-                <c:pt idx="1">
-                  <c:v>Hoima (A9)</c:v>
-                </c:pt>
-                <c:pt idx="2">
-                  <c:v>Katuna (A2)</c:v>
-                </c:pt>
-                <c:pt idx="3">
-                  <c:v>Malaba (A1)</c:v>
-                </c:pt>
-              </c:strCache>
-            </c:strRef>
-          </c:cat>
-          <c:val>
-            <c:numRef>
-              <c:f>Sheet1!$B$2:$B$5</c:f>
-              <c:numCache>
-                <c:formatCode>General</c:formatCode>
-                <c:ptCount val="4"/>
-                <c:pt idx="0">
-                  <c:v>103</c:v>
-                </c:pt>
-                <c:pt idx="1">
-                  <c:v>92</c:v>
-                </c:pt>
-                <c:pt idx="2">
-                  <c:v>68</c:v>
-                </c:pt>
-                <c:pt idx="3">
-                  <c:v>45</c:v>
-                </c:pt>
-              </c:numCache>
-            </c:numRef>
-          </c:val>
-        </c:ser>
-        <c:ser>
-          <c:idx val="1"/>
-          <c:order val="1"/>
-          <c:tx>
-            <c:strRef>
-              <c:f>Sheet1!$C$1</c:f>
-              <c:strCache>
-                <c:ptCount val="1"/>
-                <c:pt idx="0">
-                  <c:v>Town</c:v>
-                </c:pt>
-              </c:strCache>
-            </c:strRef>
-          </c:tx>
-          <c:spPr>
-            <a:solidFill>
-              <a:srgbClr val="C4532D"/>
-            </a:solidFill>
-          </c:spPr>
-          <c:cat>
-            <c:strRef>
-              <c:f>Sheet1!$A$2:$A$5</c:f>
-              <c:strCache>
-                <c:ptCount val="4"/>
-                <c:pt idx="0">
-                  <c:v>Elegu (A6)</c:v>
-                </c:pt>
-                <c:pt idx="1">
-                  <c:v>Hoima (A9)</c:v>
-                </c:pt>
-                <c:pt idx="2">
-                  <c:v>Katuna (A2)</c:v>
-                </c:pt>
-                <c:pt idx="3">
-                  <c:v>Malaba (A1)</c:v>
-                </c:pt>
-              </c:strCache>
-            </c:strRef>
-          </c:cat>
-          <c:val>
-            <c:numRef>
-              <c:f>Sheet1!$C$2:$C$5</c:f>
-              <c:numCache>
-                <c:formatCode>General</c:formatCode>
-                <c:ptCount val="4"/>
-                <c:pt idx="0">
-                  <c:v>20</c:v>
-                </c:pt>
-                <c:pt idx="1">
-                  <c:v>17</c:v>
-                </c:pt>
-                <c:pt idx="2">
-                  <c:v>16</c:v>
-                </c:pt>
-                <c:pt idx="3">
-                  <c:v>13</c:v>
-                </c:pt>
-              </c:numCache>
-            </c:numRef>
-          </c:val>
-        </c:ser>
-        <c:ser>
-          <c:idx val="2"/>
-          <c:order val="2"/>
-          <c:tx>
-            <c:strRef>
-              <c:f>Sheet1!$D$1</c:f>
-              <c:strCache>
-                <c:ptCount val="1"/>
-                <c:pt idx="0">
-                  <c:v>Whole corridor</c:v>
-                </c:pt>
-              </c:strCache>
-            </c:strRef>
-          </c:tx>
-          <c:spPr>
-            <a:solidFill>
-              <a:srgbClr val="17252A"/>
-            </a:solidFill>
-          </c:spPr>
-          <c:cat>
-            <c:strRef>
-              <c:f>Sheet1!$A$2:$A$5</c:f>
-              <c:strCache>
-                <c:ptCount val="4"/>
-                <c:pt idx="0">
-                  <c:v>Elegu (A6)</c:v>
-                </c:pt>
-                <c:pt idx="1">
-                  <c:v>Hoima (A9)</c:v>
-                </c:pt>
-                <c:pt idx="2">
-                  <c:v>Katuna (A2)</c:v>
-                </c:pt>
-                <c:pt idx="3">
-                  <c:v>Malaba (A1)</c:v>
-                </c:pt>
-              </c:strCache>
-            </c:strRef>
-          </c:cat>
-          <c:val>
-            <c:numRef>
-              <c:f>Sheet1!$D$2:$D$5</c:f>
-              <c:numCache>
-                <c:formatCode>General</c:formatCode>
-                <c:ptCount val="4"/>
-                <c:pt idx="0">
-                  <c:v>68</c:v>
-                </c:pt>
-                <c:pt idx="1">
-                  <c:v>57</c:v>
-                </c:pt>
-                <c:pt idx="2">
-                  <c:v>43</c:v>
-                </c:pt>
-                <c:pt idx="3">
-                  <c:v>27</c:v>
-                </c:pt>
-              </c:numCache>
-            </c:numRef>
-          </c:val>
-        </c:ser>
-        <c:dLbls>
-          <c:numFmt formatCode="&quot;+&quot;0&quot;%&quot;" sourceLinked="0"/>
-          <c:txPr>
-            <a:bodyPr/>
-            <a:lstStyle/>
-            <a:p>
-              <a:pPr>
-                <a:defRPr sz="1100">
-                  <a:solidFill>
-                    <a:srgbClr val="1E2528"/>
-                  </a:solidFill>
-                </a:defRPr>
-              </a:pPr>
-            </a:p>
-          </c:txPr>
-          <c:dLblPos val="outEnd"/>
-          <c:showLegendKey val="0"/>
-          <c:showVal val="1"/>
-          <c:showCatName val="0"/>
-          <c:showSerName val="0"/>
-          <c:showPercent val="0"/>
-          <c:showBubbleSize val="0"/>
-          <c:showLeaderLines val="1"/>
-        </c:dLbls>
-        <c:gapWidth val="45"/>
-        <c:overlap val="-5"/>
-        <c:axId val="-2068027336"/>
-        <c:axId val="-2113994440"/>
-      </c:barChart>
-      <c:catAx>
-        <c:axId val="-2068027336"/>
-        <c:scaling>
-          <c:orientation val="minMax"/>
-        </c:scaling>
-        <c:delete val="0"/>
-        <c:axPos val="b"/>
-        <c:majorTickMark val="out"/>
-        <c:minorTickMark val="none"/>
-        <c:tickLblPos val="nextTo"/>
-        <c:spPr>
-          <a:ln>
-            <a:solidFill>
-              <a:srgbClr val="B8C7C4"/>
-            </a:solidFill>
-          </a:ln>
-        </c:spPr>
-        <c:txPr>
-          <a:bodyPr/>
-          <a:lstStyle/>
-          <a:p>
-            <a:pPr>
-              <a:defRPr sz="1200"/>
-            </a:pPr>
-          </a:p>
-        </c:txPr>
-        <c:crossAx val="-2113994440"/>
-        <c:crosses val="autoZero"/>
-        <c:auto val="1"/>
-        <c:lblAlgn val="ctr"/>
-        <c:lblOffset val="100"/>
-        <c:noMultiLvlLbl val="0"/>
-      </c:catAx>
-      <c:valAx>
-        <c:axId val="-2113994440"/>
-        <c:scaling/>
-        <c:delete/>
-        <c:axPos val="l"/>
-        <c:majorTickMark val="out"/>
-        <c:minorTickMark val="none"/>
-        <c:tickLblPos val="nextTo"/>
-        <c:spPr>
-          <a:ln>
-            <a:noFill/>
-          </a:ln>
-        </c:spPr>
-        <c:txPr>
-          <a:bodyPr/>
-          <a:lstStyle/>
-          <a:p>
-            <a:pPr>
-              <a:defRPr sz="1100"/>
-            </a:pPr>
-          </a:p>
-        </c:txPr>
-        <c:crossAx val="-2068027336"/>
-        <c:crosses val="autoZero"/>
-      </c:valAx>
-    </c:plotArea>
-    <c:legend>
-      <c:legendPos val="t"/>
-      <c:overlay val="0"/>
-      <c:txPr>
-        <a:bodyPr/>
-        <a:lstStyle/>
-        <a:p>
-          <a:pPr>
-            <a:defRPr sz="1200"/>
-          </a:pPr>
-        </a:p>
-      </c:txPr>
-    </c:legend>
-    <c:dispBlanksAs val="gap"/>
-  </c:chart>
-  <c:txPr>
-    <a:bodyPr/>
-    <a:lstStyle/>
-    <a:p>
-      <a:pPr>
-        <a:defRPr sz="1200">
-          <a:solidFill>
-            <a:srgbClr val="5B6770"/>
-          </a:solidFill>
-          <a:latin typeface="Calibri"/>
-        </a:defRPr>
-      </a:pPr>
-      <a:endParaRPr lang="en-US"/>
-    </a:p>
-  </c:txPr>
-  <c:externalData r:id="rId1">
-    <c:autoUpdate val="0"/>
-  </c:externalData>
-</c:chartSpace>
-</file>
-
-<file path=ppt/charts/chart5.xml><?xml version="1.0" encoding="utf-8"?>
-<c:chartSpace xmlns:c="http://schemas.openxmlformats.org/drawingml/2006/chart" xmlns:a="http://schemas.openxmlformats.org/drawingml/2006/main" xmlns:r="http://schemas.openxmlformats.org/officeDocument/2006/relationships">
-  <c:date1904 val="0"/>
-  <c:chart>
-    <c:autoTitleDeleted val="0"/>
-    <c:plotArea>
-      <c:barChart>
-        <c:barDir val="col"/>
-        <c:grouping val="clustered"/>
-        <c:ser>
-          <c:idx val="0"/>
-          <c:order val="0"/>
-          <c:tx>
-            <c:strRef>
-              <c:f>Sheet1!$B$1</c:f>
-              <c:strCache>
-                <c:ptCount val="1"/>
-                <c:pt idx="0">
                   <c:v>Weigh-in-motion</c:v>
                 </c:pt>
               </c:strCache>
@@ -1624,9 +1383,9 @@
           </c:spPr>
           <c:cat>
             <c:strRef>
-              <c:f>Sheet1!$A$2:$A$5</c:f>
+              <c:f>Sheet1!$A$2:$A$6</c:f>
               <c:strCache>
-                <c:ptCount val="4"/>
+                <c:ptCount val="5"/>
                 <c:pt idx="0">
                   <c:v>Malaba (A1)</c:v>
                 </c:pt>
@@ -1638,16 +1397,19 @@
                 </c:pt>
                 <c:pt idx="3">
                   <c:v>Hoima (A9)</c:v>
+                </c:pt>
+                <c:pt idx="4">
+                  <c:v>Bwera (A5)</c:v>
                 </c:pt>
               </c:strCache>
             </c:strRef>
           </c:cat>
           <c:val>
             <c:numRef>
-              <c:f>Sheet1!$B$2:$B$5</c:f>
+              <c:f>Sheet1!$B$2:$B$6</c:f>
               <c:numCache>
                 <c:formatCode>General</c:formatCode>
-                <c:ptCount val="4"/>
+                <c:ptCount val="5"/>
                 <c:pt idx="0">
                   <c:v>16.0</c:v>
                 </c:pt>
@@ -1658,6 +1420,9 @@
                   <c:v>16.0</c:v>
                 </c:pt>
                 <c:pt idx="3">
+                  <c:v>0.0</c:v>
+                </c:pt>
+                <c:pt idx="4">
                   <c:v>0.0</c:v>
                 </c:pt>
               </c:numCache>
@@ -1685,9 +1450,9 @@
           </c:spPr>
           <c:cat>
             <c:strRef>
-              <c:f>Sheet1!$A$2:$A$5</c:f>
+              <c:f>Sheet1!$A$2:$A$6</c:f>
               <c:strCache>
-                <c:ptCount val="4"/>
+                <c:ptCount val="5"/>
                 <c:pt idx="0">
                   <c:v>Malaba (A1)</c:v>
                 </c:pt>
@@ -1699,16 +1464,19 @@
                 </c:pt>
                 <c:pt idx="3">
                   <c:v>Hoima (A9)</c:v>
+                </c:pt>
+                <c:pt idx="4">
+                  <c:v>Bwera (A5)</c:v>
                 </c:pt>
               </c:strCache>
             </c:strRef>
           </c:cat>
           <c:val>
             <c:numRef>
-              <c:f>Sheet1!$C$2:$C$5</c:f>
+              <c:f>Sheet1!$C$2:$C$6</c:f>
               <c:numCache>
                 <c:formatCode>General</c:formatCode>
-                <c:ptCount val="4"/>
+                <c:ptCount val="5"/>
                 <c:pt idx="0">
                   <c:v>10.0</c:v>
                 </c:pt>
@@ -1720,6 +1488,9 @@
                 </c:pt>
                 <c:pt idx="3">
                   <c:v>4.0</c:v>
+                </c:pt>
+                <c:pt idx="4">
+                  <c:v>5.0</c:v>
                 </c:pt>
               </c:numCache>
             </c:numRef>
@@ -1746,9 +1517,9 @@
           </c:spPr>
           <c:cat>
             <c:strRef>
-              <c:f>Sheet1!$A$2:$A$5</c:f>
+              <c:f>Sheet1!$A$2:$A$6</c:f>
               <c:strCache>
-                <c:ptCount val="4"/>
+                <c:ptCount val="5"/>
                 <c:pt idx="0">
                   <c:v>Malaba (A1)</c:v>
                 </c:pt>
@@ -1760,26 +1531,32 @@
                 </c:pt>
                 <c:pt idx="3">
                   <c:v>Hoima (A9)</c:v>
+                </c:pt>
+                <c:pt idx="4">
+                  <c:v>Bwera (A5)</c:v>
                 </c:pt>
               </c:strCache>
             </c:strRef>
           </c:cat>
           <c:val>
             <c:numRef>
-              <c:f>Sheet1!$D$2:$D$5</c:f>
+              <c:f>Sheet1!$D$2:$D$6</c:f>
               <c:numCache>
                 <c:formatCode>General</c:formatCode>
-                <c:ptCount val="4"/>
+                <c:ptCount val="5"/>
                 <c:pt idx="0">
-                  <c:v>3.8</c:v>
+                  <c:v>4.1</c:v>
                 </c:pt>
                 <c:pt idx="1">
-                  <c:v>2.0</c:v>
+                  <c:v>2.1</c:v>
                 </c:pt>
                 <c:pt idx="2">
-                  <c:v>4.7</c:v>
+                  <c:v>3.2</c:v>
                 </c:pt>
                 <c:pt idx="3">
+                  <c:v>0.0</c:v>
+                </c:pt>
+                <c:pt idx="4">
                   <c:v>0.0</c:v>
                 </c:pt>
               </c:numCache>
@@ -1807,9 +1584,9 @@
           </c:spPr>
           <c:cat>
             <c:strRef>
-              <c:f>Sheet1!$A$2:$A$5</c:f>
+              <c:f>Sheet1!$A$2:$A$6</c:f>
               <c:strCache>
-                <c:ptCount val="4"/>
+                <c:ptCount val="5"/>
                 <c:pt idx="0">
                   <c:v>Malaba (A1)</c:v>
                 </c:pt>
@@ -1821,27 +1598,33 @@
                 </c:pt>
                 <c:pt idx="3">
                   <c:v>Hoima (A9)</c:v>
+                </c:pt>
+                <c:pt idx="4">
+                  <c:v>Bwera (A5)</c:v>
                 </c:pt>
               </c:strCache>
             </c:strRef>
           </c:cat>
           <c:val>
             <c:numRef>
-              <c:f>Sheet1!$E$2:$E$5</c:f>
+              <c:f>Sheet1!$E$2:$E$6</c:f>
               <c:numCache>
                 <c:formatCode>General</c:formatCode>
-                <c:ptCount val="4"/>
+                <c:ptCount val="5"/>
                 <c:pt idx="0">
                   <c:v>10.5</c:v>
                 </c:pt>
                 <c:pt idx="1">
-                  <c:v>15.5</c:v>
+                  <c:v>15.4</c:v>
                 </c:pt>
                 <c:pt idx="2">
-                  <c:v>16.9</c:v>
+                  <c:v>17.0</c:v>
                 </c:pt>
                 <c:pt idx="3">
-                  <c:v>9.8</c:v>
+                  <c:v>9.7</c:v>
+                </c:pt>
+                <c:pt idx="4">
+                  <c:v>23.0</c:v>
                 </c:pt>
               </c:numCache>
             </c:numRef>
@@ -1854,7 +1637,7 @@
             <a:lstStyle/>
             <a:p>
               <a:pPr>
-                <a:defRPr sz="1100">
+                <a:defRPr sz="1000">
                   <a:solidFill>
                     <a:srgbClr val="1E2528"/>
                   </a:solidFill>
@@ -1898,7 +1681,7 @@
           <a:lstStyle/>
           <a:p>
             <a:pPr>
-              <a:defRPr sz="1200"/>
+              <a:defRPr sz="1100"/>
             </a:pPr>
           </a:p>
         </c:txPr>
@@ -1936,7 +1719,7 @@
           <a:lstStyle/>
           <a:p>
             <a:pPr>
-              <a:defRPr sz="1100"/>
+              <a:defRPr sz="1000"/>
             </a:pPr>
           </a:p>
         </c:txPr>
@@ -1952,7 +1735,7 @@
         <a:lstStyle/>
         <a:p>
           <a:pPr>
-            <a:defRPr sz="1200"/>
+            <a:defRPr sz="1100"/>
           </a:pPr>
         </a:p>
       </c:txPr>
@@ -1964,7 +1747,7 @@
     <a:lstStyle/>
     <a:p>
       <a:pPr>
-        <a:defRPr sz="1200">
+        <a:defRPr sz="1100">
           <a:solidFill>
             <a:srgbClr val="5B6770"/>
           </a:solidFill>
@@ -1980,7 +1763,7 @@
 </c:chartSpace>
 </file>
 
-<file path=ppt/charts/chart6.xml><?xml version="1.0" encoding="utf-8"?>
+<file path=ppt/charts/chart5.xml><?xml version="1.0" encoding="utf-8"?>
 <c:chartSpace xmlns:c="http://schemas.openxmlformats.org/drawingml/2006/chart" xmlns:a="http://schemas.openxmlformats.org/drawingml/2006/main" xmlns:r="http://schemas.openxmlformats.org/officeDocument/2006/relationships">
   <c:date1904 val="0"/>
   <c:chart>
@@ -2010,9 +1793,9 @@
           </c:spPr>
           <c:cat>
             <c:strRef>
-              <c:f>Sheet1!$A$2:$A$5</c:f>
+              <c:f>Sheet1!$A$2:$A$6</c:f>
               <c:strCache>
-                <c:ptCount val="4"/>
+                <c:ptCount val="5"/>
                 <c:pt idx="0">
                   <c:v>Malaba (A1)</c:v>
                 </c:pt>
@@ -2024,27 +1807,33 @@
                 </c:pt>
                 <c:pt idx="3">
                   <c:v>Hoima (A9)</c:v>
+                </c:pt>
+                <c:pt idx="4">
+                  <c:v>Bwera (A5)</c:v>
                 </c:pt>
               </c:strCache>
             </c:strRef>
           </c:cat>
           <c:val>
             <c:numRef>
-              <c:f>Sheet1!$B$2:$B$5</c:f>
+              <c:f>Sheet1!$B$2:$B$6</c:f>
               <c:numCache>
                 <c:formatCode>General</c:formatCode>
-                <c:ptCount val="4"/>
+                <c:ptCount val="5"/>
                 <c:pt idx="0">
                   <c:v>0.49</c:v>
                 </c:pt>
                 <c:pt idx="1">
-                  <c:v>0.57</c:v>
+                  <c:v>0.56</c:v>
                 </c:pt>
                 <c:pt idx="2">
                   <c:v>0.51</c:v>
                 </c:pt>
                 <c:pt idx="3">
-                  <c:v>0.66</c:v>
+                  <c:v>0.65</c:v>
+                </c:pt>
+                <c:pt idx="4">
+                  <c:v>0.76</c:v>
                 </c:pt>
               </c:numCache>
             </c:numRef>
@@ -2071,9 +1860,9 @@
           </c:spPr>
           <c:cat>
             <c:strRef>
-              <c:f>Sheet1!$A$2:$A$5</c:f>
+              <c:f>Sheet1!$A$2:$A$6</c:f>
               <c:strCache>
-                <c:ptCount val="4"/>
+                <c:ptCount val="5"/>
                 <c:pt idx="0">
                   <c:v>Malaba (A1)</c:v>
                 </c:pt>
@@ -2085,27 +1874,33 @@
                 </c:pt>
                 <c:pt idx="3">
                   <c:v>Hoima (A9)</c:v>
+                </c:pt>
+                <c:pt idx="4">
+                  <c:v>Bwera (A5)</c:v>
                 </c:pt>
               </c:strCache>
             </c:strRef>
           </c:cat>
           <c:val>
             <c:numRef>
-              <c:f>Sheet1!$C$2:$C$5</c:f>
+              <c:f>Sheet1!$C$2:$C$6</c:f>
               <c:numCache>
                 <c:formatCode>General</c:formatCode>
-                <c:ptCount val="4"/>
+                <c:ptCount val="5"/>
                 <c:pt idx="0">
-                  <c:v>0.66</c:v>
+                  <c:v>0.65</c:v>
                 </c:pt>
                 <c:pt idx="1">
-                  <c:v>0.73</c:v>
+                  <c:v>0.72</c:v>
                 </c:pt>
                 <c:pt idx="2">
                   <c:v>0.7</c:v>
                 </c:pt>
                 <c:pt idx="3">
-                  <c:v>0.81</c:v>
+                  <c:v>0.79</c:v>
+                </c:pt>
+                <c:pt idx="4">
+                  <c:v>0.79</c:v>
                 </c:pt>
               </c:numCache>
             </c:numRef>
@@ -2642,7 +2437,7 @@
           <a:lstStyle/>
           <a:p>
             <a:r>
-              <a:t>This study looks at the four main roads out of Kampala. They were built to carry freight to the borders, but along much of their length they now also serve as the main street of villages and towns.</a:t>
+              <a:t>This study looks at the five main roads out of Kampala. They were built to carry freight to the borders, but along much of their length they now also serve as the main street of villages and towns.</a:t>
             </a:r>
           </a:p>
         </p:txBody>
@@ -2712,7 +2507,7 @@
           <a:lstStyle/>
           <a:p>
             <a:r>
-              <a:t>scripts/23_rail.py. Alignments minimise length x grade above 1.5% x built-up share inside 25 km of each road; screening only. Capital cost from the eastern SGR contract (EUR 2.7 bn for 273 km). 30% of each road's truck freight moved (15-50%). Kenya's Naivasha-Malaba SGR link is not built, which the through-traffic case needs.</a:t>
+              <a:t>scripts/23_rail.py. Alignments minimise length x grade above 1.5% x built-up share inside 25 km of each road; screening only. Capital cost from the eastern SGR contract (EUR 2.7 bn for 273 km). 30% of each road's truck freight moved (15-50%). Eastern line with through traffic: benefit/cost 0.03 (up to 0.13).</a:t>
             </a:r>
           </a:p>
         </p:txBody>
@@ -2782,7 +2577,7 @@
           <a:lstStyle/>
           <a:p>
             <a:r>
-              <a:t>These are implications from a light-traffic model, not project appraisals. The weighbridge saving assumes about ten minutes per stop, which is itself an assumption with a wide range.</a:t>
+              <a:t>These are implications from a light-traffic model, not project appraisals. The weighbridge stop assumption is now supported by the Observatory's measured median of 12 minutes.</a:t>
             </a:r>
           </a:p>
         </p:txBody>
@@ -2852,7 +2647,7 @@
           <a:lstStyle/>
           <a:p>
             <a:r>
-              <a:t>Together the four corridors cover about 1,270 km. Three reach a border; the Hoima road serves the oil region. Almost all of Uganda's imports and exports, and transit freight to South Sudan, Rwanda and DR Congo, use them.</a:t>
+              <a:t>Together the five corridors cover about 1,686 km. Four reach a border; the Hoima road serves the oil region. The Bwera road (A5) was added after the regional search found it as Kampala's fifth national route out of the city.</a:t>
             </a:r>
           </a:p>
         </p:txBody>
@@ -2922,7 +2717,7 @@
           <a:lstStyle/>
           <a:p>
             <a:r>
-              <a:t>Shares come from clustering 500 m pieces of road into three types. Most of each corridor is now roadside settlement; towns are 8–22% of length. Building counts are Google Open Buildings v3.</a:t>
+              <a:t>Shares come from clustering 500 m pieces of road into three types. Towns are 4–22% of length. Building counts are Google Open Buildings v3.</a:t>
             </a:r>
           </a:p>
         </p:txBody>
@@ -2992,7 +2787,7 @@
           <a:lstStyle/>
           <a:p>
             <a:r>
-              <a:t>The framing is deliberate: without usable traffic data, the study measures causes rather than observing speeds. This matches the approach of the companion accessibility study.</a:t>
+              <a:t>All assumptions and their ranges are at the top of scripts/travel_model.py. Congestion is not modelled: results describe light traffic. Fuel uses a physical model on the same speed profile (scripts/26_fuel_co2.py).</a:t>
             </a:r>
           </a:p>
         </p:txBody>
@@ -3062,7 +2857,7 @@
           <a:lstStyle/>
           <a:p>
             <a:r>
-              <a:t>Each piece starts at an open-road speed, reduced by roadside activity, joining roads, a town limit, curves, and for trucks, hills. Fixed delays are added for signals, crossings, assumed humps in towns, police posts and weighbridges. All assumptions and their ranges are at the top of 10_travel_time.py. Congestion is not modelled: results describe light traffic.</a:t>
+              <a:t>Totals for a truck (model vs open-road-only): Malaba 304 vs 185 min; Elegu 476 vs 369 min; Katuna 526 vs 365 min; Hoima 226 vs 167 min; Bwera 482 vs 358 min. Report rankings with their Monte Carlo shares, not as single numbers.</a:t>
             </a:r>
           </a:p>
         </p:txBody>
@@ -3132,7 +2927,7 @@
           <a:lstStyle/>
           <a:p>
             <a:r>
-              <a:t>Totals for a truck (model vs open-road-only): Malaba 304 vs 185 min, Elegu 476 vs 369, Katuna 527 vs 365, Hoima 226 vs 167. Monte Carlo ranges: roadside activity for trucks spans roughly 10–74 min; police posts 1–71 min; humps 1–45 min. Report rankings with their Monte Carlo shares, not as single numbers.</a:t>
+              <a:t>figures/a2_corridor_race.gif, from scripts/13_animations.py.</a:t>
             </a:r>
           </a:p>
         </p:txBody>
@@ -3202,7 +2997,7 @@
           <a:lstStyle/>
           <a:p>
             <a:r>
-              <a:t>figures/a2_corridor_race.gif, from scripts/13_animations.py.</a:t>
+              <a:t>Numbers come from outputs/hotspots_mapped.csv. Close-ups of each hotspot are in figures/m03_hotspots.png and figures/hotspots/, and one atlas sheet per corridor in figures/m05_atlas_*.png.</a:t>
             </a:r>
           </a:p>
         </p:txBody>
@@ -3272,7 +3067,7 @@
           <a:lstStyle/>
           <a:p>
             <a:r>
-              <a:t>Numbers come from outputs/hotspots_mapped.csv. Close-ups of each hotspot are in figures/m03_hotspots.png and figures/hotspots/, and one atlas sheet per corridor in figures/m05_atlas_*.png.</a:t>
+              <a:t>Hectares within 300 m, 2000 to 2020: Malaba 1,078 to 1,370; Elegu 855 to 1,437; Katuna 1,184 to 1,700; Hoima 477 to 748; Bwera 856 to 1,345. GHSL's projection gives only +5–10% for 2020–2026, far slower than the observed trend.</a:t>
             </a:r>
           </a:p>
         </p:txBody>
@@ -3342,7 +3137,7 @@
           <a:lstStyle/>
           <a:p>
             <a:r>
-              <a:t>Hectares within 300 m, 2000 to 2020: Elegu 855 to 1,437; Hoima 477 to 748; Katuna 1,188 to 1,704; Malaba 1,078 to 1,370. GHSL's projection gives only +5–9% for 2020–2026, far slower than the observed trend, so it probably understates recent building.</a:t>
+              <a:t>The Malaba border crossing averaged 48 min in 2025 (Busia 2.55 h), against about 2 h lost to friction on the Kampala–Malaba road. Fixing roadside friction matters for reliability and safety, but truck transit time is dominated by stops: rest, border procedures, insecurity and administrative checks.</a:t>
             </a:r>
           </a:p>
         </p:txBody>
@@ -6372,8 +6167,8 @@
         </p:blipFill>
         <p:spPr>
           <a:xfrm>
-            <a:off x="5897880" y="411480"/>
-            <a:ext cx="6161827" cy="6035040"/>
+            <a:off x="5806440" y="457200"/>
+            <a:ext cx="6225409" cy="5943600"/>
           </a:xfrm>
           <a:prstGeom prst="rect">
             <a:avLst/>
@@ -6492,7 +6287,7 @@
                 </a:solidFill>
                 <a:latin typeface="Calibri"/>
               </a:rPr>
-              <a:t>What slows Uganda's main trade corridors, what each cause costs in travel time, and how fast the roadside is filling in</a:t>
+              <a:t>What slows Uganda's main trade corridors, what each cause costs in time, fuel and safety, and how fast the roadside is filling in</a:t>
             </a:r>
           </a:p>
         </p:txBody>
@@ -6596,7 +6391,7 @@
                 </a:solidFill>
                 <a:latin typeface="Cambria"/>
               </a:rPr>
-              <a:t>The same truck, five roads</a:t>
+              <a:t>The same truck, every road</a:t>
             </a:r>
           </a:p>
         </p:txBody>
@@ -6872,7 +6667,7 @@
                 </a:solidFill>
                 <a:latin typeface="Calibri"/>
               </a:rPr>
-              <a:t>1</a:t>
+              <a:t>2</a:t>
             </a:r>
           </a:p>
         </p:txBody>
@@ -6911,7 +6706,7 @@
                 </a:solidFill>
                 <a:latin typeface="Calibri"/>
               </a:rPr>
-              <a:t>Nakawa, Kampala end of A1</a:t>
+              <a:t>Buwanga B, Malaba road km 98</a:t>
             </a:r>
           </a:p>
         </p:txBody>
@@ -6950,7 +6745,7 @@
                 </a:solidFill>
                 <a:latin typeface="Calibri"/>
               </a:rPr>
-              <a:t>+8.5 truck / +7.6 car min · signals and crossings</a:t>
+              <a:t>+12.3 truck min · weighbridge</a:t>
             </a:r>
           </a:p>
         </p:txBody>
@@ -7042,7 +6837,7 @@
                 </a:solidFill>
                 <a:latin typeface="Calibri"/>
               </a:rPr>
-              <a:t>Lukaya, A2</a:t>
+              <a:t>Magezi Cell, Katuna road km 98</a:t>
             </a:r>
           </a:p>
         </p:txBody>
@@ -7081,7 +6876,7 @@
                 </a:solidFill>
                 <a:latin typeface="Calibri"/>
               </a:rPr>
-              <a:t>+11.9 truck min · weighbridge</a:t>
+              <a:t>+11.7 truck min · weighbridge</a:t>
             </a:r>
           </a:p>
         </p:txBody>
@@ -7134,7 +6929,7 @@
                 </a:solidFill>
                 <a:latin typeface="Calibri"/>
               </a:rPr>
-              <a:t>2</a:t>
+              <a:t>3</a:t>
             </a:r>
           </a:p>
         </p:txBody>
@@ -7173,7 +6968,7 @@
                 </a:solidFill>
                 <a:latin typeface="Calibri"/>
               </a:rPr>
-              <a:t>Magamaga, A1</a:t>
+              <a:t>Namutere, Malaba road km 174</a:t>
             </a:r>
           </a:p>
         </p:txBody>
@@ -7212,7 +7007,7 @@
                 </a:solidFill>
                 <a:latin typeface="Calibri"/>
               </a:rPr>
-              <a:t>+12.3 truck min · weighbridge, police post</a:t>
+              <a:t>+10.8 truck min · weighbridge</a:t>
             </a:r>
           </a:p>
         </p:txBody>
@@ -7265,7 +7060,7 @@
                 </a:solidFill>
                 <a:latin typeface="Calibri"/>
               </a:rPr>
-              <a:t>5</a:t>
+              <a:t>4</a:t>
             </a:r>
           </a:p>
         </p:txBody>
@@ -7304,7 +7099,7 @@
                 </a:solidFill>
                 <a:latin typeface="Calibri"/>
               </a:rPr>
-              <a:t>Elegu border</a:t>
+              <a:t>Kizito, Elegu road km 60</a:t>
             </a:r>
           </a:p>
         </p:txBody>
@@ -7343,7 +7138,7 @@
                 </a:solidFill>
                 <a:latin typeface="Calibri"/>
               </a:rPr>
-              <a:t>+4.0 truck min · police posts</a:t>
+              <a:t>+10.8 truck min · weighbridge</a:t>
             </a:r>
           </a:p>
         </p:txBody>
@@ -7382,7 +7177,7 @@
                 </a:solidFill>
                 <a:latin typeface="Calibri"/>
               </a:rPr>
-              <a:t>Eight of the ten worst stretches are led by weighbridges, police posts or signals; the other two are in Hoima town.</a:t>
+              <a:t>10 of the 13 worst stretches are led by weighbridges, police posts or signals.</a:t>
             </a:r>
           </a:p>
         </p:txBody>
@@ -7491,42 +7286,644 @@
           </a:p>
         </p:txBody>
       </p:sp>
-      <p:graphicFrame>
-        <p:nvGraphicFramePr>
-          <p:cNvPr id="4" name="Chart 3"/>
-          <p:cNvGraphicFramePr>
-            <a:graphicFrameLocks noGrp="1"/>
-          </p:cNvGraphicFramePr>
-          <p:nvPr/>
-        </p:nvGraphicFramePr>
-        <p:xfrm>
-          <a:off x="457200" y="1691640"/>
-          <a:ext cx="4114800" cy="4572000"/>
-        </p:xfrm>
-        <a:graphic>
-          <a:graphicData uri="http://schemas.openxmlformats.org/drawingml/2006/chart">
-            <c:chart xmlns:c="http://schemas.openxmlformats.org/drawingml/2006/chart" r:id="rId2"/>
-          </a:graphicData>
-        </a:graphic>
-      </p:graphicFrame>
+      <p:sp>
+        <p:nvSpPr>
+          <p:cNvPr id="4" name="Rounded Rectangle 3"/>
+          <p:cNvSpPr/>
+          <p:nvPr/>
+        </p:nvSpPr>
+        <p:spPr>
+          <a:xfrm>
+            <a:off x="548640" y="1691640"/>
+            <a:ext cx="2103120" cy="685800"/>
+          </a:xfrm>
+          <a:prstGeom prst="roundRect">
+            <a:avLst>
+              <a:gd name="adj" fmla="val 6000"/>
+            </a:avLst>
+          </a:prstGeom>
+          <a:solidFill>
+            <a:srgbClr val="EEF2F0"/>
+          </a:solidFill>
+          <a:ln>
+            <a:noFill/>
+          </a:ln>
+          <a:effectLst/>
+        </p:spPr>
+        <p:style>
+          <a:lnRef idx="1">
+            <a:schemeClr val="accent1"/>
+          </a:lnRef>
+          <a:fillRef idx="3">
+            <a:schemeClr val="accent1"/>
+          </a:fillRef>
+          <a:effectRef idx="2">
+            <a:schemeClr val="accent1"/>
+          </a:effectRef>
+          <a:fontRef idx="minor">
+            <a:schemeClr val="lt1"/>
+          </a:fontRef>
+        </p:style>
+        <p:txBody>
+          <a:bodyPr rtlCol="0" anchor="ctr"/>
+          <a:lstStyle/>
+          <a:p>
+            <a:pPr algn="ctr"/>
+          </a:p>
+        </p:txBody>
+      </p:sp>
+      <p:sp>
+        <p:nvSpPr>
+          <p:cNvPr id="5" name="TextBox 4"/>
+          <p:cNvSpPr txBox="1"/>
+          <p:nvPr/>
+        </p:nvSpPr>
+        <p:spPr>
+          <a:xfrm>
+            <a:off x="685800" y="1737360"/>
+            <a:ext cx="1938528" cy="365760"/>
+          </a:xfrm>
+          <a:prstGeom prst="rect">
+            <a:avLst/>
+          </a:prstGeom>
+          <a:noFill/>
+        </p:spPr>
+        <p:txBody>
+          <a:bodyPr wrap="square" lIns="0" rIns="0" tIns="0" bIns="0" anchor="t">
+            <a:spAutoFit/>
+          </a:bodyPr>
+          <a:lstStyle/>
+          <a:p>
+            <a:pPr algn="l">
+              <a:spcAft>
+                <a:spcPts val="0"/>
+              </a:spcAft>
+            </a:pPr>
+            <a:r>
+              <a:rPr sz="2200" b="1" i="0">
+                <a:solidFill>
+                  <a:srgbClr val="C4532D"/>
+                </a:solidFill>
+                <a:latin typeface="Cambria"/>
+              </a:rPr>
+              <a:t>+68%</a:t>
+            </a:r>
+          </a:p>
+        </p:txBody>
+      </p:sp>
+      <p:sp>
+        <p:nvSpPr>
+          <p:cNvPr id="6" name="TextBox 5"/>
+          <p:cNvSpPr txBox="1"/>
+          <p:nvPr/>
+        </p:nvSpPr>
+        <p:spPr>
+          <a:xfrm>
+            <a:off x="1737360" y="1828800"/>
+            <a:ext cx="886968" cy="457200"/>
+          </a:xfrm>
+          <a:prstGeom prst="rect">
+            <a:avLst/>
+          </a:prstGeom>
+          <a:noFill/>
+        </p:spPr>
+        <p:txBody>
+          <a:bodyPr wrap="square" lIns="0" rIns="0" tIns="0" bIns="0" anchor="t">
+            <a:spAutoFit/>
+          </a:bodyPr>
+          <a:lstStyle/>
+          <a:p>
+            <a:pPr algn="l">
+              <a:spcAft>
+                <a:spcPts val="0"/>
+              </a:spcAft>
+            </a:pPr>
+            <a:r>
+              <a:rPr sz="1300" b="0" i="0">
+                <a:solidFill>
+                  <a:srgbClr val="1E2528"/>
+                </a:solidFill>
+                <a:latin typeface="Calibri"/>
+              </a:rPr>
+              <a:t>Elegu (A6)</a:t>
+            </a:r>
+          </a:p>
+        </p:txBody>
+      </p:sp>
+      <p:sp>
+        <p:nvSpPr>
+          <p:cNvPr id="7" name="Rounded Rectangle 6"/>
+          <p:cNvSpPr/>
+          <p:nvPr/>
+        </p:nvSpPr>
+        <p:spPr>
+          <a:xfrm>
+            <a:off x="2761488" y="1691640"/>
+            <a:ext cx="2103120" cy="685800"/>
+          </a:xfrm>
+          <a:prstGeom prst="roundRect">
+            <a:avLst>
+              <a:gd name="adj" fmla="val 6000"/>
+            </a:avLst>
+          </a:prstGeom>
+          <a:solidFill>
+            <a:srgbClr val="EEF2F0"/>
+          </a:solidFill>
+          <a:ln>
+            <a:noFill/>
+          </a:ln>
+          <a:effectLst/>
+        </p:spPr>
+        <p:style>
+          <a:lnRef idx="1">
+            <a:schemeClr val="accent1"/>
+          </a:lnRef>
+          <a:fillRef idx="3">
+            <a:schemeClr val="accent1"/>
+          </a:fillRef>
+          <a:effectRef idx="2">
+            <a:schemeClr val="accent1"/>
+          </a:effectRef>
+          <a:fontRef idx="minor">
+            <a:schemeClr val="lt1"/>
+          </a:fontRef>
+        </p:style>
+        <p:txBody>
+          <a:bodyPr rtlCol="0" anchor="ctr"/>
+          <a:lstStyle/>
+          <a:p>
+            <a:pPr algn="ctr"/>
+          </a:p>
+        </p:txBody>
+      </p:sp>
+      <p:sp>
+        <p:nvSpPr>
+          <p:cNvPr id="8" name="TextBox 7"/>
+          <p:cNvSpPr txBox="1"/>
+          <p:nvPr/>
+        </p:nvSpPr>
+        <p:spPr>
+          <a:xfrm>
+            <a:off x="2898648" y="1737360"/>
+            <a:ext cx="1938528" cy="365760"/>
+          </a:xfrm>
+          <a:prstGeom prst="rect">
+            <a:avLst/>
+          </a:prstGeom>
+          <a:noFill/>
+        </p:spPr>
+        <p:txBody>
+          <a:bodyPr wrap="square" lIns="0" rIns="0" tIns="0" bIns="0" anchor="t">
+            <a:spAutoFit/>
+          </a:bodyPr>
+          <a:lstStyle/>
+          <a:p>
+            <a:pPr algn="l">
+              <a:spcAft>
+                <a:spcPts val="0"/>
+              </a:spcAft>
+            </a:pPr>
+            <a:r>
+              <a:rPr sz="2200" b="1" i="0">
+                <a:solidFill>
+                  <a:srgbClr val="C4532D"/>
+                </a:solidFill>
+                <a:latin typeface="Cambria"/>
+              </a:rPr>
+              <a:t>+57%</a:t>
+            </a:r>
+          </a:p>
+        </p:txBody>
+      </p:sp>
+      <p:sp>
+        <p:nvSpPr>
+          <p:cNvPr id="9" name="TextBox 8"/>
+          <p:cNvSpPr txBox="1"/>
+          <p:nvPr/>
+        </p:nvSpPr>
+        <p:spPr>
+          <a:xfrm>
+            <a:off x="3950208" y="1828800"/>
+            <a:ext cx="886968" cy="457200"/>
+          </a:xfrm>
+          <a:prstGeom prst="rect">
+            <a:avLst/>
+          </a:prstGeom>
+          <a:noFill/>
+        </p:spPr>
+        <p:txBody>
+          <a:bodyPr wrap="square" lIns="0" rIns="0" tIns="0" bIns="0" anchor="t">
+            <a:spAutoFit/>
+          </a:bodyPr>
+          <a:lstStyle/>
+          <a:p>
+            <a:pPr algn="l">
+              <a:spcAft>
+                <a:spcPts val="0"/>
+              </a:spcAft>
+            </a:pPr>
+            <a:r>
+              <a:rPr sz="1300" b="0" i="0">
+                <a:solidFill>
+                  <a:srgbClr val="1E2528"/>
+                </a:solidFill>
+                <a:latin typeface="Calibri"/>
+              </a:rPr>
+              <a:t>Hoima (A9)</a:t>
+            </a:r>
+          </a:p>
+        </p:txBody>
+      </p:sp>
+      <p:sp>
+        <p:nvSpPr>
+          <p:cNvPr id="10" name="Rounded Rectangle 9"/>
+          <p:cNvSpPr/>
+          <p:nvPr/>
+        </p:nvSpPr>
+        <p:spPr>
+          <a:xfrm>
+            <a:off x="4974336" y="1691640"/>
+            <a:ext cx="2103120" cy="685800"/>
+          </a:xfrm>
+          <a:prstGeom prst="roundRect">
+            <a:avLst>
+              <a:gd name="adj" fmla="val 6000"/>
+            </a:avLst>
+          </a:prstGeom>
+          <a:solidFill>
+            <a:srgbClr val="EEF2F0"/>
+          </a:solidFill>
+          <a:ln>
+            <a:noFill/>
+          </a:ln>
+          <a:effectLst/>
+        </p:spPr>
+        <p:style>
+          <a:lnRef idx="1">
+            <a:schemeClr val="accent1"/>
+          </a:lnRef>
+          <a:fillRef idx="3">
+            <a:schemeClr val="accent1"/>
+          </a:fillRef>
+          <a:effectRef idx="2">
+            <a:schemeClr val="accent1"/>
+          </a:effectRef>
+          <a:fontRef idx="minor">
+            <a:schemeClr val="lt1"/>
+          </a:fontRef>
+        </p:style>
+        <p:txBody>
+          <a:bodyPr rtlCol="0" anchor="ctr"/>
+          <a:lstStyle/>
+          <a:p>
+            <a:pPr algn="ctr"/>
+          </a:p>
+        </p:txBody>
+      </p:sp>
+      <p:sp>
+        <p:nvSpPr>
+          <p:cNvPr id="11" name="TextBox 10"/>
+          <p:cNvSpPr txBox="1"/>
+          <p:nvPr/>
+        </p:nvSpPr>
+        <p:spPr>
+          <a:xfrm>
+            <a:off x="5111496" y="1737360"/>
+            <a:ext cx="1938528" cy="365760"/>
+          </a:xfrm>
+          <a:prstGeom prst="rect">
+            <a:avLst/>
+          </a:prstGeom>
+          <a:noFill/>
+        </p:spPr>
+        <p:txBody>
+          <a:bodyPr wrap="square" lIns="0" rIns="0" tIns="0" bIns="0" anchor="t">
+            <a:spAutoFit/>
+          </a:bodyPr>
+          <a:lstStyle/>
+          <a:p>
+            <a:pPr algn="l">
+              <a:spcAft>
+                <a:spcPts val="0"/>
+              </a:spcAft>
+            </a:pPr>
+            <a:r>
+              <a:rPr sz="2200" b="1" i="0">
+                <a:solidFill>
+                  <a:srgbClr val="C4532D"/>
+                </a:solidFill>
+                <a:latin typeface="Cambria"/>
+              </a:rPr>
+              <a:t>+57%</a:t>
+            </a:r>
+          </a:p>
+        </p:txBody>
+      </p:sp>
+      <p:sp>
+        <p:nvSpPr>
+          <p:cNvPr id="12" name="TextBox 11"/>
+          <p:cNvSpPr txBox="1"/>
+          <p:nvPr/>
+        </p:nvSpPr>
+        <p:spPr>
+          <a:xfrm>
+            <a:off x="6163055" y="1828800"/>
+            <a:ext cx="886968" cy="457200"/>
+          </a:xfrm>
+          <a:prstGeom prst="rect">
+            <a:avLst/>
+          </a:prstGeom>
+          <a:noFill/>
+        </p:spPr>
+        <p:txBody>
+          <a:bodyPr wrap="square" lIns="0" rIns="0" tIns="0" bIns="0" anchor="t">
+            <a:spAutoFit/>
+          </a:bodyPr>
+          <a:lstStyle/>
+          <a:p>
+            <a:pPr algn="l">
+              <a:spcAft>
+                <a:spcPts val="0"/>
+              </a:spcAft>
+            </a:pPr>
+            <a:r>
+              <a:rPr sz="1300" b="0" i="0">
+                <a:solidFill>
+                  <a:srgbClr val="1E2528"/>
+                </a:solidFill>
+                <a:latin typeface="Calibri"/>
+              </a:rPr>
+              <a:t>Bwera (A5)</a:t>
+            </a:r>
+          </a:p>
+        </p:txBody>
+      </p:sp>
+      <p:sp>
+        <p:nvSpPr>
+          <p:cNvPr id="13" name="Rounded Rectangle 12"/>
+          <p:cNvSpPr/>
+          <p:nvPr/>
+        </p:nvSpPr>
+        <p:spPr>
+          <a:xfrm>
+            <a:off x="7187183" y="1691640"/>
+            <a:ext cx="2103120" cy="685800"/>
+          </a:xfrm>
+          <a:prstGeom prst="roundRect">
+            <a:avLst>
+              <a:gd name="adj" fmla="val 6000"/>
+            </a:avLst>
+          </a:prstGeom>
+          <a:solidFill>
+            <a:srgbClr val="EEF2F0"/>
+          </a:solidFill>
+          <a:ln>
+            <a:noFill/>
+          </a:ln>
+          <a:effectLst/>
+        </p:spPr>
+        <p:style>
+          <a:lnRef idx="1">
+            <a:schemeClr val="accent1"/>
+          </a:lnRef>
+          <a:fillRef idx="3">
+            <a:schemeClr val="accent1"/>
+          </a:fillRef>
+          <a:effectRef idx="2">
+            <a:schemeClr val="accent1"/>
+          </a:effectRef>
+          <a:fontRef idx="minor">
+            <a:schemeClr val="lt1"/>
+          </a:fontRef>
+        </p:style>
+        <p:txBody>
+          <a:bodyPr rtlCol="0" anchor="ctr"/>
+          <a:lstStyle/>
+          <a:p>
+            <a:pPr algn="ctr"/>
+          </a:p>
+        </p:txBody>
+      </p:sp>
+      <p:sp>
+        <p:nvSpPr>
+          <p:cNvPr id="14" name="TextBox 13"/>
+          <p:cNvSpPr txBox="1"/>
+          <p:nvPr/>
+        </p:nvSpPr>
+        <p:spPr>
+          <a:xfrm>
+            <a:off x="7324344" y="1737360"/>
+            <a:ext cx="1938528" cy="365760"/>
+          </a:xfrm>
+          <a:prstGeom prst="rect">
+            <a:avLst/>
+          </a:prstGeom>
+          <a:noFill/>
+        </p:spPr>
+        <p:txBody>
+          <a:bodyPr wrap="square" lIns="0" rIns="0" tIns="0" bIns="0" anchor="t">
+            <a:spAutoFit/>
+          </a:bodyPr>
+          <a:lstStyle/>
+          <a:p>
+            <a:pPr algn="l">
+              <a:spcAft>
+                <a:spcPts val="0"/>
+              </a:spcAft>
+            </a:pPr>
+            <a:r>
+              <a:rPr sz="2200" b="1" i="0">
+                <a:solidFill>
+                  <a:srgbClr val="C4532D"/>
+                </a:solidFill>
+                <a:latin typeface="Cambria"/>
+              </a:rPr>
+              <a:t>+44%</a:t>
+            </a:r>
+          </a:p>
+        </p:txBody>
+      </p:sp>
+      <p:sp>
+        <p:nvSpPr>
+          <p:cNvPr id="15" name="TextBox 14"/>
+          <p:cNvSpPr txBox="1"/>
+          <p:nvPr/>
+        </p:nvSpPr>
+        <p:spPr>
+          <a:xfrm>
+            <a:off x="8375904" y="1828800"/>
+            <a:ext cx="886968" cy="457200"/>
+          </a:xfrm>
+          <a:prstGeom prst="rect">
+            <a:avLst/>
+          </a:prstGeom>
+          <a:noFill/>
+        </p:spPr>
+        <p:txBody>
+          <a:bodyPr wrap="square" lIns="0" rIns="0" tIns="0" bIns="0" anchor="t">
+            <a:spAutoFit/>
+          </a:bodyPr>
+          <a:lstStyle/>
+          <a:p>
+            <a:pPr algn="l">
+              <a:spcAft>
+                <a:spcPts val="0"/>
+              </a:spcAft>
+            </a:pPr>
+            <a:r>
+              <a:rPr sz="1300" b="0" i="0">
+                <a:solidFill>
+                  <a:srgbClr val="1E2528"/>
+                </a:solidFill>
+                <a:latin typeface="Calibri"/>
+              </a:rPr>
+              <a:t>Katuna (A2)</a:t>
+            </a:r>
+          </a:p>
+        </p:txBody>
+      </p:sp>
+      <p:sp>
+        <p:nvSpPr>
+          <p:cNvPr id="16" name="Rounded Rectangle 15"/>
+          <p:cNvSpPr/>
+          <p:nvPr/>
+        </p:nvSpPr>
+        <p:spPr>
+          <a:xfrm>
+            <a:off x="9400032" y="1691640"/>
+            <a:ext cx="2103120" cy="685800"/>
+          </a:xfrm>
+          <a:prstGeom prst="roundRect">
+            <a:avLst>
+              <a:gd name="adj" fmla="val 6000"/>
+            </a:avLst>
+          </a:prstGeom>
+          <a:solidFill>
+            <a:srgbClr val="EEF2F0"/>
+          </a:solidFill>
+          <a:ln>
+            <a:noFill/>
+          </a:ln>
+          <a:effectLst/>
+        </p:spPr>
+        <p:style>
+          <a:lnRef idx="1">
+            <a:schemeClr val="accent1"/>
+          </a:lnRef>
+          <a:fillRef idx="3">
+            <a:schemeClr val="accent1"/>
+          </a:fillRef>
+          <a:effectRef idx="2">
+            <a:schemeClr val="accent1"/>
+          </a:effectRef>
+          <a:fontRef idx="minor">
+            <a:schemeClr val="lt1"/>
+          </a:fontRef>
+        </p:style>
+        <p:txBody>
+          <a:bodyPr rtlCol="0" anchor="ctr"/>
+          <a:lstStyle/>
+          <a:p>
+            <a:pPr algn="ctr"/>
+          </a:p>
+        </p:txBody>
+      </p:sp>
+      <p:sp>
+        <p:nvSpPr>
+          <p:cNvPr id="17" name="TextBox 16"/>
+          <p:cNvSpPr txBox="1"/>
+          <p:nvPr/>
+        </p:nvSpPr>
+        <p:spPr>
+          <a:xfrm>
+            <a:off x="9537192" y="1737360"/>
+            <a:ext cx="1938528" cy="365760"/>
+          </a:xfrm>
+          <a:prstGeom prst="rect">
+            <a:avLst/>
+          </a:prstGeom>
+          <a:noFill/>
+        </p:spPr>
+        <p:txBody>
+          <a:bodyPr wrap="square" lIns="0" rIns="0" tIns="0" bIns="0" anchor="t">
+            <a:spAutoFit/>
+          </a:bodyPr>
+          <a:lstStyle/>
+          <a:p>
+            <a:pPr algn="l">
+              <a:spcAft>
+                <a:spcPts val="0"/>
+              </a:spcAft>
+            </a:pPr>
+            <a:r>
+              <a:rPr sz="2200" b="1" i="0">
+                <a:solidFill>
+                  <a:srgbClr val="C4532D"/>
+                </a:solidFill>
+                <a:latin typeface="Cambria"/>
+              </a:rPr>
+              <a:t>+27%</a:t>
+            </a:r>
+          </a:p>
+        </p:txBody>
+      </p:sp>
+      <p:sp>
+        <p:nvSpPr>
+          <p:cNvPr id="18" name="TextBox 17"/>
+          <p:cNvSpPr txBox="1"/>
+          <p:nvPr/>
+        </p:nvSpPr>
+        <p:spPr>
+          <a:xfrm>
+            <a:off x="10588752" y="1828800"/>
+            <a:ext cx="886968" cy="457200"/>
+          </a:xfrm>
+          <a:prstGeom prst="rect">
+            <a:avLst/>
+          </a:prstGeom>
+          <a:noFill/>
+        </p:spPr>
+        <p:txBody>
+          <a:bodyPr wrap="square" lIns="0" rIns="0" tIns="0" bIns="0" anchor="t">
+            <a:spAutoFit/>
+          </a:bodyPr>
+          <a:lstStyle/>
+          <a:p>
+            <a:pPr algn="l">
+              <a:spcAft>
+                <a:spcPts val="0"/>
+              </a:spcAft>
+            </a:pPr>
+            <a:r>
+              <a:rPr sz="1300" b="0" i="0">
+                <a:solidFill>
+                  <a:srgbClr val="1E2528"/>
+                </a:solidFill>
+                <a:latin typeface="Calibri"/>
+              </a:rPr>
+              <a:t>Malaba (A1)</a:t>
+            </a:r>
+          </a:p>
+        </p:txBody>
+      </p:sp>
       <p:pic>
         <p:nvPicPr>
-          <p:cNvPr id="5" name="Picture 4" descr="m04_grid.png"/>
+          <p:cNvPr id="19" name="Picture 18" descr="m04.png"/>
           <p:cNvPicPr>
             <a:picLocks noChangeAspect="1"/>
           </p:cNvPicPr>
           <p:nvPr/>
         </p:nvPicPr>
         <p:blipFill>
-          <a:blip r:embed="rId3"/>
+          <a:blip r:embed="rId2"/>
           <a:stretch>
             <a:fillRect/>
           </a:stretch>
         </p:blipFill>
         <p:spPr>
           <a:xfrm>
-            <a:off x="4800600" y="1691640"/>
-            <a:ext cx="4118846" cy="4572000"/>
+            <a:off x="548640" y="2514600"/>
+            <a:ext cx="11064240" cy="2917165"/>
           </a:xfrm>
           <a:prstGeom prst="rect">
             <a:avLst/>
@@ -7535,14 +7932,14 @@
       </p:pic>
       <p:sp>
         <p:nvSpPr>
-          <p:cNvPr id="6" name="TextBox 5"/>
+          <p:cNvPr id="20" name="TextBox 19"/>
           <p:cNvSpPr txBox="1"/>
           <p:nvPr/>
         </p:nvSpPr>
         <p:spPr>
           <a:xfrm>
-            <a:off x="9098280" y="1783080"/>
-            <a:ext cx="2560320" cy="4480560"/>
+            <a:off x="548640" y="6400800"/>
+            <a:ext cx="11064240" cy="274320"/>
           </a:xfrm>
           <a:prstGeom prst="rect">
             <a:avLst/>
@@ -7557,104 +7954,17 @@
           <a:p>
             <a:pPr algn="l">
               <a:spcAft>
-                <a:spcPts val="1000"/>
-              </a:spcAft>
-            </a:pPr>
-            <a:r>
-              <a:rPr sz="3000" b="1" i="0">
-                <a:solidFill>
-                  <a:srgbClr val="C4532D"/>
-                </a:solidFill>
-                <a:latin typeface="Cambria"/>
-              </a:rPr>
-              <a:t>+27% to +68%</a:t>
-            </a:r>
-          </a:p>
-          <a:p>
-            <a:pPr algn="l">
-              <a:spcAft>
-                <a:spcPts val="1000"/>
-              </a:spcAft>
-            </a:pPr>
-            <a:r>
-              <a:rPr sz="1500" b="0" i="0">
-                <a:solidFill>
-                  <a:srgbClr val="1E2528"/>
+                <a:spcPts val="0"/>
+              </a:spcAft>
+            </a:pPr>
+            <a:r>
+              <a:rPr sz="1000" b="0" i="0">
+                <a:solidFill>
+                  <a:srgbClr val="5B6770"/>
                 </a:solidFill>
                 <a:latin typeface="Calibri"/>
               </a:rPr>
-              <a:t>roadside built-up land in 20 years, fastest on the Elegu and Hoima roads.</a:t>
-            </a:r>
-          </a:p>
-          <a:p>
-            <a:pPr algn="l">
-              <a:spcAft>
-                <a:spcPts val="1000"/>
-              </a:spcAft>
-            </a:pPr>
-            <a:r>
-              <a:rPr sz="1500" b="0" i="0">
-                <a:solidFill>
-                  <a:srgbClr val="5B6770"/>
-                </a:solidFill>
-                <a:latin typeface="Calibri"/>
-              </a:rPr>
-              <a:t>Settlements between towns roughly doubled on the A6 and A9; towns grew only 13–20%.</a:t>
-            </a:r>
-          </a:p>
-          <a:p>
-            <a:pPr algn="l">
-              <a:spcAft>
-                <a:spcPts val="1000"/>
-              </a:spcAft>
-            </a:pPr>
-            <a:r>
-              <a:rPr sz="1500" b="0" i="0">
-                <a:solidFill>
-                  <a:srgbClr val="5B6770"/>
-                </a:solidFill>
-                <a:latin typeface="Calibri"/>
-              </a:rPr>
-              <a:t>New friction is appearing on what used to be open road.</a:t>
-            </a:r>
-          </a:p>
-        </p:txBody>
-      </p:sp>
-      <p:sp>
-        <p:nvSpPr>
-          <p:cNvPr id="7" name="TextBox 6"/>
-          <p:cNvSpPr txBox="1"/>
-          <p:nvPr/>
-        </p:nvSpPr>
-        <p:spPr>
-          <a:xfrm>
-            <a:off x="548640" y="6400800"/>
-            <a:ext cx="11064240" cy="274320"/>
-          </a:xfrm>
-          <a:prstGeom prst="rect">
-            <a:avLst/>
-          </a:prstGeom>
-          <a:noFill/>
-        </p:spPr>
-        <p:txBody>
-          <a:bodyPr wrap="square" lIns="0" rIns="0" tIns="0" bIns="0" anchor="t">
-            <a:spAutoFit/>
-          </a:bodyPr>
-          <a:lstStyle/>
-          <a:p>
-            <a:pPr algn="l">
-              <a:spcAft>
-                <a:spcPts val="0"/>
-              </a:spcAft>
-            </a:pPr>
-            <a:r>
-              <a:rPr sz="1000" b="0" i="0">
-                <a:solidFill>
-                  <a:srgbClr val="5B6770"/>
-                </a:solidFill>
-                <a:latin typeface="Calibri"/>
-              </a:rPr>
-              <a:t>Maps: each corridor's fastest-growing 5 km; grey built by 2000, orange built 2000–2020. Open-road growth (150–225%) is from a very small base and not charted.</a:t>
+              <a:t>Roadside settlements grew 45–102%, towns 13–21%. Maps: each corridor's fastest-growing 5 km; grey built by 2000, orange 2000–2020.</a:t>
             </a:r>
           </a:p>
         </p:txBody>
@@ -7780,7 +8090,7 @@
         <p:spPr>
           <a:xfrm>
             <a:off x="548640" y="1783080"/>
-            <a:ext cx="11064240" cy="3872484"/>
+            <a:ext cx="11064240" cy="3097987"/>
           </a:xfrm>
           <a:prstGeom prst="rect">
             <a:avLst/>
@@ -7947,7 +8257,7 @@
         <p:spPr>
           <a:xfrm>
             <a:off x="822960" y="1691640"/>
-            <a:ext cx="8849532" cy="4572000"/>
+            <a:ext cx="8909939" cy="4572000"/>
           </a:xfrm>
           <a:prstGeom prst="rect">
             <a:avLst/>
@@ -8053,7 +8363,7 @@
                 </a:solidFill>
                 <a:latin typeface="Cambria"/>
               </a:rPr>
-              <a:t>Result 5 · Controls are the quickest wins</a:t>
+              <a:t>Result 5 · Trucks spend most of the trip standing still</a:t>
             </a:r>
           </a:p>
         </p:txBody>
@@ -8092,29 +8402,35 @@
                 </a:solidFill>
                 <a:latin typeface="Calibri"/>
               </a:rPr>
-              <a:t>Truck minutes saved per trip leaving Kampala, by fix (central estimate)</a:t>
-            </a:r>
-          </a:p>
-        </p:txBody>
-      </p:sp>
-      <p:graphicFrame>
-        <p:nvGraphicFramePr>
-          <p:cNvPr id="4" name="Chart 3"/>
-          <p:cNvGraphicFramePr>
-            <a:graphicFrameLocks noGrp="1"/>
-          </p:cNvGraphicFramePr>
-          <p:nvPr/>
-        </p:nvGraphicFramePr>
-        <p:xfrm>
-          <a:off x="457200" y="1737360"/>
-          <a:ext cx="7498079" cy="4572000"/>
-        </p:xfrm>
-        <a:graphic>
-          <a:graphicData uri="http://schemas.openxmlformats.org/drawingml/2006/chart">
-            <c:chart xmlns:c="http://schemas.openxmlformats.org/drawingml/2006/chart" r:id="rId2"/>
-          </a:graphicData>
-        </a:graphic>
-      </p:graphicFrame>
+              <a:t>Observed truck transit, Kampala ↔ border (NCTTCA Observatory 2025–26), against the model's driving time</a:t>
+            </a:r>
+          </a:p>
+        </p:txBody>
+      </p:sp>
+      <p:pic>
+        <p:nvPicPr>
+          <p:cNvPr id="4" name="Picture 3" descr="f14_transit_gap.png"/>
+          <p:cNvPicPr>
+            <a:picLocks noChangeAspect="1"/>
+          </p:cNvPicPr>
+          <p:nvPr/>
+        </p:nvPicPr>
+        <p:blipFill>
+          <a:blip r:embed="rId2"/>
+          <a:stretch>
+            <a:fillRect/>
+          </a:stretch>
+        </p:blipFill>
+        <p:spPr>
+          <a:xfrm>
+            <a:off x="365760" y="1691640"/>
+            <a:ext cx="7680960" cy="4129003"/>
+          </a:xfrm>
+          <a:prstGeom prst="rect">
+            <a:avLst/>
+          </a:prstGeom>
+        </p:spPr>
+      </p:pic>
       <p:sp>
         <p:nvSpPr>
           <p:cNvPr id="5" name="TextBox 4"/>
@@ -8123,8 +8439,8 @@
         </p:nvSpPr>
         <p:spPr>
           <a:xfrm>
-            <a:off x="8321040" y="1874519"/>
-            <a:ext cx="3291840" cy="4389120"/>
+            <a:off x="8321040" y="1783080"/>
+            <a:ext cx="3291840" cy="457200"/>
           </a:xfrm>
           <a:prstGeom prst="rect">
             <a:avLst/>
@@ -8139,49 +8455,17 @@
           <a:p>
             <a:pPr algn="l">
               <a:spcAft>
-                <a:spcPts val="1000"/>
-              </a:spcAft>
-            </a:pPr>
-            <a:r>
-              <a:rPr sz="2800" b="1" i="0">
+                <a:spcPts val="0"/>
+              </a:spcAft>
+            </a:pPr>
+            <a:r>
+              <a:rPr sz="2400" b="1" i="0">
                 <a:solidFill>
                   <a:srgbClr val="C4532D"/>
                 </a:solidFill>
                 <a:latin typeface="Cambria"/>
               </a:rPr>
-              <a:t>US$42 M a year</a:t>
-            </a:r>
-          </a:p>
-          <a:p>
-            <a:pPr algn="l">
-              <a:spcAft>
-                <a:spcPts val="1000"/>
-              </a:spcAft>
-            </a:pPr>
-            <a:r>
-              <a:rPr sz="1400" b="0" i="0">
-                <a:solidFill>
-                  <a:srgbClr val="1E2528"/>
-                </a:solidFill>
-                <a:latin typeface="Calibri"/>
-              </a:rPr>
-              <a:t>is what delay costs heavy trucks on the four roads at central values (range several times wider: truck counts are assumed off the A1).</a:t>
-            </a:r>
-          </a:p>
-          <a:p>
-            <a:pPr algn="l">
-              <a:spcAft>
-                <a:spcPts val="1000"/>
-              </a:spcAft>
-            </a:pPr>
-            <a:r>
-              <a:rPr sz="1400" b="0" i="0">
-                <a:solidFill>
-                  <a:srgbClr val="5B6770"/>
-                </a:solidFill>
-                <a:latin typeface="Calibri"/>
-              </a:rPr>
-              <a:t>Weigh-in-motion and ending police stops save more per trip than bypasses in light traffic. Service roads help everywhere but need 125–270 km each.</a:t>
+              <a:t>17–93 h</a:t>
             </a:r>
           </a:p>
         </p:txBody>
@@ -8194,6 +8478,279 @@
         </p:nvSpPr>
         <p:spPr>
           <a:xfrm>
+            <a:off x="8321040" y="2240280"/>
+            <a:ext cx="3291840" cy="731520"/>
+          </a:xfrm>
+          <a:prstGeom prst="rect">
+            <a:avLst/>
+          </a:prstGeom>
+          <a:noFill/>
+        </p:spPr>
+        <p:txBody>
+          <a:bodyPr wrap="square" lIns="0" rIns="0" tIns="0" bIns="0" anchor="t">
+            <a:spAutoFit/>
+          </a:bodyPr>
+          <a:lstStyle/>
+          <a:p>
+            <a:pPr algn="l">
+              <a:spcAft>
+                <a:spcPts val="0"/>
+              </a:spcAft>
+            </a:pPr>
+            <a:r>
+              <a:rPr sz="1250" b="0" i="0">
+                <a:solidFill>
+                  <a:srgbClr val="1E2528"/>
+                </a:solidFill>
+                <a:latin typeface="Calibri"/>
+              </a:rPr>
+              <a:t>observed between Kampala and the borders; the model drives it in 5–9 h.</a:t>
+            </a:r>
+          </a:p>
+        </p:txBody>
+      </p:sp>
+      <p:sp>
+        <p:nvSpPr>
+          <p:cNvPr id="7" name="TextBox 6"/>
+          <p:cNvSpPr txBox="1"/>
+          <p:nvPr/>
+        </p:nvSpPr>
+        <p:spPr>
+          <a:xfrm>
+            <a:off x="8321040" y="2926080"/>
+            <a:ext cx="3291840" cy="457200"/>
+          </a:xfrm>
+          <a:prstGeom prst="rect">
+            <a:avLst/>
+          </a:prstGeom>
+          <a:noFill/>
+        </p:spPr>
+        <p:txBody>
+          <a:bodyPr wrap="square" lIns="0" rIns="0" tIns="0" bIns="0" anchor="t">
+            <a:spAutoFit/>
+          </a:bodyPr>
+          <a:lstStyle/>
+          <a:p>
+            <a:pPr algn="l">
+              <a:spcAft>
+                <a:spcPts val="0"/>
+              </a:spcAft>
+            </a:pPr>
+            <a:r>
+              <a:rPr sz="2400" b="1" i="0">
+                <a:solidFill>
+                  <a:srgbClr val="C4532D"/>
+                </a:solidFill>
+                <a:latin typeface="Cambria"/>
+              </a:rPr>
+              <a:t>2–14%</a:t>
+            </a:r>
+          </a:p>
+        </p:txBody>
+      </p:sp>
+      <p:sp>
+        <p:nvSpPr>
+          <p:cNvPr id="8" name="TextBox 7"/>
+          <p:cNvSpPr txBox="1"/>
+          <p:nvPr/>
+        </p:nvSpPr>
+        <p:spPr>
+          <a:xfrm>
+            <a:off x="8321040" y="3383280"/>
+            <a:ext cx="3291840" cy="731520"/>
+          </a:xfrm>
+          <a:prstGeom prst="rect">
+            <a:avLst/>
+          </a:prstGeom>
+          <a:noFill/>
+        </p:spPr>
+        <p:txBody>
+          <a:bodyPr wrap="square" lIns="0" rIns="0" tIns="0" bIns="0" anchor="t">
+            <a:spAutoFit/>
+          </a:bodyPr>
+          <a:lstStyle/>
+          <a:p>
+            <a:pPr algn="l">
+              <a:spcAft>
+                <a:spcPts val="0"/>
+              </a:spcAft>
+            </a:pPr>
+            <a:r>
+              <a:rPr sz="1250" b="0" i="0">
+                <a:solidFill>
+                  <a:srgbClr val="1E2528"/>
+                </a:solidFill>
+                <a:latin typeface="Calibri"/>
+              </a:rPr>
+              <a:t>of the real truck trip is roadside and control friction; the rest is stopped time.</a:t>
+            </a:r>
+          </a:p>
+        </p:txBody>
+      </p:sp>
+      <p:sp>
+        <p:nvSpPr>
+          <p:cNvPr id="9" name="TextBox 8"/>
+          <p:cNvSpPr txBox="1"/>
+          <p:nvPr/>
+        </p:nvSpPr>
+        <p:spPr>
+          <a:xfrm>
+            <a:off x="8321040" y="4069080"/>
+            <a:ext cx="3291840" cy="457200"/>
+          </a:xfrm>
+          <a:prstGeom prst="rect">
+            <a:avLst/>
+          </a:prstGeom>
+          <a:noFill/>
+        </p:spPr>
+        <p:txBody>
+          <a:bodyPr wrap="square" lIns="0" rIns="0" tIns="0" bIns="0" anchor="t">
+            <a:spAutoFit/>
+          </a:bodyPr>
+          <a:lstStyle/>
+          <a:p>
+            <a:pPr algn="l">
+              <a:spcAft>
+                <a:spcPts val="0"/>
+              </a:spcAft>
+            </a:pPr>
+            <a:r>
+              <a:rPr sz="2400" b="1" i="0">
+                <a:solidFill>
+                  <a:srgbClr val="C4532D"/>
+                </a:solidFill>
+                <a:latin typeface="Cambria"/>
+              </a:rPr>
+              <a:t>86%</a:t>
+            </a:r>
+          </a:p>
+        </p:txBody>
+      </p:sp>
+      <p:sp>
+        <p:nvSpPr>
+          <p:cNvPr id="10" name="TextBox 9"/>
+          <p:cNvSpPr txBox="1"/>
+          <p:nvPr/>
+        </p:nvSpPr>
+        <p:spPr>
+          <a:xfrm>
+            <a:off x="8321040" y="4526280"/>
+            <a:ext cx="3291840" cy="731520"/>
+          </a:xfrm>
+          <a:prstGeom prst="rect">
+            <a:avLst/>
+          </a:prstGeom>
+          <a:noFill/>
+        </p:spPr>
+        <p:txBody>
+          <a:bodyPr wrap="square" lIns="0" rIns="0" tIns="0" bIns="0" anchor="t">
+            <a:spAutoFit/>
+          </a:bodyPr>
+          <a:lstStyle/>
+          <a:p>
+            <a:pPr algn="l">
+              <a:spcAft>
+                <a:spcPts val="0"/>
+              </a:spcAft>
+            </a:pPr>
+            <a:r>
+              <a:rPr sz="1250" b="0" i="0">
+                <a:solidFill>
+                  <a:srgbClr val="1E2528"/>
+                </a:solidFill>
+                <a:latin typeface="Calibri"/>
+              </a:rPr>
+              <a:t>of stopped time is rest, meals and border procedures (approx.).</a:t>
+            </a:r>
+          </a:p>
+        </p:txBody>
+      </p:sp>
+      <p:sp>
+        <p:nvSpPr>
+          <p:cNvPr id="11" name="TextBox 10"/>
+          <p:cNvSpPr txBox="1"/>
+          <p:nvPr/>
+        </p:nvSpPr>
+        <p:spPr>
+          <a:xfrm>
+            <a:off x="8321040" y="5212080"/>
+            <a:ext cx="3291840" cy="457200"/>
+          </a:xfrm>
+          <a:prstGeom prst="rect">
+            <a:avLst/>
+          </a:prstGeom>
+          <a:noFill/>
+        </p:spPr>
+        <p:txBody>
+          <a:bodyPr wrap="square" lIns="0" rIns="0" tIns="0" bIns="0" anchor="t">
+            <a:spAutoFit/>
+          </a:bodyPr>
+          <a:lstStyle/>
+          <a:p>
+            <a:pPr algn="l">
+              <a:spcAft>
+                <a:spcPts val="0"/>
+              </a:spcAft>
+            </a:pPr>
+            <a:r>
+              <a:rPr sz="2400" b="1" i="0">
+                <a:solidFill>
+                  <a:srgbClr val="C4532D"/>
+                </a:solidFill>
+                <a:latin typeface="Cambria"/>
+              </a:rPr>
+              <a:t>12 min</a:t>
+            </a:r>
+          </a:p>
+        </p:txBody>
+      </p:sp>
+      <p:sp>
+        <p:nvSpPr>
+          <p:cNvPr id="12" name="TextBox 11"/>
+          <p:cNvSpPr txBox="1"/>
+          <p:nvPr/>
+        </p:nvSpPr>
+        <p:spPr>
+          <a:xfrm>
+            <a:off x="8321040" y="5669280"/>
+            <a:ext cx="3291840" cy="731520"/>
+          </a:xfrm>
+          <a:prstGeom prst="rect">
+            <a:avLst/>
+          </a:prstGeom>
+          <a:noFill/>
+        </p:spPr>
+        <p:txBody>
+          <a:bodyPr wrap="square" lIns="0" rIns="0" tIns="0" bIns="0" anchor="t">
+            <a:spAutoFit/>
+          </a:bodyPr>
+          <a:lstStyle/>
+          <a:p>
+            <a:pPr algn="l">
+              <a:spcAft>
+                <a:spcPts val="0"/>
+              </a:spcAft>
+            </a:pPr>
+            <a:r>
+              <a:rPr sz="1250" b="0" i="0">
+                <a:solidFill>
+                  <a:srgbClr val="1E2528"/>
+                </a:solidFill>
+                <a:latin typeface="Calibri"/>
+              </a:rPr>
+              <a:t>median weighbridge stop: the model's 10 min (5–30) assumption holds.</a:t>
+            </a:r>
+          </a:p>
+        </p:txBody>
+      </p:sp>
+      <p:sp>
+        <p:nvSpPr>
+          <p:cNvPr id="13" name="TextBox 12"/>
+          <p:cNvSpPr txBox="1"/>
+          <p:nvPr/>
+        </p:nvSpPr>
+        <p:spPr>
+          <a:xfrm>
             <a:off x="548640" y="6400800"/>
             <a:ext cx="11064240" cy="274320"/>
           </a:xfrm>
@@ -8220,7 +8777,7 @@
                 </a:solidFill>
                 <a:latin typeface="Calibri"/>
               </a:rPr>
-              <a:t>outputs/scenarios.csv, outputs/costs.csv (scripts 16, 17). Congestion relief from bypasses is not captured by the light-traffic model.</a:t>
+              <a:t>outputs/transit_gap.csv, transit_stop_mix.csv (scripts/24_transit_gap.py). GPS: fleet sample; RECTS: bonded transit cargo. Kampala–Hoima not reported.</a:t>
             </a:r>
           </a:p>
         </p:txBody>
@@ -8285,7 +8842,7 @@
                 </a:solidFill>
                 <a:latin typeface="Cambria"/>
               </a:rPr>
-              <a:t>Result 6 · Settlements carry most of the risk</a:t>
+              <a:t>Result 6 · Controls are the quickest wins</a:t>
             </a:r>
           </a:p>
         </p:txBody>
@@ -8324,7 +8881,7 @@
                 </a:solidFill>
                 <a:latin typeface="Calibri"/>
               </a:rPr>
-              <a:t>Roadside settlements: share of people within 300 m vs share of exposure (people × trucks × speed⁴)</a:t>
+              <a:t>Truck minutes saved per trip leaving Kampala, by fix (central estimate)</a:t>
             </a:r>
           </a:p>
         </p:txBody>
@@ -8339,7 +8896,7 @@
         </p:nvGraphicFramePr>
         <p:xfrm>
           <a:off x="457200" y="1737360"/>
-          <a:ext cx="6949440" cy="4572000"/>
+          <a:ext cx="7498079" cy="4572000"/>
         </p:xfrm>
         <a:graphic>
           <a:graphicData uri="http://schemas.openxmlformats.org/drawingml/2006/chart">
@@ -8349,47 +8906,72 @@
       </p:graphicFrame>
       <p:sp>
         <p:nvSpPr>
-          <p:cNvPr id="5" name="Rounded Rectangle 4"/>
-          <p:cNvSpPr/>
-          <p:nvPr/>
-        </p:nvSpPr>
-        <p:spPr>
-          <a:xfrm>
-            <a:off x="7772400" y="1828800"/>
-            <a:ext cx="3840480" cy="2103120"/>
-          </a:xfrm>
-          <a:prstGeom prst="roundRect">
-            <a:avLst>
-              <a:gd name="adj" fmla="val 6000"/>
-            </a:avLst>
-          </a:prstGeom>
-          <a:solidFill>
-            <a:srgbClr val="EEF2F0"/>
-          </a:solidFill>
-          <a:ln>
-            <a:noFill/>
-          </a:ln>
-          <a:effectLst/>
-        </p:spPr>
-        <p:style>
-          <a:lnRef idx="1">
-            <a:schemeClr val="accent1"/>
-          </a:lnRef>
-          <a:fillRef idx="3">
-            <a:schemeClr val="accent1"/>
-          </a:fillRef>
-          <a:effectRef idx="2">
-            <a:schemeClr val="accent1"/>
-          </a:effectRef>
-          <a:fontRef idx="minor">
-            <a:schemeClr val="lt1"/>
-          </a:fontRef>
-        </p:style>
-        <p:txBody>
-          <a:bodyPr rtlCol="0" anchor="ctr"/>
-          <a:lstStyle/>
-          <a:p>
-            <a:pPr algn="ctr"/>
+          <p:cNvPr id="5" name="TextBox 4"/>
+          <p:cNvSpPr txBox="1"/>
+          <p:nvPr/>
+        </p:nvSpPr>
+        <p:spPr>
+          <a:xfrm>
+            <a:off x="8321040" y="1874519"/>
+            <a:ext cx="3291840" cy="4389120"/>
+          </a:xfrm>
+          <a:prstGeom prst="rect">
+            <a:avLst/>
+          </a:prstGeom>
+          <a:noFill/>
+        </p:spPr>
+        <p:txBody>
+          <a:bodyPr wrap="square" lIns="0" rIns="0" tIns="0" bIns="0" anchor="t">
+            <a:spAutoFit/>
+          </a:bodyPr>
+          <a:lstStyle/>
+          <a:p>
+            <a:pPr algn="l">
+              <a:spcAft>
+                <a:spcPts val="1000"/>
+              </a:spcAft>
+            </a:pPr>
+            <a:r>
+              <a:rPr sz="2800" b="1" i="0">
+                <a:solidFill>
+                  <a:srgbClr val="C4532D"/>
+                </a:solidFill>
+                <a:latin typeface="Cambria"/>
+              </a:rPr>
+              <a:t>US$41 M a year</a:t>
+            </a:r>
+          </a:p>
+          <a:p>
+            <a:pPr algn="l">
+              <a:spcAft>
+                <a:spcPts val="1000"/>
+              </a:spcAft>
+            </a:pPr>
+            <a:r>
+              <a:rPr sz="1400" b="0" i="0">
+                <a:solidFill>
+                  <a:srgbClr val="1E2528"/>
+                </a:solidFill>
+                <a:latin typeface="Calibri"/>
+              </a:rPr>
+              <a:t>in truck time lost to delay on the five roads at central values, plus about US$70 M in extra diesel burnt slowing and re-accelerating.</a:t>
+            </a:r>
+          </a:p>
+          <a:p>
+            <a:pPr algn="l">
+              <a:spcAft>
+                <a:spcPts val="1000"/>
+              </a:spcAft>
+            </a:pPr>
+            <a:r>
+              <a:rPr sz="1400" b="0" i="0">
+                <a:solidFill>
+                  <a:srgbClr val="5B6770"/>
+                </a:solidFill>
+                <a:latin typeface="Calibri"/>
+              </a:rPr>
+              <a:t>Weigh-in-motion and ending police stops save more per trip than bypasses in light traffic. Truck counts are surveyed on the Malaba, Katuna and Bwera roads, assumed on the others.</a:t>
+            </a:r>
           </a:p>
         </p:txBody>
       </p:sp>
@@ -8401,8 +8983,8 @@
         </p:nvSpPr>
         <p:spPr>
           <a:xfrm>
-            <a:off x="8046720" y="2011680"/>
-            <a:ext cx="3383280" cy="1828800"/>
+            <a:off x="548640" y="6400800"/>
+            <a:ext cx="11064240" cy="274320"/>
           </a:xfrm>
           <a:prstGeom prst="rect">
             <a:avLst/>
@@ -8417,173 +8999,17 @@
           <a:p>
             <a:pPr algn="l">
               <a:spcAft>
-                <a:spcPts val="600"/>
-              </a:spcAft>
-            </a:pPr>
-            <a:r>
-              <a:rPr sz="2200" b="1" i="0">
-                <a:solidFill>
-                  <a:srgbClr val="C4532D"/>
-                </a:solidFill>
-                <a:latin typeface="Cambria"/>
-              </a:rPr>
-              <a:t>Trucks run at 55–60 km/h</a:t>
-            </a:r>
-          </a:p>
-          <a:p>
-            <a:pPr algn="l">
-              <a:spcAft>
-                <a:spcPts val="600"/>
-              </a:spcAft>
-            </a:pPr>
-            <a:r>
-              <a:rPr sz="1300" b="0" i="0">
-                <a:solidFill>
-                  <a:srgbClr val="1E2528"/>
+                <a:spcPts val="0"/>
+              </a:spcAft>
+            </a:pPr>
+            <a:r>
+              <a:rPr sz="1000" b="0" i="0">
+                <a:solidFill>
+                  <a:srgbClr val="5B6770"/>
                 </a:solidFill>
                 <a:latin typeface="Calibri"/>
               </a:rPr>
-              <a:t>through settlements that are not classed as towns, so risk concentrates where people live between towns.</a:t>
-            </a:r>
-          </a:p>
-        </p:txBody>
-      </p:sp>
-      <p:sp>
-        <p:nvSpPr>
-          <p:cNvPr id="7" name="Rounded Rectangle 6"/>
-          <p:cNvSpPr/>
-          <p:nvPr/>
-        </p:nvSpPr>
-        <p:spPr>
-          <a:xfrm>
-            <a:off x="7772400" y="4114800"/>
-            <a:ext cx="3840480" cy="2103120"/>
-          </a:xfrm>
-          <a:prstGeom prst="roundRect">
-            <a:avLst>
-              <a:gd name="adj" fmla="val 6000"/>
-            </a:avLst>
-          </a:prstGeom>
-          <a:solidFill>
-            <a:srgbClr val="EEF2F0"/>
-          </a:solidFill>
-          <a:ln>
-            <a:noFill/>
-          </a:ln>
-          <a:effectLst/>
-        </p:spPr>
-        <p:style>
-          <a:lnRef idx="1">
-            <a:schemeClr val="accent1"/>
-          </a:lnRef>
-          <a:fillRef idx="3">
-            <a:schemeClr val="accent1"/>
-          </a:fillRef>
-          <a:effectRef idx="2">
-            <a:schemeClr val="accent1"/>
-          </a:effectRef>
-          <a:fontRef idx="minor">
-            <a:schemeClr val="lt1"/>
-          </a:fontRef>
-        </p:style>
-        <p:txBody>
-          <a:bodyPr rtlCol="0" anchor="ctr"/>
-          <a:lstStyle/>
-          <a:p>
-            <a:pPr algn="ctr"/>
-          </a:p>
-        </p:txBody>
-      </p:sp>
-      <p:sp>
-        <p:nvSpPr>
-          <p:cNvPr id="8" name="TextBox 7"/>
-          <p:cNvSpPr txBox="1"/>
-          <p:nvPr/>
-        </p:nvSpPr>
-        <p:spPr>
-          <a:xfrm>
-            <a:off x="8046720" y="4297680"/>
-            <a:ext cx="3383280" cy="1828800"/>
-          </a:xfrm>
-          <a:prstGeom prst="rect">
-            <a:avLst/>
-          </a:prstGeom>
-          <a:noFill/>
-        </p:spPr>
-        <p:txBody>
-          <a:bodyPr wrap="square" lIns="0" rIns="0" tIns="0" bIns="0" anchor="t">
-            <a:spAutoFit/>
-          </a:bodyPr>
-          <a:lstStyle/>
-          <a:p>
-            <a:pPr algn="l">
-              <a:spcAft>
-                <a:spcPts val="600"/>
-              </a:spcAft>
-            </a:pPr>
-            <a:r>
-              <a:rPr sz="2200" b="1" i="0">
-                <a:solidFill>
-                  <a:srgbClr val="17252A"/>
-                </a:solidFill>
-                <a:latin typeface="Cambria"/>
-              </a:rPr>
-              <a:t>5%–8% slower</a:t>
-            </a:r>
-          </a:p>
-          <a:p>
-            <a:pPr algn="l">
-              <a:spcAft>
-                <a:spcPts val="600"/>
-              </a:spcAft>
-            </a:pPr>
-            <a:r>
-              <a:rPr sz="1300" b="0" i="0">
-                <a:solidFill>
-                  <a:srgbClr val="1E2528"/>
-                </a:solidFill>
-                <a:latin typeface="Calibri"/>
-              </a:rPr>
-              <a:t>on a bad-rain day (95th percentile, 2006–2025) than on a typical day. The Malaba road is slowed on about 87 days a year.</a:t>
-            </a:r>
-          </a:p>
-        </p:txBody>
-      </p:sp>
-      <p:sp>
-        <p:nvSpPr>
-          <p:cNvPr id="9" name="TextBox 8"/>
-          <p:cNvSpPr txBox="1"/>
-          <p:nvPr/>
-        </p:nvSpPr>
-        <p:spPr>
-          <a:xfrm>
-            <a:off x="548640" y="6400800"/>
-            <a:ext cx="11064240" cy="274320"/>
-          </a:xfrm>
-          <a:prstGeom prst="rect">
-            <a:avLst/>
-          </a:prstGeom>
-          <a:noFill/>
-        </p:spPr>
-        <p:txBody>
-          <a:bodyPr wrap="square" lIns="0" rIns="0" tIns="0" bIns="0" anchor="t">
-            <a:spAutoFit/>
-          </a:bodyPr>
-          <a:lstStyle/>
-          <a:p>
-            <a:pPr algn="l">
-              <a:spcAft>
-                <a:spcPts val="0"/>
-              </a:spcAft>
-            </a:pPr>
-            <a:r>
-              <a:rPr sz="1000" b="0" i="0">
-                <a:solidFill>
-                  <a:srgbClr val="5B6770"/>
-                </a:solidFill>
-                <a:latin typeface="Calibri"/>
-              </a:rPr>
-              <a:t>outputs/safety_by_type.csv, outputs/reliability.csv (scripts 18, 19). Exposure is not a crash rate; floods that close roads are not modelled.</a:t>
+              <a:t>outputs/scenarios.csv, costs.csv, fuel_co2.csv (scripts 16, 17, 26). Congestion relief from bypasses is not captured by the light-traffic model.</a:t>
             </a:r>
           </a:p>
         </p:txBody>
@@ -8614,9 +9040,87 @@
         <p:nvPr/>
       </p:nvGrpSpPr>
       <p:grpSpPr/>
+      <p:sp>
+        <p:nvSpPr>
+          <p:cNvPr id="2" name="TextBox 1"/>
+          <p:cNvSpPr txBox="1"/>
+          <p:nvPr/>
+        </p:nvSpPr>
+        <p:spPr>
+          <a:xfrm>
+            <a:off x="548640" y="411480"/>
+            <a:ext cx="11064240" cy="731520"/>
+          </a:xfrm>
+          <a:prstGeom prst="rect">
+            <a:avLst/>
+          </a:prstGeom>
+          <a:noFill/>
+        </p:spPr>
+        <p:txBody>
+          <a:bodyPr wrap="square" lIns="0" rIns="0" tIns="0" bIns="0" anchor="t">
+            <a:spAutoFit/>
+          </a:bodyPr>
+          <a:lstStyle/>
+          <a:p>
+            <a:pPr algn="l">
+              <a:spcAft>
+                <a:spcPts val="0"/>
+              </a:spcAft>
+            </a:pPr>
+            <a:r>
+              <a:rPr sz="3400" b="1" i="0">
+                <a:solidFill>
+                  <a:srgbClr val="1E2528"/>
+                </a:solidFill>
+                <a:latin typeface="Cambria"/>
+              </a:rPr>
+              <a:t>Result 7 · Stop-go costs fuel and carbon</a:t>
+            </a:r>
+          </a:p>
+        </p:txBody>
+      </p:sp>
+      <p:sp>
+        <p:nvSpPr>
+          <p:cNvPr id="3" name="TextBox 2"/>
+          <p:cNvSpPr txBox="1"/>
+          <p:nvPr/>
+        </p:nvSpPr>
+        <p:spPr>
+          <a:xfrm>
+            <a:off x="548640" y="1115568"/>
+            <a:ext cx="11064240" cy="457200"/>
+          </a:xfrm>
+          <a:prstGeom prst="rect">
+            <a:avLst/>
+          </a:prstGeom>
+          <a:noFill/>
+        </p:spPr>
+        <p:txBody>
+          <a:bodyPr wrap="square" lIns="0" rIns="0" tIns="0" bIns="0" anchor="t">
+            <a:spAutoFit/>
+          </a:bodyPr>
+          <a:lstStyle/>
+          <a:p>
+            <a:pPr algn="l">
+              <a:spcAft>
+                <a:spcPts val="0"/>
+              </a:spcAft>
+            </a:pPr>
+            <a:r>
+              <a:rPr sz="1600" b="0" i="0">
+                <a:solidFill>
+                  <a:srgbClr val="5B6770"/>
+                </a:solidFill>
+                <a:latin typeface="Calibri"/>
+              </a:rPr>
+              <a:t>Extra diesel per loaded truck trip from friction, and CO₂ a year (physical fuel model, 1,000 draws)</a:t>
+            </a:r>
+          </a:p>
+        </p:txBody>
+      </p:sp>
       <p:pic>
         <p:nvPicPr>
-          <p:cNvPr id="2" name="Picture 1" descr="f12.png"/>
+          <p:cNvPr id="4" name="Picture 3" descr="f16_fuel_co2.png"/>
           <p:cNvPicPr>
             <a:picLocks noChangeAspect="1"/>
           </p:cNvPicPr>
@@ -8630,8 +9134,8 @@
         </p:blipFill>
         <p:spPr>
           <a:xfrm>
-            <a:off x="365760" y="320040"/>
-            <a:ext cx="5896644" cy="6217920"/>
+            <a:off x="548640" y="1645920"/>
+            <a:ext cx="11064240" cy="4243535"/>
           </a:xfrm>
           <a:prstGeom prst="rect">
             <a:avLst/>
@@ -8640,14 +9144,14 @@
       </p:pic>
       <p:sp>
         <p:nvSpPr>
-          <p:cNvPr id="3" name="TextBox 2"/>
+          <p:cNvPr id="5" name="TextBox 4"/>
           <p:cNvSpPr txBox="1"/>
           <p:nvPr/>
         </p:nvSpPr>
         <p:spPr>
           <a:xfrm>
-            <a:off x="6400800" y="411480"/>
-            <a:ext cx="5303520" cy="1188720"/>
+            <a:off x="548640" y="6400800"/>
+            <a:ext cx="11064240" cy="274320"/>
           </a:xfrm>
           <a:prstGeom prst="rect">
             <a:avLst/>
@@ -8666,325 +9170,13 @@
               </a:spcAft>
             </a:pPr>
             <a:r>
-              <a:rPr sz="3000" b="1" i="0">
-                <a:solidFill>
-                  <a:srgbClr val="1E2528"/>
-                </a:solidFill>
-                <a:latin typeface="Cambria"/>
-              </a:rPr>
-              <a:t>Rail along the bottlenecks</a:t>
-            </a:r>
-          </a:p>
-        </p:txBody>
-      </p:sp>
-      <p:sp>
-        <p:nvSpPr>
-          <p:cNvPr id="4" name="TextBox 3"/>
-          <p:cNvSpPr txBox="1"/>
-          <p:nvPr/>
-        </p:nvSpPr>
-        <p:spPr>
-          <a:xfrm>
-            <a:off x="6400800" y="1234440"/>
-            <a:ext cx="5303520" cy="548640"/>
-          </a:xfrm>
-          <a:prstGeom prst="rect">
-            <a:avLst/>
-          </a:prstGeom>
-          <a:noFill/>
-        </p:spPr>
-        <p:txBody>
-          <a:bodyPr wrap="square" lIns="0" rIns="0" tIns="0" bIns="0" anchor="t">
-            <a:spAutoFit/>
-          </a:bodyPr>
-          <a:lstStyle/>
-          <a:p>
-            <a:pPr algn="l">
-              <a:spcAft>
-                <a:spcPts val="0"/>
-              </a:spcAft>
-            </a:pPr>
-            <a:r>
-              <a:rPr sz="1400" b="0" i="0">
+              <a:rPr sz="1000" b="0" i="0">
                 <a:solidFill>
                   <a:srgbClr val="5B6770"/>
                 </a:solidFill>
                 <a:latin typeface="Calibri"/>
               </a:rPr>
-              <a:t>Least-cost screening alignments and the existing metre-gauge railway</a:t>
-            </a:r>
-          </a:p>
-        </p:txBody>
-      </p:sp>
-      <p:sp>
-        <p:nvSpPr>
-          <p:cNvPr id="5" name="TextBox 4"/>
-          <p:cNvSpPr txBox="1"/>
-          <p:nvPr/>
-        </p:nvSpPr>
-        <p:spPr>
-          <a:xfrm>
-            <a:off x="6400800" y="2011680"/>
-            <a:ext cx="1463040" cy="640080"/>
-          </a:xfrm>
-          <a:prstGeom prst="rect">
-            <a:avLst/>
-          </a:prstGeom>
-          <a:noFill/>
-        </p:spPr>
-        <p:txBody>
-          <a:bodyPr wrap="square" lIns="0" rIns="0" tIns="0" bIns="0" anchor="t">
-            <a:spAutoFit/>
-          </a:bodyPr>
-          <a:lstStyle/>
-          <a:p>
-            <a:pPr algn="l">
-              <a:spcAft>
-                <a:spcPts val="0"/>
-              </a:spcAft>
-            </a:pPr>
-            <a:r>
-              <a:rPr sz="2600" b="1" i="0">
-                <a:solidFill>
-                  <a:srgbClr val="C4532D"/>
-                </a:solidFill>
-                <a:latin typeface="Cambria"/>
-              </a:rPr>
-              <a:t>81%</a:t>
-            </a:r>
-          </a:p>
-        </p:txBody>
-      </p:sp>
-      <p:sp>
-        <p:nvSpPr>
-          <p:cNvPr id="6" name="TextBox 5"/>
-          <p:cNvSpPr txBox="1"/>
-          <p:nvPr/>
-        </p:nvSpPr>
-        <p:spPr>
-          <a:xfrm>
-            <a:off x="8001000" y="2057400"/>
-            <a:ext cx="3703320" cy="1188720"/>
-          </a:xfrm>
-          <a:prstGeom prst="rect">
-            <a:avLst/>
-          </a:prstGeom>
-          <a:noFill/>
-        </p:spPr>
-        <p:txBody>
-          <a:bodyPr wrap="square" lIns="0" rIns="0" tIns="0" bIns="0" anchor="t">
-            <a:spAutoFit/>
-          </a:bodyPr>
-          <a:lstStyle/>
-          <a:p>
-            <a:pPr algn="l">
-              <a:spcAft>
-                <a:spcPts val="0"/>
-              </a:spcAft>
-            </a:pPr>
-            <a:r>
-              <a:rPr sz="1300" b="0" i="0">
-                <a:solidFill>
-                  <a:srgbClr val="1E2528"/>
-                </a:solidFill>
-                <a:latin typeface="Calibri"/>
-              </a:rPr>
-              <a:t>of the Malaba road's truck delay lies within 10 km of the railway the SGR follows; on the other roads, 16% or less.</a:t>
-            </a:r>
-          </a:p>
-        </p:txBody>
-      </p:sp>
-      <p:sp>
-        <p:nvSpPr>
-          <p:cNvPr id="7" name="TextBox 6"/>
-          <p:cNvSpPr txBox="1"/>
-          <p:nvPr/>
-        </p:nvSpPr>
-        <p:spPr>
-          <a:xfrm>
-            <a:off x="6400800" y="3337560"/>
-            <a:ext cx="1463040" cy="640080"/>
-          </a:xfrm>
-          <a:prstGeom prst="rect">
-            <a:avLst/>
-          </a:prstGeom>
-          <a:noFill/>
-        </p:spPr>
-        <p:txBody>
-          <a:bodyPr wrap="square" lIns="0" rIns="0" tIns="0" bIns="0" anchor="t">
-            <a:spAutoFit/>
-          </a:bodyPr>
-          <a:lstStyle/>
-          <a:p>
-            <a:pPr algn="l">
-              <a:spcAft>
-                <a:spcPts val="0"/>
-              </a:spcAft>
-            </a:pPr>
-            <a:r>
-              <a:rPr sz="2600" b="1" i="0">
-                <a:solidFill>
-                  <a:srgbClr val="C4532D"/>
-                </a:solidFill>
-                <a:latin typeface="Cambria"/>
-              </a:rPr>
-              <a:t>17 h</a:t>
-            </a:r>
-          </a:p>
-        </p:txBody>
-      </p:sp>
-      <p:sp>
-        <p:nvSpPr>
-          <p:cNvPr id="8" name="TextBox 7"/>
-          <p:cNvSpPr txBox="1"/>
-          <p:nvPr/>
-        </p:nvSpPr>
-        <p:spPr>
-          <a:xfrm>
-            <a:off x="8001000" y="3383280"/>
-            <a:ext cx="3703320" cy="1188720"/>
-          </a:xfrm>
-          <a:prstGeom prst="rect">
-            <a:avLst/>
-          </a:prstGeom>
-          <a:noFill/>
-        </p:spPr>
-        <p:txBody>
-          <a:bodyPr wrap="square" lIns="0" rIns="0" tIns="0" bIns="0" anchor="t">
-            <a:spAutoFit/>
-          </a:bodyPr>
-          <a:lstStyle/>
-          <a:p>
-            <a:pPr algn="l">
-              <a:spcAft>
-                <a:spcPts val="0"/>
-              </a:spcAft>
-            </a:pPr>
-            <a:r>
-              <a:rPr sz="1300" b="0" i="0">
-                <a:solidFill>
-                  <a:srgbClr val="1E2528"/>
-                </a:solidFill>
-                <a:latin typeface="Calibri"/>
-              </a:rPr>
-              <a:t>door to door by rail for domestic freight on the eastern line, against about 5 h by truck: terminals, not line-haul, set the time.</a:t>
-            </a:r>
-          </a:p>
-        </p:txBody>
-      </p:sp>
-      <p:sp>
-        <p:nvSpPr>
-          <p:cNvPr id="9" name="TextBox 8"/>
-          <p:cNvSpPr txBox="1"/>
-          <p:nvPr/>
-        </p:nvSpPr>
-        <p:spPr>
-          <a:xfrm>
-            <a:off x="6400800" y="4663440"/>
-            <a:ext cx="1463040" cy="640080"/>
-          </a:xfrm>
-          <a:prstGeom prst="rect">
-            <a:avLst/>
-          </a:prstGeom>
-          <a:noFill/>
-        </p:spPr>
-        <p:txBody>
-          <a:bodyPr wrap="square" lIns="0" rIns="0" tIns="0" bIns="0" anchor="t">
-            <a:spAutoFit/>
-          </a:bodyPr>
-          <a:lstStyle/>
-          <a:p>
-            <a:pPr algn="l">
-              <a:spcAft>
-                <a:spcPts val="0"/>
-              </a:spcAft>
-            </a:pPr>
-            <a:r>
-              <a:rPr sz="2600" b="1" i="0">
-                <a:solidFill>
-                  <a:srgbClr val="C4532D"/>
-                </a:solidFill>
-                <a:latin typeface="Cambria"/>
-              </a:rPr>
-              <a:t>0.03</a:t>
-            </a:r>
-          </a:p>
-        </p:txBody>
-      </p:sp>
-      <p:sp>
-        <p:nvSpPr>
-          <p:cNvPr id="10" name="TextBox 9"/>
-          <p:cNvSpPr txBox="1"/>
-          <p:nvPr/>
-        </p:nvSpPr>
-        <p:spPr>
-          <a:xfrm>
-            <a:off x="8001000" y="4709160"/>
-            <a:ext cx="3703320" cy="1188720"/>
-          </a:xfrm>
-          <a:prstGeom prst="rect">
-            <a:avLst/>
-          </a:prstGeom>
-          <a:noFill/>
-        </p:spPr>
-        <p:txBody>
-          <a:bodyPr wrap="square" lIns="0" rIns="0" tIns="0" bIns="0" anchor="t">
-            <a:spAutoFit/>
-          </a:bodyPr>
-          <a:lstStyle/>
-          <a:p>
-            <a:pPr algn="l">
-              <a:spcAft>
-                <a:spcPts val="0"/>
-              </a:spcAft>
-            </a:pPr>
-            <a:r>
-              <a:rPr sz="1300" b="0" i="0">
-                <a:solidFill>
-                  <a:srgbClr val="1E2528"/>
-                </a:solidFill>
-                <a:latin typeface="Calibri"/>
-              </a:rPr>
-              <a:t>benefit/cost for the eastern SGR even with through traffic from Mombasa (up to 0.15); about 93 Mt a year needed to break even.</a:t>
-            </a:r>
-          </a:p>
-        </p:txBody>
-      </p:sp>
-      <p:sp>
-        <p:nvSpPr>
-          <p:cNvPr id="11" name="TextBox 10"/>
-          <p:cNvSpPr txBox="1"/>
-          <p:nvPr/>
-        </p:nvSpPr>
-        <p:spPr>
-          <a:xfrm>
-            <a:off x="6400800" y="5897880"/>
-            <a:ext cx="5303520" cy="548640"/>
-          </a:xfrm>
-          <a:prstGeom prst="rect">
-            <a:avLst/>
-          </a:prstGeom>
-          <a:noFill/>
-        </p:spPr>
-        <p:txBody>
-          <a:bodyPr wrap="square" lIns="0" rIns="0" tIns="0" bIns="0" anchor="t">
-            <a:spAutoFit/>
-          </a:bodyPr>
-          <a:lstStyle/>
-          <a:p>
-            <a:pPr algn="l">
-              <a:spcAft>
-                <a:spcPts val="0"/>
-              </a:spcAft>
-            </a:pPr>
-            <a:r>
-              <a:rPr sz="1200" b="0" i="1">
-                <a:solidFill>
-                  <a:srgbClr val="5B6770"/>
-                </a:solidFill>
-                <a:latin typeface="Calibri"/>
-              </a:rPr>
-              <a:t>Counting only freight costs and CO2 from today's Ugandan traffic: transit growth, passengers and congestion relief carry the case.</a:t>
+              <a:t>29–75 L extra per trip (25–41% of trip fuel); about 138 kt CO₂ a year. Humps are assumed (one per town piece), so the Malaba figure has a wide range. outputs/fuel_co2.csv.</a:t>
             </a:r>
           </a:p>
         </p:txBody>
@@ -9049,7 +9241,7 @@
                 </a:solidFill>
                 <a:latin typeface="Cambria"/>
               </a:rPr>
-              <a:t>Discussion</a:t>
+              <a:t>Result 8 · Settlements carry most of the risk</a:t>
             </a:r>
           </a:p>
         </p:txBody>
@@ -9088,21 +9280,39 @@
                 </a:solidFill>
                 <a:latin typeface="Calibri"/>
               </a:rPr>
-              <a:t>What the results suggest for corridor policy</a:t>
-            </a:r>
-          </a:p>
-        </p:txBody>
-      </p:sp>
-      <p:sp>
-        <p:nvSpPr>
-          <p:cNvPr id="4" name="Rounded Rectangle 3"/>
+              <a:t>Roadside settlements: share of people within 300 m vs share of exposure (people × trucks × speed⁴)</a:t>
+            </a:r>
+          </a:p>
+        </p:txBody>
+      </p:sp>
+      <p:graphicFrame>
+        <p:nvGraphicFramePr>
+          <p:cNvPr id="4" name="Chart 3"/>
+          <p:cNvGraphicFramePr>
+            <a:graphicFrameLocks noGrp="1"/>
+          </p:cNvGraphicFramePr>
+          <p:nvPr/>
+        </p:nvGraphicFramePr>
+        <p:xfrm>
+          <a:off x="457200" y="1737360"/>
+          <a:ext cx="6949440" cy="4572000"/>
+        </p:xfrm>
+        <a:graphic>
+          <a:graphicData uri="http://schemas.openxmlformats.org/drawingml/2006/chart">
+            <c:chart xmlns:c="http://schemas.openxmlformats.org/drawingml/2006/chart" r:id="rId2"/>
+          </a:graphicData>
+        </a:graphic>
+      </p:graphicFrame>
+      <p:sp>
+        <p:nvSpPr>
+          <p:cNvPr id="5" name="Rounded Rectangle 4"/>
           <p:cNvSpPr/>
           <p:nvPr/>
         </p:nvSpPr>
         <p:spPr>
           <a:xfrm>
-            <a:off x="548640" y="1783080"/>
-            <a:ext cx="5440680" cy="2103120"/>
+            <a:off x="7772400" y="1828800"/>
+            <a:ext cx="3840480" cy="2103120"/>
           </a:xfrm>
           <a:prstGeom prst="roundRect">
             <a:avLst>
@@ -9141,67 +9351,14 @@
       </p:sp>
       <p:sp>
         <p:nvSpPr>
-          <p:cNvPr id="5" name="Oval 4"/>
-          <p:cNvSpPr/>
-          <p:nvPr/>
-        </p:nvSpPr>
-        <p:spPr>
-          <a:xfrm>
-            <a:off x="822959" y="2057400"/>
-            <a:ext cx="457200" cy="457200"/>
-          </a:xfrm>
-          <a:prstGeom prst="ellipse">
-            <a:avLst/>
-          </a:prstGeom>
-          <a:solidFill>
-            <a:srgbClr val="C4532D"/>
-          </a:solidFill>
-          <a:ln>
-            <a:noFill/>
-          </a:ln>
-          <a:effectLst/>
-        </p:spPr>
-        <p:style>
-          <a:lnRef idx="1">
-            <a:schemeClr val="accent1"/>
-          </a:lnRef>
-          <a:fillRef idx="3">
-            <a:schemeClr val="accent1"/>
-          </a:fillRef>
-          <a:effectRef idx="2">
-            <a:schemeClr val="accent1"/>
-          </a:effectRef>
-          <a:fontRef idx="minor">
-            <a:schemeClr val="lt1"/>
-          </a:fontRef>
-        </p:style>
-        <p:txBody>
-          <a:bodyPr rtlCol="0" anchor="ctr" lIns="0" rIns="0" tIns="0" bIns="0"/>
-          <a:lstStyle/>
-          <a:p>
-            <a:pPr algn="ctr"/>
-            <a:r>
-              <a:rPr sz="1500" b="1">
-                <a:solidFill>
-                  <a:srgbClr val="FFFFFF"/>
-                </a:solidFill>
-                <a:latin typeface="Calibri"/>
-              </a:rPr>
-              <a:t>1</a:t>
-            </a:r>
-          </a:p>
-        </p:txBody>
-      </p:sp>
-      <p:sp>
-        <p:nvSpPr>
           <p:cNvPr id="6" name="TextBox 5"/>
           <p:cNvSpPr txBox="1"/>
           <p:nvPr/>
         </p:nvSpPr>
         <p:spPr>
           <a:xfrm>
-            <a:off x="1463040" y="2084831"/>
-            <a:ext cx="4297680" cy="411480"/>
+            <a:off x="8046720" y="2011680"/>
+            <a:ext cx="3383280" cy="1828800"/>
           </a:xfrm>
           <a:prstGeom prst="rect">
             <a:avLst/>
@@ -9216,70 +9373,47 @@
           <a:p>
             <a:pPr algn="l">
               <a:spcAft>
-                <a:spcPts val="0"/>
-              </a:spcAft>
-            </a:pPr>
-            <a:r>
-              <a:rPr sz="1900" b="1" i="0">
+                <a:spcPts val="600"/>
+              </a:spcAft>
+            </a:pPr>
+            <a:r>
+              <a:rPr sz="2200" b="1" i="0">
+                <a:solidFill>
+                  <a:srgbClr val="C4532D"/>
+                </a:solidFill>
+                <a:latin typeface="Cambria"/>
+              </a:rPr>
+              <a:t>Trucks run at 55–60 km/h</a:t>
+            </a:r>
+          </a:p>
+          <a:p>
+            <a:pPr algn="l">
+              <a:spcAft>
+                <a:spcPts val="600"/>
+              </a:spcAft>
+            </a:pPr>
+            <a:r>
+              <a:rPr sz="1300" b="0" i="0">
                 <a:solidFill>
                   <a:srgbClr val="1E2528"/>
                 </a:solidFill>
-                <a:latin typeface="Cambria"/>
-              </a:rPr>
-              <a:t>Settlement is the chronic problem</a:t>
-            </a:r>
-          </a:p>
-        </p:txBody>
-      </p:sp>
-      <p:sp>
-        <p:nvSpPr>
-          <p:cNvPr id="7" name="TextBox 6"/>
-          <p:cNvSpPr txBox="1"/>
-          <p:nvPr/>
-        </p:nvSpPr>
-        <p:spPr>
-          <a:xfrm>
-            <a:off x="1463040" y="2560320"/>
-            <a:ext cx="4297680" cy="1280160"/>
-          </a:xfrm>
-          <a:prstGeom prst="rect">
-            <a:avLst/>
-          </a:prstGeom>
-          <a:noFill/>
-        </p:spPr>
-        <p:txBody>
-          <a:bodyPr wrap="square" lIns="0" rIns="0" tIns="0" bIns="0" anchor="t">
-            <a:spAutoFit/>
-          </a:bodyPr>
-          <a:lstStyle/>
-          <a:p>
-            <a:pPr algn="l">
-              <a:spcAft>
-                <a:spcPts val="0"/>
-              </a:spcAft>
-            </a:pPr>
-            <a:r>
-              <a:rPr sz="1400" b="0" i="0">
-                <a:solidFill>
-                  <a:srgbClr val="5B6770"/>
-                </a:solidFill>
                 <a:latin typeface="Calibri"/>
               </a:rPr>
-              <a:t>Roadside activity costs the most time on three of four roads and is growing fastest where it is newest. Access management, service roads and planned trading centres off the carriageway address the cause, not the symptom.</a:t>
-            </a:r>
-          </a:p>
-        </p:txBody>
-      </p:sp>
-      <p:sp>
-        <p:nvSpPr>
-          <p:cNvPr id="8" name="Rounded Rectangle 7"/>
+              <a:t>through settlements that are not classed as towns, so risk concentrates where people live between towns.</a:t>
+            </a:r>
+          </a:p>
+        </p:txBody>
+      </p:sp>
+      <p:sp>
+        <p:nvSpPr>
+          <p:cNvPr id="7" name="Rounded Rectangle 6"/>
           <p:cNvSpPr/>
           <p:nvPr/>
         </p:nvSpPr>
         <p:spPr>
           <a:xfrm>
-            <a:off x="6172200" y="1783080"/>
-            <a:ext cx="5440680" cy="2103120"/>
+            <a:off x="7772400" y="4114800"/>
+            <a:ext cx="3840480" cy="2103120"/>
           </a:xfrm>
           <a:prstGeom prst="roundRect">
             <a:avLst>
@@ -9318,67 +9452,14 @@
       </p:sp>
       <p:sp>
         <p:nvSpPr>
-          <p:cNvPr id="9" name="Oval 8"/>
-          <p:cNvSpPr/>
-          <p:nvPr/>
-        </p:nvSpPr>
-        <p:spPr>
-          <a:xfrm>
-            <a:off x="6446520" y="2057400"/>
-            <a:ext cx="457200" cy="457200"/>
-          </a:xfrm>
-          <a:prstGeom prst="ellipse">
-            <a:avLst/>
-          </a:prstGeom>
-          <a:solidFill>
-            <a:srgbClr val="17252A"/>
-          </a:solidFill>
-          <a:ln>
-            <a:noFill/>
-          </a:ln>
-          <a:effectLst/>
-        </p:spPr>
-        <p:style>
-          <a:lnRef idx="1">
-            <a:schemeClr val="accent1"/>
-          </a:lnRef>
-          <a:fillRef idx="3">
-            <a:schemeClr val="accent1"/>
-          </a:fillRef>
-          <a:effectRef idx="2">
-            <a:schemeClr val="accent1"/>
-          </a:effectRef>
-          <a:fontRef idx="minor">
-            <a:schemeClr val="lt1"/>
-          </a:fontRef>
-        </p:style>
-        <p:txBody>
-          <a:bodyPr rtlCol="0" anchor="ctr" lIns="0" rIns="0" tIns="0" bIns="0"/>
-          <a:lstStyle/>
-          <a:p>
-            <a:pPr algn="ctr"/>
-            <a:r>
-              <a:rPr sz="1500" b="1">
-                <a:solidFill>
-                  <a:srgbClr val="FFFFFF"/>
-                </a:solidFill>
-                <a:latin typeface="Calibri"/>
-              </a:rPr>
-              <a:t>2</a:t>
-            </a:r>
-          </a:p>
-        </p:txBody>
-      </p:sp>
-      <p:sp>
-        <p:nvSpPr>
-          <p:cNvPr id="10" name="TextBox 9"/>
+          <p:cNvPr id="8" name="TextBox 7"/>
           <p:cNvSpPr txBox="1"/>
           <p:nvPr/>
         </p:nvSpPr>
         <p:spPr>
           <a:xfrm>
-            <a:off x="7086600" y="2084831"/>
-            <a:ext cx="4297680" cy="411480"/>
+            <a:off x="8046720" y="4297680"/>
+            <a:ext cx="3383280" cy="1828800"/>
           </a:xfrm>
           <a:prstGeom prst="rect">
             <a:avLst/>
@@ -9393,31 +9474,47 @@
           <a:p>
             <a:pPr algn="l">
               <a:spcAft>
-                <a:spcPts val="0"/>
-              </a:spcAft>
-            </a:pPr>
-            <a:r>
-              <a:rPr sz="1900" b="1" i="0">
+                <a:spcPts val="600"/>
+              </a:spcAft>
+            </a:pPr>
+            <a:r>
+              <a:rPr sz="2200" b="1" i="0">
+                <a:solidFill>
+                  <a:srgbClr val="17252A"/>
+                </a:solidFill>
+                <a:latin typeface="Cambria"/>
+              </a:rPr>
+              <a:t>5%–8% slower</a:t>
+            </a:r>
+          </a:p>
+          <a:p>
+            <a:pPr algn="l">
+              <a:spcAft>
+                <a:spcPts val="600"/>
+              </a:spcAft>
+            </a:pPr>
+            <a:r>
+              <a:rPr sz="1300" b="0" i="0">
                 <a:solidFill>
                   <a:srgbClr val="1E2528"/>
                 </a:solidFill>
-                <a:latin typeface="Cambria"/>
-              </a:rPr>
-              <a:t>Controls are the cheap wins</a:t>
-            </a:r>
-          </a:p>
-        </p:txBody>
-      </p:sp>
-      <p:sp>
-        <p:nvSpPr>
-          <p:cNvPr id="11" name="TextBox 10"/>
+                <a:latin typeface="Calibri"/>
+              </a:rPr>
+              <a:t>on a bad-rain day (95th percentile, 2006–2025) than on a typical day. The May 2020 Mpondwe flood stretch ranks at the 92th percentile of flood exposure.</a:t>
+            </a:r>
+          </a:p>
+        </p:txBody>
+      </p:sp>
+      <p:sp>
+        <p:nvSpPr>
+          <p:cNvPr id="9" name="TextBox 8"/>
           <p:cNvSpPr txBox="1"/>
           <p:nvPr/>
         </p:nvSpPr>
         <p:spPr>
           <a:xfrm>
-            <a:off x="7086600" y="2560320"/>
-            <a:ext cx="4297680" cy="1280160"/>
+            <a:off x="548640" y="6400800"/>
+            <a:ext cx="11064240" cy="274320"/>
           </a:xfrm>
           <a:prstGeom prst="rect">
             <a:avLst/>
@@ -9436,367 +9533,13 @@
               </a:spcAft>
             </a:pPr>
             <a:r>
-              <a:rPr sz="1400" b="0" i="0">
+              <a:rPr sz="1000" b="0" i="0">
                 <a:solidFill>
                   <a:srgbClr val="5B6770"/>
                 </a:solidFill>
                 <a:latin typeface="Calibri"/>
               </a:rPr>
-              <a:t>Weighbridges and police posts produce the worst single stretches. Weigh-in-motion screening saves 8–16 truck minutes per trip and ending police stops 4–15; bypasses save 2–5 in light traffic.</a:t>
-            </a:r>
-          </a:p>
-        </p:txBody>
-      </p:sp>
-      <p:sp>
-        <p:nvSpPr>
-          <p:cNvPr id="12" name="Rounded Rectangle 11"/>
-          <p:cNvSpPr/>
-          <p:nvPr/>
-        </p:nvSpPr>
-        <p:spPr>
-          <a:xfrm>
-            <a:off x="548640" y="4069080"/>
-            <a:ext cx="5440680" cy="2103120"/>
-          </a:xfrm>
-          <a:prstGeom prst="roundRect">
-            <a:avLst>
-              <a:gd name="adj" fmla="val 6000"/>
-            </a:avLst>
-          </a:prstGeom>
-          <a:solidFill>
-            <a:srgbClr val="EEF2F0"/>
-          </a:solidFill>
-          <a:ln>
-            <a:noFill/>
-          </a:ln>
-          <a:effectLst/>
-        </p:spPr>
-        <p:style>
-          <a:lnRef idx="1">
-            <a:schemeClr val="accent1"/>
-          </a:lnRef>
-          <a:fillRef idx="3">
-            <a:schemeClr val="accent1"/>
-          </a:fillRef>
-          <a:effectRef idx="2">
-            <a:schemeClr val="accent1"/>
-          </a:effectRef>
-          <a:fontRef idx="minor">
-            <a:schemeClr val="lt1"/>
-          </a:fontRef>
-        </p:style>
-        <p:txBody>
-          <a:bodyPr rtlCol="0" anchor="ctr"/>
-          <a:lstStyle/>
-          <a:p>
-            <a:pPr algn="ctr"/>
-          </a:p>
-        </p:txBody>
-      </p:sp>
-      <p:sp>
-        <p:nvSpPr>
-          <p:cNvPr id="13" name="Oval 12"/>
-          <p:cNvSpPr/>
-          <p:nvPr/>
-        </p:nvSpPr>
-        <p:spPr>
-          <a:xfrm>
-            <a:off x="822959" y="4343400"/>
-            <a:ext cx="457200" cy="457200"/>
-          </a:xfrm>
-          <a:prstGeom prst="ellipse">
-            <a:avLst/>
-          </a:prstGeom>
-          <a:solidFill>
-            <a:srgbClr val="3A7D5C"/>
-          </a:solidFill>
-          <a:ln>
-            <a:noFill/>
-          </a:ln>
-          <a:effectLst/>
-        </p:spPr>
-        <p:style>
-          <a:lnRef idx="1">
-            <a:schemeClr val="accent1"/>
-          </a:lnRef>
-          <a:fillRef idx="3">
-            <a:schemeClr val="accent1"/>
-          </a:fillRef>
-          <a:effectRef idx="2">
-            <a:schemeClr val="accent1"/>
-          </a:effectRef>
-          <a:fontRef idx="minor">
-            <a:schemeClr val="lt1"/>
-          </a:fontRef>
-        </p:style>
-        <p:txBody>
-          <a:bodyPr rtlCol="0" anchor="ctr" lIns="0" rIns="0" tIns="0" bIns="0"/>
-          <a:lstStyle/>
-          <a:p>
-            <a:pPr algn="ctr"/>
-            <a:r>
-              <a:rPr sz="1500" b="1">
-                <a:solidFill>
-                  <a:srgbClr val="FFFFFF"/>
-                </a:solidFill>
-                <a:latin typeface="Calibri"/>
-              </a:rPr>
-              <a:t>3</a:t>
-            </a:r>
-          </a:p>
-        </p:txBody>
-      </p:sp>
-      <p:sp>
-        <p:nvSpPr>
-          <p:cNvPr id="14" name="TextBox 13"/>
-          <p:cNvSpPr txBox="1"/>
-          <p:nvPr/>
-        </p:nvSpPr>
-        <p:spPr>
-          <a:xfrm>
-            <a:off x="1463040" y="4370832"/>
-            <a:ext cx="4297680" cy="411480"/>
-          </a:xfrm>
-          <a:prstGeom prst="rect">
-            <a:avLst/>
-          </a:prstGeom>
-          <a:noFill/>
-        </p:spPr>
-        <p:txBody>
-          <a:bodyPr wrap="square" lIns="0" rIns="0" tIns="0" bIns="0" anchor="t">
-            <a:spAutoFit/>
-          </a:bodyPr>
-          <a:lstStyle/>
-          <a:p>
-            <a:pPr algn="l">
-              <a:spcAft>
-                <a:spcPts val="0"/>
-              </a:spcAft>
-            </a:pPr>
-            <a:r>
-              <a:rPr sz="1900" b="1" i="0">
-                <a:solidFill>
-                  <a:srgbClr val="1E2528"/>
-                </a:solidFill>
-                <a:latin typeface="Cambria"/>
-              </a:rPr>
-              <a:t>Kampala's problem is congestion</a:t>
-            </a:r>
-          </a:p>
-        </p:txBody>
-      </p:sp>
-      <p:sp>
-        <p:nvSpPr>
-          <p:cNvPr id="15" name="TextBox 14"/>
-          <p:cNvSpPr txBox="1"/>
-          <p:nvPr/>
-        </p:nvSpPr>
-        <p:spPr>
-          <a:xfrm>
-            <a:off x="1463040" y="4846320"/>
-            <a:ext cx="4297680" cy="1280160"/>
-          </a:xfrm>
-          <a:prstGeom prst="rect">
-            <a:avLst/>
-          </a:prstGeom>
-          <a:noFill/>
-        </p:spPr>
-        <p:txBody>
-          <a:bodyPr wrap="square" lIns="0" rIns="0" tIns="0" bIns="0" anchor="t">
-            <a:spAutoFit/>
-          </a:bodyPr>
-          <a:lstStyle/>
-          <a:p>
-            <a:pPr algn="l">
-              <a:spcAft>
-                <a:spcPts val="0"/>
-              </a:spcAft>
-            </a:pPr>
-            <a:r>
-              <a:rPr sz="1400" b="0" i="0">
-                <a:solidFill>
-                  <a:srgbClr val="5B6770"/>
-                </a:solidFill>
-                <a:latin typeface="Calibri"/>
-              </a:rPr>
-              <a:t>The gap between modelled and observed Kampala–Jinja trips is congestion. The expressway and urban traffic management matter there more than roadside fixes.</a:t>
-            </a:r>
-          </a:p>
-        </p:txBody>
-      </p:sp>
-      <p:sp>
-        <p:nvSpPr>
-          <p:cNvPr id="16" name="Rounded Rectangle 15"/>
-          <p:cNvSpPr/>
-          <p:nvPr/>
-        </p:nvSpPr>
-        <p:spPr>
-          <a:xfrm>
-            <a:off x="6172200" y="4069080"/>
-            <a:ext cx="5440680" cy="2103120"/>
-          </a:xfrm>
-          <a:prstGeom prst="roundRect">
-            <a:avLst>
-              <a:gd name="adj" fmla="val 6000"/>
-            </a:avLst>
-          </a:prstGeom>
-          <a:solidFill>
-            <a:srgbClr val="EEF2F0"/>
-          </a:solidFill>
-          <a:ln>
-            <a:noFill/>
-          </a:ln>
-          <a:effectLst/>
-        </p:spPr>
-        <p:style>
-          <a:lnRef idx="1">
-            <a:schemeClr val="accent1"/>
-          </a:lnRef>
-          <a:fillRef idx="3">
-            <a:schemeClr val="accent1"/>
-          </a:fillRef>
-          <a:effectRef idx="2">
-            <a:schemeClr val="accent1"/>
-          </a:effectRef>
-          <a:fontRef idx="minor">
-            <a:schemeClr val="lt1"/>
-          </a:fontRef>
-        </p:style>
-        <p:txBody>
-          <a:bodyPr rtlCol="0" anchor="ctr"/>
-          <a:lstStyle/>
-          <a:p>
-            <a:pPr algn="ctr"/>
-          </a:p>
-        </p:txBody>
-      </p:sp>
-      <p:sp>
-        <p:nvSpPr>
-          <p:cNvPr id="17" name="Oval 16"/>
-          <p:cNvSpPr/>
-          <p:nvPr/>
-        </p:nvSpPr>
-        <p:spPr>
-          <a:xfrm>
-            <a:off x="6446520" y="4343400"/>
-            <a:ext cx="457200" cy="457200"/>
-          </a:xfrm>
-          <a:prstGeom prst="ellipse">
-            <a:avLst/>
-          </a:prstGeom>
-          <a:solidFill>
-            <a:srgbClr val="D9A441"/>
-          </a:solidFill>
-          <a:ln>
-            <a:noFill/>
-          </a:ln>
-          <a:effectLst/>
-        </p:spPr>
-        <p:style>
-          <a:lnRef idx="1">
-            <a:schemeClr val="accent1"/>
-          </a:lnRef>
-          <a:fillRef idx="3">
-            <a:schemeClr val="accent1"/>
-          </a:fillRef>
-          <a:effectRef idx="2">
-            <a:schemeClr val="accent1"/>
-          </a:effectRef>
-          <a:fontRef idx="minor">
-            <a:schemeClr val="lt1"/>
-          </a:fontRef>
-        </p:style>
-        <p:txBody>
-          <a:bodyPr rtlCol="0" anchor="ctr" lIns="0" rIns="0" tIns="0" bIns="0"/>
-          <a:lstStyle/>
-          <a:p>
-            <a:pPr algn="ctr"/>
-            <a:r>
-              <a:rPr sz="1500" b="1">
-                <a:solidFill>
-                  <a:srgbClr val="FFFFFF"/>
-                </a:solidFill>
-                <a:latin typeface="Calibri"/>
-              </a:rPr>
-              <a:t>4</a:t>
-            </a:r>
-          </a:p>
-        </p:txBody>
-      </p:sp>
-      <p:sp>
-        <p:nvSpPr>
-          <p:cNvPr id="18" name="TextBox 17"/>
-          <p:cNvSpPr txBox="1"/>
-          <p:nvPr/>
-        </p:nvSpPr>
-        <p:spPr>
-          <a:xfrm>
-            <a:off x="7086600" y="4370832"/>
-            <a:ext cx="4297680" cy="411480"/>
-          </a:xfrm>
-          <a:prstGeom prst="rect">
-            <a:avLst/>
-          </a:prstGeom>
-          <a:noFill/>
-        </p:spPr>
-        <p:txBody>
-          <a:bodyPr wrap="square" lIns="0" rIns="0" tIns="0" bIns="0" anchor="t">
-            <a:spAutoFit/>
-          </a:bodyPr>
-          <a:lstStyle/>
-          <a:p>
-            <a:pPr algn="l">
-              <a:spcAft>
-                <a:spcPts val="0"/>
-              </a:spcAft>
-            </a:pPr>
-            <a:r>
-              <a:rPr sz="1900" b="1" i="0">
-                <a:solidFill>
-                  <a:srgbClr val="1E2528"/>
-                </a:solidFill>
-                <a:latin typeface="Cambria"/>
-              </a:rPr>
-              <a:t>Growth outpaces the road</a:t>
-            </a:r>
-          </a:p>
-        </p:txBody>
-      </p:sp>
-      <p:sp>
-        <p:nvSpPr>
-          <p:cNvPr id="19" name="TextBox 18"/>
-          <p:cNvSpPr txBox="1"/>
-          <p:nvPr/>
-        </p:nvSpPr>
-        <p:spPr>
-          <a:xfrm>
-            <a:off x="7086600" y="4846320"/>
-            <a:ext cx="4297680" cy="1280160"/>
-          </a:xfrm>
-          <a:prstGeom prst="rect">
-            <a:avLst/>
-          </a:prstGeom>
-          <a:noFill/>
-        </p:spPr>
-        <p:txBody>
-          <a:bodyPr wrap="square" lIns="0" rIns="0" tIns="0" bIns="0" anchor="t">
-            <a:spAutoFit/>
-          </a:bodyPr>
-          <a:lstStyle/>
-          <a:p>
-            <a:pPr algn="l">
-              <a:spcAft>
-                <a:spcPts val="0"/>
-              </a:spcAft>
-            </a:pPr>
-            <a:r>
-              <a:rPr sz="1400" b="0" i="0">
-                <a:solidFill>
-                  <a:srgbClr val="5B6770"/>
-                </a:solidFill>
-                <a:latin typeface="Calibri"/>
-              </a:rPr>
-              <a:t>At 27–68% in 20 years, today's open road is tomorrow's settlement. Land-use control along the corridors is time-critical.</a:t>
+              <a:t>outputs/safety_by_type.csv, reliability.csv, flood_events_check.csv (scripts 18, 19). Exposure is not a crash rate.</a:t>
             </a:r>
           </a:p>
         </p:txBody>
@@ -9861,67 +9604,21 @@
                 </a:solidFill>
                 <a:latin typeface="Cambria"/>
               </a:rPr>
-              <a:t>Limitations and next steps</a:t>
-            </a:r>
-          </a:p>
-        </p:txBody>
-      </p:sp>
-      <p:sp>
-        <p:nvSpPr>
-          <p:cNvPr id="3" name="Rounded Rectangle 2"/>
-          <p:cNvSpPr/>
-          <p:nvPr/>
-        </p:nvSpPr>
-        <p:spPr>
-          <a:xfrm>
-            <a:off x="548640" y="1417320"/>
-            <a:ext cx="6675120" cy="1051560"/>
-          </a:xfrm>
-          <a:prstGeom prst="roundRect">
-            <a:avLst>
-              <a:gd name="adj" fmla="val 6000"/>
-            </a:avLst>
-          </a:prstGeom>
-          <a:solidFill>
-            <a:srgbClr val="EEF2F0"/>
-          </a:solidFill>
-          <a:ln>
-            <a:noFill/>
-          </a:ln>
-          <a:effectLst/>
-        </p:spPr>
-        <p:style>
-          <a:lnRef idx="1">
-            <a:schemeClr val="accent1"/>
-          </a:lnRef>
-          <a:fillRef idx="3">
-            <a:schemeClr val="accent1"/>
-          </a:fillRef>
-          <a:effectRef idx="2">
-            <a:schemeClr val="accent1"/>
-          </a:effectRef>
-          <a:fontRef idx="minor">
-            <a:schemeClr val="lt1"/>
-          </a:fontRef>
-        </p:style>
-        <p:txBody>
-          <a:bodyPr rtlCol="0" anchor="ctr"/>
-          <a:lstStyle/>
-          <a:p>
-            <a:pPr algn="ctr"/>
-          </a:p>
-        </p:txBody>
-      </p:sp>
-      <p:sp>
-        <p:nvSpPr>
-          <p:cNvPr id="4" name="TextBox 3"/>
+              <a:t>Result 9 · Police crash black spots sit in busy settlements</a:t>
+            </a:r>
+          </a:p>
+        </p:txBody>
+      </p:sp>
+      <p:sp>
+        <p:nvSpPr>
+          <p:cNvPr id="3" name="TextBox 2"/>
           <p:cNvSpPr txBox="1"/>
           <p:nvPr/>
         </p:nvSpPr>
         <p:spPr>
           <a:xfrm>
-            <a:off x="822960" y="1554480"/>
-            <a:ext cx="6217920" cy="365760"/>
+            <a:off x="548640" y="1115568"/>
+            <a:ext cx="11064240" cy="457200"/>
           </a:xfrm>
           <a:prstGeom prst="rect">
             <a:avLst/>
@@ -9940,17 +9637,41 @@
               </a:spcAft>
             </a:pPr>
             <a:r>
-              <a:rPr sz="1700" b="1" i="0">
-                <a:solidFill>
-                  <a:srgbClr val="1E2528"/>
+              <a:rPr sz="1600" b="0" i="0">
+                <a:solidFill>
+                  <a:srgbClr val="5B6770"/>
                 </a:solidFill>
                 <a:latin typeface="Calibri"/>
               </a:rPr>
-              <a:t>Congestion is not modelled</a:t>
-            </a:r>
-          </a:p>
-        </p:txBody>
-      </p:sp>
+              <a:t>Stretches holding a named black spot, against random stretches near a named place (5,000 permutations)</a:t>
+            </a:r>
+          </a:p>
+        </p:txBody>
+      </p:sp>
+      <p:pic>
+        <p:nvPicPr>
+          <p:cNvPr id="4" name="Picture 3" descr="f15_black_spots.png"/>
+          <p:cNvPicPr>
+            <a:picLocks noChangeAspect="1"/>
+          </p:cNvPicPr>
+          <p:nvPr/>
+        </p:nvPicPr>
+        <p:blipFill>
+          <a:blip r:embed="rId2"/>
+          <a:stretch>
+            <a:fillRect/>
+          </a:stretch>
+        </p:blipFill>
+        <p:spPr>
+          <a:xfrm>
+            <a:off x="365760" y="1691640"/>
+            <a:ext cx="7589520" cy="4246329"/>
+          </a:xfrm>
+          <a:prstGeom prst="rect">
+            <a:avLst/>
+          </a:prstGeom>
+        </p:spPr>
+      </p:pic>
       <p:sp>
         <p:nvSpPr>
           <p:cNvPr id="5" name="TextBox 4"/>
@@ -9959,8 +9680,8 @@
         </p:nvSpPr>
         <p:spPr>
           <a:xfrm>
-            <a:off x="822960" y="1920240"/>
-            <a:ext cx="6217920" cy="502920"/>
+            <a:off x="8229600" y="1783080"/>
+            <a:ext cx="3383280" cy="457200"/>
           </a:xfrm>
           <a:prstGeom prst="rect">
             <a:avLst/>
@@ -9979,60 +9700,53 @@
               </a:spcAft>
             </a:pPr>
             <a:r>
-              <a:rPr sz="1400" b="0" i="0">
-                <a:solidFill>
-                  <a:srgbClr val="5B6770"/>
+              <a:rPr sz="2200" b="1" i="0">
+                <a:solidFill>
+                  <a:srgbClr val="C4532D"/>
+                </a:solidFill>
+                <a:latin typeface="Cambria"/>
+              </a:rPr>
+              <a:t>40 / 58</a:t>
+            </a:r>
+          </a:p>
+        </p:txBody>
+      </p:sp>
+      <p:sp>
+        <p:nvSpPr>
+          <p:cNvPr id="6" name="TextBox 5"/>
+          <p:cNvSpPr txBox="1"/>
+          <p:nvPr/>
+        </p:nvSpPr>
+        <p:spPr>
+          <a:xfrm>
+            <a:off x="8229600" y="2221991"/>
+            <a:ext cx="3383280" cy="731520"/>
+          </a:xfrm>
+          <a:prstGeom prst="rect">
+            <a:avLst/>
+          </a:prstGeom>
+          <a:noFill/>
+        </p:spPr>
+        <p:txBody>
+          <a:bodyPr wrap="square" lIns="0" rIns="0" tIns="0" bIns="0" anchor="t">
+            <a:spAutoFit/>
+          </a:bodyPr>
+          <a:lstStyle/>
+          <a:p>
+            <a:pPr algn="l">
+              <a:spcAft>
+                <a:spcPts val="0"/>
+              </a:spcAft>
+            </a:pPr>
+            <a:r>
+              <a:rPr sz="1250" b="0" i="0">
+                <a:solidFill>
+                  <a:srgbClr val="1E2528"/>
                 </a:solidFill>
                 <a:latin typeface="Calibri"/>
               </a:rPr>
-              <a:t>Results describe light traffic; peak-hour delay near Kampala is larger.</a:t>
-            </a:r>
-          </a:p>
-        </p:txBody>
-      </p:sp>
-      <p:sp>
-        <p:nvSpPr>
-          <p:cNvPr id="6" name="Rounded Rectangle 5"/>
-          <p:cNvSpPr/>
-          <p:nvPr/>
-        </p:nvSpPr>
-        <p:spPr>
-          <a:xfrm>
-            <a:off x="548640" y="2606040"/>
-            <a:ext cx="6675120" cy="1051560"/>
-          </a:xfrm>
-          <a:prstGeom prst="roundRect">
-            <a:avLst>
-              <a:gd name="adj" fmla="val 6000"/>
-            </a:avLst>
-          </a:prstGeom>
-          <a:solidFill>
-            <a:srgbClr val="EEF2F0"/>
-          </a:solidFill>
-          <a:ln>
-            <a:noFill/>
-          </a:ln>
-          <a:effectLst/>
-        </p:spPr>
-        <p:style>
-          <a:lnRef idx="1">
-            <a:schemeClr val="accent1"/>
-          </a:lnRef>
-          <a:fillRef idx="3">
-            <a:schemeClr val="accent1"/>
-          </a:fillRef>
-          <a:effectRef idx="2">
-            <a:schemeClr val="accent1"/>
-          </a:effectRef>
-          <a:fontRef idx="minor">
-            <a:schemeClr val="lt1"/>
-          </a:fontRef>
-        </p:style>
-        <p:txBody>
-          <a:bodyPr rtlCol="0" anchor="ctr"/>
-          <a:lstStyle/>
-          <a:p>
-            <a:pPr algn="ctr"/>
+              <a:t>police-named black spots located by name in OSM.</a:t>
+            </a:r>
           </a:p>
         </p:txBody>
       </p:sp>
@@ -10044,8 +9758,8 @@
         </p:nvSpPr>
         <p:spPr>
           <a:xfrm>
-            <a:off x="822960" y="2743200"/>
-            <a:ext cx="6217920" cy="365760"/>
+            <a:off x="8229600" y="2898648"/>
+            <a:ext cx="3383280" cy="457200"/>
           </a:xfrm>
           <a:prstGeom prst="rect">
             <a:avLst/>
@@ -10064,13 +9778,13 @@
               </a:spcAft>
             </a:pPr>
             <a:r>
-              <a:rPr sz="1700" b="1" i="0">
-                <a:solidFill>
-                  <a:srgbClr val="1E2528"/>
-                </a:solidFill>
-                <a:latin typeface="Calibri"/>
-              </a:rPr>
-              <a:t>Speed humps are under-mapped</a:t>
+              <a:rPr sz="2200" b="1" i="0">
+                <a:solidFill>
+                  <a:srgbClr val="C4532D"/>
+                </a:solidFill>
+                <a:latin typeface="Cambria"/>
+              </a:rPr>
+              <a:t>71th pct</a:t>
             </a:r>
           </a:p>
         </p:txBody>
@@ -10083,8 +9797,8 @@
         </p:nvSpPr>
         <p:spPr>
           <a:xfrm>
-            <a:off x="822960" y="3108960"/>
-            <a:ext cx="6217920" cy="502920"/>
+            <a:off x="8229600" y="3337560"/>
+            <a:ext cx="3383280" cy="731520"/>
           </a:xfrm>
           <a:prstGeom prst="rect">
             <a:avLst/>
@@ -10103,60 +9817,53 @@
               </a:spcAft>
             </a:pPr>
             <a:r>
-              <a:rPr sz="1400" b="0" i="0">
-                <a:solidFill>
-                  <a:srgbClr val="5B6770"/>
+              <a:rPr sz="1250" b="0" i="0">
+                <a:solidFill>
+                  <a:srgbClr val="1E2528"/>
                 </a:solidFill>
                 <a:latin typeface="Calibri"/>
               </a:rPr>
-              <a:t>OSM holds &lt; 60 on all four roads; one per town piece is assumed (range 0–2).</a:t>
-            </a:r>
-          </a:p>
-        </p:txBody>
-      </p:sp>
-      <p:sp>
-        <p:nvSpPr>
-          <p:cNvPr id="9" name="Rounded Rectangle 8"/>
-          <p:cNvSpPr/>
-          <p:nvPr/>
-        </p:nvSpPr>
-        <p:spPr>
-          <a:xfrm>
-            <a:off x="548640" y="3794760"/>
-            <a:ext cx="6675120" cy="1051560"/>
-          </a:xfrm>
-          <a:prstGeom prst="roundRect">
-            <a:avLst>
-              <a:gd name="adj" fmla="val 6000"/>
-            </a:avLst>
-          </a:prstGeom>
-          <a:solidFill>
-            <a:srgbClr val="EEF2F0"/>
-          </a:solidFill>
-          <a:ln>
-            <a:noFill/>
-          </a:ln>
-          <a:effectLst/>
-        </p:spPr>
-        <p:style>
-          <a:lnRef idx="1">
-            <a:schemeClr val="accent1"/>
-          </a:lnRef>
-          <a:fillRef idx="3">
-            <a:schemeClr val="accent1"/>
-          </a:fillRef>
-          <a:effectRef idx="2">
-            <a:schemeClr val="accent1"/>
-          </a:effectRef>
-          <a:fontRef idx="minor">
-            <a:schemeClr val="lt1"/>
-          </a:fontRef>
-        </p:style>
-        <p:txBody>
-          <a:bodyPr rtlCol="0" anchor="ctr"/>
-          <a:lstStyle/>
-          <a:p>
-            <a:pPr algn="ctr"/>
+              <a:t>on roadside buildings (p &lt; 0.001); joining roads 65th.</a:t>
+            </a:r>
+          </a:p>
+        </p:txBody>
+      </p:sp>
+      <p:sp>
+        <p:nvSpPr>
+          <p:cNvPr id="9" name="TextBox 8"/>
+          <p:cNvSpPr txBox="1"/>
+          <p:nvPr/>
+        </p:nvSpPr>
+        <p:spPr>
+          <a:xfrm>
+            <a:off x="8229600" y="4014215"/>
+            <a:ext cx="3383280" cy="457200"/>
+          </a:xfrm>
+          <a:prstGeom prst="rect">
+            <a:avLst/>
+          </a:prstGeom>
+          <a:noFill/>
+        </p:spPr>
+        <p:txBody>
+          <a:bodyPr wrap="square" lIns="0" rIns="0" tIns="0" bIns="0" anchor="t">
+            <a:spAutoFit/>
+          </a:bodyPr>
+          <a:lstStyle/>
+          <a:p>
+            <a:pPr algn="l">
+              <a:spcAft>
+                <a:spcPts val="0"/>
+              </a:spcAft>
+            </a:pPr>
+            <a:r>
+              <a:rPr sz="2200" b="1" i="0">
+                <a:solidFill>
+                  <a:srgbClr val="C4532D"/>
+                </a:solidFill>
+                <a:latin typeface="Cambria"/>
+              </a:rPr>
+              <a:t>32th pct</a:t>
+            </a:r>
           </a:p>
         </p:txBody>
       </p:sp>
@@ -10168,8 +9875,8 @@
         </p:nvSpPr>
         <p:spPr>
           <a:xfrm>
-            <a:off x="822960" y="3931920"/>
-            <a:ext cx="6217920" cy="365760"/>
+            <a:off x="8229600" y="4453127"/>
+            <a:ext cx="3383280" cy="731520"/>
           </a:xfrm>
           <a:prstGeom prst="rect">
             <a:avLst/>
@@ -10188,13 +9895,13 @@
               </a:spcAft>
             </a:pPr>
             <a:r>
-              <a:rPr sz="1700" b="1" i="0">
+              <a:rPr sz="1250" b="0" i="0">
                 <a:solidFill>
                   <a:srgbClr val="1E2528"/>
                 </a:solidFill>
                 <a:latin typeface="Calibri"/>
               </a:rPr>
-              <a:t>Stop times are assumptions</a:t>
+              <a:t>on truck speed (p &lt; 0.001): black spots are slower, busier places, not fast bends.</a:t>
             </a:r>
           </a:p>
         </p:txBody>
@@ -10207,8 +9914,8 @@
         </p:nvSpPr>
         <p:spPr>
           <a:xfrm>
-            <a:off x="822960" y="4297680"/>
-            <a:ext cx="6217920" cy="502920"/>
+            <a:off x="8229600" y="5129783"/>
+            <a:ext cx="3383280" cy="457200"/>
           </a:xfrm>
           <a:prstGeom prst="rect">
             <a:avLst/>
@@ -10227,60 +9934,53 @@
               </a:spcAft>
             </a:pPr>
             <a:r>
-              <a:rPr sz="1400" b="0" i="0">
-                <a:solidFill>
-                  <a:srgbClr val="5B6770"/>
+              <a:rPr sz="2200" b="1" i="0">
+                <a:solidFill>
+                  <a:srgbClr val="C4532D"/>
+                </a:solidFill>
+                <a:latin typeface="Cambria"/>
+              </a:rPr>
+              <a:t>59th pct</a:t>
+            </a:r>
+          </a:p>
+        </p:txBody>
+      </p:sp>
+      <p:sp>
+        <p:nvSpPr>
+          <p:cNvPr id="12" name="TextBox 11"/>
+          <p:cNvSpPr txBox="1"/>
+          <p:nvPr/>
+        </p:nvSpPr>
+        <p:spPr>
+          <a:xfrm>
+            <a:off x="8229600" y="5568696"/>
+            <a:ext cx="3383280" cy="731520"/>
+          </a:xfrm>
+          <a:prstGeom prst="rect">
+            <a:avLst/>
+          </a:prstGeom>
+          <a:noFill/>
+        </p:spPr>
+        <p:txBody>
+          <a:bodyPr wrap="square" lIns="0" rIns="0" tIns="0" bIns="0" anchor="t">
+            <a:spAutoFit/>
+          </a:bodyPr>
+          <a:lstStyle/>
+          <a:p>
+            <a:pPr algn="l">
+              <a:spcAft>
+                <a:spcPts val="0"/>
+              </a:spcAft>
+            </a:pPr>
+            <a:r>
+              <a:rPr sz="1250" b="0" i="0">
+                <a:solidFill>
+                  <a:srgbClr val="1E2528"/>
                 </a:solidFill>
                 <a:latin typeface="Calibri"/>
               </a:rPr>
-              <a:t>Police posts 0–5 min, weighbridges ~10 min; rankings on the A1 depend on them.</a:t>
-            </a:r>
-          </a:p>
-        </p:txBody>
-      </p:sp>
-      <p:sp>
-        <p:nvSpPr>
-          <p:cNvPr id="12" name="Rounded Rectangle 11"/>
-          <p:cNvSpPr/>
-          <p:nvPr/>
-        </p:nvSpPr>
-        <p:spPr>
-          <a:xfrm>
-            <a:off x="548640" y="4983480"/>
-            <a:ext cx="6675120" cy="1051560"/>
-          </a:xfrm>
-          <a:prstGeom prst="roundRect">
-            <a:avLst>
-              <a:gd name="adj" fmla="val 6000"/>
-            </a:avLst>
-          </a:prstGeom>
-          <a:solidFill>
-            <a:srgbClr val="EEF2F0"/>
-          </a:solidFill>
-          <a:ln>
-            <a:noFill/>
-          </a:ln>
-          <a:effectLst/>
-        </p:spPr>
-        <p:style>
-          <a:lnRef idx="1">
-            <a:schemeClr val="accent1"/>
-          </a:lnRef>
-          <a:fillRef idx="3">
-            <a:schemeClr val="accent1"/>
-          </a:fillRef>
-          <a:effectRef idx="2">
-            <a:schemeClr val="accent1"/>
-          </a:effectRef>
-          <a:fontRef idx="minor">
-            <a:schemeClr val="lt1"/>
-          </a:fontRef>
-        </p:style>
-        <p:txBody>
-          <a:bodyPr rtlCol="0" anchor="ctr"/>
-          <a:lstStyle/>
-          <a:p>
-            <a:pPr algn="ctr"/>
+              <a:t>on the exposure index (p = 0.081): its speed⁴ term under-weights busy, slower places.</a:t>
+            </a:r>
           </a:p>
         </p:txBody>
       </p:sp>
@@ -10292,8 +9992,8 @@
         </p:nvSpPr>
         <p:spPr>
           <a:xfrm>
-            <a:off x="822960" y="5120640"/>
-            <a:ext cx="6217920" cy="365760"/>
+            <a:off x="548640" y="6400800"/>
+            <a:ext cx="11064240" cy="274320"/>
           </a:xfrm>
           <a:prstGeom prst="rect">
             <a:avLst/>
@@ -10312,217 +10012,13 @@
               </a:spcAft>
             </a:pPr>
             <a:r>
-              <a:rPr sz="1700" b="1" i="0">
-                <a:solidFill>
-                  <a:srgbClr val="1E2528"/>
+              <a:rPr sz="1000" b="0" i="0">
+                <a:solidFill>
+                  <a:srgbClr val="5B6770"/>
                 </a:solidFill>
                 <a:latin typeface="Calibri"/>
               </a:rPr>
-              <a:t>Growth data end in 2020</a:t>
-            </a:r>
-          </a:p>
-        </p:txBody>
-      </p:sp>
-      <p:sp>
-        <p:nvSpPr>
-          <p:cNvPr id="14" name="TextBox 13"/>
-          <p:cNvSpPr txBox="1"/>
-          <p:nvPr/>
-        </p:nvSpPr>
-        <p:spPr>
-          <a:xfrm>
-            <a:off x="822960" y="5486400"/>
-            <a:ext cx="6217920" cy="502920"/>
-          </a:xfrm>
-          <a:prstGeom prst="rect">
-            <a:avLst/>
-          </a:prstGeom>
-          <a:noFill/>
-        </p:spPr>
-        <p:txBody>
-          <a:bodyPr wrap="square" lIns="0" rIns="0" tIns="0" bIns="0" anchor="t">
-            <a:spAutoFit/>
-          </a:bodyPr>
-          <a:lstStyle/>
-          <a:p>
-            <a:pPr algn="l">
-              <a:spcAft>
-                <a:spcPts val="0"/>
-              </a:spcAft>
-            </a:pPr>
-            <a:r>
-              <a:rPr sz="1400" b="0" i="0">
-                <a:solidFill>
-                  <a:srgbClr val="5B6770"/>
-                </a:solidFill>
-                <a:latin typeface="Calibri"/>
-              </a:rPr>
-              <a:t>GHSL's projection to 2026 is slower than the observed trend; Open Buildings Temporal would extend it.</a:t>
-            </a:r>
-          </a:p>
-        </p:txBody>
-      </p:sp>
-      <p:sp>
-        <p:nvSpPr>
-          <p:cNvPr id="15" name="Rounded Rectangle 14"/>
-          <p:cNvSpPr/>
-          <p:nvPr/>
-        </p:nvSpPr>
-        <p:spPr>
-          <a:xfrm>
-            <a:off x="7589520" y="1417320"/>
-            <a:ext cx="4023360" cy="4617720"/>
-          </a:xfrm>
-          <a:prstGeom prst="roundRect">
-            <a:avLst>
-              <a:gd name="adj" fmla="val 6000"/>
-            </a:avLst>
-          </a:prstGeom>
-          <a:solidFill>
-            <a:srgbClr val="17252A"/>
-          </a:solidFill>
-          <a:ln>
-            <a:noFill/>
-          </a:ln>
-          <a:effectLst/>
-        </p:spPr>
-        <p:style>
-          <a:lnRef idx="1">
-            <a:schemeClr val="accent1"/>
-          </a:lnRef>
-          <a:fillRef idx="3">
-            <a:schemeClr val="accent1"/>
-          </a:fillRef>
-          <a:effectRef idx="2">
-            <a:schemeClr val="accent1"/>
-          </a:effectRef>
-          <a:fontRef idx="minor">
-            <a:schemeClr val="lt1"/>
-          </a:fontRef>
-        </p:style>
-        <p:txBody>
-          <a:bodyPr rtlCol="0" anchor="ctr"/>
-          <a:lstStyle/>
-          <a:p>
-            <a:pPr algn="ctr"/>
-          </a:p>
-        </p:txBody>
-      </p:sp>
-      <p:sp>
-        <p:nvSpPr>
-          <p:cNvPr id="16" name="TextBox 15"/>
-          <p:cNvSpPr txBox="1"/>
-          <p:nvPr/>
-        </p:nvSpPr>
-        <p:spPr>
-          <a:xfrm>
-            <a:off x="7909560" y="1691640"/>
-            <a:ext cx="3474720" cy="4206240"/>
-          </a:xfrm>
-          <a:prstGeom prst="rect">
-            <a:avLst/>
-          </a:prstGeom>
-          <a:noFill/>
-        </p:spPr>
-        <p:txBody>
-          <a:bodyPr wrap="square" lIns="0" rIns="0" tIns="0" bIns="0" anchor="t">
-            <a:spAutoFit/>
-          </a:bodyPr>
-          <a:lstStyle/>
-          <a:p>
-            <a:pPr algn="l">
-              <a:spcAft>
-                <a:spcPts val="1200"/>
-              </a:spcAft>
-            </a:pPr>
-            <a:r>
-              <a:rPr sz="2200" b="1" i="0">
-                <a:solidFill>
-                  <a:srgbClr val="FFFFFF"/>
-                </a:solidFill>
-                <a:latin typeface="Cambria"/>
-              </a:rPr>
-              <a:t>Next steps</a:t>
-            </a:r>
-          </a:p>
-          <a:p>
-            <a:pPr algn="l">
-              <a:spcAft>
-                <a:spcPts val="1200"/>
-              </a:spcAft>
-            </a:pPr>
-            <a:r>
-              <a:rPr sz="1500" b="0" i="0">
-                <a:solidFill>
-                  <a:srgbClr val="B8C7C4"/>
-                </a:solidFill>
-                <a:latin typeface="Calibri"/>
-              </a:rPr>
-              <a:t>Report cause rankings with their Monte Carlo shares</a:t>
-            </a:r>
-          </a:p>
-          <a:p>
-            <a:pPr algn="l">
-              <a:spcAft>
-                <a:spcPts val="1200"/>
-              </a:spcAft>
-            </a:pPr>
-            <a:r>
-              <a:rPr sz="1500" b="0" i="0">
-                <a:solidFill>
-                  <a:srgbClr val="B8C7C4"/>
-                </a:solidFill>
-                <a:latin typeface="Calibri"/>
-              </a:rPr>
-              <a:t>Swap GLO-30 for FABDEM terrain</a:t>
-            </a:r>
-          </a:p>
-          <a:p>
-            <a:pPr algn="l">
-              <a:spcAft>
-                <a:spcPts val="1200"/>
-              </a:spcAft>
-            </a:pPr>
-            <a:r>
-              <a:rPr sz="1500" b="0" i="0">
-                <a:solidFill>
-                  <a:srgbClr val="B8C7C4"/>
-                </a:solidFill>
-                <a:latin typeface="Calibri"/>
-              </a:rPr>
-              <a:t>Observe post-2020 growth with Open Buildings 2.5D Temporal</a:t>
-            </a:r>
-          </a:p>
-          <a:p>
-            <a:pPr algn="l">
-              <a:spcAft>
-                <a:spcPts val="1200"/>
-              </a:spcAft>
-            </a:pPr>
-            <a:r>
-              <a:rPr sz="1500" b="0" i="0">
-                <a:solidFill>
-                  <a:srgbClr val="B8C7C4"/>
-                </a:solidFill>
-                <a:latin typeface="Calibri"/>
-              </a:rPr>
-              <a:t>Replace assumed truck counts with UNRA counts</a:t>
-            </a:r>
-          </a:p>
-          <a:p>
-            <a:pPr algn="l">
-              <a:spcAft>
-                <a:spcPts val="1200"/>
-              </a:spcAft>
-            </a:pPr>
-            <a:r>
-              <a:rPr sz="1500" b="0" i="0">
-                <a:solidFill>
-                  <a:srgbClr val="B8C7C4"/>
-                </a:solidFill>
-                <a:latin typeface="Calibri"/>
-              </a:rPr>
-              <a:t>Write up the paper</a:t>
+              <a:t>Daily Monitor (23 Dec 2018), black spots named by Uganda Police traffic officers; outputs/black_spots_*.csv (script 25). Name matching misses forest and swamp spots.</a:t>
             </a:r>
           </a:p>
         </p:txBody>
@@ -10587,7 +10083,7 @@
                 </a:solidFill>
                 <a:latin typeface="Cambria"/>
               </a:rPr>
-              <a:t>Four roads carry Uganda's trade</a:t>
+              <a:t>Five roads carry Uganda's trade</a:t>
             </a:r>
           </a:p>
         </p:txBody>
@@ -10639,8 +10135,8 @@
         </p:nvSpPr>
         <p:spPr>
           <a:xfrm>
-            <a:off x="548640" y="1828800"/>
-            <a:ext cx="6583680" cy="960120"/>
+            <a:off x="548640" y="1783080"/>
+            <a:ext cx="6583680" cy="804672"/>
           </a:xfrm>
           <a:prstGeom prst="roundRect">
             <a:avLst>
@@ -10685,8 +10181,8 @@
         </p:nvSpPr>
         <p:spPr>
           <a:xfrm>
-            <a:off x="777240" y="2011680"/>
-            <a:ext cx="594360" cy="594360"/>
+            <a:off x="731520" y="1911095"/>
+            <a:ext cx="548640" cy="548640"/>
           </a:xfrm>
           <a:prstGeom prst="ellipse">
             <a:avLst/>
@@ -10719,7 +10215,7 @@
           <a:p>
             <a:pPr algn="ctr"/>
             <a:r>
-              <a:rPr sz="1500" b="1">
+              <a:rPr sz="1400" b="1">
                 <a:solidFill>
                   <a:srgbClr val="FFFFFF"/>
                 </a:solidFill>
@@ -10738,8 +10234,8 @@
         </p:nvSpPr>
         <p:spPr>
           <a:xfrm>
-            <a:off x="1600200" y="1975104"/>
-            <a:ext cx="4206240" cy="365760"/>
+            <a:off x="1508760" y="1874519"/>
+            <a:ext cx="4480560" cy="365760"/>
           </a:xfrm>
           <a:prstGeom prst="rect">
             <a:avLst/>
@@ -10758,7 +10254,7 @@
               </a:spcAft>
             </a:pPr>
             <a:r>
-              <a:rPr sz="1700" b="1" i="0">
+              <a:rPr sz="1500" b="1" i="0">
                 <a:solidFill>
                   <a:srgbClr val="1E2528"/>
                 </a:solidFill>
@@ -10777,7 +10273,7 @@
         </p:nvSpPr>
         <p:spPr>
           <a:xfrm>
-            <a:off x="1600200" y="2331720"/>
+            <a:off x="1508760" y="2194560"/>
             <a:ext cx="5394960" cy="365760"/>
           </a:xfrm>
           <a:prstGeom prst="rect">
@@ -10797,7 +10293,7 @@
               </a:spcAft>
             </a:pPr>
             <a:r>
-              <a:rPr sz="1400" b="0" i="0">
+              <a:rPr sz="1250" b="0" i="0">
                 <a:solidFill>
                   <a:srgbClr val="5B6770"/>
                 </a:solidFill>
@@ -10816,7 +10312,7 @@
         </p:nvSpPr>
         <p:spPr>
           <a:xfrm>
-            <a:off x="5760720" y="1975104"/>
+            <a:off x="5760720" y="1874519"/>
             <a:ext cx="1188720" cy="365760"/>
           </a:xfrm>
           <a:prstGeom prst="rect">
@@ -10836,7 +10332,7 @@
               </a:spcAft>
             </a:pPr>
             <a:r>
-              <a:rPr sz="1700" b="1" i="0">
+              <a:rPr sz="1500" b="1" i="0">
                 <a:solidFill>
                   <a:srgbClr val="1E2528"/>
                 </a:solidFill>
@@ -10855,8 +10351,8 @@
         </p:nvSpPr>
         <p:spPr>
           <a:xfrm>
-            <a:off x="548640" y="2926080"/>
-            <a:ext cx="6583680" cy="960120"/>
+            <a:off x="548640" y="2697480"/>
+            <a:ext cx="6583680" cy="804672"/>
           </a:xfrm>
           <a:prstGeom prst="roundRect">
             <a:avLst>
@@ -10901,8 +10397,8 @@
         </p:nvSpPr>
         <p:spPr>
           <a:xfrm>
-            <a:off x="777240" y="3108960"/>
-            <a:ext cx="594360" cy="594360"/>
+            <a:off x="731520" y="2825496"/>
+            <a:ext cx="548640" cy="548640"/>
           </a:xfrm>
           <a:prstGeom prst="ellipse">
             <a:avLst/>
@@ -10935,7 +10431,7 @@
           <a:p>
             <a:pPr algn="ctr"/>
             <a:r>
-              <a:rPr sz="1500" b="1">
+              <a:rPr sz="1400" b="1">
                 <a:solidFill>
                   <a:srgbClr val="FFFFFF"/>
                 </a:solidFill>
@@ -10954,8 +10450,8 @@
         </p:nvSpPr>
         <p:spPr>
           <a:xfrm>
-            <a:off x="1600200" y="3072384"/>
-            <a:ext cx="4206240" cy="365760"/>
+            <a:off x="1508760" y="2788920"/>
+            <a:ext cx="4480560" cy="365760"/>
           </a:xfrm>
           <a:prstGeom prst="rect">
             <a:avLst/>
@@ -10974,7 +10470,7 @@
               </a:spcAft>
             </a:pPr>
             <a:r>
-              <a:rPr sz="1700" b="1" i="0">
+              <a:rPr sz="1500" b="1" i="0">
                 <a:solidFill>
                   <a:srgbClr val="1E2528"/>
                 </a:solidFill>
@@ -10993,7 +10489,7 @@
         </p:nvSpPr>
         <p:spPr>
           <a:xfrm>
-            <a:off x="1600200" y="3429000"/>
+            <a:off x="1508760" y="3108960"/>
             <a:ext cx="5394960" cy="365760"/>
           </a:xfrm>
           <a:prstGeom prst="rect">
@@ -11013,7 +10509,7 @@
               </a:spcAft>
             </a:pPr>
             <a:r>
-              <a:rPr sz="1400" b="0" i="0">
+              <a:rPr sz="1250" b="0" i="0">
                 <a:solidFill>
                   <a:srgbClr val="5B6770"/>
                 </a:solidFill>
@@ -11032,7 +10528,7 @@
         </p:nvSpPr>
         <p:spPr>
           <a:xfrm>
-            <a:off x="5760720" y="3072384"/>
+            <a:off x="5760720" y="2788920"/>
             <a:ext cx="1188720" cy="365760"/>
           </a:xfrm>
           <a:prstGeom prst="rect">
@@ -11052,7 +10548,7 @@
               </a:spcAft>
             </a:pPr>
             <a:r>
-              <a:rPr sz="1700" b="1" i="0">
+              <a:rPr sz="1500" b="1" i="0">
                 <a:solidFill>
                   <a:srgbClr val="1E2528"/>
                 </a:solidFill>
@@ -11071,8 +10567,8 @@
         </p:nvSpPr>
         <p:spPr>
           <a:xfrm>
-            <a:off x="548640" y="4023360"/>
-            <a:ext cx="6583680" cy="960120"/>
+            <a:off x="548640" y="3611880"/>
+            <a:ext cx="6583680" cy="804672"/>
           </a:xfrm>
           <a:prstGeom prst="roundRect">
             <a:avLst>
@@ -11117,8 +10613,8 @@
         </p:nvSpPr>
         <p:spPr>
           <a:xfrm>
-            <a:off x="777240" y="4206240"/>
-            <a:ext cx="594360" cy="594360"/>
+            <a:off x="731520" y="3739896"/>
+            <a:ext cx="548640" cy="548640"/>
           </a:xfrm>
           <a:prstGeom prst="ellipse">
             <a:avLst/>
@@ -11151,7 +10647,7 @@
           <a:p>
             <a:pPr algn="ctr"/>
             <a:r>
-              <a:rPr sz="1500" b="1">
+              <a:rPr sz="1400" b="1">
                 <a:solidFill>
                   <a:srgbClr val="FFFFFF"/>
                 </a:solidFill>
@@ -11170,8 +10666,8 @@
         </p:nvSpPr>
         <p:spPr>
           <a:xfrm>
-            <a:off x="1600200" y="4169664"/>
-            <a:ext cx="4206240" cy="365760"/>
+            <a:off x="1508760" y="3703320"/>
+            <a:ext cx="4480560" cy="365760"/>
           </a:xfrm>
           <a:prstGeom prst="rect">
             <a:avLst/>
@@ -11190,13 +10686,13 @@
               </a:spcAft>
             </a:pPr>
             <a:r>
-              <a:rPr sz="1700" b="1" i="0">
+              <a:rPr sz="1500" b="1" i="0">
                 <a:solidFill>
                   <a:srgbClr val="1E2528"/>
                 </a:solidFill>
                 <a:latin typeface="Calibri"/>
               </a:rPr>
-              <a:t>Kampala → Masaka → Mbarara → Katuna</a:t>
+              <a:t>Kampala → Masaka → Katuna</a:t>
             </a:r>
           </a:p>
         </p:txBody>
@@ -11209,7 +10705,7 @@
         </p:nvSpPr>
         <p:spPr>
           <a:xfrm>
-            <a:off x="1600200" y="4526280"/>
+            <a:off x="1508760" y="4023360"/>
             <a:ext cx="5394960" cy="365760"/>
           </a:xfrm>
           <a:prstGeom prst="rect">
@@ -11229,7 +10725,7 @@
               </a:spcAft>
             </a:pPr>
             <a:r>
-              <a:rPr sz="1400" b="0" i="0">
+              <a:rPr sz="1250" b="0" i="0">
                 <a:solidFill>
                   <a:srgbClr val="5B6770"/>
                 </a:solidFill>
@@ -11248,7 +10744,7 @@
         </p:nvSpPr>
         <p:spPr>
           <a:xfrm>
-            <a:off x="5760720" y="4169664"/>
+            <a:off x="5760720" y="3703320"/>
             <a:ext cx="1188720" cy="365760"/>
           </a:xfrm>
           <a:prstGeom prst="rect">
@@ -11268,7 +10764,7 @@
               </a:spcAft>
             </a:pPr>
             <a:r>
-              <a:rPr sz="1700" b="1" i="0">
+              <a:rPr sz="1500" b="1" i="0">
                 <a:solidFill>
                   <a:srgbClr val="1E2528"/>
                 </a:solidFill>
@@ -11287,8 +10783,8 @@
         </p:nvSpPr>
         <p:spPr>
           <a:xfrm>
-            <a:off x="548640" y="5120640"/>
-            <a:ext cx="6583680" cy="960120"/>
+            <a:off x="548640" y="4526280"/>
+            <a:ext cx="6583680" cy="804672"/>
           </a:xfrm>
           <a:prstGeom prst="roundRect">
             <a:avLst>
@@ -11333,8 +10829,8 @@
         </p:nvSpPr>
         <p:spPr>
           <a:xfrm>
-            <a:off x="777240" y="5303520"/>
-            <a:ext cx="594360" cy="594360"/>
+            <a:off x="731520" y="4654296"/>
+            <a:ext cx="548640" cy="548640"/>
           </a:xfrm>
           <a:prstGeom prst="ellipse">
             <a:avLst/>
@@ -11367,7 +10863,7 @@
           <a:p>
             <a:pPr algn="ctr"/>
             <a:r>
-              <a:rPr sz="1500" b="1">
+              <a:rPr sz="1400" b="1">
                 <a:solidFill>
                   <a:srgbClr val="FFFFFF"/>
                 </a:solidFill>
@@ -11386,8 +10882,8 @@
         </p:nvSpPr>
         <p:spPr>
           <a:xfrm>
-            <a:off x="1600200" y="5266944"/>
-            <a:ext cx="4206240" cy="365760"/>
+            <a:off x="1508760" y="4617720"/>
+            <a:ext cx="4480560" cy="365760"/>
           </a:xfrm>
           <a:prstGeom prst="rect">
             <a:avLst/>
@@ -11406,7 +10902,7 @@
               </a:spcAft>
             </a:pPr>
             <a:r>
-              <a:rPr sz="1700" b="1" i="0">
+              <a:rPr sz="1500" b="1" i="0">
                 <a:solidFill>
                   <a:srgbClr val="1E2528"/>
                 </a:solidFill>
@@ -11425,7 +10921,7 @@
         </p:nvSpPr>
         <p:spPr>
           <a:xfrm>
-            <a:off x="1600200" y="5623560"/>
+            <a:off x="1508760" y="4937760"/>
             <a:ext cx="5394960" cy="365760"/>
           </a:xfrm>
           <a:prstGeom prst="rect">
@@ -11445,7 +10941,7 @@
               </a:spcAft>
             </a:pPr>
             <a:r>
-              <a:rPr sz="1400" b="0" i="0">
+              <a:rPr sz="1250" b="0" i="0">
                 <a:solidFill>
                   <a:srgbClr val="5B6770"/>
                 </a:solidFill>
@@ -11464,7 +10960,7 @@
         </p:nvSpPr>
         <p:spPr>
           <a:xfrm>
-            <a:off x="5760720" y="5266944"/>
+            <a:off x="5760720" y="4617720"/>
             <a:ext cx="1188720" cy="365760"/>
           </a:xfrm>
           <a:prstGeom prst="rect">
@@ -11484,20 +10980,236 @@
               </a:spcAft>
             </a:pPr>
             <a:r>
-              <a:rPr sz="1700" b="1" i="0">
+              <a:rPr sz="1500" b="1" i="0">
                 <a:solidFill>
                   <a:srgbClr val="1E2528"/>
                 </a:solidFill>
                 <a:latin typeface="Calibri"/>
               </a:rPr>
               <a:t>194 km</a:t>
+            </a:r>
+          </a:p>
+        </p:txBody>
+      </p:sp>
+      <p:sp>
+        <p:nvSpPr>
+          <p:cNvPr id="24" name="Rounded Rectangle 23"/>
+          <p:cNvSpPr/>
+          <p:nvPr/>
+        </p:nvSpPr>
+        <p:spPr>
+          <a:xfrm>
+            <a:off x="548640" y="5440680"/>
+            <a:ext cx="6583680" cy="804672"/>
+          </a:xfrm>
+          <a:prstGeom prst="roundRect">
+            <a:avLst>
+              <a:gd name="adj" fmla="val 6000"/>
+            </a:avLst>
+          </a:prstGeom>
+          <a:solidFill>
+            <a:srgbClr val="EEF2F0"/>
+          </a:solidFill>
+          <a:ln>
+            <a:noFill/>
+          </a:ln>
+          <a:effectLst/>
+        </p:spPr>
+        <p:style>
+          <a:lnRef idx="1">
+            <a:schemeClr val="accent1"/>
+          </a:lnRef>
+          <a:fillRef idx="3">
+            <a:schemeClr val="accent1"/>
+          </a:fillRef>
+          <a:effectRef idx="2">
+            <a:schemeClr val="accent1"/>
+          </a:effectRef>
+          <a:fontRef idx="minor">
+            <a:schemeClr val="lt1"/>
+          </a:fontRef>
+        </p:style>
+        <p:txBody>
+          <a:bodyPr rtlCol="0" anchor="ctr"/>
+          <a:lstStyle/>
+          <a:p>
+            <a:pPr algn="ctr"/>
+          </a:p>
+        </p:txBody>
+      </p:sp>
+      <p:sp>
+        <p:nvSpPr>
+          <p:cNvPr id="25" name="Oval 24"/>
+          <p:cNvSpPr/>
+          <p:nvPr/>
+        </p:nvSpPr>
+        <p:spPr>
+          <a:xfrm>
+            <a:off x="731520" y="5568696"/>
+            <a:ext cx="548640" cy="548640"/>
+          </a:xfrm>
+          <a:prstGeom prst="ellipse">
+            <a:avLst/>
+          </a:prstGeom>
+          <a:solidFill>
+            <a:srgbClr val="8A5CC7"/>
+          </a:solidFill>
+          <a:ln>
+            <a:noFill/>
+          </a:ln>
+          <a:effectLst/>
+        </p:spPr>
+        <p:style>
+          <a:lnRef idx="1">
+            <a:schemeClr val="accent1"/>
+          </a:lnRef>
+          <a:fillRef idx="3">
+            <a:schemeClr val="accent1"/>
+          </a:fillRef>
+          <a:effectRef idx="2">
+            <a:schemeClr val="accent1"/>
+          </a:effectRef>
+          <a:fontRef idx="minor">
+            <a:schemeClr val="lt1"/>
+          </a:fontRef>
+        </p:style>
+        <p:txBody>
+          <a:bodyPr rtlCol="0" anchor="ctr" lIns="0" rIns="0" tIns="0" bIns="0"/>
+          <a:lstStyle/>
+          <a:p>
+            <a:pPr algn="ctr"/>
+            <a:r>
+              <a:rPr sz="1400" b="1">
+                <a:solidFill>
+                  <a:srgbClr val="FFFFFF"/>
+                </a:solidFill>
+                <a:latin typeface="Calibri"/>
+              </a:rPr>
+              <a:t>A5</a:t>
+            </a:r>
+          </a:p>
+        </p:txBody>
+      </p:sp>
+      <p:sp>
+        <p:nvSpPr>
+          <p:cNvPr id="26" name="TextBox 25"/>
+          <p:cNvSpPr txBox="1"/>
+          <p:nvPr/>
+        </p:nvSpPr>
+        <p:spPr>
+          <a:xfrm>
+            <a:off x="1508760" y="5532120"/>
+            <a:ext cx="4480560" cy="365760"/>
+          </a:xfrm>
+          <a:prstGeom prst="rect">
+            <a:avLst/>
+          </a:prstGeom>
+          <a:noFill/>
+        </p:spPr>
+        <p:txBody>
+          <a:bodyPr wrap="square" lIns="0" rIns="0" tIns="0" bIns="0" anchor="t">
+            <a:spAutoFit/>
+          </a:bodyPr>
+          <a:lstStyle/>
+          <a:p>
+            <a:pPr algn="l">
+              <a:spcAft>
+                <a:spcPts val="0"/>
+              </a:spcAft>
+            </a:pPr>
+            <a:r>
+              <a:rPr sz="1500" b="1" i="0">
+                <a:solidFill>
+                  <a:srgbClr val="1E2528"/>
+                </a:solidFill>
+                <a:latin typeface="Calibri"/>
+              </a:rPr>
+              <a:t>Kampala → Mubende → Fort Portal → Kasese → Bwera</a:t>
+            </a:r>
+          </a:p>
+        </p:txBody>
+      </p:sp>
+      <p:sp>
+        <p:nvSpPr>
+          <p:cNvPr id="27" name="TextBox 26"/>
+          <p:cNvSpPr txBox="1"/>
+          <p:nvPr/>
+        </p:nvSpPr>
+        <p:spPr>
+          <a:xfrm>
+            <a:off x="1508760" y="5852160"/>
+            <a:ext cx="5394960" cy="365760"/>
+          </a:xfrm>
+          <a:prstGeom prst="rect">
+            <a:avLst/>
+          </a:prstGeom>
+          <a:noFill/>
+        </p:spPr>
+        <p:txBody>
+          <a:bodyPr wrap="square" lIns="0" rIns="0" tIns="0" bIns="0" anchor="t">
+            <a:spAutoFit/>
+          </a:bodyPr>
+          <a:lstStyle/>
+          <a:p>
+            <a:pPr algn="l">
+              <a:spcAft>
+                <a:spcPts val="0"/>
+              </a:spcAft>
+            </a:pPr>
+            <a:r>
+              <a:rPr sz="1250" b="0" i="0">
+                <a:solidFill>
+                  <a:srgbClr val="5B6770"/>
+                </a:solidFill>
+                <a:latin typeface="Calibri"/>
+              </a:rPr>
+              <a:t>DR Congo border at Mpondwe; Kasese and North Kivu</a:t>
+            </a:r>
+          </a:p>
+        </p:txBody>
+      </p:sp>
+      <p:sp>
+        <p:nvSpPr>
+          <p:cNvPr id="28" name="TextBox 27"/>
+          <p:cNvSpPr txBox="1"/>
+          <p:nvPr/>
+        </p:nvSpPr>
+        <p:spPr>
+          <a:xfrm>
+            <a:off x="5760720" y="5532120"/>
+            <a:ext cx="1188720" cy="365760"/>
+          </a:xfrm>
+          <a:prstGeom prst="rect">
+            <a:avLst/>
+          </a:prstGeom>
+          <a:noFill/>
+        </p:spPr>
+        <p:txBody>
+          <a:bodyPr wrap="square" lIns="0" rIns="0" tIns="0" bIns="0" anchor="t">
+            <a:spAutoFit/>
+          </a:bodyPr>
+          <a:lstStyle/>
+          <a:p>
+            <a:pPr algn="r">
+              <a:spcAft>
+                <a:spcPts val="0"/>
+              </a:spcAft>
+            </a:pPr>
+            <a:r>
+              <a:rPr sz="1500" b="1" i="0">
+                <a:solidFill>
+                  <a:srgbClr val="1E2528"/>
+                </a:solidFill>
+                <a:latin typeface="Calibri"/>
+              </a:rPr>
+              <a:t>418 km</a:t>
             </a:r>
           </a:p>
         </p:txBody>
       </p:sp>
       <p:pic>
         <p:nvPicPr>
-          <p:cNvPr id="24" name="Picture 23" descr="m01.png"/>
+          <p:cNvPr id="29" name="Picture 28" descr="m01.png"/>
           <p:cNvPicPr>
             <a:picLocks noChangeAspect="1"/>
           </p:cNvPicPr>
@@ -11521,7 +11233,7 @@
       </p:pic>
       <p:sp>
         <p:nvSpPr>
-          <p:cNvPr id="25" name="TextBox 24"/>
+          <p:cNvPr id="30" name="TextBox 29"/>
           <p:cNvSpPr txBox="1"/>
           <p:nvPr/>
         </p:nvSpPr>
@@ -11567,6 +11279,1945 @@
 </file>
 
 <file path=ppt/slides/slide20.xml><?xml version="1.0" encoding="utf-8"?>
+<p:sld xmlns:a="http://schemas.openxmlformats.org/drawingml/2006/main" xmlns:p="http://schemas.openxmlformats.org/presentationml/2006/main" xmlns:r="http://schemas.openxmlformats.org/officeDocument/2006/relationships">
+  <p:cSld>
+    <p:bg>
+      <p:bgPr>
+        <a:solidFill>
+          <a:srgbClr val="FFFFFF"/>
+        </a:solidFill>
+        <a:effectLst/>
+      </p:bgPr>
+    </p:bg>
+    <p:spTree>
+      <p:nvGrpSpPr>
+        <p:cNvPr id="1" name=""/>
+        <p:cNvGrpSpPr/>
+        <p:nvPr/>
+      </p:nvGrpSpPr>
+      <p:grpSpPr/>
+      <p:pic>
+        <p:nvPicPr>
+          <p:cNvPr id="2" name="Picture 1" descr="f12.png"/>
+          <p:cNvPicPr>
+            <a:picLocks noChangeAspect="1"/>
+          </p:cNvPicPr>
+          <p:nvPr/>
+        </p:nvPicPr>
+        <p:blipFill>
+          <a:blip r:embed="rId2"/>
+          <a:stretch>
+            <a:fillRect/>
+          </a:stretch>
+        </p:blipFill>
+        <p:spPr>
+          <a:xfrm>
+            <a:off x="365760" y="320040"/>
+            <a:ext cx="5896644" cy="6217920"/>
+          </a:xfrm>
+          <a:prstGeom prst="rect">
+            <a:avLst/>
+          </a:prstGeom>
+        </p:spPr>
+      </p:pic>
+      <p:sp>
+        <p:nvSpPr>
+          <p:cNvPr id="3" name="TextBox 2"/>
+          <p:cNvSpPr txBox="1"/>
+          <p:nvPr/>
+        </p:nvSpPr>
+        <p:spPr>
+          <a:xfrm>
+            <a:off x="6400800" y="411480"/>
+            <a:ext cx="5303520" cy="1188720"/>
+          </a:xfrm>
+          <a:prstGeom prst="rect">
+            <a:avLst/>
+          </a:prstGeom>
+          <a:noFill/>
+        </p:spPr>
+        <p:txBody>
+          <a:bodyPr wrap="square" lIns="0" rIns="0" tIns="0" bIns="0" anchor="t">
+            <a:spAutoFit/>
+          </a:bodyPr>
+          <a:lstStyle/>
+          <a:p>
+            <a:pPr algn="l">
+              <a:spcAft>
+                <a:spcPts val="0"/>
+              </a:spcAft>
+            </a:pPr>
+            <a:r>
+              <a:rPr sz="3000" b="1" i="0">
+                <a:solidFill>
+                  <a:srgbClr val="1E2528"/>
+                </a:solidFill>
+                <a:latin typeface="Cambria"/>
+              </a:rPr>
+              <a:t>Rail along the bottlenecks</a:t>
+            </a:r>
+          </a:p>
+        </p:txBody>
+      </p:sp>
+      <p:sp>
+        <p:nvSpPr>
+          <p:cNvPr id="4" name="TextBox 3"/>
+          <p:cNvSpPr txBox="1"/>
+          <p:nvPr/>
+        </p:nvSpPr>
+        <p:spPr>
+          <a:xfrm>
+            <a:off x="6400800" y="1234440"/>
+            <a:ext cx="5303520" cy="548640"/>
+          </a:xfrm>
+          <a:prstGeom prst="rect">
+            <a:avLst/>
+          </a:prstGeom>
+          <a:noFill/>
+        </p:spPr>
+        <p:txBody>
+          <a:bodyPr wrap="square" lIns="0" rIns="0" tIns="0" bIns="0" anchor="t">
+            <a:spAutoFit/>
+          </a:bodyPr>
+          <a:lstStyle/>
+          <a:p>
+            <a:pPr algn="l">
+              <a:spcAft>
+                <a:spcPts val="0"/>
+              </a:spcAft>
+            </a:pPr>
+            <a:r>
+              <a:rPr sz="1400" b="0" i="0">
+                <a:solidFill>
+                  <a:srgbClr val="5B6770"/>
+                </a:solidFill>
+                <a:latin typeface="Calibri"/>
+              </a:rPr>
+              <a:t>Least-cost screening alignments and the existing metre-gauge railway</a:t>
+            </a:r>
+          </a:p>
+        </p:txBody>
+      </p:sp>
+      <p:sp>
+        <p:nvSpPr>
+          <p:cNvPr id="5" name="TextBox 4"/>
+          <p:cNvSpPr txBox="1"/>
+          <p:nvPr/>
+        </p:nvSpPr>
+        <p:spPr>
+          <a:xfrm>
+            <a:off x="6400800" y="2011680"/>
+            <a:ext cx="1463040" cy="640080"/>
+          </a:xfrm>
+          <a:prstGeom prst="rect">
+            <a:avLst/>
+          </a:prstGeom>
+          <a:noFill/>
+        </p:spPr>
+        <p:txBody>
+          <a:bodyPr wrap="square" lIns="0" rIns="0" tIns="0" bIns="0" anchor="t">
+            <a:spAutoFit/>
+          </a:bodyPr>
+          <a:lstStyle/>
+          <a:p>
+            <a:pPr algn="l">
+              <a:spcAft>
+                <a:spcPts val="0"/>
+              </a:spcAft>
+            </a:pPr>
+            <a:r>
+              <a:rPr sz="2600" b="1" i="0">
+                <a:solidFill>
+                  <a:srgbClr val="C4532D"/>
+                </a:solidFill>
+                <a:latin typeface="Cambria"/>
+              </a:rPr>
+              <a:t>81%</a:t>
+            </a:r>
+          </a:p>
+        </p:txBody>
+      </p:sp>
+      <p:sp>
+        <p:nvSpPr>
+          <p:cNvPr id="6" name="TextBox 5"/>
+          <p:cNvSpPr txBox="1"/>
+          <p:nvPr/>
+        </p:nvSpPr>
+        <p:spPr>
+          <a:xfrm>
+            <a:off x="8001000" y="2057400"/>
+            <a:ext cx="3703320" cy="1188720"/>
+          </a:xfrm>
+          <a:prstGeom prst="rect">
+            <a:avLst/>
+          </a:prstGeom>
+          <a:noFill/>
+        </p:spPr>
+        <p:txBody>
+          <a:bodyPr wrap="square" lIns="0" rIns="0" tIns="0" bIns="0" anchor="t">
+            <a:spAutoFit/>
+          </a:bodyPr>
+          <a:lstStyle/>
+          <a:p>
+            <a:pPr algn="l">
+              <a:spcAft>
+                <a:spcPts val="0"/>
+              </a:spcAft>
+            </a:pPr>
+            <a:r>
+              <a:rPr sz="1300" b="0" i="0">
+                <a:solidFill>
+                  <a:srgbClr val="1E2528"/>
+                </a:solidFill>
+                <a:latin typeface="Calibri"/>
+              </a:rPr>
+              <a:t>of the Malaba road's truck delay lies within 10 km of the railway the SGR follows; on the other roads, 16% or less.</a:t>
+            </a:r>
+          </a:p>
+        </p:txBody>
+      </p:sp>
+      <p:sp>
+        <p:nvSpPr>
+          <p:cNvPr id="7" name="TextBox 6"/>
+          <p:cNvSpPr txBox="1"/>
+          <p:nvPr/>
+        </p:nvSpPr>
+        <p:spPr>
+          <a:xfrm>
+            <a:off x="6400800" y="3337560"/>
+            <a:ext cx="1463040" cy="640080"/>
+          </a:xfrm>
+          <a:prstGeom prst="rect">
+            <a:avLst/>
+          </a:prstGeom>
+          <a:noFill/>
+        </p:spPr>
+        <p:txBody>
+          <a:bodyPr wrap="square" lIns="0" rIns="0" tIns="0" bIns="0" anchor="t">
+            <a:spAutoFit/>
+          </a:bodyPr>
+          <a:lstStyle/>
+          <a:p>
+            <a:pPr algn="l">
+              <a:spcAft>
+                <a:spcPts val="0"/>
+              </a:spcAft>
+            </a:pPr>
+            <a:r>
+              <a:rPr sz="2600" b="1" i="0">
+                <a:solidFill>
+                  <a:srgbClr val="C4532D"/>
+                </a:solidFill>
+                <a:latin typeface="Cambria"/>
+              </a:rPr>
+              <a:t>17 h</a:t>
+            </a:r>
+          </a:p>
+        </p:txBody>
+      </p:sp>
+      <p:sp>
+        <p:nvSpPr>
+          <p:cNvPr id="8" name="TextBox 7"/>
+          <p:cNvSpPr txBox="1"/>
+          <p:nvPr/>
+        </p:nvSpPr>
+        <p:spPr>
+          <a:xfrm>
+            <a:off x="8001000" y="3383280"/>
+            <a:ext cx="3703320" cy="1188720"/>
+          </a:xfrm>
+          <a:prstGeom prst="rect">
+            <a:avLst/>
+          </a:prstGeom>
+          <a:noFill/>
+        </p:spPr>
+        <p:txBody>
+          <a:bodyPr wrap="square" lIns="0" rIns="0" tIns="0" bIns="0" anchor="t">
+            <a:spAutoFit/>
+          </a:bodyPr>
+          <a:lstStyle/>
+          <a:p>
+            <a:pPr algn="l">
+              <a:spcAft>
+                <a:spcPts val="0"/>
+              </a:spcAft>
+            </a:pPr>
+            <a:r>
+              <a:rPr sz="1300" b="0" i="0">
+                <a:solidFill>
+                  <a:srgbClr val="1E2528"/>
+                </a:solidFill>
+                <a:latin typeface="Calibri"/>
+              </a:rPr>
+              <a:t>door to door by rail for domestic freight on the eastern line, against about 5 h by truck: terminals, not line-haul, set the time.</a:t>
+            </a:r>
+          </a:p>
+        </p:txBody>
+      </p:sp>
+      <p:sp>
+        <p:nvSpPr>
+          <p:cNvPr id="9" name="TextBox 8"/>
+          <p:cNvSpPr txBox="1"/>
+          <p:nvPr/>
+        </p:nvSpPr>
+        <p:spPr>
+          <a:xfrm>
+            <a:off x="6400800" y="4663440"/>
+            <a:ext cx="1463040" cy="640080"/>
+          </a:xfrm>
+          <a:prstGeom prst="rect">
+            <a:avLst/>
+          </a:prstGeom>
+          <a:noFill/>
+        </p:spPr>
+        <p:txBody>
+          <a:bodyPr wrap="square" lIns="0" rIns="0" tIns="0" bIns="0" anchor="t">
+            <a:spAutoFit/>
+          </a:bodyPr>
+          <a:lstStyle/>
+          <a:p>
+            <a:pPr algn="l">
+              <a:spcAft>
+                <a:spcPts val="0"/>
+              </a:spcAft>
+            </a:pPr>
+            <a:r>
+              <a:rPr sz="2600" b="1" i="0">
+                <a:solidFill>
+                  <a:srgbClr val="C4532D"/>
+                </a:solidFill>
+                <a:latin typeface="Cambria"/>
+              </a:rPr>
+              <a:t>≤ 0.09</a:t>
+            </a:r>
+          </a:p>
+        </p:txBody>
+      </p:sp>
+      <p:sp>
+        <p:nvSpPr>
+          <p:cNvPr id="10" name="TextBox 9"/>
+          <p:cNvSpPr txBox="1"/>
+          <p:nvPr/>
+        </p:nvSpPr>
+        <p:spPr>
+          <a:xfrm>
+            <a:off x="8001000" y="4709160"/>
+            <a:ext cx="3703320" cy="1188720"/>
+          </a:xfrm>
+          <a:prstGeom prst="rect">
+            <a:avLst/>
+          </a:prstGeom>
+          <a:noFill/>
+        </p:spPr>
+        <p:txBody>
+          <a:bodyPr wrap="square" lIns="0" rIns="0" tIns="0" bIns="0" anchor="t">
+            <a:spAutoFit/>
+          </a:bodyPr>
+          <a:lstStyle/>
+          <a:p>
+            <a:pPr algn="l">
+              <a:spcAft>
+                <a:spcPts val="0"/>
+              </a:spcAft>
+            </a:pPr>
+            <a:r>
+              <a:rPr sz="1300" b="0" i="0">
+                <a:solidFill>
+                  <a:srgbClr val="1E2528"/>
+                </a:solidFill>
+                <a:latin typeface="Calibri"/>
+              </a:rPr>
+              <a:t>benefit/cost for any of the 5 lines on Ugandan freight alone; through traffic from Mombasa needs about 93 Mt a year to break even.</a:t>
+            </a:r>
+          </a:p>
+        </p:txBody>
+      </p:sp>
+      <p:sp>
+        <p:nvSpPr>
+          <p:cNvPr id="11" name="TextBox 10"/>
+          <p:cNvSpPr txBox="1"/>
+          <p:nvPr/>
+        </p:nvSpPr>
+        <p:spPr>
+          <a:xfrm>
+            <a:off x="6400800" y="5897880"/>
+            <a:ext cx="5303520" cy="548640"/>
+          </a:xfrm>
+          <a:prstGeom prst="rect">
+            <a:avLst/>
+          </a:prstGeom>
+          <a:noFill/>
+        </p:spPr>
+        <p:txBody>
+          <a:bodyPr wrap="square" lIns="0" rIns="0" tIns="0" bIns="0" anchor="t">
+            <a:spAutoFit/>
+          </a:bodyPr>
+          <a:lstStyle/>
+          <a:p>
+            <a:pPr algn="l">
+              <a:spcAft>
+                <a:spcPts val="0"/>
+              </a:spcAft>
+            </a:pPr>
+            <a:r>
+              <a:rPr sz="1200" b="0" i="1">
+                <a:solidFill>
+                  <a:srgbClr val="5B6770"/>
+                </a:solidFill>
+                <a:latin typeface="Calibri"/>
+              </a:rPr>
+              <a:t>Counting only freight costs and CO2 from today's Ugandan traffic: transit growth, passengers and congestion relief carry the case.</a:t>
+            </a:r>
+          </a:p>
+        </p:txBody>
+      </p:sp>
+    </p:spTree>
+  </p:cSld>
+  <p:clrMapOvr>
+    <a:masterClrMapping/>
+  </p:clrMapOvr>
+</p:sld>
+</file>
+
+<file path=ppt/slides/slide21.xml><?xml version="1.0" encoding="utf-8"?>
+<p:sld xmlns:a="http://schemas.openxmlformats.org/drawingml/2006/main" xmlns:p="http://schemas.openxmlformats.org/presentationml/2006/main" xmlns:r="http://schemas.openxmlformats.org/officeDocument/2006/relationships">
+  <p:cSld>
+    <p:bg>
+      <p:bgPr>
+        <a:solidFill>
+          <a:srgbClr val="FFFFFF"/>
+        </a:solidFill>
+        <a:effectLst/>
+      </p:bgPr>
+    </p:bg>
+    <p:spTree>
+      <p:nvGrpSpPr>
+        <p:cNvPr id="1" name=""/>
+        <p:cNvGrpSpPr/>
+        <p:nvPr/>
+      </p:nvGrpSpPr>
+      <p:grpSpPr/>
+      <p:sp>
+        <p:nvSpPr>
+          <p:cNvPr id="2" name="TextBox 1"/>
+          <p:cNvSpPr txBox="1"/>
+          <p:nvPr/>
+        </p:nvSpPr>
+        <p:spPr>
+          <a:xfrm>
+            <a:off x="548640" y="411480"/>
+            <a:ext cx="11064240" cy="731520"/>
+          </a:xfrm>
+          <a:prstGeom prst="rect">
+            <a:avLst/>
+          </a:prstGeom>
+          <a:noFill/>
+        </p:spPr>
+        <p:txBody>
+          <a:bodyPr wrap="square" lIns="0" rIns="0" tIns="0" bIns="0" anchor="t">
+            <a:spAutoFit/>
+          </a:bodyPr>
+          <a:lstStyle/>
+          <a:p>
+            <a:pPr algn="l">
+              <a:spcAft>
+                <a:spcPts val="0"/>
+              </a:spcAft>
+            </a:pPr>
+            <a:r>
+              <a:rPr sz="3400" b="1" i="0">
+                <a:solidFill>
+                  <a:srgbClr val="1E2528"/>
+                </a:solidFill>
+                <a:latin typeface="Cambria"/>
+              </a:rPr>
+              <a:t>Discussion</a:t>
+            </a:r>
+          </a:p>
+        </p:txBody>
+      </p:sp>
+      <p:sp>
+        <p:nvSpPr>
+          <p:cNvPr id="3" name="TextBox 2"/>
+          <p:cNvSpPr txBox="1"/>
+          <p:nvPr/>
+        </p:nvSpPr>
+        <p:spPr>
+          <a:xfrm>
+            <a:off x="548640" y="1115568"/>
+            <a:ext cx="11064240" cy="457200"/>
+          </a:xfrm>
+          <a:prstGeom prst="rect">
+            <a:avLst/>
+          </a:prstGeom>
+          <a:noFill/>
+        </p:spPr>
+        <p:txBody>
+          <a:bodyPr wrap="square" lIns="0" rIns="0" tIns="0" bIns="0" anchor="t">
+            <a:spAutoFit/>
+          </a:bodyPr>
+          <a:lstStyle/>
+          <a:p>
+            <a:pPr algn="l">
+              <a:spcAft>
+                <a:spcPts val="0"/>
+              </a:spcAft>
+            </a:pPr>
+            <a:r>
+              <a:rPr sz="1600" b="0" i="0">
+                <a:solidFill>
+                  <a:srgbClr val="5B6770"/>
+                </a:solidFill>
+                <a:latin typeface="Calibri"/>
+              </a:rPr>
+              <a:t>What the results suggest for corridor policy</a:t>
+            </a:r>
+          </a:p>
+        </p:txBody>
+      </p:sp>
+      <p:sp>
+        <p:nvSpPr>
+          <p:cNvPr id="4" name="Rounded Rectangle 3"/>
+          <p:cNvSpPr/>
+          <p:nvPr/>
+        </p:nvSpPr>
+        <p:spPr>
+          <a:xfrm>
+            <a:off x="548640" y="1783080"/>
+            <a:ext cx="5440680" cy="2103120"/>
+          </a:xfrm>
+          <a:prstGeom prst="roundRect">
+            <a:avLst>
+              <a:gd name="adj" fmla="val 6000"/>
+            </a:avLst>
+          </a:prstGeom>
+          <a:solidFill>
+            <a:srgbClr val="EEF2F0"/>
+          </a:solidFill>
+          <a:ln>
+            <a:noFill/>
+          </a:ln>
+          <a:effectLst/>
+        </p:spPr>
+        <p:style>
+          <a:lnRef idx="1">
+            <a:schemeClr val="accent1"/>
+          </a:lnRef>
+          <a:fillRef idx="3">
+            <a:schemeClr val="accent1"/>
+          </a:fillRef>
+          <a:effectRef idx="2">
+            <a:schemeClr val="accent1"/>
+          </a:effectRef>
+          <a:fontRef idx="minor">
+            <a:schemeClr val="lt1"/>
+          </a:fontRef>
+        </p:style>
+        <p:txBody>
+          <a:bodyPr rtlCol="0" anchor="ctr"/>
+          <a:lstStyle/>
+          <a:p>
+            <a:pPr algn="ctr"/>
+          </a:p>
+        </p:txBody>
+      </p:sp>
+      <p:sp>
+        <p:nvSpPr>
+          <p:cNvPr id="5" name="Oval 4"/>
+          <p:cNvSpPr/>
+          <p:nvPr/>
+        </p:nvSpPr>
+        <p:spPr>
+          <a:xfrm>
+            <a:off x="822959" y="2057400"/>
+            <a:ext cx="457200" cy="457200"/>
+          </a:xfrm>
+          <a:prstGeom prst="ellipse">
+            <a:avLst/>
+          </a:prstGeom>
+          <a:solidFill>
+            <a:srgbClr val="C4532D"/>
+          </a:solidFill>
+          <a:ln>
+            <a:noFill/>
+          </a:ln>
+          <a:effectLst/>
+        </p:spPr>
+        <p:style>
+          <a:lnRef idx="1">
+            <a:schemeClr val="accent1"/>
+          </a:lnRef>
+          <a:fillRef idx="3">
+            <a:schemeClr val="accent1"/>
+          </a:fillRef>
+          <a:effectRef idx="2">
+            <a:schemeClr val="accent1"/>
+          </a:effectRef>
+          <a:fontRef idx="minor">
+            <a:schemeClr val="lt1"/>
+          </a:fontRef>
+        </p:style>
+        <p:txBody>
+          <a:bodyPr rtlCol="0" anchor="ctr" lIns="0" rIns="0" tIns="0" bIns="0"/>
+          <a:lstStyle/>
+          <a:p>
+            <a:pPr algn="ctr"/>
+            <a:r>
+              <a:rPr sz="1500" b="1">
+                <a:solidFill>
+                  <a:srgbClr val="FFFFFF"/>
+                </a:solidFill>
+                <a:latin typeface="Calibri"/>
+              </a:rPr>
+              <a:t>1</a:t>
+            </a:r>
+          </a:p>
+        </p:txBody>
+      </p:sp>
+      <p:sp>
+        <p:nvSpPr>
+          <p:cNvPr id="6" name="TextBox 5"/>
+          <p:cNvSpPr txBox="1"/>
+          <p:nvPr/>
+        </p:nvSpPr>
+        <p:spPr>
+          <a:xfrm>
+            <a:off x="1463040" y="2084831"/>
+            <a:ext cx="4297680" cy="411480"/>
+          </a:xfrm>
+          <a:prstGeom prst="rect">
+            <a:avLst/>
+          </a:prstGeom>
+          <a:noFill/>
+        </p:spPr>
+        <p:txBody>
+          <a:bodyPr wrap="square" lIns="0" rIns="0" tIns="0" bIns="0" anchor="t">
+            <a:spAutoFit/>
+          </a:bodyPr>
+          <a:lstStyle/>
+          <a:p>
+            <a:pPr algn="l">
+              <a:spcAft>
+                <a:spcPts val="0"/>
+              </a:spcAft>
+            </a:pPr>
+            <a:r>
+              <a:rPr sz="1900" b="1" i="0">
+                <a:solidFill>
+                  <a:srgbClr val="1E2528"/>
+                </a:solidFill>
+                <a:latin typeface="Cambria"/>
+              </a:rPr>
+              <a:t>Settlement is the chronic problem</a:t>
+            </a:r>
+          </a:p>
+        </p:txBody>
+      </p:sp>
+      <p:sp>
+        <p:nvSpPr>
+          <p:cNvPr id="7" name="TextBox 6"/>
+          <p:cNvSpPr txBox="1"/>
+          <p:nvPr/>
+        </p:nvSpPr>
+        <p:spPr>
+          <a:xfrm>
+            <a:off x="1463040" y="2560320"/>
+            <a:ext cx="4297680" cy="1280160"/>
+          </a:xfrm>
+          <a:prstGeom prst="rect">
+            <a:avLst/>
+          </a:prstGeom>
+          <a:noFill/>
+        </p:spPr>
+        <p:txBody>
+          <a:bodyPr wrap="square" lIns="0" rIns="0" tIns="0" bIns="0" anchor="t">
+            <a:spAutoFit/>
+          </a:bodyPr>
+          <a:lstStyle/>
+          <a:p>
+            <a:pPr algn="l">
+              <a:spcAft>
+                <a:spcPts val="0"/>
+              </a:spcAft>
+            </a:pPr>
+            <a:r>
+              <a:rPr sz="1400" b="0" i="0">
+                <a:solidFill>
+                  <a:srgbClr val="5B6770"/>
+                </a:solidFill>
+                <a:latin typeface="Calibri"/>
+              </a:rPr>
+              <a:t>Roadside activity costs the most time for cars on every road, is growing fastest where it is newest, and is where police place their crash black spots. Access management and service roads address the cause.</a:t>
+            </a:r>
+          </a:p>
+        </p:txBody>
+      </p:sp>
+      <p:sp>
+        <p:nvSpPr>
+          <p:cNvPr id="8" name="Rounded Rectangle 7"/>
+          <p:cNvSpPr/>
+          <p:nvPr/>
+        </p:nvSpPr>
+        <p:spPr>
+          <a:xfrm>
+            <a:off x="6172200" y="1783080"/>
+            <a:ext cx="5440680" cy="2103120"/>
+          </a:xfrm>
+          <a:prstGeom prst="roundRect">
+            <a:avLst>
+              <a:gd name="adj" fmla="val 6000"/>
+            </a:avLst>
+          </a:prstGeom>
+          <a:solidFill>
+            <a:srgbClr val="EEF2F0"/>
+          </a:solidFill>
+          <a:ln>
+            <a:noFill/>
+          </a:ln>
+          <a:effectLst/>
+        </p:spPr>
+        <p:style>
+          <a:lnRef idx="1">
+            <a:schemeClr val="accent1"/>
+          </a:lnRef>
+          <a:fillRef idx="3">
+            <a:schemeClr val="accent1"/>
+          </a:fillRef>
+          <a:effectRef idx="2">
+            <a:schemeClr val="accent1"/>
+          </a:effectRef>
+          <a:fontRef idx="minor">
+            <a:schemeClr val="lt1"/>
+          </a:fontRef>
+        </p:style>
+        <p:txBody>
+          <a:bodyPr rtlCol="0" anchor="ctr"/>
+          <a:lstStyle/>
+          <a:p>
+            <a:pPr algn="ctr"/>
+          </a:p>
+        </p:txBody>
+      </p:sp>
+      <p:sp>
+        <p:nvSpPr>
+          <p:cNvPr id="9" name="Oval 8"/>
+          <p:cNvSpPr/>
+          <p:nvPr/>
+        </p:nvSpPr>
+        <p:spPr>
+          <a:xfrm>
+            <a:off x="6446520" y="2057400"/>
+            <a:ext cx="457200" cy="457200"/>
+          </a:xfrm>
+          <a:prstGeom prst="ellipse">
+            <a:avLst/>
+          </a:prstGeom>
+          <a:solidFill>
+            <a:srgbClr val="17252A"/>
+          </a:solidFill>
+          <a:ln>
+            <a:noFill/>
+          </a:ln>
+          <a:effectLst/>
+        </p:spPr>
+        <p:style>
+          <a:lnRef idx="1">
+            <a:schemeClr val="accent1"/>
+          </a:lnRef>
+          <a:fillRef idx="3">
+            <a:schemeClr val="accent1"/>
+          </a:fillRef>
+          <a:effectRef idx="2">
+            <a:schemeClr val="accent1"/>
+          </a:effectRef>
+          <a:fontRef idx="minor">
+            <a:schemeClr val="lt1"/>
+          </a:fontRef>
+        </p:style>
+        <p:txBody>
+          <a:bodyPr rtlCol="0" anchor="ctr" lIns="0" rIns="0" tIns="0" bIns="0"/>
+          <a:lstStyle/>
+          <a:p>
+            <a:pPr algn="ctr"/>
+            <a:r>
+              <a:rPr sz="1500" b="1">
+                <a:solidFill>
+                  <a:srgbClr val="FFFFFF"/>
+                </a:solidFill>
+                <a:latin typeface="Calibri"/>
+              </a:rPr>
+              <a:t>2</a:t>
+            </a:r>
+          </a:p>
+        </p:txBody>
+      </p:sp>
+      <p:sp>
+        <p:nvSpPr>
+          <p:cNvPr id="10" name="TextBox 9"/>
+          <p:cNvSpPr txBox="1"/>
+          <p:nvPr/>
+        </p:nvSpPr>
+        <p:spPr>
+          <a:xfrm>
+            <a:off x="7086600" y="2084831"/>
+            <a:ext cx="4297680" cy="411480"/>
+          </a:xfrm>
+          <a:prstGeom prst="rect">
+            <a:avLst/>
+          </a:prstGeom>
+          <a:noFill/>
+        </p:spPr>
+        <p:txBody>
+          <a:bodyPr wrap="square" lIns="0" rIns="0" tIns="0" bIns="0" anchor="t">
+            <a:spAutoFit/>
+          </a:bodyPr>
+          <a:lstStyle/>
+          <a:p>
+            <a:pPr algn="l">
+              <a:spcAft>
+                <a:spcPts val="0"/>
+              </a:spcAft>
+            </a:pPr>
+            <a:r>
+              <a:rPr sz="1900" b="1" i="0">
+                <a:solidFill>
+                  <a:srgbClr val="1E2528"/>
+                </a:solidFill>
+                <a:latin typeface="Cambria"/>
+              </a:rPr>
+              <a:t>Controls are the cheap wins</a:t>
+            </a:r>
+          </a:p>
+        </p:txBody>
+      </p:sp>
+      <p:sp>
+        <p:nvSpPr>
+          <p:cNvPr id="11" name="TextBox 10"/>
+          <p:cNvSpPr txBox="1"/>
+          <p:nvPr/>
+        </p:nvSpPr>
+        <p:spPr>
+          <a:xfrm>
+            <a:off x="7086600" y="2560320"/>
+            <a:ext cx="4297680" cy="1280160"/>
+          </a:xfrm>
+          <a:prstGeom prst="rect">
+            <a:avLst/>
+          </a:prstGeom>
+          <a:noFill/>
+        </p:spPr>
+        <p:txBody>
+          <a:bodyPr wrap="square" lIns="0" rIns="0" tIns="0" bIns="0" anchor="t">
+            <a:spAutoFit/>
+          </a:bodyPr>
+          <a:lstStyle/>
+          <a:p>
+            <a:pPr algn="l">
+              <a:spcAft>
+                <a:spcPts val="0"/>
+              </a:spcAft>
+            </a:pPr>
+            <a:r>
+              <a:rPr sz="1400" b="0" i="0">
+                <a:solidFill>
+                  <a:srgbClr val="5B6770"/>
+                </a:solidFill>
+                <a:latin typeface="Calibri"/>
+              </a:rPr>
+              <a:t>Weighbridges and police posts produce the worst single stretches. Weigh-in-motion and ending police stops save more per trip than bypasses in light traffic, and cut stop-go fuel.</a:t>
+            </a:r>
+          </a:p>
+        </p:txBody>
+      </p:sp>
+      <p:sp>
+        <p:nvSpPr>
+          <p:cNvPr id="12" name="Rounded Rectangle 11"/>
+          <p:cNvSpPr/>
+          <p:nvPr/>
+        </p:nvSpPr>
+        <p:spPr>
+          <a:xfrm>
+            <a:off x="548640" y="4069080"/>
+            <a:ext cx="5440680" cy="2103120"/>
+          </a:xfrm>
+          <a:prstGeom prst="roundRect">
+            <a:avLst>
+              <a:gd name="adj" fmla="val 6000"/>
+            </a:avLst>
+          </a:prstGeom>
+          <a:solidFill>
+            <a:srgbClr val="EEF2F0"/>
+          </a:solidFill>
+          <a:ln>
+            <a:noFill/>
+          </a:ln>
+          <a:effectLst/>
+        </p:spPr>
+        <p:style>
+          <a:lnRef idx="1">
+            <a:schemeClr val="accent1"/>
+          </a:lnRef>
+          <a:fillRef idx="3">
+            <a:schemeClr val="accent1"/>
+          </a:fillRef>
+          <a:effectRef idx="2">
+            <a:schemeClr val="accent1"/>
+          </a:effectRef>
+          <a:fontRef idx="minor">
+            <a:schemeClr val="lt1"/>
+          </a:fontRef>
+        </p:style>
+        <p:txBody>
+          <a:bodyPr rtlCol="0" anchor="ctr"/>
+          <a:lstStyle/>
+          <a:p>
+            <a:pPr algn="ctr"/>
+          </a:p>
+        </p:txBody>
+      </p:sp>
+      <p:sp>
+        <p:nvSpPr>
+          <p:cNvPr id="13" name="Oval 12"/>
+          <p:cNvSpPr/>
+          <p:nvPr/>
+        </p:nvSpPr>
+        <p:spPr>
+          <a:xfrm>
+            <a:off x="822959" y="4343400"/>
+            <a:ext cx="457200" cy="457200"/>
+          </a:xfrm>
+          <a:prstGeom prst="ellipse">
+            <a:avLst/>
+          </a:prstGeom>
+          <a:solidFill>
+            <a:srgbClr val="3A7D5C"/>
+          </a:solidFill>
+          <a:ln>
+            <a:noFill/>
+          </a:ln>
+          <a:effectLst/>
+        </p:spPr>
+        <p:style>
+          <a:lnRef idx="1">
+            <a:schemeClr val="accent1"/>
+          </a:lnRef>
+          <a:fillRef idx="3">
+            <a:schemeClr val="accent1"/>
+          </a:fillRef>
+          <a:effectRef idx="2">
+            <a:schemeClr val="accent1"/>
+          </a:effectRef>
+          <a:fontRef idx="minor">
+            <a:schemeClr val="lt1"/>
+          </a:fontRef>
+        </p:style>
+        <p:txBody>
+          <a:bodyPr rtlCol="0" anchor="ctr" lIns="0" rIns="0" tIns="0" bIns="0"/>
+          <a:lstStyle/>
+          <a:p>
+            <a:pPr algn="ctr"/>
+            <a:r>
+              <a:rPr sz="1500" b="1">
+                <a:solidFill>
+                  <a:srgbClr val="FFFFFF"/>
+                </a:solidFill>
+                <a:latin typeface="Calibri"/>
+              </a:rPr>
+              <a:t>3</a:t>
+            </a:r>
+          </a:p>
+        </p:txBody>
+      </p:sp>
+      <p:sp>
+        <p:nvSpPr>
+          <p:cNvPr id="14" name="TextBox 13"/>
+          <p:cNvSpPr txBox="1"/>
+          <p:nvPr/>
+        </p:nvSpPr>
+        <p:spPr>
+          <a:xfrm>
+            <a:off x="1463040" y="4370832"/>
+            <a:ext cx="4297680" cy="411480"/>
+          </a:xfrm>
+          <a:prstGeom prst="rect">
+            <a:avLst/>
+          </a:prstGeom>
+          <a:noFill/>
+        </p:spPr>
+        <p:txBody>
+          <a:bodyPr wrap="square" lIns="0" rIns="0" tIns="0" bIns="0" anchor="t">
+            <a:spAutoFit/>
+          </a:bodyPr>
+          <a:lstStyle/>
+          <a:p>
+            <a:pPr algn="l">
+              <a:spcAft>
+                <a:spcPts val="0"/>
+              </a:spcAft>
+            </a:pPr>
+            <a:r>
+              <a:rPr sz="1900" b="1" i="0">
+                <a:solidFill>
+                  <a:srgbClr val="1E2528"/>
+                </a:solidFill>
+                <a:latin typeface="Cambria"/>
+              </a:rPr>
+              <a:t>Stopped time dwarfs driving time</a:t>
+            </a:r>
+          </a:p>
+        </p:txBody>
+      </p:sp>
+      <p:sp>
+        <p:nvSpPr>
+          <p:cNvPr id="15" name="TextBox 14"/>
+          <p:cNvSpPr txBox="1"/>
+          <p:nvPr/>
+        </p:nvSpPr>
+        <p:spPr>
+          <a:xfrm>
+            <a:off x="1463040" y="4846320"/>
+            <a:ext cx="4297680" cy="1280160"/>
+          </a:xfrm>
+          <a:prstGeom prst="rect">
+            <a:avLst/>
+          </a:prstGeom>
+          <a:noFill/>
+        </p:spPr>
+        <p:txBody>
+          <a:bodyPr wrap="square" lIns="0" rIns="0" tIns="0" bIns="0" anchor="t">
+            <a:spAutoFit/>
+          </a:bodyPr>
+          <a:lstStyle/>
+          <a:p>
+            <a:pPr algn="l">
+              <a:spcAft>
+                <a:spcPts val="0"/>
+              </a:spcAft>
+            </a:pPr>
+            <a:r>
+              <a:rPr sz="1400" b="0" i="0">
+                <a:solidFill>
+                  <a:srgbClr val="5B6770"/>
+                </a:solidFill>
+                <a:latin typeface="Calibri"/>
+              </a:rPr>
+              <a:t>Trucks take 17–93 h between Kampala and the borders, of which friction is a small share. Rest, border and administrative stops need their own reforms alongside the road.</a:t>
+            </a:r>
+          </a:p>
+        </p:txBody>
+      </p:sp>
+      <p:sp>
+        <p:nvSpPr>
+          <p:cNvPr id="16" name="Rounded Rectangle 15"/>
+          <p:cNvSpPr/>
+          <p:nvPr/>
+        </p:nvSpPr>
+        <p:spPr>
+          <a:xfrm>
+            <a:off x="6172200" y="4069080"/>
+            <a:ext cx="5440680" cy="2103120"/>
+          </a:xfrm>
+          <a:prstGeom prst="roundRect">
+            <a:avLst>
+              <a:gd name="adj" fmla="val 6000"/>
+            </a:avLst>
+          </a:prstGeom>
+          <a:solidFill>
+            <a:srgbClr val="EEF2F0"/>
+          </a:solidFill>
+          <a:ln>
+            <a:noFill/>
+          </a:ln>
+          <a:effectLst/>
+        </p:spPr>
+        <p:style>
+          <a:lnRef idx="1">
+            <a:schemeClr val="accent1"/>
+          </a:lnRef>
+          <a:fillRef idx="3">
+            <a:schemeClr val="accent1"/>
+          </a:fillRef>
+          <a:effectRef idx="2">
+            <a:schemeClr val="accent1"/>
+          </a:effectRef>
+          <a:fontRef idx="minor">
+            <a:schemeClr val="lt1"/>
+          </a:fontRef>
+        </p:style>
+        <p:txBody>
+          <a:bodyPr rtlCol="0" anchor="ctr"/>
+          <a:lstStyle/>
+          <a:p>
+            <a:pPr algn="ctr"/>
+          </a:p>
+        </p:txBody>
+      </p:sp>
+      <p:sp>
+        <p:nvSpPr>
+          <p:cNvPr id="17" name="Oval 16"/>
+          <p:cNvSpPr/>
+          <p:nvPr/>
+        </p:nvSpPr>
+        <p:spPr>
+          <a:xfrm>
+            <a:off x="6446520" y="4343400"/>
+            <a:ext cx="457200" cy="457200"/>
+          </a:xfrm>
+          <a:prstGeom prst="ellipse">
+            <a:avLst/>
+          </a:prstGeom>
+          <a:solidFill>
+            <a:srgbClr val="D9A441"/>
+          </a:solidFill>
+          <a:ln>
+            <a:noFill/>
+          </a:ln>
+          <a:effectLst/>
+        </p:spPr>
+        <p:style>
+          <a:lnRef idx="1">
+            <a:schemeClr val="accent1"/>
+          </a:lnRef>
+          <a:fillRef idx="3">
+            <a:schemeClr val="accent1"/>
+          </a:fillRef>
+          <a:effectRef idx="2">
+            <a:schemeClr val="accent1"/>
+          </a:effectRef>
+          <a:fontRef idx="minor">
+            <a:schemeClr val="lt1"/>
+          </a:fontRef>
+        </p:style>
+        <p:txBody>
+          <a:bodyPr rtlCol="0" anchor="ctr" lIns="0" rIns="0" tIns="0" bIns="0"/>
+          <a:lstStyle/>
+          <a:p>
+            <a:pPr algn="ctr"/>
+            <a:r>
+              <a:rPr sz="1500" b="1">
+                <a:solidFill>
+                  <a:srgbClr val="FFFFFF"/>
+                </a:solidFill>
+                <a:latin typeface="Calibri"/>
+              </a:rPr>
+              <a:t>4</a:t>
+            </a:r>
+          </a:p>
+        </p:txBody>
+      </p:sp>
+      <p:sp>
+        <p:nvSpPr>
+          <p:cNvPr id="18" name="TextBox 17"/>
+          <p:cNvSpPr txBox="1"/>
+          <p:nvPr/>
+        </p:nvSpPr>
+        <p:spPr>
+          <a:xfrm>
+            <a:off x="7086600" y="4370832"/>
+            <a:ext cx="4297680" cy="411480"/>
+          </a:xfrm>
+          <a:prstGeom prst="rect">
+            <a:avLst/>
+          </a:prstGeom>
+          <a:noFill/>
+        </p:spPr>
+        <p:txBody>
+          <a:bodyPr wrap="square" lIns="0" rIns="0" tIns="0" bIns="0" anchor="t">
+            <a:spAutoFit/>
+          </a:bodyPr>
+          <a:lstStyle/>
+          <a:p>
+            <a:pPr algn="l">
+              <a:spcAft>
+                <a:spcPts val="0"/>
+              </a:spcAft>
+            </a:pPr>
+            <a:r>
+              <a:rPr sz="1900" b="1" i="0">
+                <a:solidFill>
+                  <a:srgbClr val="1E2528"/>
+                </a:solidFill>
+                <a:latin typeface="Cambria"/>
+              </a:rPr>
+              <a:t>Growth outpaces the road</a:t>
+            </a:r>
+          </a:p>
+        </p:txBody>
+      </p:sp>
+      <p:sp>
+        <p:nvSpPr>
+          <p:cNvPr id="19" name="TextBox 18"/>
+          <p:cNvSpPr txBox="1"/>
+          <p:nvPr/>
+        </p:nvSpPr>
+        <p:spPr>
+          <a:xfrm>
+            <a:off x="7086600" y="4846320"/>
+            <a:ext cx="4297680" cy="1280160"/>
+          </a:xfrm>
+          <a:prstGeom prst="rect">
+            <a:avLst/>
+          </a:prstGeom>
+          <a:noFill/>
+        </p:spPr>
+        <p:txBody>
+          <a:bodyPr wrap="square" lIns="0" rIns="0" tIns="0" bIns="0" anchor="t">
+            <a:spAutoFit/>
+          </a:bodyPr>
+          <a:lstStyle/>
+          <a:p>
+            <a:pPr algn="l">
+              <a:spcAft>
+                <a:spcPts val="0"/>
+              </a:spcAft>
+            </a:pPr>
+            <a:r>
+              <a:rPr sz="1400" b="0" i="0">
+                <a:solidFill>
+                  <a:srgbClr val="5B6770"/>
+                </a:solidFill>
+                <a:latin typeface="Calibri"/>
+              </a:rPr>
+              <a:t>At 27–68% in 20 years, today's open road is tomorrow's settlement. Land-use control along the corridors is time-critical.</a:t>
+            </a:r>
+          </a:p>
+        </p:txBody>
+      </p:sp>
+    </p:spTree>
+  </p:cSld>
+  <p:clrMapOvr>
+    <a:masterClrMapping/>
+  </p:clrMapOvr>
+</p:sld>
+</file>
+
+<file path=ppt/slides/slide22.xml><?xml version="1.0" encoding="utf-8"?>
+<p:sld xmlns:a="http://schemas.openxmlformats.org/drawingml/2006/main" xmlns:p="http://schemas.openxmlformats.org/presentationml/2006/main" xmlns:r="http://schemas.openxmlformats.org/officeDocument/2006/relationships">
+  <p:cSld>
+    <p:bg>
+      <p:bgPr>
+        <a:solidFill>
+          <a:srgbClr val="FFFFFF"/>
+        </a:solidFill>
+        <a:effectLst/>
+      </p:bgPr>
+    </p:bg>
+    <p:spTree>
+      <p:nvGrpSpPr>
+        <p:cNvPr id="1" name=""/>
+        <p:cNvGrpSpPr/>
+        <p:nvPr/>
+      </p:nvGrpSpPr>
+      <p:grpSpPr/>
+      <p:sp>
+        <p:nvSpPr>
+          <p:cNvPr id="2" name="TextBox 1"/>
+          <p:cNvSpPr txBox="1"/>
+          <p:nvPr/>
+        </p:nvSpPr>
+        <p:spPr>
+          <a:xfrm>
+            <a:off x="548640" y="411480"/>
+            <a:ext cx="11064240" cy="731520"/>
+          </a:xfrm>
+          <a:prstGeom prst="rect">
+            <a:avLst/>
+          </a:prstGeom>
+          <a:noFill/>
+        </p:spPr>
+        <p:txBody>
+          <a:bodyPr wrap="square" lIns="0" rIns="0" tIns="0" bIns="0" anchor="t">
+            <a:spAutoFit/>
+          </a:bodyPr>
+          <a:lstStyle/>
+          <a:p>
+            <a:pPr algn="l">
+              <a:spcAft>
+                <a:spcPts val="0"/>
+              </a:spcAft>
+            </a:pPr>
+            <a:r>
+              <a:rPr sz="3400" b="1" i="0">
+                <a:solidFill>
+                  <a:srgbClr val="1E2528"/>
+                </a:solidFill>
+                <a:latin typeface="Cambria"/>
+              </a:rPr>
+              <a:t>Limitations and next steps</a:t>
+            </a:r>
+          </a:p>
+        </p:txBody>
+      </p:sp>
+      <p:sp>
+        <p:nvSpPr>
+          <p:cNvPr id="3" name="Rounded Rectangle 2"/>
+          <p:cNvSpPr/>
+          <p:nvPr/>
+        </p:nvSpPr>
+        <p:spPr>
+          <a:xfrm>
+            <a:off x="548640" y="1417320"/>
+            <a:ext cx="6675120" cy="1051560"/>
+          </a:xfrm>
+          <a:prstGeom prst="roundRect">
+            <a:avLst>
+              <a:gd name="adj" fmla="val 6000"/>
+            </a:avLst>
+          </a:prstGeom>
+          <a:solidFill>
+            <a:srgbClr val="EEF2F0"/>
+          </a:solidFill>
+          <a:ln>
+            <a:noFill/>
+          </a:ln>
+          <a:effectLst/>
+        </p:spPr>
+        <p:style>
+          <a:lnRef idx="1">
+            <a:schemeClr val="accent1"/>
+          </a:lnRef>
+          <a:fillRef idx="3">
+            <a:schemeClr val="accent1"/>
+          </a:fillRef>
+          <a:effectRef idx="2">
+            <a:schemeClr val="accent1"/>
+          </a:effectRef>
+          <a:fontRef idx="minor">
+            <a:schemeClr val="lt1"/>
+          </a:fontRef>
+        </p:style>
+        <p:txBody>
+          <a:bodyPr rtlCol="0" anchor="ctr"/>
+          <a:lstStyle/>
+          <a:p>
+            <a:pPr algn="ctr"/>
+          </a:p>
+        </p:txBody>
+      </p:sp>
+      <p:sp>
+        <p:nvSpPr>
+          <p:cNvPr id="4" name="TextBox 3"/>
+          <p:cNvSpPr txBox="1"/>
+          <p:nvPr/>
+        </p:nvSpPr>
+        <p:spPr>
+          <a:xfrm>
+            <a:off x="822960" y="1554480"/>
+            <a:ext cx="6217920" cy="365760"/>
+          </a:xfrm>
+          <a:prstGeom prst="rect">
+            <a:avLst/>
+          </a:prstGeom>
+          <a:noFill/>
+        </p:spPr>
+        <p:txBody>
+          <a:bodyPr wrap="square" lIns="0" rIns="0" tIns="0" bIns="0" anchor="t">
+            <a:spAutoFit/>
+          </a:bodyPr>
+          <a:lstStyle/>
+          <a:p>
+            <a:pPr algn="l">
+              <a:spcAft>
+                <a:spcPts val="0"/>
+              </a:spcAft>
+            </a:pPr>
+            <a:r>
+              <a:rPr sz="1700" b="1" i="0">
+                <a:solidFill>
+                  <a:srgbClr val="1E2528"/>
+                </a:solidFill>
+                <a:latin typeface="Calibri"/>
+              </a:rPr>
+              <a:t>Congestion is not modelled</a:t>
+            </a:r>
+          </a:p>
+        </p:txBody>
+      </p:sp>
+      <p:sp>
+        <p:nvSpPr>
+          <p:cNvPr id="5" name="TextBox 4"/>
+          <p:cNvSpPr txBox="1"/>
+          <p:nvPr/>
+        </p:nvSpPr>
+        <p:spPr>
+          <a:xfrm>
+            <a:off x="822960" y="1920240"/>
+            <a:ext cx="6217920" cy="502920"/>
+          </a:xfrm>
+          <a:prstGeom prst="rect">
+            <a:avLst/>
+          </a:prstGeom>
+          <a:noFill/>
+        </p:spPr>
+        <p:txBody>
+          <a:bodyPr wrap="square" lIns="0" rIns="0" tIns="0" bIns="0" anchor="t">
+            <a:spAutoFit/>
+          </a:bodyPr>
+          <a:lstStyle/>
+          <a:p>
+            <a:pPr algn="l">
+              <a:spcAft>
+                <a:spcPts val="0"/>
+              </a:spcAft>
+            </a:pPr>
+            <a:r>
+              <a:rPr sz="1400" b="0" i="0">
+                <a:solidFill>
+                  <a:srgbClr val="5B6770"/>
+                </a:solidFill>
+                <a:latin typeface="Calibri"/>
+              </a:rPr>
+              <a:t>Results describe light traffic; peak-hour delay near Kampala is larger.</a:t>
+            </a:r>
+          </a:p>
+        </p:txBody>
+      </p:sp>
+      <p:sp>
+        <p:nvSpPr>
+          <p:cNvPr id="6" name="Rounded Rectangle 5"/>
+          <p:cNvSpPr/>
+          <p:nvPr/>
+        </p:nvSpPr>
+        <p:spPr>
+          <a:xfrm>
+            <a:off x="548640" y="2606040"/>
+            <a:ext cx="6675120" cy="1051560"/>
+          </a:xfrm>
+          <a:prstGeom prst="roundRect">
+            <a:avLst>
+              <a:gd name="adj" fmla="val 6000"/>
+            </a:avLst>
+          </a:prstGeom>
+          <a:solidFill>
+            <a:srgbClr val="EEF2F0"/>
+          </a:solidFill>
+          <a:ln>
+            <a:noFill/>
+          </a:ln>
+          <a:effectLst/>
+        </p:spPr>
+        <p:style>
+          <a:lnRef idx="1">
+            <a:schemeClr val="accent1"/>
+          </a:lnRef>
+          <a:fillRef idx="3">
+            <a:schemeClr val="accent1"/>
+          </a:fillRef>
+          <a:effectRef idx="2">
+            <a:schemeClr val="accent1"/>
+          </a:effectRef>
+          <a:fontRef idx="minor">
+            <a:schemeClr val="lt1"/>
+          </a:fontRef>
+        </p:style>
+        <p:txBody>
+          <a:bodyPr rtlCol="0" anchor="ctr"/>
+          <a:lstStyle/>
+          <a:p>
+            <a:pPr algn="ctr"/>
+          </a:p>
+        </p:txBody>
+      </p:sp>
+      <p:sp>
+        <p:nvSpPr>
+          <p:cNvPr id="7" name="TextBox 6"/>
+          <p:cNvSpPr txBox="1"/>
+          <p:nvPr/>
+        </p:nvSpPr>
+        <p:spPr>
+          <a:xfrm>
+            <a:off x="822960" y="2743200"/>
+            <a:ext cx="6217920" cy="365760"/>
+          </a:xfrm>
+          <a:prstGeom prst="rect">
+            <a:avLst/>
+          </a:prstGeom>
+          <a:noFill/>
+        </p:spPr>
+        <p:txBody>
+          <a:bodyPr wrap="square" lIns="0" rIns="0" tIns="0" bIns="0" anchor="t">
+            <a:spAutoFit/>
+          </a:bodyPr>
+          <a:lstStyle/>
+          <a:p>
+            <a:pPr algn="l">
+              <a:spcAft>
+                <a:spcPts val="0"/>
+              </a:spcAft>
+            </a:pPr>
+            <a:r>
+              <a:rPr sz="1700" b="1" i="0">
+                <a:solidFill>
+                  <a:srgbClr val="1E2528"/>
+                </a:solidFill>
+                <a:latin typeface="Calibri"/>
+              </a:rPr>
+              <a:t>Speed humps are under-mapped</a:t>
+            </a:r>
+          </a:p>
+        </p:txBody>
+      </p:sp>
+      <p:sp>
+        <p:nvSpPr>
+          <p:cNvPr id="8" name="TextBox 7"/>
+          <p:cNvSpPr txBox="1"/>
+          <p:nvPr/>
+        </p:nvSpPr>
+        <p:spPr>
+          <a:xfrm>
+            <a:off x="822960" y="3108960"/>
+            <a:ext cx="6217920" cy="502920"/>
+          </a:xfrm>
+          <a:prstGeom prst="rect">
+            <a:avLst/>
+          </a:prstGeom>
+          <a:noFill/>
+        </p:spPr>
+        <p:txBody>
+          <a:bodyPr wrap="square" lIns="0" rIns="0" tIns="0" bIns="0" anchor="t">
+            <a:spAutoFit/>
+          </a:bodyPr>
+          <a:lstStyle/>
+          <a:p>
+            <a:pPr algn="l">
+              <a:spcAft>
+                <a:spcPts val="0"/>
+              </a:spcAft>
+            </a:pPr>
+            <a:r>
+              <a:rPr sz="1400" b="0" i="0">
+                <a:solidFill>
+                  <a:srgbClr val="5B6770"/>
+                </a:solidFill>
+                <a:latin typeface="Calibri"/>
+              </a:rPr>
+              <a:t>One per town piece is assumed (range 0–2); they drive the Malaba fuel figure.</a:t>
+            </a:r>
+          </a:p>
+        </p:txBody>
+      </p:sp>
+      <p:sp>
+        <p:nvSpPr>
+          <p:cNvPr id="9" name="Rounded Rectangle 8"/>
+          <p:cNvSpPr/>
+          <p:nvPr/>
+        </p:nvSpPr>
+        <p:spPr>
+          <a:xfrm>
+            <a:off x="548640" y="3794760"/>
+            <a:ext cx="6675120" cy="1051560"/>
+          </a:xfrm>
+          <a:prstGeom prst="roundRect">
+            <a:avLst>
+              <a:gd name="adj" fmla="val 6000"/>
+            </a:avLst>
+          </a:prstGeom>
+          <a:solidFill>
+            <a:srgbClr val="EEF2F0"/>
+          </a:solidFill>
+          <a:ln>
+            <a:noFill/>
+          </a:ln>
+          <a:effectLst/>
+        </p:spPr>
+        <p:style>
+          <a:lnRef idx="1">
+            <a:schemeClr val="accent1"/>
+          </a:lnRef>
+          <a:fillRef idx="3">
+            <a:schemeClr val="accent1"/>
+          </a:fillRef>
+          <a:effectRef idx="2">
+            <a:schemeClr val="accent1"/>
+          </a:effectRef>
+          <a:fontRef idx="minor">
+            <a:schemeClr val="lt1"/>
+          </a:fontRef>
+        </p:style>
+        <p:txBody>
+          <a:bodyPr rtlCol="0" anchor="ctr"/>
+          <a:lstStyle/>
+          <a:p>
+            <a:pPr algn="ctr"/>
+          </a:p>
+        </p:txBody>
+      </p:sp>
+      <p:sp>
+        <p:nvSpPr>
+          <p:cNvPr id="10" name="TextBox 9"/>
+          <p:cNvSpPr txBox="1"/>
+          <p:nvPr/>
+        </p:nvSpPr>
+        <p:spPr>
+          <a:xfrm>
+            <a:off x="822960" y="3931920"/>
+            <a:ext cx="6217920" cy="365760"/>
+          </a:xfrm>
+          <a:prstGeom prst="rect">
+            <a:avLst/>
+          </a:prstGeom>
+          <a:noFill/>
+        </p:spPr>
+        <p:txBody>
+          <a:bodyPr wrap="square" lIns="0" rIns="0" tIns="0" bIns="0" anchor="t">
+            <a:spAutoFit/>
+          </a:bodyPr>
+          <a:lstStyle/>
+          <a:p>
+            <a:pPr algn="l">
+              <a:spcAft>
+                <a:spcPts val="0"/>
+              </a:spcAft>
+            </a:pPr>
+            <a:r>
+              <a:rPr sz="1700" b="1" i="0">
+                <a:solidFill>
+                  <a:srgbClr val="1E2528"/>
+                </a:solidFill>
+                <a:latin typeface="Calibri"/>
+              </a:rPr>
+              <a:t>Truck counts are partly assumed</a:t>
+            </a:r>
+          </a:p>
+        </p:txBody>
+      </p:sp>
+      <p:sp>
+        <p:nvSpPr>
+          <p:cNvPr id="11" name="TextBox 10"/>
+          <p:cNvSpPr txBox="1"/>
+          <p:nvPr/>
+        </p:nvSpPr>
+        <p:spPr>
+          <a:xfrm>
+            <a:off x="822960" y="4297680"/>
+            <a:ext cx="6217920" cy="502920"/>
+          </a:xfrm>
+          <a:prstGeom prst="rect">
+            <a:avLst/>
+          </a:prstGeom>
+          <a:noFill/>
+        </p:spPr>
+        <p:txBody>
+          <a:bodyPr wrap="square" lIns="0" rIns="0" tIns="0" bIns="0" anchor="t">
+            <a:spAutoFit/>
+          </a:bodyPr>
+          <a:lstStyle/>
+          <a:p>
+            <a:pPr algn="l">
+              <a:spcAft>
+                <a:spcPts val="0"/>
+              </a:spcAft>
+            </a:pPr>
+            <a:r>
+              <a:rPr sz="1400" b="0" i="0">
+                <a:solidFill>
+                  <a:srgbClr val="5B6770"/>
+                </a:solidFill>
+                <a:latin typeface="Calibri"/>
+              </a:rPr>
+              <a:t>Surveyed on the Malaba, Katuna and Bwera roads; assumed on the Elegu and Hoima roads.</a:t>
+            </a:r>
+          </a:p>
+        </p:txBody>
+      </p:sp>
+      <p:sp>
+        <p:nvSpPr>
+          <p:cNvPr id="12" name="Rounded Rectangle 11"/>
+          <p:cNvSpPr/>
+          <p:nvPr/>
+        </p:nvSpPr>
+        <p:spPr>
+          <a:xfrm>
+            <a:off x="548640" y="4983480"/>
+            <a:ext cx="6675120" cy="1051560"/>
+          </a:xfrm>
+          <a:prstGeom prst="roundRect">
+            <a:avLst>
+              <a:gd name="adj" fmla="val 6000"/>
+            </a:avLst>
+          </a:prstGeom>
+          <a:solidFill>
+            <a:srgbClr val="EEF2F0"/>
+          </a:solidFill>
+          <a:ln>
+            <a:noFill/>
+          </a:ln>
+          <a:effectLst/>
+        </p:spPr>
+        <p:style>
+          <a:lnRef idx="1">
+            <a:schemeClr val="accent1"/>
+          </a:lnRef>
+          <a:fillRef idx="3">
+            <a:schemeClr val="accent1"/>
+          </a:fillRef>
+          <a:effectRef idx="2">
+            <a:schemeClr val="accent1"/>
+          </a:effectRef>
+          <a:fontRef idx="minor">
+            <a:schemeClr val="lt1"/>
+          </a:fontRef>
+        </p:style>
+        <p:txBody>
+          <a:bodyPr rtlCol="0" anchor="ctr"/>
+          <a:lstStyle/>
+          <a:p>
+            <a:pPr algn="ctr"/>
+          </a:p>
+        </p:txBody>
+      </p:sp>
+      <p:sp>
+        <p:nvSpPr>
+          <p:cNvPr id="13" name="TextBox 12"/>
+          <p:cNvSpPr txBox="1"/>
+          <p:nvPr/>
+        </p:nvSpPr>
+        <p:spPr>
+          <a:xfrm>
+            <a:off x="822960" y="5120640"/>
+            <a:ext cx="6217920" cy="365760"/>
+          </a:xfrm>
+          <a:prstGeom prst="rect">
+            <a:avLst/>
+          </a:prstGeom>
+          <a:noFill/>
+        </p:spPr>
+        <p:txBody>
+          <a:bodyPr wrap="square" lIns="0" rIns="0" tIns="0" bIns="0" anchor="t">
+            <a:spAutoFit/>
+          </a:bodyPr>
+          <a:lstStyle/>
+          <a:p>
+            <a:pPr algn="l">
+              <a:spcAft>
+                <a:spcPts val="0"/>
+              </a:spcAft>
+            </a:pPr>
+            <a:r>
+              <a:rPr sz="1700" b="1" i="0">
+                <a:solidFill>
+                  <a:srgbClr val="1E2528"/>
+                </a:solidFill>
+                <a:latin typeface="Calibri"/>
+              </a:rPr>
+              <a:t>Growth data end in 2020</a:t>
+            </a:r>
+          </a:p>
+        </p:txBody>
+      </p:sp>
+      <p:sp>
+        <p:nvSpPr>
+          <p:cNvPr id="14" name="TextBox 13"/>
+          <p:cNvSpPr txBox="1"/>
+          <p:nvPr/>
+        </p:nvSpPr>
+        <p:spPr>
+          <a:xfrm>
+            <a:off x="822960" y="5486400"/>
+            <a:ext cx="6217920" cy="502920"/>
+          </a:xfrm>
+          <a:prstGeom prst="rect">
+            <a:avLst/>
+          </a:prstGeom>
+          <a:noFill/>
+        </p:spPr>
+        <p:txBody>
+          <a:bodyPr wrap="square" lIns="0" rIns="0" tIns="0" bIns="0" anchor="t">
+            <a:spAutoFit/>
+          </a:bodyPr>
+          <a:lstStyle/>
+          <a:p>
+            <a:pPr algn="l">
+              <a:spcAft>
+                <a:spcPts val="0"/>
+              </a:spcAft>
+            </a:pPr>
+            <a:r>
+              <a:rPr sz="1400" b="0" i="0">
+                <a:solidFill>
+                  <a:srgbClr val="5B6770"/>
+                </a:solidFill>
+                <a:latin typeface="Calibri"/>
+              </a:rPr>
+              <a:t>GHSL's projection to 2026 is slower than the observed trend.</a:t>
+            </a:r>
+          </a:p>
+        </p:txBody>
+      </p:sp>
+      <p:sp>
+        <p:nvSpPr>
+          <p:cNvPr id="15" name="Rounded Rectangle 14"/>
+          <p:cNvSpPr/>
+          <p:nvPr/>
+        </p:nvSpPr>
+        <p:spPr>
+          <a:xfrm>
+            <a:off x="7589520" y="1417320"/>
+            <a:ext cx="4023360" cy="4617720"/>
+          </a:xfrm>
+          <a:prstGeom prst="roundRect">
+            <a:avLst>
+              <a:gd name="adj" fmla="val 6000"/>
+            </a:avLst>
+          </a:prstGeom>
+          <a:solidFill>
+            <a:srgbClr val="17252A"/>
+          </a:solidFill>
+          <a:ln>
+            <a:noFill/>
+          </a:ln>
+          <a:effectLst/>
+        </p:spPr>
+        <p:style>
+          <a:lnRef idx="1">
+            <a:schemeClr val="accent1"/>
+          </a:lnRef>
+          <a:fillRef idx="3">
+            <a:schemeClr val="accent1"/>
+          </a:fillRef>
+          <a:effectRef idx="2">
+            <a:schemeClr val="accent1"/>
+          </a:effectRef>
+          <a:fontRef idx="minor">
+            <a:schemeClr val="lt1"/>
+          </a:fontRef>
+        </p:style>
+        <p:txBody>
+          <a:bodyPr rtlCol="0" anchor="ctr"/>
+          <a:lstStyle/>
+          <a:p>
+            <a:pPr algn="ctr"/>
+          </a:p>
+        </p:txBody>
+      </p:sp>
+      <p:sp>
+        <p:nvSpPr>
+          <p:cNvPr id="16" name="TextBox 15"/>
+          <p:cNvSpPr txBox="1"/>
+          <p:nvPr/>
+        </p:nvSpPr>
+        <p:spPr>
+          <a:xfrm>
+            <a:off x="7909560" y="1691640"/>
+            <a:ext cx="3474720" cy="4206240"/>
+          </a:xfrm>
+          <a:prstGeom prst="rect">
+            <a:avLst/>
+          </a:prstGeom>
+          <a:noFill/>
+        </p:spPr>
+        <p:txBody>
+          <a:bodyPr wrap="square" lIns="0" rIns="0" tIns="0" bIns="0" anchor="t">
+            <a:spAutoFit/>
+          </a:bodyPr>
+          <a:lstStyle/>
+          <a:p>
+            <a:pPr algn="l">
+              <a:spcAft>
+                <a:spcPts val="1200"/>
+              </a:spcAft>
+            </a:pPr>
+            <a:r>
+              <a:rPr sz="2200" b="1" i="0">
+                <a:solidFill>
+                  <a:srgbClr val="FFFFFF"/>
+                </a:solidFill>
+                <a:latin typeface="Cambria"/>
+              </a:rPr>
+              <a:t>Next steps</a:t>
+            </a:r>
+          </a:p>
+          <a:p>
+            <a:pPr algn="l">
+              <a:spcAft>
+                <a:spcPts val="1200"/>
+              </a:spcAft>
+            </a:pPr>
+            <a:r>
+              <a:rPr sz="1500" b="0" i="0">
+                <a:solidFill>
+                  <a:srgbClr val="B8C7C4"/>
+                </a:solidFill>
+                <a:latin typeface="Calibri"/>
+              </a:rPr>
+              <a:t>Count speed humps from Mapillary street-level detections</a:t>
+            </a:r>
+          </a:p>
+          <a:p>
+            <a:pPr algn="l">
+              <a:spcAft>
+                <a:spcPts val="1200"/>
+              </a:spcAft>
+            </a:pPr>
+            <a:r>
+              <a:rPr sz="1500" b="0" i="0">
+                <a:solidFill>
+                  <a:srgbClr val="B8C7C4"/>
+                </a:solidFill>
+                <a:latin typeface="Calibri"/>
+              </a:rPr>
+              <a:t>Observe 2016–2023 growth with Open Buildings 2.5D Temporal</a:t>
+            </a:r>
+          </a:p>
+          <a:p>
+            <a:pPr algn="l">
+              <a:spcAft>
+                <a:spcPts val="1200"/>
+              </a:spcAft>
+            </a:pPr>
+            <a:r>
+              <a:rPr sz="1500" b="0" i="0">
+                <a:solidFill>
+                  <a:srgbClr val="B8C7C4"/>
+                </a:solidFill>
+                <a:latin typeface="Calibri"/>
+              </a:rPr>
+              <a:t>Swap GLO-30 for FABDEM terrain</a:t>
+            </a:r>
+          </a:p>
+          <a:p>
+            <a:pPr algn="l">
+              <a:spcAft>
+                <a:spcPts val="1200"/>
+              </a:spcAft>
+            </a:pPr>
+            <a:r>
+              <a:rPr sz="1500" b="0" i="0">
+                <a:solidFill>
+                  <a:srgbClr val="B8C7C4"/>
+                </a:solidFill>
+                <a:latin typeface="Calibri"/>
+              </a:rPr>
+              <a:t>Apply the method to eleven capitals (regional paper)</a:t>
+            </a:r>
+          </a:p>
+          <a:p>
+            <a:pPr algn="l">
+              <a:spcAft>
+                <a:spcPts val="1200"/>
+              </a:spcAft>
+            </a:pPr>
+            <a:r>
+              <a:rPr sz="1500" b="0" i="0">
+                <a:solidFill>
+                  <a:srgbClr val="B8C7C4"/>
+                </a:solidFill>
+                <a:latin typeface="Calibri"/>
+              </a:rPr>
+              <a:t>Write up the paper</a:t>
+            </a:r>
+          </a:p>
+        </p:txBody>
+      </p:sp>
+    </p:spTree>
+  </p:cSld>
+  <p:clrMapOvr>
+    <a:masterClrMapping/>
+  </p:clrMapOvr>
+</p:sld>
+</file>
+
+<file path=ppt/slides/slide23.xml><?xml version="1.0" encoding="utf-8"?>
 <p:sld xmlns:a="http://schemas.openxmlformats.org/drawingml/2006/main" xmlns:p="http://schemas.openxmlformats.org/presentationml/2006/main" xmlns:r="http://schemas.openxmlformats.org/officeDocument/2006/relationships">
   <p:cSld>
     <p:bg>
@@ -12025,7 +13676,7 @@
                 </a:solidFill>
                 <a:latin typeface="Calibri"/>
               </a:rPr>
-              <a:t>Cheap fixes at controls beat bypasses; rail pays only with far more freight than today.</a:t>
+              <a:t>Friction is a small part of truck transit, but it costs fuel and sits where crashes happen.</a:t>
             </a:r>
           </a:p>
         </p:txBody>
@@ -12064,7 +13715,7 @@
                 </a:solidFill>
                 <a:latin typeface="Calibri"/>
               </a:rPr>
-              <a:t>Code, outputs, maps and animations: uganda-trade-corridors repository</a:t>
+              <a:t>Code, outputs, maps and animations: github.com/gavacharles/uganda-trade-corridors</a:t>
             </a:r>
           </a:p>
         </p:txBody>
@@ -12253,7 +13904,7 @@
                 </a:solidFill>
                 <a:latin typeface="Cambria"/>
               </a:rPr>
-              <a:t>58–76%</a:t>
+              <a:t>56–74%</a:t>
             </a:r>
           </a:p>
         </p:txBody>
@@ -12378,7 +14029,7 @@
                 </a:solidFill>
                 <a:latin typeface="Cambria"/>
               </a:rPr>
-              <a:t>17–34%</a:t>
+              <a:t>18–36%</a:t>
             </a:r>
           </a:p>
         </p:txBody>
@@ -12502,7 +14153,7 @@
                 </a:solidFill>
                 <a:latin typeface="Cambria"/>
               </a:rPr>
-              <a:t>1.25 M</a:t>
+              <a:t>1.54 M</a:t>
             </a:r>
           </a:p>
         </p:txBody>
@@ -12542,7 +14193,7 @@
                 <a:latin typeface="Calibri"/>
               </a:rPr>
               <a:t>building footprints within
-1 km of the four roads</a:t>
+1 km of the five roads</a:t>
             </a:r>
           </a:p>
         </p:txBody>
@@ -13156,7 +14807,7 @@
                 </a:solidFill>
                 <a:latin typeface="Calibri"/>
               </a:rPr>
-              <a:t>Which stretches, and which fixes, would save the most time?</a:t>
+              <a:t>Which stretches, and which fixes, would save the most time, fuel and risk?</a:t>
             </a:r>
           </a:p>
         </p:txBody>
@@ -13204,7 +14855,7 @@
                 </a:solidFill>
                 <a:latin typeface="Calibri"/>
               </a:rPr>
-              <a:t>don't watch the traffic; measure the causes of delay from open data, cost them in minutes, and check the result against published trip times.</a:t>
+              <a:t>measure the causes of delay from open data, cost them in minutes, fuel and exposure, and check the result against published trip, transit and crash records.</a:t>
             </a:r>
           </a:p>
         </p:txBody>
@@ -13308,7 +14959,7 @@
                 </a:solidFill>
                 <a:latin typeface="Calibri"/>
               </a:rPr>
-              <a:t>Every cause is measured from public data; nothing comes from traffic feeds, project records or surveys</a:t>
+              <a:t>Every cause is measured from public data; published records are used only to check the model</a:t>
             </a:r>
           </a:p>
         </p:txBody>
@@ -13556,7 +15207,7 @@
                 </a:solidFill>
                 <a:latin typeface="Cambria"/>
               </a:rPr>
-              <a:t>Buildings</a:t>
+              <a:t>Buildings &amp; growth</a:t>
             </a:r>
           </a:p>
         </p:txBody>
@@ -13595,7 +15246,7 @@
                 </a:solidFill>
                 <a:latin typeface="Calibri"/>
               </a:rPr>
-              <a:t>Google Open Buildings v3</a:t>
+              <a:t>Open Buildings v3 · GHSL</a:t>
             </a:r>
           </a:p>
         </p:txBody>
@@ -13634,7 +15285,7 @@
                 </a:solidFill>
                 <a:latin typeface="Calibri"/>
               </a:rPr>
-              <a:t>1.25 M footprints within 1 km; roadside activity within 100 m and 300 m</a:t>
+              <a:t>1.54 M footprints within 1 km; built-up surface 2000–2020</a:t>
             </a:r>
           </a:p>
         </p:txBody>
@@ -13719,7 +15370,7 @@
                 </a:solidFill>
                 <a:latin typeface="Cambria"/>
               </a:rPr>
-              <a:t>Growth</a:t>
+              <a:t>Terrain &amp; rain</a:t>
             </a:r>
           </a:p>
         </p:txBody>
@@ -13758,7 +15409,7 @@
                 </a:solidFill>
                 <a:latin typeface="Calibri"/>
               </a:rPr>
-              <a:t>GHSL built-up surface</a:t>
+              <a:t>Copernicus GLO-30 · CHIRPS</a:t>
             </a:r>
           </a:p>
         </p:txBody>
@@ -13797,7 +15448,7 @@
                 </a:solidFill>
                 <a:latin typeface="Calibri"/>
               </a:rPr>
-              <a:t>2000–2020 observed, 2025–2030 projected, within 300 m of the road</a:t>
+              <a:t>Climb and grade per 500 m; daily rain 2006–2025</a:t>
             </a:r>
           </a:p>
         </p:txBody>
@@ -13882,7 +15533,7 @@
                 </a:solidFill>
                 <a:latin typeface="Cambria"/>
               </a:rPr>
-              <a:t>Terrain</a:t>
+              <a:t>Trip times</a:t>
             </a:r>
           </a:p>
         </p:txBody>
@@ -13921,7 +15572,7 @@
                 </a:solidFill>
                 <a:latin typeface="Calibri"/>
               </a:rPr>
-              <a:t>Copernicus GLO-30 DEM</a:t>
+              <a:t>Rome2rio, bus timetables</a:t>
             </a:r>
           </a:p>
         </p:txBody>
@@ -13960,7 +15611,7 @@
                 </a:solidFill>
                 <a:latin typeface="Calibri"/>
               </a:rPr>
-              <a:t>Climb in each direction and average grade, per 500 m</a:t>
+              <a:t>Independent car trip times to check the model</a:t>
             </a:r>
           </a:p>
         </p:txBody>
@@ -14045,7 +15696,7 @@
                 </a:solidFill>
                 <a:latin typeface="Cambria"/>
               </a:rPr>
-              <a:t>Rain</a:t>
+              <a:t>Trucks</a:t>
             </a:r>
           </a:p>
         </p:txBody>
@@ -14084,7 +15735,7 @@
                 </a:solidFill>
                 <a:latin typeface="Calibri"/>
               </a:rPr>
-              <a:t>CHIRPS 2006–2025</a:t>
+              <a:t>NCTTCA Observatory 2025–26</a:t>
             </a:r>
           </a:p>
         </p:txBody>
@@ -14123,7 +15774,7 @@
                 </a:solidFill>
                 <a:latin typeface="Calibri"/>
               </a:rPr>
-              <a:t>Days a year with ≥ 10 mm of rain</a:t>
+              <a:t>GPS and RECTS transit times, stop reasons, border times, station truck counts</a:t>
             </a:r>
           </a:p>
         </p:txBody>
@@ -14208,7 +15859,7 @@
                 </a:solidFill>
                 <a:latin typeface="Cambria"/>
               </a:rPr>
-              <a:t>Validation</a:t>
+              <a:t>Crashes</a:t>
             </a:r>
           </a:p>
         </p:txBody>
@@ -14247,7 +15898,7 @@
                 </a:solidFill>
                 <a:latin typeface="Calibri"/>
               </a:rPr>
-              <a:t>Routing estimates, bus timetables</a:t>
+              <a:t>Uganda Police traffic officers</a:t>
             </a:r>
           </a:p>
         </p:txBody>
@@ -14286,7 +15937,7 @@
                 </a:solidFill>
                 <a:latin typeface="Calibri"/>
               </a:rPr>
-              <a:t>Independent trip times to check the model against</a:t>
+              <a:t>About 60 named crash black spots on the corridors (2018)</a:t>
             </a:r>
           </a:p>
         </p:txBody>
@@ -14325,7 +15976,7 @@
                 </a:solidFill>
                 <a:latin typeface="Calibri"/>
               </a:rPr>
-              <a:t>Also: Sentinel-2 imagery for an experimental moving-truck index (not used in the model); NCTTCA Transport Observatory 2022 roughness data as context.</a:t>
+              <a:t>Also: Sentinel-2 imagery for an experimental moving-truck index (not used in the model); NCTTCA GHG Emissions Baseline 2025 for truck counts.</a:t>
             </a:r>
           </a:p>
         </p:txBody>
@@ -14429,7 +16080,7 @@
                 </a:solidFill>
                 <a:latin typeface="Calibri"/>
               </a:rPr>
-              <a:t>From road geometry to minutes lost, with uncertainty carried through every step</a:t>
+              <a:t>From road geometry to minutes, litres and exposure, with uncertainty carried through every step</a:t>
             </a:r>
           </a:p>
         </p:txBody>
@@ -15137,7 +16788,7 @@
                 </a:solidFill>
                 <a:latin typeface="Calibri"/>
               </a:rPr>
-              <a:t>Switch one cause off at a time to get the minutes it adds</a:t>
+              <a:t>Switch one cause off at a time to get the minutes and litres it adds</a:t>
             </a:r>
           </a:p>
         </p:txBody>
@@ -15452,7 +17103,7 @@
                 </a:solidFill>
                 <a:latin typeface="Cambria"/>
               </a:rPr>
-              <a:t>Validate</a:t>
+              <a:t>Check</a:t>
             </a:r>
           </a:p>
         </p:txBody>
@@ -15491,7 +17142,7 @@
                 </a:solidFill>
                 <a:latin typeface="Calibri"/>
               </a:rPr>
-              <a:t>Check against trip times; map the 10 worst 2 km on each road</a:t>
+              <a:t>Trip times, truck transit records, weighbridge stops, crash black spots, floods</a:t>
             </a:r>
           </a:p>
         </p:txBody>
@@ -15808,7 +17459,7 @@
                 </a:solidFill>
                 <a:latin typeface="Calibri"/>
               </a:rPr>
-              <a:t>on the Gulu, Kabale and Hoima roads. The model runs below scheduled buses, as expected without stops.</a:t>
+              <a:t>on the Gulu, Kabale and Hoima roads. To Fort Portal the model runs 15% fast.</a:t>
             </a:r>
           </a:p>
         </p:txBody>
@@ -15948,7 +17599,7 @@
                 </a:solidFill>
                 <a:latin typeface="Calibri"/>
               </a:rPr>
-              <a:t>Source: outputs/validation.csv. The Njeru estimate covers a shorter segment than the model's 73.5 km, so it is the least like-for-like.</a:t>
+              <a:t>Source: outputs/validation.csv. The Njeru estimate covers a shorter segment than the model's, so it is the least like-for-like.</a:t>
             </a:r>
           </a:p>
         </p:txBody>
@@ -16134,7 +17785,7 @@
                 </a:solidFill>
                 <a:latin typeface="Calibri"/>
               </a:rPr>
-              <a:t>~4–9 buildings within 100 m per piece</a:t>
+              <a:t>~4–10 buildings within 100 m per piece</a:t>
             </a:r>
           </a:p>
           <a:p>
@@ -16159,7 +17810,7 @@
                 </a:solidFill>
                 <a:latin typeface="Calibri"/>
               </a:rPr>
-              <a:t>~87–154 buildings, ~1.8 joining roads</a:t>
+              <a:t>~90–156 buildings, ~1.6 joining roads</a:t>
             </a:r>
           </a:p>
           <a:p>
@@ -16184,7 +17835,7 @@
                 </a:solidFill>
                 <a:latin typeface="Calibri"/>
               </a:rPr>
-              <a:t>~340–416 buildings, 6–7 joining roads</a:t>
+              <a:t>~322–416 buildings, 6–9 joining roads</a:t>
             </a:r>
           </a:p>
           <a:p>
@@ -16200,7 +17851,7 @@
                 </a:solidFill>
                 <a:latin typeface="Calibri"/>
               </a:rPr>
-              <a:t>Even the "open" A9 to Hoima has only 32 km of truly open road.</a:t>
+              <a:t>The A9 to Hoima has only 36 km of truly open road.</a:t>
             </a:r>
           </a:p>
         </p:txBody>
@@ -16239,7 +17890,7 @@
                 </a:solidFill>
                 <a:latin typeface="Calibri"/>
               </a:rPr>
-              <a:t>Source: outputs/typology_summary.csv. Three types chosen by silhouette score.</a:t>
+              <a:t>Source: outputs/typology_summary.csv. Three types chosen by silhouette score, clustered jointly across the corridors.</a:t>
             </a:r>
           </a:p>
         </p:txBody>
@@ -16409,7 +18060,7 @@
                 </a:solidFill>
                 <a:latin typeface="Calibri"/>
               </a:rPr>
-              <a:t>roadside activity is the largest cause on the Gulu, Katuna and Hoima roads (17–28 min).</a:t>
+              <a:t>roadside activity is the largest cause in 56–100% of draws on every road.</a:t>
             </a:r>
           </a:p>
           <a:p>
@@ -16434,32 +18085,7 @@
                 </a:solidFill>
                 <a:latin typeface="Calibri"/>
               </a:rPr>
-              <a:t>the five weighbridges are the largest single delays, ~10 min each if every truck stops.</a:t>
-            </a:r>
-          </a:p>
-          <a:p>
-            <a:pPr algn="l">
-              <a:spcAft>
-                <a:spcPts val="1200"/>
-              </a:spcAft>
-            </a:pPr>
-            <a:r>
-              <a:rPr sz="1500" b="1" i="0">
-                <a:solidFill>
-                  <a:srgbClr val="C4532D"/>
-                </a:solidFill>
-                <a:latin typeface="Calibri"/>
-              </a:rPr>
-              <a:t>Jinja road: </a:t>
-            </a:r>
-            <a:r>
-              <a:rPr sz="1500" b="0" i="0">
-                <a:solidFill>
-                  <a:srgbClr val="1E2528"/>
-                </a:solidFill>
-                <a:latin typeface="Calibri"/>
-              </a:rPr>
-              <a:t>signals, crossings and humps compete with roadside activity; the ranking depends on assumptions.</a:t>
+              <a:t>weighbridges lead on the Malaba road, police posts on the Elegu road, hills on the Bwera and Katuna roads; rankings shift across draws.</a:t>
             </a:r>
           </a:p>
           <a:p>
@@ -16514,7 +18140,7 @@
                 </a:solidFill>
                 <a:latin typeface="Calibri"/>
               </a:rPr>
-              <a:t>Source: outputs/travel_time_causes.csv. Town speed limits and curves (&lt; 3 min) omitted. 5–95% ranges are wide: see speaker notes.</a:t>
+              <a:t>Source: outputs/travel_time_causes.csv, outputs/rank_stability.csv. Town speed limits and curves (&lt; 3 min) omitted.</a:t>
             </a:r>
           </a:p>
         </p:txBody>

--- a/presentation/highways_high_streets.pptx
+++ b/presentation/highways_high_streets.pptx
@@ -28,6 +28,7 @@
     <p:sldId id="276" r:id="rId28"/>
     <p:sldId id="277" r:id="rId29"/>
     <p:sldId id="278" r:id="rId30"/>
+    <p:sldId id="279" r:id="rId31"/>
   </p:sldIdLst>
   <p:sldSz cx="12191695" cy="6858000" type="screen4x3"/>
   <p:notesSz cx="6858000" cy="9144000"/>
@@ -8196,7 +8197,7 @@
                 </a:solidFill>
                 <a:latin typeface="Cambria"/>
               </a:rPr>
-              <a:t>When distance becomes time</a:t>
+              <a:t>The roadside kept filling in after 2020</a:t>
             </a:r>
           </a:p>
         </p:txBody>
@@ -8235,14 +8236,14 @@
                 </a:solidFill>
                 <a:latin typeface="Calibri"/>
               </a:rPr>
-              <a:t>The corridors redrawn so that length is loaded-truck travel time; dots mark each hour</a:t>
+              <a:t>Buildings within 300 m of each road, 2016–2023 (Google Open Buildings 2.5D Temporal, Earth Engine)</a:t>
             </a:r>
           </a:p>
         </p:txBody>
       </p:sp>
       <p:pic>
         <p:nvPicPr>
-          <p:cNvPr id="4" name="Picture 3" descr="g04.png"/>
+          <p:cNvPr id="4" name="Picture 3" descr="f17_growth_temporal.png"/>
           <p:cNvPicPr>
             <a:picLocks noChangeAspect="1"/>
           </p:cNvPicPr>
@@ -8256,8 +8257,8 @@
         </p:blipFill>
         <p:spPr>
           <a:xfrm>
-            <a:off x="822960" y="1691640"/>
-            <a:ext cx="8909939" cy="4572000"/>
+            <a:off x="365760" y="1691640"/>
+            <a:ext cx="7863840" cy="3217590"/>
           </a:xfrm>
           <a:prstGeom prst="rect">
             <a:avLst/>
@@ -8267,6 +8268,318 @@
       <p:sp>
         <p:nvSpPr>
           <p:cNvPr id="5" name="TextBox 4"/>
+          <p:cNvSpPr txBox="1"/>
+          <p:nvPr/>
+        </p:nvSpPr>
+        <p:spPr>
+          <a:xfrm>
+            <a:off x="8503920" y="1783080"/>
+            <a:ext cx="3200400" cy="457200"/>
+          </a:xfrm>
+          <a:prstGeom prst="rect">
+            <a:avLst/>
+          </a:prstGeom>
+          <a:noFill/>
+        </p:spPr>
+        <p:txBody>
+          <a:bodyPr wrap="square" lIns="0" rIns="0" tIns="0" bIns="0" anchor="t">
+            <a:spAutoFit/>
+          </a:bodyPr>
+          <a:lstStyle/>
+          <a:p>
+            <a:pPr algn="l">
+              <a:spcAft>
+                <a:spcPts val="0"/>
+              </a:spcAft>
+            </a:pPr>
+            <a:r>
+              <a:rPr sz="2200" b="1" i="0">
+                <a:solidFill>
+                  <a:srgbClr val="C4532D"/>
+                </a:solidFill>
+                <a:latin typeface="Cambria"/>
+              </a:rPr>
+              <a:t>+22–48%</a:t>
+            </a:r>
+          </a:p>
+        </p:txBody>
+      </p:sp>
+      <p:sp>
+        <p:nvSpPr>
+          <p:cNvPr id="6" name="TextBox 5"/>
+          <p:cNvSpPr txBox="1"/>
+          <p:nvPr/>
+        </p:nvSpPr>
+        <p:spPr>
+          <a:xfrm>
+            <a:off x="8503920" y="2221991"/>
+            <a:ext cx="3200400" cy="731520"/>
+          </a:xfrm>
+          <a:prstGeom prst="rect">
+            <a:avLst/>
+          </a:prstGeom>
+          <a:noFill/>
+        </p:spPr>
+        <p:txBody>
+          <a:bodyPr wrap="square" lIns="0" rIns="0" tIns="0" bIns="0" anchor="t">
+            <a:spAutoFit/>
+          </a:bodyPr>
+          <a:lstStyle/>
+          <a:p>
+            <a:pPr algn="l">
+              <a:spcAft>
+                <a:spcPts val="0"/>
+              </a:spcAft>
+            </a:pPr>
+            <a:r>
+              <a:rPr sz="1250" b="0" i="0">
+                <a:solidFill>
+                  <a:srgbClr val="1E2528"/>
+                </a:solidFill>
+                <a:latin typeface="Calibri"/>
+              </a:rPr>
+              <a:t>more buildings within 300 m of the road in 2016–2023 (trend), 2.8–5.8% a year.</a:t>
+            </a:r>
+          </a:p>
+        </p:txBody>
+      </p:sp>
+      <p:sp>
+        <p:nvSpPr>
+          <p:cNvPr id="7" name="TextBox 6"/>
+          <p:cNvSpPr txBox="1"/>
+          <p:nvPr/>
+        </p:nvSpPr>
+        <p:spPr>
+          <a:xfrm>
+            <a:off x="8503920" y="2898648"/>
+            <a:ext cx="3200400" cy="457200"/>
+          </a:xfrm>
+          <a:prstGeom prst="rect">
+            <a:avLst/>
+          </a:prstGeom>
+          <a:noFill/>
+        </p:spPr>
+        <p:txBody>
+          <a:bodyPr wrap="square" lIns="0" rIns="0" tIns="0" bIns="0" anchor="t">
+            <a:spAutoFit/>
+          </a:bodyPr>
+          <a:lstStyle/>
+          <a:p>
+            <a:pPr algn="l">
+              <a:spcAft>
+                <a:spcPts val="0"/>
+              </a:spcAft>
+            </a:pPr>
+            <a:r>
+              <a:rPr sz="2200" b="1" i="0">
+                <a:solidFill>
+                  <a:srgbClr val="C4532D"/>
+                </a:solidFill>
+                <a:latin typeface="Cambria"/>
+              </a:rPr>
+              <a:t>1.0–2.6% a year</a:t>
+            </a:r>
+          </a:p>
+        </p:txBody>
+      </p:sp>
+      <p:sp>
+        <p:nvSpPr>
+          <p:cNvPr id="8" name="TextBox 7"/>
+          <p:cNvSpPr txBox="1"/>
+          <p:nvPr/>
+        </p:nvSpPr>
+        <p:spPr>
+          <a:xfrm>
+            <a:off x="8503920" y="3337560"/>
+            <a:ext cx="3200400" cy="731520"/>
+          </a:xfrm>
+          <a:prstGeom prst="rect">
+            <a:avLst/>
+          </a:prstGeom>
+          <a:noFill/>
+        </p:spPr>
+        <p:txBody>
+          <a:bodyPr wrap="square" lIns="0" rIns="0" tIns="0" bIns="0" anchor="t">
+            <a:spAutoFit/>
+          </a:bodyPr>
+          <a:lstStyle/>
+          <a:p>
+            <a:pPr algn="l">
+              <a:spcAft>
+                <a:spcPts val="0"/>
+              </a:spcAft>
+            </a:pPr>
+            <a:r>
+              <a:rPr sz="1250" b="0" i="0">
+                <a:solidFill>
+                  <a:srgbClr val="1E2528"/>
+                </a:solidFill>
+                <a:latin typeface="Calibri"/>
+              </a:rPr>
+              <a:t>was GHSL's observed rate for 2015–2020: its projection to 2026 understates recent building.</a:t>
+            </a:r>
+          </a:p>
+        </p:txBody>
+      </p:sp>
+      <p:sp>
+        <p:nvSpPr>
+          <p:cNvPr id="9" name="TextBox 8"/>
+          <p:cNvSpPr txBox="1"/>
+          <p:nvPr/>
+        </p:nvSpPr>
+        <p:spPr>
+          <a:xfrm>
+            <a:off x="8503920" y="4014215"/>
+            <a:ext cx="3200400" cy="457200"/>
+          </a:xfrm>
+          <a:prstGeom prst="rect">
+            <a:avLst/>
+          </a:prstGeom>
+          <a:noFill/>
+        </p:spPr>
+        <p:txBody>
+          <a:bodyPr wrap="square" lIns="0" rIns="0" tIns="0" bIns="0" anchor="t">
+            <a:spAutoFit/>
+          </a:bodyPr>
+          <a:lstStyle/>
+          <a:p>
+            <a:pPr algn="l">
+              <a:spcAft>
+                <a:spcPts val="0"/>
+              </a:spcAft>
+            </a:pPr>
+            <a:r>
+              <a:rPr sz="2200" b="1" i="0">
+                <a:solidFill>
+                  <a:srgbClr val="C4532D"/>
+                </a:solidFill>
+                <a:latin typeface="Cambria"/>
+              </a:rPr>
+              <a:t>1.6×</a:t>
+            </a:r>
+          </a:p>
+        </p:txBody>
+      </p:sp>
+      <p:sp>
+        <p:nvSpPr>
+          <p:cNvPr id="10" name="TextBox 9"/>
+          <p:cNvSpPr txBox="1"/>
+          <p:nvPr/>
+        </p:nvSpPr>
+        <p:spPr>
+          <a:xfrm>
+            <a:off x="8503920" y="4453127"/>
+            <a:ext cx="3200400" cy="731520"/>
+          </a:xfrm>
+          <a:prstGeom prst="rect">
+            <a:avLst/>
+          </a:prstGeom>
+          <a:noFill/>
+        </p:spPr>
+        <p:txBody>
+          <a:bodyPr wrap="square" lIns="0" rIns="0" tIns="0" bIns="0" anchor="t">
+            <a:spAutoFit/>
+          </a:bodyPr>
+          <a:lstStyle/>
+          <a:p>
+            <a:pPr algn="l">
+              <a:spcAft>
+                <a:spcPts val="0"/>
+              </a:spcAft>
+            </a:pPr>
+            <a:r>
+              <a:rPr sz="1250" b="0" i="0">
+                <a:solidFill>
+                  <a:srgbClr val="1E2528"/>
+                </a:solidFill>
+                <a:latin typeface="Calibri"/>
+              </a:rPr>
+              <a:t>as many new buildings per km² as land 1–2 km back, which grows faster in percent only from a lower base.</a:t>
+            </a:r>
+          </a:p>
+        </p:txBody>
+      </p:sp>
+      <p:sp>
+        <p:nvSpPr>
+          <p:cNvPr id="11" name="TextBox 10"/>
+          <p:cNvSpPr txBox="1"/>
+          <p:nvPr/>
+        </p:nvSpPr>
+        <p:spPr>
+          <a:xfrm>
+            <a:off x="8503920" y="5129783"/>
+            <a:ext cx="3200400" cy="457200"/>
+          </a:xfrm>
+          <a:prstGeom prst="rect">
+            <a:avLst/>
+          </a:prstGeom>
+          <a:noFill/>
+        </p:spPr>
+        <p:txBody>
+          <a:bodyPr wrap="square" lIns="0" rIns="0" tIns="0" bIns="0" anchor="t">
+            <a:spAutoFit/>
+          </a:bodyPr>
+          <a:lstStyle/>
+          <a:p>
+            <a:pPr algn="l">
+              <a:spcAft>
+                <a:spcPts val="0"/>
+              </a:spcAft>
+            </a:pPr>
+            <a:r>
+              <a:rPr sz="2200" b="1" i="0">
+                <a:solidFill>
+                  <a:srgbClr val="C4532D"/>
+                </a:solidFill>
+                <a:latin typeface="Cambria"/>
+              </a:rPr>
+              <a:t>4 of 5</a:t>
+            </a:r>
+          </a:p>
+        </p:txBody>
+      </p:sp>
+      <p:sp>
+        <p:nvSpPr>
+          <p:cNvPr id="12" name="TextBox 11"/>
+          <p:cNvSpPr txBox="1"/>
+          <p:nvPr/>
+        </p:nvSpPr>
+        <p:spPr>
+          <a:xfrm>
+            <a:off x="8503920" y="5568696"/>
+            <a:ext cx="3200400" cy="731520"/>
+          </a:xfrm>
+          <a:prstGeom prst="rect">
+            <a:avLst/>
+          </a:prstGeom>
+          <a:noFill/>
+        </p:spPr>
+        <p:txBody>
+          <a:bodyPr wrap="square" lIns="0" rIns="0" tIns="0" bIns="0" anchor="t">
+            <a:spAutoFit/>
+          </a:bodyPr>
+          <a:lstStyle/>
+          <a:p>
+            <a:pPr algn="l">
+              <a:spcAft>
+                <a:spcPts val="0"/>
+              </a:spcAft>
+            </a:pPr>
+            <a:r>
+              <a:rPr sz="1250" b="0" i="0">
+                <a:solidFill>
+                  <a:srgbClr val="1E2528"/>
+                </a:solidFill>
+                <a:latin typeface="Calibri"/>
+              </a:rPr>
+              <a:t>roads where settlements between towns grew faster than the towns.</a:t>
+            </a:r>
+          </a:p>
+        </p:txBody>
+      </p:sp>
+      <p:sp>
+        <p:nvSpPr>
+          <p:cNvPr id="13" name="TextBox 12"/>
           <p:cNvSpPr txBox="1"/>
           <p:nvPr/>
         </p:nvSpPr>
@@ -8298,7 +8611,7 @@
                 </a:solidFill>
                 <a:latin typeface="Calibri"/>
               </a:rPr>
-              <a:t>figures/g04_time_map.png. Grey: the roads as mapped. Towns, controls and hills stretch the lines.</a:t>
+              <a:t>outputs/growth_temporal_summary.csv (scripts/27_growth_temporal.py). Counts from building_fractional_count; trend = straight-line fit over 2016–2023, which damps year-to-year model noise.</a:t>
             </a:r>
           </a:p>
         </p:txBody>
@@ -8363,7 +8676,7 @@
                 </a:solidFill>
                 <a:latin typeface="Cambria"/>
               </a:rPr>
-              <a:t>Result 5 · Trucks spend most of the trip standing still</a:t>
+              <a:t>When distance becomes time</a:t>
             </a:r>
           </a:p>
         </p:txBody>
@@ -8402,14 +8715,14 @@
                 </a:solidFill>
                 <a:latin typeface="Calibri"/>
               </a:rPr>
-              <a:t>Observed truck transit, Kampala ↔ border (NCTTCA Observatory 2025–26), against the model's driving time</a:t>
+              <a:t>The corridors redrawn so that length is loaded-truck travel time; dots mark each hour</a:t>
             </a:r>
           </a:p>
         </p:txBody>
       </p:sp>
       <p:pic>
         <p:nvPicPr>
-          <p:cNvPr id="4" name="Picture 3" descr="f14_transit_gap.png"/>
+          <p:cNvPr id="4" name="Picture 3" descr="g04.png"/>
           <p:cNvPicPr>
             <a:picLocks noChangeAspect="1"/>
           </p:cNvPicPr>
@@ -8423,8 +8736,8 @@
         </p:blipFill>
         <p:spPr>
           <a:xfrm>
-            <a:off x="365760" y="1691640"/>
-            <a:ext cx="7680960" cy="4129003"/>
+            <a:off x="822960" y="1691640"/>
+            <a:ext cx="8909939" cy="4572000"/>
           </a:xfrm>
           <a:prstGeom prst="rect">
             <a:avLst/>
@@ -8434,318 +8747,6 @@
       <p:sp>
         <p:nvSpPr>
           <p:cNvPr id="5" name="TextBox 4"/>
-          <p:cNvSpPr txBox="1"/>
-          <p:nvPr/>
-        </p:nvSpPr>
-        <p:spPr>
-          <a:xfrm>
-            <a:off x="8321040" y="1783080"/>
-            <a:ext cx="3291840" cy="457200"/>
-          </a:xfrm>
-          <a:prstGeom prst="rect">
-            <a:avLst/>
-          </a:prstGeom>
-          <a:noFill/>
-        </p:spPr>
-        <p:txBody>
-          <a:bodyPr wrap="square" lIns="0" rIns="0" tIns="0" bIns="0" anchor="t">
-            <a:spAutoFit/>
-          </a:bodyPr>
-          <a:lstStyle/>
-          <a:p>
-            <a:pPr algn="l">
-              <a:spcAft>
-                <a:spcPts val="0"/>
-              </a:spcAft>
-            </a:pPr>
-            <a:r>
-              <a:rPr sz="2400" b="1" i="0">
-                <a:solidFill>
-                  <a:srgbClr val="C4532D"/>
-                </a:solidFill>
-                <a:latin typeface="Cambria"/>
-              </a:rPr>
-              <a:t>17–93 h</a:t>
-            </a:r>
-          </a:p>
-        </p:txBody>
-      </p:sp>
-      <p:sp>
-        <p:nvSpPr>
-          <p:cNvPr id="6" name="TextBox 5"/>
-          <p:cNvSpPr txBox="1"/>
-          <p:nvPr/>
-        </p:nvSpPr>
-        <p:spPr>
-          <a:xfrm>
-            <a:off x="8321040" y="2240280"/>
-            <a:ext cx="3291840" cy="731520"/>
-          </a:xfrm>
-          <a:prstGeom prst="rect">
-            <a:avLst/>
-          </a:prstGeom>
-          <a:noFill/>
-        </p:spPr>
-        <p:txBody>
-          <a:bodyPr wrap="square" lIns="0" rIns="0" tIns="0" bIns="0" anchor="t">
-            <a:spAutoFit/>
-          </a:bodyPr>
-          <a:lstStyle/>
-          <a:p>
-            <a:pPr algn="l">
-              <a:spcAft>
-                <a:spcPts val="0"/>
-              </a:spcAft>
-            </a:pPr>
-            <a:r>
-              <a:rPr sz="1250" b="0" i="0">
-                <a:solidFill>
-                  <a:srgbClr val="1E2528"/>
-                </a:solidFill>
-                <a:latin typeface="Calibri"/>
-              </a:rPr>
-              <a:t>observed between Kampala and the borders; the model drives it in 5–9 h.</a:t>
-            </a:r>
-          </a:p>
-        </p:txBody>
-      </p:sp>
-      <p:sp>
-        <p:nvSpPr>
-          <p:cNvPr id="7" name="TextBox 6"/>
-          <p:cNvSpPr txBox="1"/>
-          <p:nvPr/>
-        </p:nvSpPr>
-        <p:spPr>
-          <a:xfrm>
-            <a:off x="8321040" y="2926080"/>
-            <a:ext cx="3291840" cy="457200"/>
-          </a:xfrm>
-          <a:prstGeom prst="rect">
-            <a:avLst/>
-          </a:prstGeom>
-          <a:noFill/>
-        </p:spPr>
-        <p:txBody>
-          <a:bodyPr wrap="square" lIns="0" rIns="0" tIns="0" bIns="0" anchor="t">
-            <a:spAutoFit/>
-          </a:bodyPr>
-          <a:lstStyle/>
-          <a:p>
-            <a:pPr algn="l">
-              <a:spcAft>
-                <a:spcPts val="0"/>
-              </a:spcAft>
-            </a:pPr>
-            <a:r>
-              <a:rPr sz="2400" b="1" i="0">
-                <a:solidFill>
-                  <a:srgbClr val="C4532D"/>
-                </a:solidFill>
-                <a:latin typeface="Cambria"/>
-              </a:rPr>
-              <a:t>2–14%</a:t>
-            </a:r>
-          </a:p>
-        </p:txBody>
-      </p:sp>
-      <p:sp>
-        <p:nvSpPr>
-          <p:cNvPr id="8" name="TextBox 7"/>
-          <p:cNvSpPr txBox="1"/>
-          <p:nvPr/>
-        </p:nvSpPr>
-        <p:spPr>
-          <a:xfrm>
-            <a:off x="8321040" y="3383280"/>
-            <a:ext cx="3291840" cy="731520"/>
-          </a:xfrm>
-          <a:prstGeom prst="rect">
-            <a:avLst/>
-          </a:prstGeom>
-          <a:noFill/>
-        </p:spPr>
-        <p:txBody>
-          <a:bodyPr wrap="square" lIns="0" rIns="0" tIns="0" bIns="0" anchor="t">
-            <a:spAutoFit/>
-          </a:bodyPr>
-          <a:lstStyle/>
-          <a:p>
-            <a:pPr algn="l">
-              <a:spcAft>
-                <a:spcPts val="0"/>
-              </a:spcAft>
-            </a:pPr>
-            <a:r>
-              <a:rPr sz="1250" b="0" i="0">
-                <a:solidFill>
-                  <a:srgbClr val="1E2528"/>
-                </a:solidFill>
-                <a:latin typeface="Calibri"/>
-              </a:rPr>
-              <a:t>of the real truck trip is roadside and control friction; the rest is stopped time.</a:t>
-            </a:r>
-          </a:p>
-        </p:txBody>
-      </p:sp>
-      <p:sp>
-        <p:nvSpPr>
-          <p:cNvPr id="9" name="TextBox 8"/>
-          <p:cNvSpPr txBox="1"/>
-          <p:nvPr/>
-        </p:nvSpPr>
-        <p:spPr>
-          <a:xfrm>
-            <a:off x="8321040" y="4069080"/>
-            <a:ext cx="3291840" cy="457200"/>
-          </a:xfrm>
-          <a:prstGeom prst="rect">
-            <a:avLst/>
-          </a:prstGeom>
-          <a:noFill/>
-        </p:spPr>
-        <p:txBody>
-          <a:bodyPr wrap="square" lIns="0" rIns="0" tIns="0" bIns="0" anchor="t">
-            <a:spAutoFit/>
-          </a:bodyPr>
-          <a:lstStyle/>
-          <a:p>
-            <a:pPr algn="l">
-              <a:spcAft>
-                <a:spcPts val="0"/>
-              </a:spcAft>
-            </a:pPr>
-            <a:r>
-              <a:rPr sz="2400" b="1" i="0">
-                <a:solidFill>
-                  <a:srgbClr val="C4532D"/>
-                </a:solidFill>
-                <a:latin typeface="Cambria"/>
-              </a:rPr>
-              <a:t>86%</a:t>
-            </a:r>
-          </a:p>
-        </p:txBody>
-      </p:sp>
-      <p:sp>
-        <p:nvSpPr>
-          <p:cNvPr id="10" name="TextBox 9"/>
-          <p:cNvSpPr txBox="1"/>
-          <p:nvPr/>
-        </p:nvSpPr>
-        <p:spPr>
-          <a:xfrm>
-            <a:off x="8321040" y="4526280"/>
-            <a:ext cx="3291840" cy="731520"/>
-          </a:xfrm>
-          <a:prstGeom prst="rect">
-            <a:avLst/>
-          </a:prstGeom>
-          <a:noFill/>
-        </p:spPr>
-        <p:txBody>
-          <a:bodyPr wrap="square" lIns="0" rIns="0" tIns="0" bIns="0" anchor="t">
-            <a:spAutoFit/>
-          </a:bodyPr>
-          <a:lstStyle/>
-          <a:p>
-            <a:pPr algn="l">
-              <a:spcAft>
-                <a:spcPts val="0"/>
-              </a:spcAft>
-            </a:pPr>
-            <a:r>
-              <a:rPr sz="1250" b="0" i="0">
-                <a:solidFill>
-                  <a:srgbClr val="1E2528"/>
-                </a:solidFill>
-                <a:latin typeface="Calibri"/>
-              </a:rPr>
-              <a:t>of stopped time is rest, meals and border procedures (approx.).</a:t>
-            </a:r>
-          </a:p>
-        </p:txBody>
-      </p:sp>
-      <p:sp>
-        <p:nvSpPr>
-          <p:cNvPr id="11" name="TextBox 10"/>
-          <p:cNvSpPr txBox="1"/>
-          <p:nvPr/>
-        </p:nvSpPr>
-        <p:spPr>
-          <a:xfrm>
-            <a:off x="8321040" y="5212080"/>
-            <a:ext cx="3291840" cy="457200"/>
-          </a:xfrm>
-          <a:prstGeom prst="rect">
-            <a:avLst/>
-          </a:prstGeom>
-          <a:noFill/>
-        </p:spPr>
-        <p:txBody>
-          <a:bodyPr wrap="square" lIns="0" rIns="0" tIns="0" bIns="0" anchor="t">
-            <a:spAutoFit/>
-          </a:bodyPr>
-          <a:lstStyle/>
-          <a:p>
-            <a:pPr algn="l">
-              <a:spcAft>
-                <a:spcPts val="0"/>
-              </a:spcAft>
-            </a:pPr>
-            <a:r>
-              <a:rPr sz="2400" b="1" i="0">
-                <a:solidFill>
-                  <a:srgbClr val="C4532D"/>
-                </a:solidFill>
-                <a:latin typeface="Cambria"/>
-              </a:rPr>
-              <a:t>12 min</a:t>
-            </a:r>
-          </a:p>
-        </p:txBody>
-      </p:sp>
-      <p:sp>
-        <p:nvSpPr>
-          <p:cNvPr id="12" name="TextBox 11"/>
-          <p:cNvSpPr txBox="1"/>
-          <p:nvPr/>
-        </p:nvSpPr>
-        <p:spPr>
-          <a:xfrm>
-            <a:off x="8321040" y="5669280"/>
-            <a:ext cx="3291840" cy="731520"/>
-          </a:xfrm>
-          <a:prstGeom prst="rect">
-            <a:avLst/>
-          </a:prstGeom>
-          <a:noFill/>
-        </p:spPr>
-        <p:txBody>
-          <a:bodyPr wrap="square" lIns="0" rIns="0" tIns="0" bIns="0" anchor="t">
-            <a:spAutoFit/>
-          </a:bodyPr>
-          <a:lstStyle/>
-          <a:p>
-            <a:pPr algn="l">
-              <a:spcAft>
-                <a:spcPts val="0"/>
-              </a:spcAft>
-            </a:pPr>
-            <a:r>
-              <a:rPr sz="1250" b="0" i="0">
-                <a:solidFill>
-                  <a:srgbClr val="1E2528"/>
-                </a:solidFill>
-                <a:latin typeface="Calibri"/>
-              </a:rPr>
-              <a:t>median weighbridge stop: the model's 10 min (5–30) assumption holds.</a:t>
-            </a:r>
-          </a:p>
-        </p:txBody>
-      </p:sp>
-      <p:sp>
-        <p:nvSpPr>
-          <p:cNvPr id="13" name="TextBox 12"/>
           <p:cNvSpPr txBox="1"/>
           <p:nvPr/>
         </p:nvSpPr>
@@ -8777,7 +8778,7 @@
                 </a:solidFill>
                 <a:latin typeface="Calibri"/>
               </a:rPr>
-              <a:t>outputs/transit_gap.csv, transit_stop_mix.csv (scripts/24_transit_gap.py). GPS: fleet sample; RECTS: bonded transit cargo. Kampala–Hoima not reported.</a:t>
+              <a:t>figures/g04_time_map.png. Grey: the roads as mapped. Towns, controls and hills stretch the lines.</a:t>
             </a:r>
           </a:p>
         </p:txBody>
@@ -8842,7 +8843,7 @@
                 </a:solidFill>
                 <a:latin typeface="Cambria"/>
               </a:rPr>
-              <a:t>Result 6 · Controls are the quickest wins</a:t>
+              <a:t>Result 5 · Trucks spend most of the trip standing still</a:t>
             </a:r>
           </a:p>
         </p:txBody>
@@ -8881,29 +8882,35 @@
                 </a:solidFill>
                 <a:latin typeface="Calibri"/>
               </a:rPr>
-              <a:t>Truck minutes saved per trip leaving Kampala, by fix (central estimate)</a:t>
-            </a:r>
-          </a:p>
-        </p:txBody>
-      </p:sp>
-      <p:graphicFrame>
-        <p:nvGraphicFramePr>
-          <p:cNvPr id="4" name="Chart 3"/>
-          <p:cNvGraphicFramePr>
-            <a:graphicFrameLocks noGrp="1"/>
-          </p:cNvGraphicFramePr>
-          <p:nvPr/>
-        </p:nvGraphicFramePr>
-        <p:xfrm>
-          <a:off x="457200" y="1737360"/>
-          <a:ext cx="7498079" cy="4572000"/>
-        </p:xfrm>
-        <a:graphic>
-          <a:graphicData uri="http://schemas.openxmlformats.org/drawingml/2006/chart">
-            <c:chart xmlns:c="http://schemas.openxmlformats.org/drawingml/2006/chart" r:id="rId2"/>
-          </a:graphicData>
-        </a:graphic>
-      </p:graphicFrame>
+              <a:t>Observed truck transit, Kampala ↔ border (NCTTCA Observatory 2025–26), against the model's driving time</a:t>
+            </a:r>
+          </a:p>
+        </p:txBody>
+      </p:sp>
+      <p:pic>
+        <p:nvPicPr>
+          <p:cNvPr id="4" name="Picture 3" descr="f14_transit_gap.png"/>
+          <p:cNvPicPr>
+            <a:picLocks noChangeAspect="1"/>
+          </p:cNvPicPr>
+          <p:nvPr/>
+        </p:nvPicPr>
+        <p:blipFill>
+          <a:blip r:embed="rId2"/>
+          <a:stretch>
+            <a:fillRect/>
+          </a:stretch>
+        </p:blipFill>
+        <p:spPr>
+          <a:xfrm>
+            <a:off x="365760" y="1691640"/>
+            <a:ext cx="7680960" cy="4129003"/>
+          </a:xfrm>
+          <a:prstGeom prst="rect">
+            <a:avLst/>
+          </a:prstGeom>
+        </p:spPr>
+      </p:pic>
       <p:sp>
         <p:nvSpPr>
           <p:cNvPr id="5" name="TextBox 4"/>
@@ -8912,8 +8919,8 @@
         </p:nvSpPr>
         <p:spPr>
           <a:xfrm>
-            <a:off x="8321040" y="1874519"/>
-            <a:ext cx="3291840" cy="4389120"/>
+            <a:off x="8321040" y="1783080"/>
+            <a:ext cx="3291840" cy="457200"/>
           </a:xfrm>
           <a:prstGeom prst="rect">
             <a:avLst/>
@@ -8928,56 +8935,297 @@
           <a:p>
             <a:pPr algn="l">
               <a:spcAft>
-                <a:spcPts val="1000"/>
-              </a:spcAft>
-            </a:pPr>
-            <a:r>
-              <a:rPr sz="2800" b="1" i="0">
+                <a:spcPts val="0"/>
+              </a:spcAft>
+            </a:pPr>
+            <a:r>
+              <a:rPr sz="2400" b="1" i="0">
                 <a:solidFill>
                   <a:srgbClr val="C4532D"/>
                 </a:solidFill>
                 <a:latin typeface="Cambria"/>
               </a:rPr>
-              <a:t>US$41 M a year</a:t>
-            </a:r>
-          </a:p>
-          <a:p>
-            <a:pPr algn="l">
-              <a:spcAft>
-                <a:spcPts val="1000"/>
-              </a:spcAft>
-            </a:pPr>
-            <a:r>
-              <a:rPr sz="1400" b="0" i="0">
+              <a:t>17–93 h</a:t>
+            </a:r>
+          </a:p>
+        </p:txBody>
+      </p:sp>
+      <p:sp>
+        <p:nvSpPr>
+          <p:cNvPr id="6" name="TextBox 5"/>
+          <p:cNvSpPr txBox="1"/>
+          <p:nvPr/>
+        </p:nvSpPr>
+        <p:spPr>
+          <a:xfrm>
+            <a:off x="8321040" y="2240280"/>
+            <a:ext cx="3291840" cy="731520"/>
+          </a:xfrm>
+          <a:prstGeom prst="rect">
+            <a:avLst/>
+          </a:prstGeom>
+          <a:noFill/>
+        </p:spPr>
+        <p:txBody>
+          <a:bodyPr wrap="square" lIns="0" rIns="0" tIns="0" bIns="0" anchor="t">
+            <a:spAutoFit/>
+          </a:bodyPr>
+          <a:lstStyle/>
+          <a:p>
+            <a:pPr algn="l">
+              <a:spcAft>
+                <a:spcPts val="0"/>
+              </a:spcAft>
+            </a:pPr>
+            <a:r>
+              <a:rPr sz="1250" b="0" i="0">
                 <a:solidFill>
                   <a:srgbClr val="1E2528"/>
                 </a:solidFill>
                 <a:latin typeface="Calibri"/>
               </a:rPr>
-              <a:t>in truck time lost to delay on the five roads at central values, plus about US$70 M in extra diesel burnt slowing and re-accelerating.</a:t>
-            </a:r>
-          </a:p>
-          <a:p>
-            <a:pPr algn="l">
-              <a:spcAft>
-                <a:spcPts val="1000"/>
-              </a:spcAft>
-            </a:pPr>
-            <a:r>
-              <a:rPr sz="1400" b="0" i="0">
-                <a:solidFill>
-                  <a:srgbClr val="5B6770"/>
+              <a:t>observed between Kampala and the borders; the model drives it in 5–9 h.</a:t>
+            </a:r>
+          </a:p>
+        </p:txBody>
+      </p:sp>
+      <p:sp>
+        <p:nvSpPr>
+          <p:cNvPr id="7" name="TextBox 6"/>
+          <p:cNvSpPr txBox="1"/>
+          <p:nvPr/>
+        </p:nvSpPr>
+        <p:spPr>
+          <a:xfrm>
+            <a:off x="8321040" y="2926080"/>
+            <a:ext cx="3291840" cy="457200"/>
+          </a:xfrm>
+          <a:prstGeom prst="rect">
+            <a:avLst/>
+          </a:prstGeom>
+          <a:noFill/>
+        </p:spPr>
+        <p:txBody>
+          <a:bodyPr wrap="square" lIns="0" rIns="0" tIns="0" bIns="0" anchor="t">
+            <a:spAutoFit/>
+          </a:bodyPr>
+          <a:lstStyle/>
+          <a:p>
+            <a:pPr algn="l">
+              <a:spcAft>
+                <a:spcPts val="0"/>
+              </a:spcAft>
+            </a:pPr>
+            <a:r>
+              <a:rPr sz="2400" b="1" i="0">
+                <a:solidFill>
+                  <a:srgbClr val="C4532D"/>
+                </a:solidFill>
+                <a:latin typeface="Cambria"/>
+              </a:rPr>
+              <a:t>2–14%</a:t>
+            </a:r>
+          </a:p>
+        </p:txBody>
+      </p:sp>
+      <p:sp>
+        <p:nvSpPr>
+          <p:cNvPr id="8" name="TextBox 7"/>
+          <p:cNvSpPr txBox="1"/>
+          <p:nvPr/>
+        </p:nvSpPr>
+        <p:spPr>
+          <a:xfrm>
+            <a:off x="8321040" y="3383280"/>
+            <a:ext cx="3291840" cy="731520"/>
+          </a:xfrm>
+          <a:prstGeom prst="rect">
+            <a:avLst/>
+          </a:prstGeom>
+          <a:noFill/>
+        </p:spPr>
+        <p:txBody>
+          <a:bodyPr wrap="square" lIns="0" rIns="0" tIns="0" bIns="0" anchor="t">
+            <a:spAutoFit/>
+          </a:bodyPr>
+          <a:lstStyle/>
+          <a:p>
+            <a:pPr algn="l">
+              <a:spcAft>
+                <a:spcPts val="0"/>
+              </a:spcAft>
+            </a:pPr>
+            <a:r>
+              <a:rPr sz="1250" b="0" i="0">
+                <a:solidFill>
+                  <a:srgbClr val="1E2528"/>
                 </a:solidFill>
                 <a:latin typeface="Calibri"/>
               </a:rPr>
-              <a:t>Weigh-in-motion and ending police stops save more per trip than bypasses in light traffic. Truck counts are surveyed on the Malaba, Katuna and Bwera roads, assumed on the others.</a:t>
-            </a:r>
-          </a:p>
-        </p:txBody>
-      </p:sp>
-      <p:sp>
-        <p:nvSpPr>
-          <p:cNvPr id="6" name="TextBox 5"/>
+              <a:t>of the real truck trip is roadside and control friction; the rest is stopped time.</a:t>
+            </a:r>
+          </a:p>
+        </p:txBody>
+      </p:sp>
+      <p:sp>
+        <p:nvSpPr>
+          <p:cNvPr id="9" name="TextBox 8"/>
+          <p:cNvSpPr txBox="1"/>
+          <p:nvPr/>
+        </p:nvSpPr>
+        <p:spPr>
+          <a:xfrm>
+            <a:off x="8321040" y="4069080"/>
+            <a:ext cx="3291840" cy="457200"/>
+          </a:xfrm>
+          <a:prstGeom prst="rect">
+            <a:avLst/>
+          </a:prstGeom>
+          <a:noFill/>
+        </p:spPr>
+        <p:txBody>
+          <a:bodyPr wrap="square" lIns="0" rIns="0" tIns="0" bIns="0" anchor="t">
+            <a:spAutoFit/>
+          </a:bodyPr>
+          <a:lstStyle/>
+          <a:p>
+            <a:pPr algn="l">
+              <a:spcAft>
+                <a:spcPts val="0"/>
+              </a:spcAft>
+            </a:pPr>
+            <a:r>
+              <a:rPr sz="2400" b="1" i="0">
+                <a:solidFill>
+                  <a:srgbClr val="C4532D"/>
+                </a:solidFill>
+                <a:latin typeface="Cambria"/>
+              </a:rPr>
+              <a:t>86%</a:t>
+            </a:r>
+          </a:p>
+        </p:txBody>
+      </p:sp>
+      <p:sp>
+        <p:nvSpPr>
+          <p:cNvPr id="10" name="TextBox 9"/>
+          <p:cNvSpPr txBox="1"/>
+          <p:nvPr/>
+        </p:nvSpPr>
+        <p:spPr>
+          <a:xfrm>
+            <a:off x="8321040" y="4526280"/>
+            <a:ext cx="3291840" cy="731520"/>
+          </a:xfrm>
+          <a:prstGeom prst="rect">
+            <a:avLst/>
+          </a:prstGeom>
+          <a:noFill/>
+        </p:spPr>
+        <p:txBody>
+          <a:bodyPr wrap="square" lIns="0" rIns="0" tIns="0" bIns="0" anchor="t">
+            <a:spAutoFit/>
+          </a:bodyPr>
+          <a:lstStyle/>
+          <a:p>
+            <a:pPr algn="l">
+              <a:spcAft>
+                <a:spcPts val="0"/>
+              </a:spcAft>
+            </a:pPr>
+            <a:r>
+              <a:rPr sz="1250" b="0" i="0">
+                <a:solidFill>
+                  <a:srgbClr val="1E2528"/>
+                </a:solidFill>
+                <a:latin typeface="Calibri"/>
+              </a:rPr>
+              <a:t>of stopped time is rest, meals and border procedures (approx.).</a:t>
+            </a:r>
+          </a:p>
+        </p:txBody>
+      </p:sp>
+      <p:sp>
+        <p:nvSpPr>
+          <p:cNvPr id="11" name="TextBox 10"/>
+          <p:cNvSpPr txBox="1"/>
+          <p:nvPr/>
+        </p:nvSpPr>
+        <p:spPr>
+          <a:xfrm>
+            <a:off x="8321040" y="5212080"/>
+            <a:ext cx="3291840" cy="457200"/>
+          </a:xfrm>
+          <a:prstGeom prst="rect">
+            <a:avLst/>
+          </a:prstGeom>
+          <a:noFill/>
+        </p:spPr>
+        <p:txBody>
+          <a:bodyPr wrap="square" lIns="0" rIns="0" tIns="0" bIns="0" anchor="t">
+            <a:spAutoFit/>
+          </a:bodyPr>
+          <a:lstStyle/>
+          <a:p>
+            <a:pPr algn="l">
+              <a:spcAft>
+                <a:spcPts val="0"/>
+              </a:spcAft>
+            </a:pPr>
+            <a:r>
+              <a:rPr sz="2400" b="1" i="0">
+                <a:solidFill>
+                  <a:srgbClr val="C4532D"/>
+                </a:solidFill>
+                <a:latin typeface="Cambria"/>
+              </a:rPr>
+              <a:t>12 min</a:t>
+            </a:r>
+          </a:p>
+        </p:txBody>
+      </p:sp>
+      <p:sp>
+        <p:nvSpPr>
+          <p:cNvPr id="12" name="TextBox 11"/>
+          <p:cNvSpPr txBox="1"/>
+          <p:nvPr/>
+        </p:nvSpPr>
+        <p:spPr>
+          <a:xfrm>
+            <a:off x="8321040" y="5669280"/>
+            <a:ext cx="3291840" cy="731520"/>
+          </a:xfrm>
+          <a:prstGeom prst="rect">
+            <a:avLst/>
+          </a:prstGeom>
+          <a:noFill/>
+        </p:spPr>
+        <p:txBody>
+          <a:bodyPr wrap="square" lIns="0" rIns="0" tIns="0" bIns="0" anchor="t">
+            <a:spAutoFit/>
+          </a:bodyPr>
+          <a:lstStyle/>
+          <a:p>
+            <a:pPr algn="l">
+              <a:spcAft>
+                <a:spcPts val="0"/>
+              </a:spcAft>
+            </a:pPr>
+            <a:r>
+              <a:rPr sz="1250" b="0" i="0">
+                <a:solidFill>
+                  <a:srgbClr val="1E2528"/>
+                </a:solidFill>
+                <a:latin typeface="Calibri"/>
+              </a:rPr>
+              <a:t>median weighbridge stop: the model's 10 min (5–30) assumption holds.</a:t>
+            </a:r>
+          </a:p>
+        </p:txBody>
+      </p:sp>
+      <p:sp>
+        <p:nvSpPr>
+          <p:cNvPr id="13" name="TextBox 12"/>
           <p:cNvSpPr txBox="1"/>
           <p:nvPr/>
         </p:nvSpPr>
@@ -9009,7 +9257,7 @@
                 </a:solidFill>
                 <a:latin typeface="Calibri"/>
               </a:rPr>
-              <a:t>outputs/scenarios.csv, costs.csv, fuel_co2.csv (scripts 16, 17, 26). Congestion relief from bypasses is not captured by the light-traffic model.</a:t>
+              <a:t>outputs/transit_gap.csv, transit_stop_mix.csv (scripts/24_transit_gap.py). GPS: fleet sample; RECTS: bonded transit cargo. Kampala–Hoima not reported.</a:t>
             </a:r>
           </a:p>
         </p:txBody>
@@ -9074,7 +9322,7 @@
                 </a:solidFill>
                 <a:latin typeface="Cambria"/>
               </a:rPr>
-              <a:t>Result 7 · Stop-go costs fuel and carbon</a:t>
+              <a:t>Result 6 · Controls are the quickest wins</a:t>
             </a:r>
           </a:p>
         </p:txBody>
@@ -9113,38 +9361,103 @@
                 </a:solidFill>
                 <a:latin typeface="Calibri"/>
               </a:rPr>
-              <a:t>Extra diesel per loaded truck trip from friction, and CO₂ a year (physical fuel model, 1,000 draws)</a:t>
-            </a:r>
-          </a:p>
-        </p:txBody>
-      </p:sp>
-      <p:pic>
-        <p:nvPicPr>
-          <p:cNvPr id="4" name="Picture 3" descr="f16_fuel_co2.png"/>
-          <p:cNvPicPr>
-            <a:picLocks noChangeAspect="1"/>
-          </p:cNvPicPr>
-          <p:nvPr/>
-        </p:nvPicPr>
-        <p:blipFill>
-          <a:blip r:embed="rId2"/>
-          <a:stretch>
-            <a:fillRect/>
-          </a:stretch>
-        </p:blipFill>
-        <p:spPr>
-          <a:xfrm>
-            <a:off x="548640" y="1645920"/>
-            <a:ext cx="11064240" cy="4243535"/>
-          </a:xfrm>
-          <a:prstGeom prst="rect">
-            <a:avLst/>
-          </a:prstGeom>
-        </p:spPr>
-      </p:pic>
+              <a:t>Truck minutes saved per trip leaving Kampala, by fix (central estimate)</a:t>
+            </a:r>
+          </a:p>
+        </p:txBody>
+      </p:sp>
+      <p:graphicFrame>
+        <p:nvGraphicFramePr>
+          <p:cNvPr id="4" name="Chart 3"/>
+          <p:cNvGraphicFramePr>
+            <a:graphicFrameLocks noGrp="1"/>
+          </p:cNvGraphicFramePr>
+          <p:nvPr/>
+        </p:nvGraphicFramePr>
+        <p:xfrm>
+          <a:off x="457200" y="1737360"/>
+          <a:ext cx="7498079" cy="4572000"/>
+        </p:xfrm>
+        <a:graphic>
+          <a:graphicData uri="http://schemas.openxmlformats.org/drawingml/2006/chart">
+            <c:chart xmlns:c="http://schemas.openxmlformats.org/drawingml/2006/chart" r:id="rId2"/>
+          </a:graphicData>
+        </a:graphic>
+      </p:graphicFrame>
       <p:sp>
         <p:nvSpPr>
           <p:cNvPr id="5" name="TextBox 4"/>
+          <p:cNvSpPr txBox="1"/>
+          <p:nvPr/>
+        </p:nvSpPr>
+        <p:spPr>
+          <a:xfrm>
+            <a:off x="8321040" y="1874519"/>
+            <a:ext cx="3291840" cy="4389120"/>
+          </a:xfrm>
+          <a:prstGeom prst="rect">
+            <a:avLst/>
+          </a:prstGeom>
+          <a:noFill/>
+        </p:spPr>
+        <p:txBody>
+          <a:bodyPr wrap="square" lIns="0" rIns="0" tIns="0" bIns="0" anchor="t">
+            <a:spAutoFit/>
+          </a:bodyPr>
+          <a:lstStyle/>
+          <a:p>
+            <a:pPr algn="l">
+              <a:spcAft>
+                <a:spcPts val="1000"/>
+              </a:spcAft>
+            </a:pPr>
+            <a:r>
+              <a:rPr sz="2800" b="1" i="0">
+                <a:solidFill>
+                  <a:srgbClr val="C4532D"/>
+                </a:solidFill>
+                <a:latin typeface="Cambria"/>
+              </a:rPr>
+              <a:t>US$41 M a year</a:t>
+            </a:r>
+          </a:p>
+          <a:p>
+            <a:pPr algn="l">
+              <a:spcAft>
+                <a:spcPts val="1000"/>
+              </a:spcAft>
+            </a:pPr>
+            <a:r>
+              <a:rPr sz="1400" b="0" i="0">
+                <a:solidFill>
+                  <a:srgbClr val="1E2528"/>
+                </a:solidFill>
+                <a:latin typeface="Calibri"/>
+              </a:rPr>
+              <a:t>in truck time lost to delay on the five roads at central values, plus about US$70 M in extra diesel burnt slowing and re-accelerating.</a:t>
+            </a:r>
+          </a:p>
+          <a:p>
+            <a:pPr algn="l">
+              <a:spcAft>
+                <a:spcPts val="1000"/>
+              </a:spcAft>
+            </a:pPr>
+            <a:r>
+              <a:rPr sz="1400" b="0" i="0">
+                <a:solidFill>
+                  <a:srgbClr val="5B6770"/>
+                </a:solidFill>
+                <a:latin typeface="Calibri"/>
+              </a:rPr>
+              <a:t>Weigh-in-motion and ending police stops save more per trip than bypasses in light traffic. Truck counts are surveyed on the Malaba, Katuna and Bwera roads, assumed on the others.</a:t>
+            </a:r>
+          </a:p>
+        </p:txBody>
+      </p:sp>
+      <p:sp>
+        <p:nvSpPr>
+          <p:cNvPr id="6" name="TextBox 5"/>
           <p:cNvSpPr txBox="1"/>
           <p:nvPr/>
         </p:nvSpPr>
@@ -9176,7 +9489,7 @@
                 </a:solidFill>
                 <a:latin typeface="Calibri"/>
               </a:rPr>
-              <a:t>29–75 L extra per trip (25–41% of trip fuel); about 138 kt CO₂ a year. Humps are assumed (one per town piece), so the Malaba figure has a wide range. outputs/fuel_co2.csv.</a:t>
+              <a:t>outputs/scenarios.csv, costs.csv, fuel_co2.csv (scripts 16, 17, 26). Congestion relief from bypasses is not captured by the light-traffic model.</a:t>
             </a:r>
           </a:p>
         </p:txBody>
@@ -9241,7 +9554,7 @@
                 </a:solidFill>
                 <a:latin typeface="Cambria"/>
               </a:rPr>
-              <a:t>Result 8 · Settlements carry most of the risk</a:t>
+              <a:t>Result 7 · Stop-go costs fuel and carbon</a:t>
             </a:r>
           </a:p>
         </p:txBody>
@@ -9280,234 +9593,38 @@
                 </a:solidFill>
                 <a:latin typeface="Calibri"/>
               </a:rPr>
-              <a:t>Roadside settlements: share of people within 300 m vs share of exposure (people × trucks × speed⁴)</a:t>
-            </a:r>
-          </a:p>
-        </p:txBody>
-      </p:sp>
-      <p:graphicFrame>
-        <p:nvGraphicFramePr>
-          <p:cNvPr id="4" name="Chart 3"/>
-          <p:cNvGraphicFramePr>
-            <a:graphicFrameLocks noGrp="1"/>
-          </p:cNvGraphicFramePr>
-          <p:nvPr/>
-        </p:nvGraphicFramePr>
-        <p:xfrm>
-          <a:off x="457200" y="1737360"/>
-          <a:ext cx="6949440" cy="4572000"/>
-        </p:xfrm>
-        <a:graphic>
-          <a:graphicData uri="http://schemas.openxmlformats.org/drawingml/2006/chart">
-            <c:chart xmlns:c="http://schemas.openxmlformats.org/drawingml/2006/chart" r:id="rId2"/>
-          </a:graphicData>
-        </a:graphic>
-      </p:graphicFrame>
-      <p:sp>
-        <p:nvSpPr>
-          <p:cNvPr id="5" name="Rounded Rectangle 4"/>
-          <p:cNvSpPr/>
-          <p:nvPr/>
-        </p:nvSpPr>
-        <p:spPr>
-          <a:xfrm>
-            <a:off x="7772400" y="1828800"/>
-            <a:ext cx="3840480" cy="2103120"/>
-          </a:xfrm>
-          <a:prstGeom prst="roundRect">
-            <a:avLst>
-              <a:gd name="adj" fmla="val 6000"/>
-            </a:avLst>
-          </a:prstGeom>
-          <a:solidFill>
-            <a:srgbClr val="EEF2F0"/>
-          </a:solidFill>
-          <a:ln>
-            <a:noFill/>
-          </a:ln>
-          <a:effectLst/>
-        </p:spPr>
-        <p:style>
-          <a:lnRef idx="1">
-            <a:schemeClr val="accent1"/>
-          </a:lnRef>
-          <a:fillRef idx="3">
-            <a:schemeClr val="accent1"/>
-          </a:fillRef>
-          <a:effectRef idx="2">
-            <a:schemeClr val="accent1"/>
-          </a:effectRef>
-          <a:fontRef idx="minor">
-            <a:schemeClr val="lt1"/>
-          </a:fontRef>
-        </p:style>
-        <p:txBody>
-          <a:bodyPr rtlCol="0" anchor="ctr"/>
-          <a:lstStyle/>
-          <a:p>
-            <a:pPr algn="ctr"/>
-          </a:p>
-        </p:txBody>
-      </p:sp>
-      <p:sp>
-        <p:nvSpPr>
-          <p:cNvPr id="6" name="TextBox 5"/>
-          <p:cNvSpPr txBox="1"/>
-          <p:nvPr/>
-        </p:nvSpPr>
-        <p:spPr>
-          <a:xfrm>
-            <a:off x="8046720" y="2011680"/>
-            <a:ext cx="3383280" cy="1828800"/>
-          </a:xfrm>
-          <a:prstGeom prst="rect">
-            <a:avLst/>
-          </a:prstGeom>
-          <a:noFill/>
-        </p:spPr>
-        <p:txBody>
-          <a:bodyPr wrap="square" lIns="0" rIns="0" tIns="0" bIns="0" anchor="t">
-            <a:spAutoFit/>
-          </a:bodyPr>
-          <a:lstStyle/>
-          <a:p>
-            <a:pPr algn="l">
-              <a:spcAft>
-                <a:spcPts val="600"/>
-              </a:spcAft>
-            </a:pPr>
-            <a:r>
-              <a:rPr sz="2200" b="1" i="0">
-                <a:solidFill>
-                  <a:srgbClr val="C4532D"/>
-                </a:solidFill>
-                <a:latin typeface="Cambria"/>
-              </a:rPr>
-              <a:t>Trucks run at 55–60 km/h</a:t>
-            </a:r>
-          </a:p>
-          <a:p>
-            <a:pPr algn="l">
-              <a:spcAft>
-                <a:spcPts val="600"/>
-              </a:spcAft>
-            </a:pPr>
-            <a:r>
-              <a:rPr sz="1300" b="0" i="0">
-                <a:solidFill>
-                  <a:srgbClr val="1E2528"/>
-                </a:solidFill>
-                <a:latin typeface="Calibri"/>
-              </a:rPr>
-              <a:t>through settlements that are not classed as towns, so risk concentrates where people live between towns.</a:t>
-            </a:r>
-          </a:p>
-        </p:txBody>
-      </p:sp>
-      <p:sp>
-        <p:nvSpPr>
-          <p:cNvPr id="7" name="Rounded Rectangle 6"/>
-          <p:cNvSpPr/>
-          <p:nvPr/>
-        </p:nvSpPr>
-        <p:spPr>
-          <a:xfrm>
-            <a:off x="7772400" y="4114800"/>
-            <a:ext cx="3840480" cy="2103120"/>
-          </a:xfrm>
-          <a:prstGeom prst="roundRect">
-            <a:avLst>
-              <a:gd name="adj" fmla="val 6000"/>
-            </a:avLst>
-          </a:prstGeom>
-          <a:solidFill>
-            <a:srgbClr val="EEF2F0"/>
-          </a:solidFill>
-          <a:ln>
-            <a:noFill/>
-          </a:ln>
-          <a:effectLst/>
-        </p:spPr>
-        <p:style>
-          <a:lnRef idx="1">
-            <a:schemeClr val="accent1"/>
-          </a:lnRef>
-          <a:fillRef idx="3">
-            <a:schemeClr val="accent1"/>
-          </a:fillRef>
-          <a:effectRef idx="2">
-            <a:schemeClr val="accent1"/>
-          </a:effectRef>
-          <a:fontRef idx="minor">
-            <a:schemeClr val="lt1"/>
-          </a:fontRef>
-        </p:style>
-        <p:txBody>
-          <a:bodyPr rtlCol="0" anchor="ctr"/>
-          <a:lstStyle/>
-          <a:p>
-            <a:pPr algn="ctr"/>
-          </a:p>
-        </p:txBody>
-      </p:sp>
-      <p:sp>
-        <p:nvSpPr>
-          <p:cNvPr id="8" name="TextBox 7"/>
-          <p:cNvSpPr txBox="1"/>
-          <p:nvPr/>
-        </p:nvSpPr>
-        <p:spPr>
-          <a:xfrm>
-            <a:off x="8046720" y="4297680"/>
-            <a:ext cx="3383280" cy="1828800"/>
-          </a:xfrm>
-          <a:prstGeom prst="rect">
-            <a:avLst/>
-          </a:prstGeom>
-          <a:noFill/>
-        </p:spPr>
-        <p:txBody>
-          <a:bodyPr wrap="square" lIns="0" rIns="0" tIns="0" bIns="0" anchor="t">
-            <a:spAutoFit/>
-          </a:bodyPr>
-          <a:lstStyle/>
-          <a:p>
-            <a:pPr algn="l">
-              <a:spcAft>
-                <a:spcPts val="600"/>
-              </a:spcAft>
-            </a:pPr>
-            <a:r>
-              <a:rPr sz="2200" b="1" i="0">
-                <a:solidFill>
-                  <a:srgbClr val="17252A"/>
-                </a:solidFill>
-                <a:latin typeface="Cambria"/>
-              </a:rPr>
-              <a:t>5%–8% slower</a:t>
-            </a:r>
-          </a:p>
-          <a:p>
-            <a:pPr algn="l">
-              <a:spcAft>
-                <a:spcPts val="600"/>
-              </a:spcAft>
-            </a:pPr>
-            <a:r>
-              <a:rPr sz="1300" b="0" i="0">
-                <a:solidFill>
-                  <a:srgbClr val="1E2528"/>
-                </a:solidFill>
-                <a:latin typeface="Calibri"/>
-              </a:rPr>
-              <a:t>on a bad-rain day (95th percentile, 2006–2025) than on a typical day. The May 2020 Mpondwe flood stretch ranks at the 92th percentile of flood exposure.</a:t>
-            </a:r>
-          </a:p>
-        </p:txBody>
-      </p:sp>
-      <p:sp>
-        <p:nvSpPr>
-          <p:cNvPr id="9" name="TextBox 8"/>
+              <a:t>Extra diesel per loaded truck trip from friction, and CO₂ a year (physical fuel model, 1,000 draws)</a:t>
+            </a:r>
+          </a:p>
+        </p:txBody>
+      </p:sp>
+      <p:pic>
+        <p:nvPicPr>
+          <p:cNvPr id="4" name="Picture 3" descr="f16_fuel_co2.png"/>
+          <p:cNvPicPr>
+            <a:picLocks noChangeAspect="1"/>
+          </p:cNvPicPr>
+          <p:nvPr/>
+        </p:nvPicPr>
+        <p:blipFill>
+          <a:blip r:embed="rId2"/>
+          <a:stretch>
+            <a:fillRect/>
+          </a:stretch>
+        </p:blipFill>
+        <p:spPr>
+          <a:xfrm>
+            <a:off x="548640" y="1645920"/>
+            <a:ext cx="11064240" cy="4243535"/>
+          </a:xfrm>
+          <a:prstGeom prst="rect">
+            <a:avLst/>
+          </a:prstGeom>
+        </p:spPr>
+      </p:pic>
+      <p:sp>
+        <p:nvSpPr>
+          <p:cNvPr id="5" name="TextBox 4"/>
           <p:cNvSpPr txBox="1"/>
           <p:nvPr/>
         </p:nvSpPr>
@@ -9539,7 +9656,7 @@
                 </a:solidFill>
                 <a:latin typeface="Calibri"/>
               </a:rPr>
-              <a:t>outputs/safety_by_type.csv, reliability.csv, flood_events_check.csv (scripts 18, 19). Exposure is not a crash rate.</a:t>
+              <a:t>29–75 L extra per trip (25–41% of trip fuel); about 138 kt CO₂ a year. Humps are assumed (one per town piece), so the Malaba figure has a wide range. outputs/fuel_co2.csv.</a:t>
             </a:r>
           </a:p>
         </p:txBody>
@@ -9604,7 +9721,7 @@
                 </a:solidFill>
                 <a:latin typeface="Cambria"/>
               </a:rPr>
-              <a:t>Result 9 · Police crash black spots sit in busy settlements</a:t>
+              <a:t>Result 8 · Settlements carry most of the risk</a:t>
             </a:r>
           </a:p>
         </p:txBody>
@@ -9643,45 +9760,85 @@
                 </a:solidFill>
                 <a:latin typeface="Calibri"/>
               </a:rPr>
-              <a:t>Stretches holding a named black spot, against random stretches near a named place (5,000 permutations)</a:t>
-            </a:r>
-          </a:p>
-        </p:txBody>
-      </p:sp>
-      <p:pic>
-        <p:nvPicPr>
-          <p:cNvPr id="4" name="Picture 3" descr="f15_black_spots.png"/>
-          <p:cNvPicPr>
-            <a:picLocks noChangeAspect="1"/>
-          </p:cNvPicPr>
-          <p:nvPr/>
-        </p:nvPicPr>
-        <p:blipFill>
-          <a:blip r:embed="rId2"/>
-          <a:stretch>
-            <a:fillRect/>
-          </a:stretch>
-        </p:blipFill>
-        <p:spPr>
-          <a:xfrm>
-            <a:off x="365760" y="1691640"/>
-            <a:ext cx="7589520" cy="4246329"/>
-          </a:xfrm>
-          <a:prstGeom prst="rect">
-            <a:avLst/>
-          </a:prstGeom>
-        </p:spPr>
-      </p:pic>
-      <p:sp>
-        <p:nvSpPr>
-          <p:cNvPr id="5" name="TextBox 4"/>
-          <p:cNvSpPr txBox="1"/>
-          <p:nvPr/>
-        </p:nvSpPr>
-        <p:spPr>
-          <a:xfrm>
-            <a:off x="8229600" y="1783080"/>
-            <a:ext cx="3383280" cy="457200"/>
+              <a:t>Roadside settlements: share of people within 300 m vs share of exposure (people × trucks × speed⁴)</a:t>
+            </a:r>
+          </a:p>
+        </p:txBody>
+      </p:sp>
+      <p:graphicFrame>
+        <p:nvGraphicFramePr>
+          <p:cNvPr id="4" name="Chart 3"/>
+          <p:cNvGraphicFramePr>
+            <a:graphicFrameLocks noGrp="1"/>
+          </p:cNvGraphicFramePr>
+          <p:nvPr/>
+        </p:nvGraphicFramePr>
+        <p:xfrm>
+          <a:off x="457200" y="1737360"/>
+          <a:ext cx="6949440" cy="4572000"/>
+        </p:xfrm>
+        <a:graphic>
+          <a:graphicData uri="http://schemas.openxmlformats.org/drawingml/2006/chart">
+            <c:chart xmlns:c="http://schemas.openxmlformats.org/drawingml/2006/chart" r:id="rId2"/>
+          </a:graphicData>
+        </a:graphic>
+      </p:graphicFrame>
+      <p:sp>
+        <p:nvSpPr>
+          <p:cNvPr id="5" name="Rounded Rectangle 4"/>
+          <p:cNvSpPr/>
+          <p:nvPr/>
+        </p:nvSpPr>
+        <p:spPr>
+          <a:xfrm>
+            <a:off x="7772400" y="1828800"/>
+            <a:ext cx="3840480" cy="2103120"/>
+          </a:xfrm>
+          <a:prstGeom prst="roundRect">
+            <a:avLst>
+              <a:gd name="adj" fmla="val 6000"/>
+            </a:avLst>
+          </a:prstGeom>
+          <a:solidFill>
+            <a:srgbClr val="EEF2F0"/>
+          </a:solidFill>
+          <a:ln>
+            <a:noFill/>
+          </a:ln>
+          <a:effectLst/>
+        </p:spPr>
+        <p:style>
+          <a:lnRef idx="1">
+            <a:schemeClr val="accent1"/>
+          </a:lnRef>
+          <a:fillRef idx="3">
+            <a:schemeClr val="accent1"/>
+          </a:fillRef>
+          <a:effectRef idx="2">
+            <a:schemeClr val="accent1"/>
+          </a:effectRef>
+          <a:fontRef idx="minor">
+            <a:schemeClr val="lt1"/>
+          </a:fontRef>
+        </p:style>
+        <p:txBody>
+          <a:bodyPr rtlCol="0" anchor="ctr"/>
+          <a:lstStyle/>
+          <a:p>
+            <a:pPr algn="ctr"/>
+          </a:p>
+        </p:txBody>
+      </p:sp>
+      <p:sp>
+        <p:nvSpPr>
+          <p:cNvPr id="6" name="TextBox 5"/>
+          <p:cNvSpPr txBox="1"/>
+          <p:nvPr/>
+        </p:nvSpPr>
+        <p:spPr>
+          <a:xfrm>
+            <a:off x="8046720" y="2011680"/>
+            <a:ext cx="3383280" cy="1828800"/>
           </a:xfrm>
           <a:prstGeom prst="rect">
             <a:avLst/>
@@ -9696,7 +9853,7 @@
           <a:p>
             <a:pPr algn="l">
               <a:spcAft>
-                <a:spcPts val="0"/>
+                <a:spcPts val="600"/>
               </a:spcAft>
             </a:pPr>
             <a:r>
@@ -9706,21 +9863,83 @@
                 </a:solidFill>
                 <a:latin typeface="Cambria"/>
               </a:rPr>
-              <a:t>40 / 58</a:t>
-            </a:r>
-          </a:p>
-        </p:txBody>
-      </p:sp>
-      <p:sp>
-        <p:nvSpPr>
-          <p:cNvPr id="6" name="TextBox 5"/>
-          <p:cNvSpPr txBox="1"/>
-          <p:nvPr/>
-        </p:nvSpPr>
-        <p:spPr>
-          <a:xfrm>
-            <a:off x="8229600" y="2221991"/>
-            <a:ext cx="3383280" cy="731520"/>
+              <a:t>Trucks run at 55–60 km/h</a:t>
+            </a:r>
+          </a:p>
+          <a:p>
+            <a:pPr algn="l">
+              <a:spcAft>
+                <a:spcPts val="600"/>
+              </a:spcAft>
+            </a:pPr>
+            <a:r>
+              <a:rPr sz="1300" b="0" i="0">
+                <a:solidFill>
+                  <a:srgbClr val="1E2528"/>
+                </a:solidFill>
+                <a:latin typeface="Calibri"/>
+              </a:rPr>
+              <a:t>through settlements that are not classed as towns, so risk concentrates where people live between towns.</a:t>
+            </a:r>
+          </a:p>
+        </p:txBody>
+      </p:sp>
+      <p:sp>
+        <p:nvSpPr>
+          <p:cNvPr id="7" name="Rounded Rectangle 6"/>
+          <p:cNvSpPr/>
+          <p:nvPr/>
+        </p:nvSpPr>
+        <p:spPr>
+          <a:xfrm>
+            <a:off x="7772400" y="4114800"/>
+            <a:ext cx="3840480" cy="2103120"/>
+          </a:xfrm>
+          <a:prstGeom prst="roundRect">
+            <a:avLst>
+              <a:gd name="adj" fmla="val 6000"/>
+            </a:avLst>
+          </a:prstGeom>
+          <a:solidFill>
+            <a:srgbClr val="EEF2F0"/>
+          </a:solidFill>
+          <a:ln>
+            <a:noFill/>
+          </a:ln>
+          <a:effectLst/>
+        </p:spPr>
+        <p:style>
+          <a:lnRef idx="1">
+            <a:schemeClr val="accent1"/>
+          </a:lnRef>
+          <a:fillRef idx="3">
+            <a:schemeClr val="accent1"/>
+          </a:fillRef>
+          <a:effectRef idx="2">
+            <a:schemeClr val="accent1"/>
+          </a:effectRef>
+          <a:fontRef idx="minor">
+            <a:schemeClr val="lt1"/>
+          </a:fontRef>
+        </p:style>
+        <p:txBody>
+          <a:bodyPr rtlCol="0" anchor="ctr"/>
+          <a:lstStyle/>
+          <a:p>
+            <a:pPr algn="ctr"/>
+          </a:p>
+        </p:txBody>
+      </p:sp>
+      <p:sp>
+        <p:nvSpPr>
+          <p:cNvPr id="8" name="TextBox 7"/>
+          <p:cNvSpPr txBox="1"/>
+          <p:nvPr/>
+        </p:nvSpPr>
+        <p:spPr>
+          <a:xfrm>
+            <a:off x="8046720" y="4297680"/>
+            <a:ext cx="3383280" cy="1828800"/>
           </a:xfrm>
           <a:prstGeom prst="rect">
             <a:avLst/>
@@ -9735,95 +9954,33 @@
           <a:p>
             <a:pPr algn="l">
               <a:spcAft>
-                <a:spcPts val="0"/>
-              </a:spcAft>
-            </a:pPr>
-            <a:r>
-              <a:rPr sz="1250" b="0" i="0">
+                <a:spcPts val="600"/>
+              </a:spcAft>
+            </a:pPr>
+            <a:r>
+              <a:rPr sz="2200" b="1" i="0">
+                <a:solidFill>
+                  <a:srgbClr val="17252A"/>
+                </a:solidFill>
+                <a:latin typeface="Cambria"/>
+              </a:rPr>
+              <a:t>5%–8% slower</a:t>
+            </a:r>
+          </a:p>
+          <a:p>
+            <a:pPr algn="l">
+              <a:spcAft>
+                <a:spcPts val="600"/>
+              </a:spcAft>
+            </a:pPr>
+            <a:r>
+              <a:rPr sz="1300" b="0" i="0">
                 <a:solidFill>
                   <a:srgbClr val="1E2528"/>
                 </a:solidFill>
                 <a:latin typeface="Calibri"/>
               </a:rPr>
-              <a:t>police-named black spots located by name in OSM.</a:t>
-            </a:r>
-          </a:p>
-        </p:txBody>
-      </p:sp>
-      <p:sp>
-        <p:nvSpPr>
-          <p:cNvPr id="7" name="TextBox 6"/>
-          <p:cNvSpPr txBox="1"/>
-          <p:nvPr/>
-        </p:nvSpPr>
-        <p:spPr>
-          <a:xfrm>
-            <a:off x="8229600" y="2898648"/>
-            <a:ext cx="3383280" cy="457200"/>
-          </a:xfrm>
-          <a:prstGeom prst="rect">
-            <a:avLst/>
-          </a:prstGeom>
-          <a:noFill/>
-        </p:spPr>
-        <p:txBody>
-          <a:bodyPr wrap="square" lIns="0" rIns="0" tIns="0" bIns="0" anchor="t">
-            <a:spAutoFit/>
-          </a:bodyPr>
-          <a:lstStyle/>
-          <a:p>
-            <a:pPr algn="l">
-              <a:spcAft>
-                <a:spcPts val="0"/>
-              </a:spcAft>
-            </a:pPr>
-            <a:r>
-              <a:rPr sz="2200" b="1" i="0">
-                <a:solidFill>
-                  <a:srgbClr val="C4532D"/>
-                </a:solidFill>
-                <a:latin typeface="Cambria"/>
-              </a:rPr>
-              <a:t>71th pct</a:t>
-            </a:r>
-          </a:p>
-        </p:txBody>
-      </p:sp>
-      <p:sp>
-        <p:nvSpPr>
-          <p:cNvPr id="8" name="TextBox 7"/>
-          <p:cNvSpPr txBox="1"/>
-          <p:nvPr/>
-        </p:nvSpPr>
-        <p:spPr>
-          <a:xfrm>
-            <a:off x="8229600" y="3337560"/>
-            <a:ext cx="3383280" cy="731520"/>
-          </a:xfrm>
-          <a:prstGeom prst="rect">
-            <a:avLst/>
-          </a:prstGeom>
-          <a:noFill/>
-        </p:spPr>
-        <p:txBody>
-          <a:bodyPr wrap="square" lIns="0" rIns="0" tIns="0" bIns="0" anchor="t">
-            <a:spAutoFit/>
-          </a:bodyPr>
-          <a:lstStyle/>
-          <a:p>
-            <a:pPr algn="l">
-              <a:spcAft>
-                <a:spcPts val="0"/>
-              </a:spcAft>
-            </a:pPr>
-            <a:r>
-              <a:rPr sz="1250" b="0" i="0">
-                <a:solidFill>
-                  <a:srgbClr val="1E2528"/>
-                </a:solidFill>
-                <a:latin typeface="Calibri"/>
-              </a:rPr>
-              <a:t>on roadside buildings (p &lt; 0.001); joining roads 65th.</a:t>
+              <a:t>on a bad-rain day (95th percentile, 2006–2025) than on a typical day. The May 2020 Mpondwe flood stretch ranks at the 92th percentile of flood exposure.</a:t>
             </a:r>
           </a:p>
         </p:txBody>
@@ -9831,162 +9988,6 @@
       <p:sp>
         <p:nvSpPr>
           <p:cNvPr id="9" name="TextBox 8"/>
-          <p:cNvSpPr txBox="1"/>
-          <p:nvPr/>
-        </p:nvSpPr>
-        <p:spPr>
-          <a:xfrm>
-            <a:off x="8229600" y="4014215"/>
-            <a:ext cx="3383280" cy="457200"/>
-          </a:xfrm>
-          <a:prstGeom prst="rect">
-            <a:avLst/>
-          </a:prstGeom>
-          <a:noFill/>
-        </p:spPr>
-        <p:txBody>
-          <a:bodyPr wrap="square" lIns="0" rIns="0" tIns="0" bIns="0" anchor="t">
-            <a:spAutoFit/>
-          </a:bodyPr>
-          <a:lstStyle/>
-          <a:p>
-            <a:pPr algn="l">
-              <a:spcAft>
-                <a:spcPts val="0"/>
-              </a:spcAft>
-            </a:pPr>
-            <a:r>
-              <a:rPr sz="2200" b="1" i="0">
-                <a:solidFill>
-                  <a:srgbClr val="C4532D"/>
-                </a:solidFill>
-                <a:latin typeface="Cambria"/>
-              </a:rPr>
-              <a:t>32th pct</a:t>
-            </a:r>
-          </a:p>
-        </p:txBody>
-      </p:sp>
-      <p:sp>
-        <p:nvSpPr>
-          <p:cNvPr id="10" name="TextBox 9"/>
-          <p:cNvSpPr txBox="1"/>
-          <p:nvPr/>
-        </p:nvSpPr>
-        <p:spPr>
-          <a:xfrm>
-            <a:off x="8229600" y="4453127"/>
-            <a:ext cx="3383280" cy="731520"/>
-          </a:xfrm>
-          <a:prstGeom prst="rect">
-            <a:avLst/>
-          </a:prstGeom>
-          <a:noFill/>
-        </p:spPr>
-        <p:txBody>
-          <a:bodyPr wrap="square" lIns="0" rIns="0" tIns="0" bIns="0" anchor="t">
-            <a:spAutoFit/>
-          </a:bodyPr>
-          <a:lstStyle/>
-          <a:p>
-            <a:pPr algn="l">
-              <a:spcAft>
-                <a:spcPts val="0"/>
-              </a:spcAft>
-            </a:pPr>
-            <a:r>
-              <a:rPr sz="1250" b="0" i="0">
-                <a:solidFill>
-                  <a:srgbClr val="1E2528"/>
-                </a:solidFill>
-                <a:latin typeface="Calibri"/>
-              </a:rPr>
-              <a:t>on truck speed (p &lt; 0.001): black spots are slower, busier places, not fast bends.</a:t>
-            </a:r>
-          </a:p>
-        </p:txBody>
-      </p:sp>
-      <p:sp>
-        <p:nvSpPr>
-          <p:cNvPr id="11" name="TextBox 10"/>
-          <p:cNvSpPr txBox="1"/>
-          <p:nvPr/>
-        </p:nvSpPr>
-        <p:spPr>
-          <a:xfrm>
-            <a:off x="8229600" y="5129783"/>
-            <a:ext cx="3383280" cy="457200"/>
-          </a:xfrm>
-          <a:prstGeom prst="rect">
-            <a:avLst/>
-          </a:prstGeom>
-          <a:noFill/>
-        </p:spPr>
-        <p:txBody>
-          <a:bodyPr wrap="square" lIns="0" rIns="0" tIns="0" bIns="0" anchor="t">
-            <a:spAutoFit/>
-          </a:bodyPr>
-          <a:lstStyle/>
-          <a:p>
-            <a:pPr algn="l">
-              <a:spcAft>
-                <a:spcPts val="0"/>
-              </a:spcAft>
-            </a:pPr>
-            <a:r>
-              <a:rPr sz="2200" b="1" i="0">
-                <a:solidFill>
-                  <a:srgbClr val="C4532D"/>
-                </a:solidFill>
-                <a:latin typeface="Cambria"/>
-              </a:rPr>
-              <a:t>59th pct</a:t>
-            </a:r>
-          </a:p>
-        </p:txBody>
-      </p:sp>
-      <p:sp>
-        <p:nvSpPr>
-          <p:cNvPr id="12" name="TextBox 11"/>
-          <p:cNvSpPr txBox="1"/>
-          <p:nvPr/>
-        </p:nvSpPr>
-        <p:spPr>
-          <a:xfrm>
-            <a:off x="8229600" y="5568696"/>
-            <a:ext cx="3383280" cy="731520"/>
-          </a:xfrm>
-          <a:prstGeom prst="rect">
-            <a:avLst/>
-          </a:prstGeom>
-          <a:noFill/>
-        </p:spPr>
-        <p:txBody>
-          <a:bodyPr wrap="square" lIns="0" rIns="0" tIns="0" bIns="0" anchor="t">
-            <a:spAutoFit/>
-          </a:bodyPr>
-          <a:lstStyle/>
-          <a:p>
-            <a:pPr algn="l">
-              <a:spcAft>
-                <a:spcPts val="0"/>
-              </a:spcAft>
-            </a:pPr>
-            <a:r>
-              <a:rPr sz="1250" b="0" i="0">
-                <a:solidFill>
-                  <a:srgbClr val="1E2528"/>
-                </a:solidFill>
-                <a:latin typeface="Calibri"/>
-              </a:rPr>
-              <a:t>on the exposure index (p = 0.081): its speed⁴ term under-weights busy, slower places.</a:t>
-            </a:r>
-          </a:p>
-        </p:txBody>
-      </p:sp>
-      <p:sp>
-        <p:nvSpPr>
-          <p:cNvPr id="13" name="TextBox 12"/>
           <p:cNvSpPr txBox="1"/>
           <p:nvPr/>
         </p:nvSpPr>
@@ -10018,7 +10019,7 @@
                 </a:solidFill>
                 <a:latin typeface="Calibri"/>
               </a:rPr>
-              <a:t>Daily Monitor (23 Dec 2018), black spots named by Uganda Police traffic officers; outputs/black_spots_*.csv (script 25). Name matching misses forest and swamp spots.</a:t>
+              <a:t>outputs/safety_by_type.csv, reliability.csv, flood_events_check.csv (scripts 18, 19). Exposure is not a crash rate.</a:t>
             </a:r>
           </a:p>
         </p:txBody>
@@ -11296,9 +11297,87 @@
         <p:nvPr/>
       </p:nvGrpSpPr>
       <p:grpSpPr/>
+      <p:sp>
+        <p:nvSpPr>
+          <p:cNvPr id="2" name="TextBox 1"/>
+          <p:cNvSpPr txBox="1"/>
+          <p:nvPr/>
+        </p:nvSpPr>
+        <p:spPr>
+          <a:xfrm>
+            <a:off x="548640" y="411480"/>
+            <a:ext cx="11064240" cy="731520"/>
+          </a:xfrm>
+          <a:prstGeom prst="rect">
+            <a:avLst/>
+          </a:prstGeom>
+          <a:noFill/>
+        </p:spPr>
+        <p:txBody>
+          <a:bodyPr wrap="square" lIns="0" rIns="0" tIns="0" bIns="0" anchor="t">
+            <a:spAutoFit/>
+          </a:bodyPr>
+          <a:lstStyle/>
+          <a:p>
+            <a:pPr algn="l">
+              <a:spcAft>
+                <a:spcPts val="0"/>
+              </a:spcAft>
+            </a:pPr>
+            <a:r>
+              <a:rPr sz="3400" b="1" i="0">
+                <a:solidFill>
+                  <a:srgbClr val="1E2528"/>
+                </a:solidFill>
+                <a:latin typeface="Cambria"/>
+              </a:rPr>
+              <a:t>Result 9 · Police crash black spots sit in busy settlements</a:t>
+            </a:r>
+          </a:p>
+        </p:txBody>
+      </p:sp>
+      <p:sp>
+        <p:nvSpPr>
+          <p:cNvPr id="3" name="TextBox 2"/>
+          <p:cNvSpPr txBox="1"/>
+          <p:nvPr/>
+        </p:nvSpPr>
+        <p:spPr>
+          <a:xfrm>
+            <a:off x="548640" y="1115568"/>
+            <a:ext cx="11064240" cy="457200"/>
+          </a:xfrm>
+          <a:prstGeom prst="rect">
+            <a:avLst/>
+          </a:prstGeom>
+          <a:noFill/>
+        </p:spPr>
+        <p:txBody>
+          <a:bodyPr wrap="square" lIns="0" rIns="0" tIns="0" bIns="0" anchor="t">
+            <a:spAutoFit/>
+          </a:bodyPr>
+          <a:lstStyle/>
+          <a:p>
+            <a:pPr algn="l">
+              <a:spcAft>
+                <a:spcPts val="0"/>
+              </a:spcAft>
+            </a:pPr>
+            <a:r>
+              <a:rPr sz="1600" b="0" i="0">
+                <a:solidFill>
+                  <a:srgbClr val="5B6770"/>
+                </a:solidFill>
+                <a:latin typeface="Calibri"/>
+              </a:rPr>
+              <a:t>Stretches holding a named black spot, against random stretches near a named place (5,000 permutations)</a:t>
+            </a:r>
+          </a:p>
+        </p:txBody>
+      </p:sp>
       <p:pic>
         <p:nvPicPr>
-          <p:cNvPr id="2" name="Picture 1" descr="f12.png"/>
+          <p:cNvPr id="4" name="Picture 3" descr="f15_black_spots.png"/>
           <p:cNvPicPr>
             <a:picLocks noChangeAspect="1"/>
           </p:cNvPicPr>
@@ -11312,8 +11391,8 @@
         </p:blipFill>
         <p:spPr>
           <a:xfrm>
-            <a:off x="365760" y="320040"/>
-            <a:ext cx="5896644" cy="6217920"/>
+            <a:off x="365760" y="1691640"/>
+            <a:ext cx="7589520" cy="4246329"/>
           </a:xfrm>
           <a:prstGeom prst="rect">
             <a:avLst/>
@@ -11322,14 +11401,14 @@
       </p:pic>
       <p:sp>
         <p:nvSpPr>
-          <p:cNvPr id="3" name="TextBox 2"/>
-          <p:cNvSpPr txBox="1"/>
-          <p:nvPr/>
-        </p:nvSpPr>
-        <p:spPr>
-          <a:xfrm>
-            <a:off x="6400800" y="411480"/>
-            <a:ext cx="5303520" cy="1188720"/>
+          <p:cNvPr id="5" name="TextBox 4"/>
+          <p:cNvSpPr txBox="1"/>
+          <p:nvPr/>
+        </p:nvSpPr>
+        <p:spPr>
+          <a:xfrm>
+            <a:off x="8229600" y="1783080"/>
+            <a:ext cx="3383280" cy="457200"/>
           </a:xfrm>
           <a:prstGeom prst="rect">
             <a:avLst/>
@@ -11348,27 +11427,105 @@
               </a:spcAft>
             </a:pPr>
             <a:r>
-              <a:rPr sz="3000" b="1" i="0">
+              <a:rPr sz="2200" b="1" i="0">
+                <a:solidFill>
+                  <a:srgbClr val="C4532D"/>
+                </a:solidFill>
+                <a:latin typeface="Cambria"/>
+              </a:rPr>
+              <a:t>40 / 58</a:t>
+            </a:r>
+          </a:p>
+        </p:txBody>
+      </p:sp>
+      <p:sp>
+        <p:nvSpPr>
+          <p:cNvPr id="6" name="TextBox 5"/>
+          <p:cNvSpPr txBox="1"/>
+          <p:nvPr/>
+        </p:nvSpPr>
+        <p:spPr>
+          <a:xfrm>
+            <a:off x="8229600" y="2221991"/>
+            <a:ext cx="3383280" cy="731520"/>
+          </a:xfrm>
+          <a:prstGeom prst="rect">
+            <a:avLst/>
+          </a:prstGeom>
+          <a:noFill/>
+        </p:spPr>
+        <p:txBody>
+          <a:bodyPr wrap="square" lIns="0" rIns="0" tIns="0" bIns="0" anchor="t">
+            <a:spAutoFit/>
+          </a:bodyPr>
+          <a:lstStyle/>
+          <a:p>
+            <a:pPr algn="l">
+              <a:spcAft>
+                <a:spcPts val="0"/>
+              </a:spcAft>
+            </a:pPr>
+            <a:r>
+              <a:rPr sz="1250" b="0" i="0">
                 <a:solidFill>
                   <a:srgbClr val="1E2528"/>
                 </a:solidFill>
+                <a:latin typeface="Calibri"/>
+              </a:rPr>
+              <a:t>police-named black spots located by name in OSM.</a:t>
+            </a:r>
+          </a:p>
+        </p:txBody>
+      </p:sp>
+      <p:sp>
+        <p:nvSpPr>
+          <p:cNvPr id="7" name="TextBox 6"/>
+          <p:cNvSpPr txBox="1"/>
+          <p:nvPr/>
+        </p:nvSpPr>
+        <p:spPr>
+          <a:xfrm>
+            <a:off x="8229600" y="2898648"/>
+            <a:ext cx="3383280" cy="457200"/>
+          </a:xfrm>
+          <a:prstGeom prst="rect">
+            <a:avLst/>
+          </a:prstGeom>
+          <a:noFill/>
+        </p:spPr>
+        <p:txBody>
+          <a:bodyPr wrap="square" lIns="0" rIns="0" tIns="0" bIns="0" anchor="t">
+            <a:spAutoFit/>
+          </a:bodyPr>
+          <a:lstStyle/>
+          <a:p>
+            <a:pPr algn="l">
+              <a:spcAft>
+                <a:spcPts val="0"/>
+              </a:spcAft>
+            </a:pPr>
+            <a:r>
+              <a:rPr sz="2200" b="1" i="0">
+                <a:solidFill>
+                  <a:srgbClr val="C4532D"/>
+                </a:solidFill>
                 <a:latin typeface="Cambria"/>
               </a:rPr>
-              <a:t>Rail along the bottlenecks</a:t>
-            </a:r>
-          </a:p>
-        </p:txBody>
-      </p:sp>
-      <p:sp>
-        <p:nvSpPr>
-          <p:cNvPr id="4" name="TextBox 3"/>
-          <p:cNvSpPr txBox="1"/>
-          <p:nvPr/>
-        </p:nvSpPr>
-        <p:spPr>
-          <a:xfrm>
-            <a:off x="6400800" y="1234440"/>
-            <a:ext cx="5303520" cy="548640"/>
+              <a:t>71th pct</a:t>
+            </a:r>
+          </a:p>
+        </p:txBody>
+      </p:sp>
+      <p:sp>
+        <p:nvSpPr>
+          <p:cNvPr id="8" name="TextBox 7"/>
+          <p:cNvSpPr txBox="1"/>
+          <p:nvPr/>
+        </p:nvSpPr>
+        <p:spPr>
+          <a:xfrm>
+            <a:off x="8229600" y="3337560"/>
+            <a:ext cx="3383280" cy="731520"/>
           </a:xfrm>
           <a:prstGeom prst="rect">
             <a:avLst/>
@@ -11387,286 +11544,208 @@
               </a:spcAft>
             </a:pPr>
             <a:r>
-              <a:rPr sz="1400" b="0" i="0">
+              <a:rPr sz="1250" b="0" i="0">
+                <a:solidFill>
+                  <a:srgbClr val="1E2528"/>
+                </a:solidFill>
+                <a:latin typeface="Calibri"/>
+              </a:rPr>
+              <a:t>on roadside buildings (p &lt; 0.001); joining roads 65th.</a:t>
+            </a:r>
+          </a:p>
+        </p:txBody>
+      </p:sp>
+      <p:sp>
+        <p:nvSpPr>
+          <p:cNvPr id="9" name="TextBox 8"/>
+          <p:cNvSpPr txBox="1"/>
+          <p:nvPr/>
+        </p:nvSpPr>
+        <p:spPr>
+          <a:xfrm>
+            <a:off x="8229600" y="4014215"/>
+            <a:ext cx="3383280" cy="457200"/>
+          </a:xfrm>
+          <a:prstGeom prst="rect">
+            <a:avLst/>
+          </a:prstGeom>
+          <a:noFill/>
+        </p:spPr>
+        <p:txBody>
+          <a:bodyPr wrap="square" lIns="0" rIns="0" tIns="0" bIns="0" anchor="t">
+            <a:spAutoFit/>
+          </a:bodyPr>
+          <a:lstStyle/>
+          <a:p>
+            <a:pPr algn="l">
+              <a:spcAft>
+                <a:spcPts val="0"/>
+              </a:spcAft>
+            </a:pPr>
+            <a:r>
+              <a:rPr sz="2200" b="1" i="0">
+                <a:solidFill>
+                  <a:srgbClr val="C4532D"/>
+                </a:solidFill>
+                <a:latin typeface="Cambria"/>
+              </a:rPr>
+              <a:t>32th pct</a:t>
+            </a:r>
+          </a:p>
+        </p:txBody>
+      </p:sp>
+      <p:sp>
+        <p:nvSpPr>
+          <p:cNvPr id="10" name="TextBox 9"/>
+          <p:cNvSpPr txBox="1"/>
+          <p:nvPr/>
+        </p:nvSpPr>
+        <p:spPr>
+          <a:xfrm>
+            <a:off x="8229600" y="4453127"/>
+            <a:ext cx="3383280" cy="731520"/>
+          </a:xfrm>
+          <a:prstGeom prst="rect">
+            <a:avLst/>
+          </a:prstGeom>
+          <a:noFill/>
+        </p:spPr>
+        <p:txBody>
+          <a:bodyPr wrap="square" lIns="0" rIns="0" tIns="0" bIns="0" anchor="t">
+            <a:spAutoFit/>
+          </a:bodyPr>
+          <a:lstStyle/>
+          <a:p>
+            <a:pPr algn="l">
+              <a:spcAft>
+                <a:spcPts val="0"/>
+              </a:spcAft>
+            </a:pPr>
+            <a:r>
+              <a:rPr sz="1250" b="0" i="0">
+                <a:solidFill>
+                  <a:srgbClr val="1E2528"/>
+                </a:solidFill>
+                <a:latin typeface="Calibri"/>
+              </a:rPr>
+              <a:t>on truck speed (p &lt; 0.001): black spots are slower, busier places, not fast bends.</a:t>
+            </a:r>
+          </a:p>
+        </p:txBody>
+      </p:sp>
+      <p:sp>
+        <p:nvSpPr>
+          <p:cNvPr id="11" name="TextBox 10"/>
+          <p:cNvSpPr txBox="1"/>
+          <p:nvPr/>
+        </p:nvSpPr>
+        <p:spPr>
+          <a:xfrm>
+            <a:off x="8229600" y="5129783"/>
+            <a:ext cx="3383280" cy="457200"/>
+          </a:xfrm>
+          <a:prstGeom prst="rect">
+            <a:avLst/>
+          </a:prstGeom>
+          <a:noFill/>
+        </p:spPr>
+        <p:txBody>
+          <a:bodyPr wrap="square" lIns="0" rIns="0" tIns="0" bIns="0" anchor="t">
+            <a:spAutoFit/>
+          </a:bodyPr>
+          <a:lstStyle/>
+          <a:p>
+            <a:pPr algn="l">
+              <a:spcAft>
+                <a:spcPts val="0"/>
+              </a:spcAft>
+            </a:pPr>
+            <a:r>
+              <a:rPr sz="2200" b="1" i="0">
+                <a:solidFill>
+                  <a:srgbClr val="C4532D"/>
+                </a:solidFill>
+                <a:latin typeface="Cambria"/>
+              </a:rPr>
+              <a:t>59th pct</a:t>
+            </a:r>
+          </a:p>
+        </p:txBody>
+      </p:sp>
+      <p:sp>
+        <p:nvSpPr>
+          <p:cNvPr id="12" name="TextBox 11"/>
+          <p:cNvSpPr txBox="1"/>
+          <p:nvPr/>
+        </p:nvSpPr>
+        <p:spPr>
+          <a:xfrm>
+            <a:off x="8229600" y="5568696"/>
+            <a:ext cx="3383280" cy="731520"/>
+          </a:xfrm>
+          <a:prstGeom prst="rect">
+            <a:avLst/>
+          </a:prstGeom>
+          <a:noFill/>
+        </p:spPr>
+        <p:txBody>
+          <a:bodyPr wrap="square" lIns="0" rIns="0" tIns="0" bIns="0" anchor="t">
+            <a:spAutoFit/>
+          </a:bodyPr>
+          <a:lstStyle/>
+          <a:p>
+            <a:pPr algn="l">
+              <a:spcAft>
+                <a:spcPts val="0"/>
+              </a:spcAft>
+            </a:pPr>
+            <a:r>
+              <a:rPr sz="1250" b="0" i="0">
+                <a:solidFill>
+                  <a:srgbClr val="1E2528"/>
+                </a:solidFill>
+                <a:latin typeface="Calibri"/>
+              </a:rPr>
+              <a:t>on the exposure index (p = 0.081): its speed⁴ term under-weights busy, slower places.</a:t>
+            </a:r>
+          </a:p>
+        </p:txBody>
+      </p:sp>
+      <p:sp>
+        <p:nvSpPr>
+          <p:cNvPr id="13" name="TextBox 12"/>
+          <p:cNvSpPr txBox="1"/>
+          <p:nvPr/>
+        </p:nvSpPr>
+        <p:spPr>
+          <a:xfrm>
+            <a:off x="548640" y="6400800"/>
+            <a:ext cx="11064240" cy="274320"/>
+          </a:xfrm>
+          <a:prstGeom prst="rect">
+            <a:avLst/>
+          </a:prstGeom>
+          <a:noFill/>
+        </p:spPr>
+        <p:txBody>
+          <a:bodyPr wrap="square" lIns="0" rIns="0" tIns="0" bIns="0" anchor="t">
+            <a:spAutoFit/>
+          </a:bodyPr>
+          <a:lstStyle/>
+          <a:p>
+            <a:pPr algn="l">
+              <a:spcAft>
+                <a:spcPts val="0"/>
+              </a:spcAft>
+            </a:pPr>
+            <a:r>
+              <a:rPr sz="1000" b="0" i="0">
                 <a:solidFill>
                   <a:srgbClr val="5B6770"/>
                 </a:solidFill>
                 <a:latin typeface="Calibri"/>
               </a:rPr>
-              <a:t>Least-cost screening alignments and the existing metre-gauge railway</a:t>
-            </a:r>
-          </a:p>
-        </p:txBody>
-      </p:sp>
-      <p:sp>
-        <p:nvSpPr>
-          <p:cNvPr id="5" name="TextBox 4"/>
-          <p:cNvSpPr txBox="1"/>
-          <p:nvPr/>
-        </p:nvSpPr>
-        <p:spPr>
-          <a:xfrm>
-            <a:off x="6400800" y="2011680"/>
-            <a:ext cx="1463040" cy="640080"/>
-          </a:xfrm>
-          <a:prstGeom prst="rect">
-            <a:avLst/>
-          </a:prstGeom>
-          <a:noFill/>
-        </p:spPr>
-        <p:txBody>
-          <a:bodyPr wrap="square" lIns="0" rIns="0" tIns="0" bIns="0" anchor="t">
-            <a:spAutoFit/>
-          </a:bodyPr>
-          <a:lstStyle/>
-          <a:p>
-            <a:pPr algn="l">
-              <a:spcAft>
-                <a:spcPts val="0"/>
-              </a:spcAft>
-            </a:pPr>
-            <a:r>
-              <a:rPr sz="2600" b="1" i="0">
-                <a:solidFill>
-                  <a:srgbClr val="C4532D"/>
-                </a:solidFill>
-                <a:latin typeface="Cambria"/>
-              </a:rPr>
-              <a:t>81%</a:t>
-            </a:r>
-          </a:p>
-        </p:txBody>
-      </p:sp>
-      <p:sp>
-        <p:nvSpPr>
-          <p:cNvPr id="6" name="TextBox 5"/>
-          <p:cNvSpPr txBox="1"/>
-          <p:nvPr/>
-        </p:nvSpPr>
-        <p:spPr>
-          <a:xfrm>
-            <a:off x="8001000" y="2057400"/>
-            <a:ext cx="3703320" cy="1188720"/>
-          </a:xfrm>
-          <a:prstGeom prst="rect">
-            <a:avLst/>
-          </a:prstGeom>
-          <a:noFill/>
-        </p:spPr>
-        <p:txBody>
-          <a:bodyPr wrap="square" lIns="0" rIns="0" tIns="0" bIns="0" anchor="t">
-            <a:spAutoFit/>
-          </a:bodyPr>
-          <a:lstStyle/>
-          <a:p>
-            <a:pPr algn="l">
-              <a:spcAft>
-                <a:spcPts val="0"/>
-              </a:spcAft>
-            </a:pPr>
-            <a:r>
-              <a:rPr sz="1300" b="0" i="0">
-                <a:solidFill>
-                  <a:srgbClr val="1E2528"/>
-                </a:solidFill>
-                <a:latin typeface="Calibri"/>
-              </a:rPr>
-              <a:t>of the Malaba road's truck delay lies within 10 km of the railway the SGR follows; on the other roads, 16% or less.</a:t>
-            </a:r>
-          </a:p>
-        </p:txBody>
-      </p:sp>
-      <p:sp>
-        <p:nvSpPr>
-          <p:cNvPr id="7" name="TextBox 6"/>
-          <p:cNvSpPr txBox="1"/>
-          <p:nvPr/>
-        </p:nvSpPr>
-        <p:spPr>
-          <a:xfrm>
-            <a:off x="6400800" y="3337560"/>
-            <a:ext cx="1463040" cy="640080"/>
-          </a:xfrm>
-          <a:prstGeom prst="rect">
-            <a:avLst/>
-          </a:prstGeom>
-          <a:noFill/>
-        </p:spPr>
-        <p:txBody>
-          <a:bodyPr wrap="square" lIns="0" rIns="0" tIns="0" bIns="0" anchor="t">
-            <a:spAutoFit/>
-          </a:bodyPr>
-          <a:lstStyle/>
-          <a:p>
-            <a:pPr algn="l">
-              <a:spcAft>
-                <a:spcPts val="0"/>
-              </a:spcAft>
-            </a:pPr>
-            <a:r>
-              <a:rPr sz="2600" b="1" i="0">
-                <a:solidFill>
-                  <a:srgbClr val="C4532D"/>
-                </a:solidFill>
-                <a:latin typeface="Cambria"/>
-              </a:rPr>
-              <a:t>17 h</a:t>
-            </a:r>
-          </a:p>
-        </p:txBody>
-      </p:sp>
-      <p:sp>
-        <p:nvSpPr>
-          <p:cNvPr id="8" name="TextBox 7"/>
-          <p:cNvSpPr txBox="1"/>
-          <p:nvPr/>
-        </p:nvSpPr>
-        <p:spPr>
-          <a:xfrm>
-            <a:off x="8001000" y="3383280"/>
-            <a:ext cx="3703320" cy="1188720"/>
-          </a:xfrm>
-          <a:prstGeom prst="rect">
-            <a:avLst/>
-          </a:prstGeom>
-          <a:noFill/>
-        </p:spPr>
-        <p:txBody>
-          <a:bodyPr wrap="square" lIns="0" rIns="0" tIns="0" bIns="0" anchor="t">
-            <a:spAutoFit/>
-          </a:bodyPr>
-          <a:lstStyle/>
-          <a:p>
-            <a:pPr algn="l">
-              <a:spcAft>
-                <a:spcPts val="0"/>
-              </a:spcAft>
-            </a:pPr>
-            <a:r>
-              <a:rPr sz="1300" b="0" i="0">
-                <a:solidFill>
-                  <a:srgbClr val="1E2528"/>
-                </a:solidFill>
-                <a:latin typeface="Calibri"/>
-              </a:rPr>
-              <a:t>door to door by rail for domestic freight on the eastern line, against about 5 h by truck: terminals, not line-haul, set the time.</a:t>
-            </a:r>
-          </a:p>
-        </p:txBody>
-      </p:sp>
-      <p:sp>
-        <p:nvSpPr>
-          <p:cNvPr id="9" name="TextBox 8"/>
-          <p:cNvSpPr txBox="1"/>
-          <p:nvPr/>
-        </p:nvSpPr>
-        <p:spPr>
-          <a:xfrm>
-            <a:off x="6400800" y="4663440"/>
-            <a:ext cx="1463040" cy="640080"/>
-          </a:xfrm>
-          <a:prstGeom prst="rect">
-            <a:avLst/>
-          </a:prstGeom>
-          <a:noFill/>
-        </p:spPr>
-        <p:txBody>
-          <a:bodyPr wrap="square" lIns="0" rIns="0" tIns="0" bIns="0" anchor="t">
-            <a:spAutoFit/>
-          </a:bodyPr>
-          <a:lstStyle/>
-          <a:p>
-            <a:pPr algn="l">
-              <a:spcAft>
-                <a:spcPts val="0"/>
-              </a:spcAft>
-            </a:pPr>
-            <a:r>
-              <a:rPr sz="2600" b="1" i="0">
-                <a:solidFill>
-                  <a:srgbClr val="C4532D"/>
-                </a:solidFill>
-                <a:latin typeface="Cambria"/>
-              </a:rPr>
-              <a:t>≤ 0.09</a:t>
-            </a:r>
-          </a:p>
-        </p:txBody>
-      </p:sp>
-      <p:sp>
-        <p:nvSpPr>
-          <p:cNvPr id="10" name="TextBox 9"/>
-          <p:cNvSpPr txBox="1"/>
-          <p:nvPr/>
-        </p:nvSpPr>
-        <p:spPr>
-          <a:xfrm>
-            <a:off x="8001000" y="4709160"/>
-            <a:ext cx="3703320" cy="1188720"/>
-          </a:xfrm>
-          <a:prstGeom prst="rect">
-            <a:avLst/>
-          </a:prstGeom>
-          <a:noFill/>
-        </p:spPr>
-        <p:txBody>
-          <a:bodyPr wrap="square" lIns="0" rIns="0" tIns="0" bIns="0" anchor="t">
-            <a:spAutoFit/>
-          </a:bodyPr>
-          <a:lstStyle/>
-          <a:p>
-            <a:pPr algn="l">
-              <a:spcAft>
-                <a:spcPts val="0"/>
-              </a:spcAft>
-            </a:pPr>
-            <a:r>
-              <a:rPr sz="1300" b="0" i="0">
-                <a:solidFill>
-                  <a:srgbClr val="1E2528"/>
-                </a:solidFill>
-                <a:latin typeface="Calibri"/>
-              </a:rPr>
-              <a:t>benefit/cost for any of the 5 lines on Ugandan freight alone; through traffic from Mombasa needs about 93 Mt a year to break even.</a:t>
-            </a:r>
-          </a:p>
-        </p:txBody>
-      </p:sp>
-      <p:sp>
-        <p:nvSpPr>
-          <p:cNvPr id="11" name="TextBox 10"/>
-          <p:cNvSpPr txBox="1"/>
-          <p:nvPr/>
-        </p:nvSpPr>
-        <p:spPr>
-          <a:xfrm>
-            <a:off x="6400800" y="5897880"/>
-            <a:ext cx="5303520" cy="548640"/>
-          </a:xfrm>
-          <a:prstGeom prst="rect">
-            <a:avLst/>
-          </a:prstGeom>
-          <a:noFill/>
-        </p:spPr>
-        <p:txBody>
-          <a:bodyPr wrap="square" lIns="0" rIns="0" tIns="0" bIns="0" anchor="t">
-            <a:spAutoFit/>
-          </a:bodyPr>
-          <a:lstStyle/>
-          <a:p>
-            <a:pPr algn="l">
-              <a:spcAft>
-                <a:spcPts val="0"/>
-              </a:spcAft>
-            </a:pPr>
-            <a:r>
-              <a:rPr sz="1200" b="0" i="1">
-                <a:solidFill>
-                  <a:srgbClr val="5B6770"/>
-                </a:solidFill>
-                <a:latin typeface="Calibri"/>
-              </a:rPr>
-              <a:t>Counting only freight costs and CO2 from today's Ugandan traffic: transit growth, passengers and congestion relief carry the case.</a:t>
+              <a:t>Daily Monitor (23 Dec 2018), black spots named by Uganda Police traffic officers; outputs/black_spots_*.csv (script 25). Name matching misses forest and swamp spots.</a:t>
             </a:r>
           </a:p>
         </p:txBody>
@@ -11697,16 +11776,40 @@
         <p:nvPr/>
       </p:nvGrpSpPr>
       <p:grpSpPr/>
-      <p:sp>
-        <p:nvSpPr>
-          <p:cNvPr id="2" name="TextBox 1"/>
-          <p:cNvSpPr txBox="1"/>
-          <p:nvPr/>
-        </p:nvSpPr>
-        <p:spPr>
-          <a:xfrm>
-            <a:off x="548640" y="411480"/>
-            <a:ext cx="11064240" cy="731520"/>
+      <p:pic>
+        <p:nvPicPr>
+          <p:cNvPr id="2" name="Picture 1" descr="f12.png"/>
+          <p:cNvPicPr>
+            <a:picLocks noChangeAspect="1"/>
+          </p:cNvPicPr>
+          <p:nvPr/>
+        </p:nvPicPr>
+        <p:blipFill>
+          <a:blip r:embed="rId2"/>
+          <a:stretch>
+            <a:fillRect/>
+          </a:stretch>
+        </p:blipFill>
+        <p:spPr>
+          <a:xfrm>
+            <a:off x="365760" y="320040"/>
+            <a:ext cx="5896644" cy="6217920"/>
+          </a:xfrm>
+          <a:prstGeom prst="rect">
+            <a:avLst/>
+          </a:prstGeom>
+        </p:spPr>
+      </p:pic>
+      <p:sp>
+        <p:nvSpPr>
+          <p:cNvPr id="3" name="TextBox 2"/>
+          <p:cNvSpPr txBox="1"/>
+          <p:nvPr/>
+        </p:nvSpPr>
+        <p:spPr>
+          <a:xfrm>
+            <a:off x="6400800" y="411480"/>
+            <a:ext cx="5303520" cy="1188720"/>
           </a:xfrm>
           <a:prstGeom prst="rect">
             <a:avLst/>
@@ -11725,27 +11828,27 @@
               </a:spcAft>
             </a:pPr>
             <a:r>
-              <a:rPr sz="3400" b="1" i="0">
+              <a:rPr sz="3000" b="1" i="0">
                 <a:solidFill>
                   <a:srgbClr val="1E2528"/>
                 </a:solidFill>
                 <a:latin typeface="Cambria"/>
               </a:rPr>
-              <a:t>Discussion</a:t>
-            </a:r>
-          </a:p>
-        </p:txBody>
-      </p:sp>
-      <p:sp>
-        <p:nvSpPr>
-          <p:cNvPr id="3" name="TextBox 2"/>
-          <p:cNvSpPr txBox="1"/>
-          <p:nvPr/>
-        </p:nvSpPr>
-        <p:spPr>
-          <a:xfrm>
-            <a:off x="548640" y="1115568"/>
-            <a:ext cx="11064240" cy="457200"/>
+              <a:t>Rail along the bottlenecks</a:t>
+            </a:r>
+          </a:p>
+        </p:txBody>
+      </p:sp>
+      <p:sp>
+        <p:nvSpPr>
+          <p:cNvPr id="4" name="TextBox 3"/>
+          <p:cNvSpPr txBox="1"/>
+          <p:nvPr/>
+        </p:nvSpPr>
+        <p:spPr>
+          <a:xfrm>
+            <a:off x="6400800" y="1234440"/>
+            <a:ext cx="5303520" cy="548640"/>
           </a:xfrm>
           <a:prstGeom prst="rect">
             <a:avLst/>
@@ -11764,126 +11867,105 @@
               </a:spcAft>
             </a:pPr>
             <a:r>
-              <a:rPr sz="1600" b="0" i="0">
+              <a:rPr sz="1400" b="0" i="0">
                 <a:solidFill>
                   <a:srgbClr val="5B6770"/>
                 </a:solidFill>
                 <a:latin typeface="Calibri"/>
               </a:rPr>
-              <a:t>What the results suggest for corridor policy</a:t>
-            </a:r>
-          </a:p>
-        </p:txBody>
-      </p:sp>
-      <p:sp>
-        <p:nvSpPr>
-          <p:cNvPr id="4" name="Rounded Rectangle 3"/>
-          <p:cNvSpPr/>
-          <p:nvPr/>
-        </p:nvSpPr>
-        <p:spPr>
-          <a:xfrm>
-            <a:off x="548640" y="1783080"/>
-            <a:ext cx="5440680" cy="2103120"/>
-          </a:xfrm>
-          <a:prstGeom prst="roundRect">
-            <a:avLst>
-              <a:gd name="adj" fmla="val 6000"/>
-            </a:avLst>
-          </a:prstGeom>
-          <a:solidFill>
-            <a:srgbClr val="EEF2F0"/>
-          </a:solidFill>
-          <a:ln>
-            <a:noFill/>
-          </a:ln>
-          <a:effectLst/>
-        </p:spPr>
-        <p:style>
-          <a:lnRef idx="1">
-            <a:schemeClr val="accent1"/>
-          </a:lnRef>
-          <a:fillRef idx="3">
-            <a:schemeClr val="accent1"/>
-          </a:fillRef>
-          <a:effectRef idx="2">
-            <a:schemeClr val="accent1"/>
-          </a:effectRef>
-          <a:fontRef idx="minor">
-            <a:schemeClr val="lt1"/>
-          </a:fontRef>
-        </p:style>
-        <p:txBody>
-          <a:bodyPr rtlCol="0" anchor="ctr"/>
-          <a:lstStyle/>
-          <a:p>
-            <a:pPr algn="ctr"/>
-          </a:p>
-        </p:txBody>
-      </p:sp>
-      <p:sp>
-        <p:nvSpPr>
-          <p:cNvPr id="5" name="Oval 4"/>
-          <p:cNvSpPr/>
-          <p:nvPr/>
-        </p:nvSpPr>
-        <p:spPr>
-          <a:xfrm>
-            <a:off x="822959" y="2057400"/>
-            <a:ext cx="457200" cy="457200"/>
-          </a:xfrm>
-          <a:prstGeom prst="ellipse">
-            <a:avLst/>
-          </a:prstGeom>
-          <a:solidFill>
-            <a:srgbClr val="C4532D"/>
-          </a:solidFill>
-          <a:ln>
-            <a:noFill/>
-          </a:ln>
-          <a:effectLst/>
-        </p:spPr>
-        <p:style>
-          <a:lnRef idx="1">
-            <a:schemeClr val="accent1"/>
-          </a:lnRef>
-          <a:fillRef idx="3">
-            <a:schemeClr val="accent1"/>
-          </a:fillRef>
-          <a:effectRef idx="2">
-            <a:schemeClr val="accent1"/>
-          </a:effectRef>
-          <a:fontRef idx="minor">
-            <a:schemeClr val="lt1"/>
-          </a:fontRef>
-        </p:style>
-        <p:txBody>
-          <a:bodyPr rtlCol="0" anchor="ctr" lIns="0" rIns="0" tIns="0" bIns="0"/>
-          <a:lstStyle/>
-          <a:p>
-            <a:pPr algn="ctr"/>
-            <a:r>
-              <a:rPr sz="1500" b="1">
-                <a:solidFill>
-                  <a:srgbClr val="FFFFFF"/>
+              <a:t>Least-cost screening alignments and the existing metre-gauge railway</a:t>
+            </a:r>
+          </a:p>
+        </p:txBody>
+      </p:sp>
+      <p:sp>
+        <p:nvSpPr>
+          <p:cNvPr id="5" name="TextBox 4"/>
+          <p:cNvSpPr txBox="1"/>
+          <p:nvPr/>
+        </p:nvSpPr>
+        <p:spPr>
+          <a:xfrm>
+            <a:off x="6400800" y="2011680"/>
+            <a:ext cx="1463040" cy="640080"/>
+          </a:xfrm>
+          <a:prstGeom prst="rect">
+            <a:avLst/>
+          </a:prstGeom>
+          <a:noFill/>
+        </p:spPr>
+        <p:txBody>
+          <a:bodyPr wrap="square" lIns="0" rIns="0" tIns="0" bIns="0" anchor="t">
+            <a:spAutoFit/>
+          </a:bodyPr>
+          <a:lstStyle/>
+          <a:p>
+            <a:pPr algn="l">
+              <a:spcAft>
+                <a:spcPts val="0"/>
+              </a:spcAft>
+            </a:pPr>
+            <a:r>
+              <a:rPr sz="2600" b="1" i="0">
+                <a:solidFill>
+                  <a:srgbClr val="C4532D"/>
+                </a:solidFill>
+                <a:latin typeface="Cambria"/>
+              </a:rPr>
+              <a:t>81%</a:t>
+            </a:r>
+          </a:p>
+        </p:txBody>
+      </p:sp>
+      <p:sp>
+        <p:nvSpPr>
+          <p:cNvPr id="6" name="TextBox 5"/>
+          <p:cNvSpPr txBox="1"/>
+          <p:nvPr/>
+        </p:nvSpPr>
+        <p:spPr>
+          <a:xfrm>
+            <a:off x="8001000" y="2057400"/>
+            <a:ext cx="3703320" cy="1188720"/>
+          </a:xfrm>
+          <a:prstGeom prst="rect">
+            <a:avLst/>
+          </a:prstGeom>
+          <a:noFill/>
+        </p:spPr>
+        <p:txBody>
+          <a:bodyPr wrap="square" lIns="0" rIns="0" tIns="0" bIns="0" anchor="t">
+            <a:spAutoFit/>
+          </a:bodyPr>
+          <a:lstStyle/>
+          <a:p>
+            <a:pPr algn="l">
+              <a:spcAft>
+                <a:spcPts val="0"/>
+              </a:spcAft>
+            </a:pPr>
+            <a:r>
+              <a:rPr sz="1300" b="0" i="0">
+                <a:solidFill>
+                  <a:srgbClr val="1E2528"/>
                 </a:solidFill>
                 <a:latin typeface="Calibri"/>
               </a:rPr>
-              <a:t>1</a:t>
-            </a:r>
-          </a:p>
-        </p:txBody>
-      </p:sp>
-      <p:sp>
-        <p:nvSpPr>
-          <p:cNvPr id="6" name="TextBox 5"/>
-          <p:cNvSpPr txBox="1"/>
-          <p:nvPr/>
-        </p:nvSpPr>
-        <p:spPr>
-          <a:xfrm>
-            <a:off x="1463040" y="2084831"/>
-            <a:ext cx="4297680" cy="411480"/>
+              <a:t>of the Malaba road's truck delay lies within 10 km of the railway the SGR follows; on the other roads, 16% or less.</a:t>
+            </a:r>
+          </a:p>
+        </p:txBody>
+      </p:sp>
+      <p:sp>
+        <p:nvSpPr>
+          <p:cNvPr id="7" name="TextBox 6"/>
+          <p:cNvSpPr txBox="1"/>
+          <p:nvPr/>
+        </p:nvSpPr>
+        <p:spPr>
+          <a:xfrm>
+            <a:off x="6400800" y="3337560"/>
+            <a:ext cx="1463040" cy="640080"/>
           </a:xfrm>
           <a:prstGeom prst="rect">
             <a:avLst/>
@@ -11902,27 +11984,105 @@
               </a:spcAft>
             </a:pPr>
             <a:r>
-              <a:rPr sz="1900" b="1" i="0">
+              <a:rPr sz="2600" b="1" i="0">
+                <a:solidFill>
+                  <a:srgbClr val="C4532D"/>
+                </a:solidFill>
+                <a:latin typeface="Cambria"/>
+              </a:rPr>
+              <a:t>17 h</a:t>
+            </a:r>
+          </a:p>
+        </p:txBody>
+      </p:sp>
+      <p:sp>
+        <p:nvSpPr>
+          <p:cNvPr id="8" name="TextBox 7"/>
+          <p:cNvSpPr txBox="1"/>
+          <p:nvPr/>
+        </p:nvSpPr>
+        <p:spPr>
+          <a:xfrm>
+            <a:off x="8001000" y="3383280"/>
+            <a:ext cx="3703320" cy="1188720"/>
+          </a:xfrm>
+          <a:prstGeom prst="rect">
+            <a:avLst/>
+          </a:prstGeom>
+          <a:noFill/>
+        </p:spPr>
+        <p:txBody>
+          <a:bodyPr wrap="square" lIns="0" rIns="0" tIns="0" bIns="0" anchor="t">
+            <a:spAutoFit/>
+          </a:bodyPr>
+          <a:lstStyle/>
+          <a:p>
+            <a:pPr algn="l">
+              <a:spcAft>
+                <a:spcPts val="0"/>
+              </a:spcAft>
+            </a:pPr>
+            <a:r>
+              <a:rPr sz="1300" b="0" i="0">
                 <a:solidFill>
                   <a:srgbClr val="1E2528"/>
                 </a:solidFill>
+                <a:latin typeface="Calibri"/>
+              </a:rPr>
+              <a:t>door to door by rail for domestic freight on the eastern line, against about 5 h by truck: terminals, not line-haul, set the time.</a:t>
+            </a:r>
+          </a:p>
+        </p:txBody>
+      </p:sp>
+      <p:sp>
+        <p:nvSpPr>
+          <p:cNvPr id="9" name="TextBox 8"/>
+          <p:cNvSpPr txBox="1"/>
+          <p:nvPr/>
+        </p:nvSpPr>
+        <p:spPr>
+          <a:xfrm>
+            <a:off x="6400800" y="4663440"/>
+            <a:ext cx="1463040" cy="640080"/>
+          </a:xfrm>
+          <a:prstGeom prst="rect">
+            <a:avLst/>
+          </a:prstGeom>
+          <a:noFill/>
+        </p:spPr>
+        <p:txBody>
+          <a:bodyPr wrap="square" lIns="0" rIns="0" tIns="0" bIns="0" anchor="t">
+            <a:spAutoFit/>
+          </a:bodyPr>
+          <a:lstStyle/>
+          <a:p>
+            <a:pPr algn="l">
+              <a:spcAft>
+                <a:spcPts val="0"/>
+              </a:spcAft>
+            </a:pPr>
+            <a:r>
+              <a:rPr sz="2600" b="1" i="0">
+                <a:solidFill>
+                  <a:srgbClr val="C4532D"/>
+                </a:solidFill>
                 <a:latin typeface="Cambria"/>
               </a:rPr>
-              <a:t>Settlement is the chronic problem</a:t>
-            </a:r>
-          </a:p>
-        </p:txBody>
-      </p:sp>
-      <p:sp>
-        <p:nvSpPr>
-          <p:cNvPr id="7" name="TextBox 6"/>
-          <p:cNvSpPr txBox="1"/>
-          <p:nvPr/>
-        </p:nvSpPr>
-        <p:spPr>
-          <a:xfrm>
-            <a:off x="1463040" y="2560320"/>
-            <a:ext cx="4297680" cy="1280160"/>
+              <a:t>≤ 0.09</a:t>
+            </a:r>
+          </a:p>
+        </p:txBody>
+      </p:sp>
+      <p:sp>
+        <p:nvSpPr>
+          <p:cNvPr id="10" name="TextBox 9"/>
+          <p:cNvSpPr txBox="1"/>
+          <p:nvPr/>
+        </p:nvSpPr>
+        <p:spPr>
+          <a:xfrm>
+            <a:off x="8001000" y="4709160"/>
+            <a:ext cx="3703320" cy="1188720"/>
           </a:xfrm>
           <a:prstGeom prst="rect">
             <a:avLst/>
@@ -11941,544 +12101,52 @@
               </a:spcAft>
             </a:pPr>
             <a:r>
-              <a:rPr sz="1400" b="0" i="0">
+              <a:rPr sz="1300" b="0" i="0">
+                <a:solidFill>
+                  <a:srgbClr val="1E2528"/>
+                </a:solidFill>
+                <a:latin typeface="Calibri"/>
+              </a:rPr>
+              <a:t>benefit/cost for any of the 5 lines on Ugandan freight alone; through traffic from Mombasa needs about 93 Mt a year to break even.</a:t>
+            </a:r>
+          </a:p>
+        </p:txBody>
+      </p:sp>
+      <p:sp>
+        <p:nvSpPr>
+          <p:cNvPr id="11" name="TextBox 10"/>
+          <p:cNvSpPr txBox="1"/>
+          <p:nvPr/>
+        </p:nvSpPr>
+        <p:spPr>
+          <a:xfrm>
+            <a:off x="6400800" y="5897880"/>
+            <a:ext cx="5303520" cy="548640"/>
+          </a:xfrm>
+          <a:prstGeom prst="rect">
+            <a:avLst/>
+          </a:prstGeom>
+          <a:noFill/>
+        </p:spPr>
+        <p:txBody>
+          <a:bodyPr wrap="square" lIns="0" rIns="0" tIns="0" bIns="0" anchor="t">
+            <a:spAutoFit/>
+          </a:bodyPr>
+          <a:lstStyle/>
+          <a:p>
+            <a:pPr algn="l">
+              <a:spcAft>
+                <a:spcPts val="0"/>
+              </a:spcAft>
+            </a:pPr>
+            <a:r>
+              <a:rPr sz="1200" b="0" i="1">
                 <a:solidFill>
                   <a:srgbClr val="5B6770"/>
                 </a:solidFill>
                 <a:latin typeface="Calibri"/>
               </a:rPr>
-              <a:t>Roadside activity costs the most time for cars on every road, is growing fastest where it is newest, and is where police place their crash black spots. Access management and service roads address the cause.</a:t>
-            </a:r>
-          </a:p>
-        </p:txBody>
-      </p:sp>
-      <p:sp>
-        <p:nvSpPr>
-          <p:cNvPr id="8" name="Rounded Rectangle 7"/>
-          <p:cNvSpPr/>
-          <p:nvPr/>
-        </p:nvSpPr>
-        <p:spPr>
-          <a:xfrm>
-            <a:off x="6172200" y="1783080"/>
-            <a:ext cx="5440680" cy="2103120"/>
-          </a:xfrm>
-          <a:prstGeom prst="roundRect">
-            <a:avLst>
-              <a:gd name="adj" fmla="val 6000"/>
-            </a:avLst>
-          </a:prstGeom>
-          <a:solidFill>
-            <a:srgbClr val="EEF2F0"/>
-          </a:solidFill>
-          <a:ln>
-            <a:noFill/>
-          </a:ln>
-          <a:effectLst/>
-        </p:spPr>
-        <p:style>
-          <a:lnRef idx="1">
-            <a:schemeClr val="accent1"/>
-          </a:lnRef>
-          <a:fillRef idx="3">
-            <a:schemeClr val="accent1"/>
-          </a:fillRef>
-          <a:effectRef idx="2">
-            <a:schemeClr val="accent1"/>
-          </a:effectRef>
-          <a:fontRef idx="minor">
-            <a:schemeClr val="lt1"/>
-          </a:fontRef>
-        </p:style>
-        <p:txBody>
-          <a:bodyPr rtlCol="0" anchor="ctr"/>
-          <a:lstStyle/>
-          <a:p>
-            <a:pPr algn="ctr"/>
-          </a:p>
-        </p:txBody>
-      </p:sp>
-      <p:sp>
-        <p:nvSpPr>
-          <p:cNvPr id="9" name="Oval 8"/>
-          <p:cNvSpPr/>
-          <p:nvPr/>
-        </p:nvSpPr>
-        <p:spPr>
-          <a:xfrm>
-            <a:off x="6446520" y="2057400"/>
-            <a:ext cx="457200" cy="457200"/>
-          </a:xfrm>
-          <a:prstGeom prst="ellipse">
-            <a:avLst/>
-          </a:prstGeom>
-          <a:solidFill>
-            <a:srgbClr val="17252A"/>
-          </a:solidFill>
-          <a:ln>
-            <a:noFill/>
-          </a:ln>
-          <a:effectLst/>
-        </p:spPr>
-        <p:style>
-          <a:lnRef idx="1">
-            <a:schemeClr val="accent1"/>
-          </a:lnRef>
-          <a:fillRef idx="3">
-            <a:schemeClr val="accent1"/>
-          </a:fillRef>
-          <a:effectRef idx="2">
-            <a:schemeClr val="accent1"/>
-          </a:effectRef>
-          <a:fontRef idx="minor">
-            <a:schemeClr val="lt1"/>
-          </a:fontRef>
-        </p:style>
-        <p:txBody>
-          <a:bodyPr rtlCol="0" anchor="ctr" lIns="0" rIns="0" tIns="0" bIns="0"/>
-          <a:lstStyle/>
-          <a:p>
-            <a:pPr algn="ctr"/>
-            <a:r>
-              <a:rPr sz="1500" b="1">
-                <a:solidFill>
-                  <a:srgbClr val="FFFFFF"/>
-                </a:solidFill>
-                <a:latin typeface="Calibri"/>
-              </a:rPr>
-              <a:t>2</a:t>
-            </a:r>
-          </a:p>
-        </p:txBody>
-      </p:sp>
-      <p:sp>
-        <p:nvSpPr>
-          <p:cNvPr id="10" name="TextBox 9"/>
-          <p:cNvSpPr txBox="1"/>
-          <p:nvPr/>
-        </p:nvSpPr>
-        <p:spPr>
-          <a:xfrm>
-            <a:off x="7086600" y="2084831"/>
-            <a:ext cx="4297680" cy="411480"/>
-          </a:xfrm>
-          <a:prstGeom prst="rect">
-            <a:avLst/>
-          </a:prstGeom>
-          <a:noFill/>
-        </p:spPr>
-        <p:txBody>
-          <a:bodyPr wrap="square" lIns="0" rIns="0" tIns="0" bIns="0" anchor="t">
-            <a:spAutoFit/>
-          </a:bodyPr>
-          <a:lstStyle/>
-          <a:p>
-            <a:pPr algn="l">
-              <a:spcAft>
-                <a:spcPts val="0"/>
-              </a:spcAft>
-            </a:pPr>
-            <a:r>
-              <a:rPr sz="1900" b="1" i="0">
-                <a:solidFill>
-                  <a:srgbClr val="1E2528"/>
-                </a:solidFill>
-                <a:latin typeface="Cambria"/>
-              </a:rPr>
-              <a:t>Controls are the cheap wins</a:t>
-            </a:r>
-          </a:p>
-        </p:txBody>
-      </p:sp>
-      <p:sp>
-        <p:nvSpPr>
-          <p:cNvPr id="11" name="TextBox 10"/>
-          <p:cNvSpPr txBox="1"/>
-          <p:nvPr/>
-        </p:nvSpPr>
-        <p:spPr>
-          <a:xfrm>
-            <a:off x="7086600" y="2560320"/>
-            <a:ext cx="4297680" cy="1280160"/>
-          </a:xfrm>
-          <a:prstGeom prst="rect">
-            <a:avLst/>
-          </a:prstGeom>
-          <a:noFill/>
-        </p:spPr>
-        <p:txBody>
-          <a:bodyPr wrap="square" lIns="0" rIns="0" tIns="0" bIns="0" anchor="t">
-            <a:spAutoFit/>
-          </a:bodyPr>
-          <a:lstStyle/>
-          <a:p>
-            <a:pPr algn="l">
-              <a:spcAft>
-                <a:spcPts val="0"/>
-              </a:spcAft>
-            </a:pPr>
-            <a:r>
-              <a:rPr sz="1400" b="0" i="0">
-                <a:solidFill>
-                  <a:srgbClr val="5B6770"/>
-                </a:solidFill>
-                <a:latin typeface="Calibri"/>
-              </a:rPr>
-              <a:t>Weighbridges and police posts produce the worst single stretches. Weigh-in-motion and ending police stops save more per trip than bypasses in light traffic, and cut stop-go fuel.</a:t>
-            </a:r>
-          </a:p>
-        </p:txBody>
-      </p:sp>
-      <p:sp>
-        <p:nvSpPr>
-          <p:cNvPr id="12" name="Rounded Rectangle 11"/>
-          <p:cNvSpPr/>
-          <p:nvPr/>
-        </p:nvSpPr>
-        <p:spPr>
-          <a:xfrm>
-            <a:off x="548640" y="4069080"/>
-            <a:ext cx="5440680" cy="2103120"/>
-          </a:xfrm>
-          <a:prstGeom prst="roundRect">
-            <a:avLst>
-              <a:gd name="adj" fmla="val 6000"/>
-            </a:avLst>
-          </a:prstGeom>
-          <a:solidFill>
-            <a:srgbClr val="EEF2F0"/>
-          </a:solidFill>
-          <a:ln>
-            <a:noFill/>
-          </a:ln>
-          <a:effectLst/>
-        </p:spPr>
-        <p:style>
-          <a:lnRef idx="1">
-            <a:schemeClr val="accent1"/>
-          </a:lnRef>
-          <a:fillRef idx="3">
-            <a:schemeClr val="accent1"/>
-          </a:fillRef>
-          <a:effectRef idx="2">
-            <a:schemeClr val="accent1"/>
-          </a:effectRef>
-          <a:fontRef idx="minor">
-            <a:schemeClr val="lt1"/>
-          </a:fontRef>
-        </p:style>
-        <p:txBody>
-          <a:bodyPr rtlCol="0" anchor="ctr"/>
-          <a:lstStyle/>
-          <a:p>
-            <a:pPr algn="ctr"/>
-          </a:p>
-        </p:txBody>
-      </p:sp>
-      <p:sp>
-        <p:nvSpPr>
-          <p:cNvPr id="13" name="Oval 12"/>
-          <p:cNvSpPr/>
-          <p:nvPr/>
-        </p:nvSpPr>
-        <p:spPr>
-          <a:xfrm>
-            <a:off x="822959" y="4343400"/>
-            <a:ext cx="457200" cy="457200"/>
-          </a:xfrm>
-          <a:prstGeom prst="ellipse">
-            <a:avLst/>
-          </a:prstGeom>
-          <a:solidFill>
-            <a:srgbClr val="3A7D5C"/>
-          </a:solidFill>
-          <a:ln>
-            <a:noFill/>
-          </a:ln>
-          <a:effectLst/>
-        </p:spPr>
-        <p:style>
-          <a:lnRef idx="1">
-            <a:schemeClr val="accent1"/>
-          </a:lnRef>
-          <a:fillRef idx="3">
-            <a:schemeClr val="accent1"/>
-          </a:fillRef>
-          <a:effectRef idx="2">
-            <a:schemeClr val="accent1"/>
-          </a:effectRef>
-          <a:fontRef idx="minor">
-            <a:schemeClr val="lt1"/>
-          </a:fontRef>
-        </p:style>
-        <p:txBody>
-          <a:bodyPr rtlCol="0" anchor="ctr" lIns="0" rIns="0" tIns="0" bIns="0"/>
-          <a:lstStyle/>
-          <a:p>
-            <a:pPr algn="ctr"/>
-            <a:r>
-              <a:rPr sz="1500" b="1">
-                <a:solidFill>
-                  <a:srgbClr val="FFFFFF"/>
-                </a:solidFill>
-                <a:latin typeface="Calibri"/>
-              </a:rPr>
-              <a:t>3</a:t>
-            </a:r>
-          </a:p>
-        </p:txBody>
-      </p:sp>
-      <p:sp>
-        <p:nvSpPr>
-          <p:cNvPr id="14" name="TextBox 13"/>
-          <p:cNvSpPr txBox="1"/>
-          <p:nvPr/>
-        </p:nvSpPr>
-        <p:spPr>
-          <a:xfrm>
-            <a:off x="1463040" y="4370832"/>
-            <a:ext cx="4297680" cy="411480"/>
-          </a:xfrm>
-          <a:prstGeom prst="rect">
-            <a:avLst/>
-          </a:prstGeom>
-          <a:noFill/>
-        </p:spPr>
-        <p:txBody>
-          <a:bodyPr wrap="square" lIns="0" rIns="0" tIns="0" bIns="0" anchor="t">
-            <a:spAutoFit/>
-          </a:bodyPr>
-          <a:lstStyle/>
-          <a:p>
-            <a:pPr algn="l">
-              <a:spcAft>
-                <a:spcPts val="0"/>
-              </a:spcAft>
-            </a:pPr>
-            <a:r>
-              <a:rPr sz="1900" b="1" i="0">
-                <a:solidFill>
-                  <a:srgbClr val="1E2528"/>
-                </a:solidFill>
-                <a:latin typeface="Cambria"/>
-              </a:rPr>
-              <a:t>Stopped time dwarfs driving time</a:t>
-            </a:r>
-          </a:p>
-        </p:txBody>
-      </p:sp>
-      <p:sp>
-        <p:nvSpPr>
-          <p:cNvPr id="15" name="TextBox 14"/>
-          <p:cNvSpPr txBox="1"/>
-          <p:nvPr/>
-        </p:nvSpPr>
-        <p:spPr>
-          <a:xfrm>
-            <a:off x="1463040" y="4846320"/>
-            <a:ext cx="4297680" cy="1280160"/>
-          </a:xfrm>
-          <a:prstGeom prst="rect">
-            <a:avLst/>
-          </a:prstGeom>
-          <a:noFill/>
-        </p:spPr>
-        <p:txBody>
-          <a:bodyPr wrap="square" lIns="0" rIns="0" tIns="0" bIns="0" anchor="t">
-            <a:spAutoFit/>
-          </a:bodyPr>
-          <a:lstStyle/>
-          <a:p>
-            <a:pPr algn="l">
-              <a:spcAft>
-                <a:spcPts val="0"/>
-              </a:spcAft>
-            </a:pPr>
-            <a:r>
-              <a:rPr sz="1400" b="0" i="0">
-                <a:solidFill>
-                  <a:srgbClr val="5B6770"/>
-                </a:solidFill>
-                <a:latin typeface="Calibri"/>
-              </a:rPr>
-              <a:t>Trucks take 17–93 h between Kampala and the borders, of which friction is a small share. Rest, border and administrative stops need their own reforms alongside the road.</a:t>
-            </a:r>
-          </a:p>
-        </p:txBody>
-      </p:sp>
-      <p:sp>
-        <p:nvSpPr>
-          <p:cNvPr id="16" name="Rounded Rectangle 15"/>
-          <p:cNvSpPr/>
-          <p:nvPr/>
-        </p:nvSpPr>
-        <p:spPr>
-          <a:xfrm>
-            <a:off x="6172200" y="4069080"/>
-            <a:ext cx="5440680" cy="2103120"/>
-          </a:xfrm>
-          <a:prstGeom prst="roundRect">
-            <a:avLst>
-              <a:gd name="adj" fmla="val 6000"/>
-            </a:avLst>
-          </a:prstGeom>
-          <a:solidFill>
-            <a:srgbClr val="EEF2F0"/>
-          </a:solidFill>
-          <a:ln>
-            <a:noFill/>
-          </a:ln>
-          <a:effectLst/>
-        </p:spPr>
-        <p:style>
-          <a:lnRef idx="1">
-            <a:schemeClr val="accent1"/>
-          </a:lnRef>
-          <a:fillRef idx="3">
-            <a:schemeClr val="accent1"/>
-          </a:fillRef>
-          <a:effectRef idx="2">
-            <a:schemeClr val="accent1"/>
-          </a:effectRef>
-          <a:fontRef idx="minor">
-            <a:schemeClr val="lt1"/>
-          </a:fontRef>
-        </p:style>
-        <p:txBody>
-          <a:bodyPr rtlCol="0" anchor="ctr"/>
-          <a:lstStyle/>
-          <a:p>
-            <a:pPr algn="ctr"/>
-          </a:p>
-        </p:txBody>
-      </p:sp>
-      <p:sp>
-        <p:nvSpPr>
-          <p:cNvPr id="17" name="Oval 16"/>
-          <p:cNvSpPr/>
-          <p:nvPr/>
-        </p:nvSpPr>
-        <p:spPr>
-          <a:xfrm>
-            <a:off x="6446520" y="4343400"/>
-            <a:ext cx="457200" cy="457200"/>
-          </a:xfrm>
-          <a:prstGeom prst="ellipse">
-            <a:avLst/>
-          </a:prstGeom>
-          <a:solidFill>
-            <a:srgbClr val="D9A441"/>
-          </a:solidFill>
-          <a:ln>
-            <a:noFill/>
-          </a:ln>
-          <a:effectLst/>
-        </p:spPr>
-        <p:style>
-          <a:lnRef idx="1">
-            <a:schemeClr val="accent1"/>
-          </a:lnRef>
-          <a:fillRef idx="3">
-            <a:schemeClr val="accent1"/>
-          </a:fillRef>
-          <a:effectRef idx="2">
-            <a:schemeClr val="accent1"/>
-          </a:effectRef>
-          <a:fontRef idx="minor">
-            <a:schemeClr val="lt1"/>
-          </a:fontRef>
-        </p:style>
-        <p:txBody>
-          <a:bodyPr rtlCol="0" anchor="ctr" lIns="0" rIns="0" tIns="0" bIns="0"/>
-          <a:lstStyle/>
-          <a:p>
-            <a:pPr algn="ctr"/>
-            <a:r>
-              <a:rPr sz="1500" b="1">
-                <a:solidFill>
-                  <a:srgbClr val="FFFFFF"/>
-                </a:solidFill>
-                <a:latin typeface="Calibri"/>
-              </a:rPr>
-              <a:t>4</a:t>
-            </a:r>
-          </a:p>
-        </p:txBody>
-      </p:sp>
-      <p:sp>
-        <p:nvSpPr>
-          <p:cNvPr id="18" name="TextBox 17"/>
-          <p:cNvSpPr txBox="1"/>
-          <p:nvPr/>
-        </p:nvSpPr>
-        <p:spPr>
-          <a:xfrm>
-            <a:off x="7086600" y="4370832"/>
-            <a:ext cx="4297680" cy="411480"/>
-          </a:xfrm>
-          <a:prstGeom prst="rect">
-            <a:avLst/>
-          </a:prstGeom>
-          <a:noFill/>
-        </p:spPr>
-        <p:txBody>
-          <a:bodyPr wrap="square" lIns="0" rIns="0" tIns="0" bIns="0" anchor="t">
-            <a:spAutoFit/>
-          </a:bodyPr>
-          <a:lstStyle/>
-          <a:p>
-            <a:pPr algn="l">
-              <a:spcAft>
-                <a:spcPts val="0"/>
-              </a:spcAft>
-            </a:pPr>
-            <a:r>
-              <a:rPr sz="1900" b="1" i="0">
-                <a:solidFill>
-                  <a:srgbClr val="1E2528"/>
-                </a:solidFill>
-                <a:latin typeface="Cambria"/>
-              </a:rPr>
-              <a:t>Growth outpaces the road</a:t>
-            </a:r>
-          </a:p>
-        </p:txBody>
-      </p:sp>
-      <p:sp>
-        <p:nvSpPr>
-          <p:cNvPr id="19" name="TextBox 18"/>
-          <p:cNvSpPr txBox="1"/>
-          <p:nvPr/>
-        </p:nvSpPr>
-        <p:spPr>
-          <a:xfrm>
-            <a:off x="7086600" y="4846320"/>
-            <a:ext cx="4297680" cy="1280160"/>
-          </a:xfrm>
-          <a:prstGeom prst="rect">
-            <a:avLst/>
-          </a:prstGeom>
-          <a:noFill/>
-        </p:spPr>
-        <p:txBody>
-          <a:bodyPr wrap="square" lIns="0" rIns="0" tIns="0" bIns="0" anchor="t">
-            <a:spAutoFit/>
-          </a:bodyPr>
-          <a:lstStyle/>
-          <a:p>
-            <a:pPr algn="l">
-              <a:spcAft>
-                <a:spcPts val="0"/>
-              </a:spcAft>
-            </a:pPr>
-            <a:r>
-              <a:rPr sz="1400" b="0" i="0">
-                <a:solidFill>
-                  <a:srgbClr val="5B6770"/>
-                </a:solidFill>
-                <a:latin typeface="Calibri"/>
-              </a:rPr>
-              <a:t>At 27–68% in 20 years, today's open road is tomorrow's settlement. Land-use control along the corridors is time-critical.</a:t>
+              <a:t>Counting only freight costs and CO2 from today's Ugandan traffic: transit growth, passengers and congestion relief carry the case.</a:t>
             </a:r>
           </a:p>
         </p:txBody>
@@ -12543,21 +12211,60 @@
                 </a:solidFill>
                 <a:latin typeface="Cambria"/>
               </a:rPr>
-              <a:t>Limitations and next steps</a:t>
-            </a:r>
-          </a:p>
-        </p:txBody>
-      </p:sp>
-      <p:sp>
-        <p:nvSpPr>
-          <p:cNvPr id="3" name="Rounded Rectangle 2"/>
+              <a:t>Discussion</a:t>
+            </a:r>
+          </a:p>
+        </p:txBody>
+      </p:sp>
+      <p:sp>
+        <p:nvSpPr>
+          <p:cNvPr id="3" name="TextBox 2"/>
+          <p:cNvSpPr txBox="1"/>
+          <p:nvPr/>
+        </p:nvSpPr>
+        <p:spPr>
+          <a:xfrm>
+            <a:off x="548640" y="1115568"/>
+            <a:ext cx="11064240" cy="457200"/>
+          </a:xfrm>
+          <a:prstGeom prst="rect">
+            <a:avLst/>
+          </a:prstGeom>
+          <a:noFill/>
+        </p:spPr>
+        <p:txBody>
+          <a:bodyPr wrap="square" lIns="0" rIns="0" tIns="0" bIns="0" anchor="t">
+            <a:spAutoFit/>
+          </a:bodyPr>
+          <a:lstStyle/>
+          <a:p>
+            <a:pPr algn="l">
+              <a:spcAft>
+                <a:spcPts val="0"/>
+              </a:spcAft>
+            </a:pPr>
+            <a:r>
+              <a:rPr sz="1600" b="0" i="0">
+                <a:solidFill>
+                  <a:srgbClr val="5B6770"/>
+                </a:solidFill>
+                <a:latin typeface="Calibri"/>
+              </a:rPr>
+              <a:t>What the results suggest for corridor policy</a:t>
+            </a:r>
+          </a:p>
+        </p:txBody>
+      </p:sp>
+      <p:sp>
+        <p:nvSpPr>
+          <p:cNvPr id="4" name="Rounded Rectangle 3"/>
           <p:cNvSpPr/>
           <p:nvPr/>
         </p:nvSpPr>
         <p:spPr>
           <a:xfrm>
-            <a:off x="548640" y="1417320"/>
-            <a:ext cx="6675120" cy="1051560"/>
+            <a:off x="548640" y="1783080"/>
+            <a:ext cx="5440680" cy="2103120"/>
           </a:xfrm>
           <a:prstGeom prst="roundRect">
             <a:avLst>
@@ -12596,14 +12303,67 @@
       </p:sp>
       <p:sp>
         <p:nvSpPr>
-          <p:cNvPr id="4" name="TextBox 3"/>
-          <p:cNvSpPr txBox="1"/>
-          <p:nvPr/>
-        </p:nvSpPr>
-        <p:spPr>
-          <a:xfrm>
-            <a:off x="822960" y="1554480"/>
-            <a:ext cx="6217920" cy="365760"/>
+          <p:cNvPr id="5" name="Oval 4"/>
+          <p:cNvSpPr/>
+          <p:nvPr/>
+        </p:nvSpPr>
+        <p:spPr>
+          <a:xfrm>
+            <a:off x="822959" y="2057400"/>
+            <a:ext cx="457200" cy="457200"/>
+          </a:xfrm>
+          <a:prstGeom prst="ellipse">
+            <a:avLst/>
+          </a:prstGeom>
+          <a:solidFill>
+            <a:srgbClr val="C4532D"/>
+          </a:solidFill>
+          <a:ln>
+            <a:noFill/>
+          </a:ln>
+          <a:effectLst/>
+        </p:spPr>
+        <p:style>
+          <a:lnRef idx="1">
+            <a:schemeClr val="accent1"/>
+          </a:lnRef>
+          <a:fillRef idx="3">
+            <a:schemeClr val="accent1"/>
+          </a:fillRef>
+          <a:effectRef idx="2">
+            <a:schemeClr val="accent1"/>
+          </a:effectRef>
+          <a:fontRef idx="minor">
+            <a:schemeClr val="lt1"/>
+          </a:fontRef>
+        </p:style>
+        <p:txBody>
+          <a:bodyPr rtlCol="0" anchor="ctr" lIns="0" rIns="0" tIns="0" bIns="0"/>
+          <a:lstStyle/>
+          <a:p>
+            <a:pPr algn="ctr"/>
+            <a:r>
+              <a:rPr sz="1500" b="1">
+                <a:solidFill>
+                  <a:srgbClr val="FFFFFF"/>
+                </a:solidFill>
+                <a:latin typeface="Calibri"/>
+              </a:rPr>
+              <a:t>1</a:t>
+            </a:r>
+          </a:p>
+        </p:txBody>
+      </p:sp>
+      <p:sp>
+        <p:nvSpPr>
+          <p:cNvPr id="6" name="TextBox 5"/>
+          <p:cNvSpPr txBox="1"/>
+          <p:nvPr/>
+        </p:nvSpPr>
+        <p:spPr>
+          <a:xfrm>
+            <a:off x="1463040" y="2084831"/>
+            <a:ext cx="4297680" cy="411480"/>
           </a:xfrm>
           <a:prstGeom prst="rect">
             <a:avLst/>
@@ -12622,66 +12382,66 @@
               </a:spcAft>
             </a:pPr>
             <a:r>
-              <a:rPr sz="1700" b="1" i="0">
+              <a:rPr sz="1900" b="1" i="0">
                 <a:solidFill>
                   <a:srgbClr val="1E2528"/>
                 </a:solidFill>
+                <a:latin typeface="Cambria"/>
+              </a:rPr>
+              <a:t>Settlement is the chronic problem</a:t>
+            </a:r>
+          </a:p>
+        </p:txBody>
+      </p:sp>
+      <p:sp>
+        <p:nvSpPr>
+          <p:cNvPr id="7" name="TextBox 6"/>
+          <p:cNvSpPr txBox="1"/>
+          <p:nvPr/>
+        </p:nvSpPr>
+        <p:spPr>
+          <a:xfrm>
+            <a:off x="1463040" y="2560320"/>
+            <a:ext cx="4297680" cy="1280160"/>
+          </a:xfrm>
+          <a:prstGeom prst="rect">
+            <a:avLst/>
+          </a:prstGeom>
+          <a:noFill/>
+        </p:spPr>
+        <p:txBody>
+          <a:bodyPr wrap="square" lIns="0" rIns="0" tIns="0" bIns="0" anchor="t">
+            <a:spAutoFit/>
+          </a:bodyPr>
+          <a:lstStyle/>
+          <a:p>
+            <a:pPr algn="l">
+              <a:spcAft>
+                <a:spcPts val="0"/>
+              </a:spcAft>
+            </a:pPr>
+            <a:r>
+              <a:rPr sz="1400" b="0" i="0">
+                <a:solidFill>
+                  <a:srgbClr val="5B6770"/>
+                </a:solidFill>
                 <a:latin typeface="Calibri"/>
               </a:rPr>
-              <a:t>Congestion is not modelled</a:t>
-            </a:r>
-          </a:p>
-        </p:txBody>
-      </p:sp>
-      <p:sp>
-        <p:nvSpPr>
-          <p:cNvPr id="5" name="TextBox 4"/>
-          <p:cNvSpPr txBox="1"/>
-          <p:nvPr/>
-        </p:nvSpPr>
-        <p:spPr>
-          <a:xfrm>
-            <a:off x="822960" y="1920240"/>
-            <a:ext cx="6217920" cy="502920"/>
-          </a:xfrm>
-          <a:prstGeom prst="rect">
-            <a:avLst/>
-          </a:prstGeom>
-          <a:noFill/>
-        </p:spPr>
-        <p:txBody>
-          <a:bodyPr wrap="square" lIns="0" rIns="0" tIns="0" bIns="0" anchor="t">
-            <a:spAutoFit/>
-          </a:bodyPr>
-          <a:lstStyle/>
-          <a:p>
-            <a:pPr algn="l">
-              <a:spcAft>
-                <a:spcPts val="0"/>
-              </a:spcAft>
-            </a:pPr>
-            <a:r>
-              <a:rPr sz="1400" b="0" i="0">
-                <a:solidFill>
-                  <a:srgbClr val="5B6770"/>
-                </a:solidFill>
-                <a:latin typeface="Calibri"/>
-              </a:rPr>
-              <a:t>Results describe light traffic; peak-hour delay near Kampala is larger.</a:t>
-            </a:r>
-          </a:p>
-        </p:txBody>
-      </p:sp>
-      <p:sp>
-        <p:nvSpPr>
-          <p:cNvPr id="6" name="Rounded Rectangle 5"/>
+              <a:t>Roadside activity costs the most time for cars on every road, is growing fastest where it is newest, and is where police place their crash black spots. Access management and service roads address the cause.</a:t>
+            </a:r>
+          </a:p>
+        </p:txBody>
+      </p:sp>
+      <p:sp>
+        <p:nvSpPr>
+          <p:cNvPr id="8" name="Rounded Rectangle 7"/>
           <p:cNvSpPr/>
           <p:nvPr/>
         </p:nvSpPr>
         <p:spPr>
           <a:xfrm>
-            <a:off x="548640" y="2606040"/>
-            <a:ext cx="6675120" cy="1051560"/>
+            <a:off x="6172200" y="1783080"/>
+            <a:ext cx="5440680" cy="2103120"/>
           </a:xfrm>
           <a:prstGeom prst="roundRect">
             <a:avLst>
@@ -12720,14 +12480,67 @@
       </p:sp>
       <p:sp>
         <p:nvSpPr>
-          <p:cNvPr id="7" name="TextBox 6"/>
-          <p:cNvSpPr txBox="1"/>
-          <p:nvPr/>
-        </p:nvSpPr>
-        <p:spPr>
-          <a:xfrm>
-            <a:off x="822960" y="2743200"/>
-            <a:ext cx="6217920" cy="365760"/>
+          <p:cNvPr id="9" name="Oval 8"/>
+          <p:cNvSpPr/>
+          <p:nvPr/>
+        </p:nvSpPr>
+        <p:spPr>
+          <a:xfrm>
+            <a:off x="6446520" y="2057400"/>
+            <a:ext cx="457200" cy="457200"/>
+          </a:xfrm>
+          <a:prstGeom prst="ellipse">
+            <a:avLst/>
+          </a:prstGeom>
+          <a:solidFill>
+            <a:srgbClr val="17252A"/>
+          </a:solidFill>
+          <a:ln>
+            <a:noFill/>
+          </a:ln>
+          <a:effectLst/>
+        </p:spPr>
+        <p:style>
+          <a:lnRef idx="1">
+            <a:schemeClr val="accent1"/>
+          </a:lnRef>
+          <a:fillRef idx="3">
+            <a:schemeClr val="accent1"/>
+          </a:fillRef>
+          <a:effectRef idx="2">
+            <a:schemeClr val="accent1"/>
+          </a:effectRef>
+          <a:fontRef idx="minor">
+            <a:schemeClr val="lt1"/>
+          </a:fontRef>
+        </p:style>
+        <p:txBody>
+          <a:bodyPr rtlCol="0" anchor="ctr" lIns="0" rIns="0" tIns="0" bIns="0"/>
+          <a:lstStyle/>
+          <a:p>
+            <a:pPr algn="ctr"/>
+            <a:r>
+              <a:rPr sz="1500" b="1">
+                <a:solidFill>
+                  <a:srgbClr val="FFFFFF"/>
+                </a:solidFill>
+                <a:latin typeface="Calibri"/>
+              </a:rPr>
+              <a:t>2</a:t>
+            </a:r>
+          </a:p>
+        </p:txBody>
+      </p:sp>
+      <p:sp>
+        <p:nvSpPr>
+          <p:cNvPr id="10" name="TextBox 9"/>
+          <p:cNvSpPr txBox="1"/>
+          <p:nvPr/>
+        </p:nvSpPr>
+        <p:spPr>
+          <a:xfrm>
+            <a:off x="7086600" y="2084831"/>
+            <a:ext cx="4297680" cy="411480"/>
           </a:xfrm>
           <a:prstGeom prst="rect">
             <a:avLst/>
@@ -12746,66 +12559,66 @@
               </a:spcAft>
             </a:pPr>
             <a:r>
-              <a:rPr sz="1700" b="1" i="0">
+              <a:rPr sz="1900" b="1" i="0">
                 <a:solidFill>
                   <a:srgbClr val="1E2528"/>
                 </a:solidFill>
+                <a:latin typeface="Cambria"/>
+              </a:rPr>
+              <a:t>Controls are the cheap wins</a:t>
+            </a:r>
+          </a:p>
+        </p:txBody>
+      </p:sp>
+      <p:sp>
+        <p:nvSpPr>
+          <p:cNvPr id="11" name="TextBox 10"/>
+          <p:cNvSpPr txBox="1"/>
+          <p:nvPr/>
+        </p:nvSpPr>
+        <p:spPr>
+          <a:xfrm>
+            <a:off x="7086600" y="2560320"/>
+            <a:ext cx="4297680" cy="1280160"/>
+          </a:xfrm>
+          <a:prstGeom prst="rect">
+            <a:avLst/>
+          </a:prstGeom>
+          <a:noFill/>
+        </p:spPr>
+        <p:txBody>
+          <a:bodyPr wrap="square" lIns="0" rIns="0" tIns="0" bIns="0" anchor="t">
+            <a:spAutoFit/>
+          </a:bodyPr>
+          <a:lstStyle/>
+          <a:p>
+            <a:pPr algn="l">
+              <a:spcAft>
+                <a:spcPts val="0"/>
+              </a:spcAft>
+            </a:pPr>
+            <a:r>
+              <a:rPr sz="1400" b="0" i="0">
+                <a:solidFill>
+                  <a:srgbClr val="5B6770"/>
+                </a:solidFill>
                 <a:latin typeface="Calibri"/>
               </a:rPr>
-              <a:t>Speed humps are under-mapped</a:t>
-            </a:r>
-          </a:p>
-        </p:txBody>
-      </p:sp>
-      <p:sp>
-        <p:nvSpPr>
-          <p:cNvPr id="8" name="TextBox 7"/>
-          <p:cNvSpPr txBox="1"/>
-          <p:nvPr/>
-        </p:nvSpPr>
-        <p:spPr>
-          <a:xfrm>
-            <a:off x="822960" y="3108960"/>
-            <a:ext cx="6217920" cy="502920"/>
-          </a:xfrm>
-          <a:prstGeom prst="rect">
-            <a:avLst/>
-          </a:prstGeom>
-          <a:noFill/>
-        </p:spPr>
-        <p:txBody>
-          <a:bodyPr wrap="square" lIns="0" rIns="0" tIns="0" bIns="0" anchor="t">
-            <a:spAutoFit/>
-          </a:bodyPr>
-          <a:lstStyle/>
-          <a:p>
-            <a:pPr algn="l">
-              <a:spcAft>
-                <a:spcPts val="0"/>
-              </a:spcAft>
-            </a:pPr>
-            <a:r>
-              <a:rPr sz="1400" b="0" i="0">
-                <a:solidFill>
-                  <a:srgbClr val="5B6770"/>
-                </a:solidFill>
-                <a:latin typeface="Calibri"/>
-              </a:rPr>
-              <a:t>One per town piece is assumed (range 0–2); they drive the Malaba fuel figure.</a:t>
-            </a:r>
-          </a:p>
-        </p:txBody>
-      </p:sp>
-      <p:sp>
-        <p:nvSpPr>
-          <p:cNvPr id="9" name="Rounded Rectangle 8"/>
+              <a:t>Weighbridges and police posts produce the worst single stretches. Weigh-in-motion and ending police stops save more per trip than bypasses in light traffic, and cut stop-go fuel.</a:t>
+            </a:r>
+          </a:p>
+        </p:txBody>
+      </p:sp>
+      <p:sp>
+        <p:nvSpPr>
+          <p:cNvPr id="12" name="Rounded Rectangle 11"/>
           <p:cNvSpPr/>
           <p:nvPr/>
         </p:nvSpPr>
         <p:spPr>
           <a:xfrm>
-            <a:off x="548640" y="3794760"/>
-            <a:ext cx="6675120" cy="1051560"/>
+            <a:off x="548640" y="4069080"/>
+            <a:ext cx="5440680" cy="2103120"/>
           </a:xfrm>
           <a:prstGeom prst="roundRect">
             <a:avLst>
@@ -12844,14 +12657,67 @@
       </p:sp>
       <p:sp>
         <p:nvSpPr>
-          <p:cNvPr id="10" name="TextBox 9"/>
-          <p:cNvSpPr txBox="1"/>
-          <p:nvPr/>
-        </p:nvSpPr>
-        <p:spPr>
-          <a:xfrm>
-            <a:off x="822960" y="3931920"/>
-            <a:ext cx="6217920" cy="365760"/>
+          <p:cNvPr id="13" name="Oval 12"/>
+          <p:cNvSpPr/>
+          <p:nvPr/>
+        </p:nvSpPr>
+        <p:spPr>
+          <a:xfrm>
+            <a:off x="822959" y="4343400"/>
+            <a:ext cx="457200" cy="457200"/>
+          </a:xfrm>
+          <a:prstGeom prst="ellipse">
+            <a:avLst/>
+          </a:prstGeom>
+          <a:solidFill>
+            <a:srgbClr val="3A7D5C"/>
+          </a:solidFill>
+          <a:ln>
+            <a:noFill/>
+          </a:ln>
+          <a:effectLst/>
+        </p:spPr>
+        <p:style>
+          <a:lnRef idx="1">
+            <a:schemeClr val="accent1"/>
+          </a:lnRef>
+          <a:fillRef idx="3">
+            <a:schemeClr val="accent1"/>
+          </a:fillRef>
+          <a:effectRef idx="2">
+            <a:schemeClr val="accent1"/>
+          </a:effectRef>
+          <a:fontRef idx="minor">
+            <a:schemeClr val="lt1"/>
+          </a:fontRef>
+        </p:style>
+        <p:txBody>
+          <a:bodyPr rtlCol="0" anchor="ctr" lIns="0" rIns="0" tIns="0" bIns="0"/>
+          <a:lstStyle/>
+          <a:p>
+            <a:pPr algn="ctr"/>
+            <a:r>
+              <a:rPr sz="1500" b="1">
+                <a:solidFill>
+                  <a:srgbClr val="FFFFFF"/>
+                </a:solidFill>
+                <a:latin typeface="Calibri"/>
+              </a:rPr>
+              <a:t>3</a:t>
+            </a:r>
+          </a:p>
+        </p:txBody>
+      </p:sp>
+      <p:sp>
+        <p:nvSpPr>
+          <p:cNvPr id="14" name="TextBox 13"/>
+          <p:cNvSpPr txBox="1"/>
+          <p:nvPr/>
+        </p:nvSpPr>
+        <p:spPr>
+          <a:xfrm>
+            <a:off x="1463040" y="4370832"/>
+            <a:ext cx="4297680" cy="411480"/>
           </a:xfrm>
           <a:prstGeom prst="rect">
             <a:avLst/>
@@ -12870,66 +12736,66 @@
               </a:spcAft>
             </a:pPr>
             <a:r>
-              <a:rPr sz="1700" b="1" i="0">
+              <a:rPr sz="1900" b="1" i="0">
                 <a:solidFill>
                   <a:srgbClr val="1E2528"/>
                 </a:solidFill>
+                <a:latin typeface="Cambria"/>
+              </a:rPr>
+              <a:t>Stopped time dwarfs driving time</a:t>
+            </a:r>
+          </a:p>
+        </p:txBody>
+      </p:sp>
+      <p:sp>
+        <p:nvSpPr>
+          <p:cNvPr id="15" name="TextBox 14"/>
+          <p:cNvSpPr txBox="1"/>
+          <p:nvPr/>
+        </p:nvSpPr>
+        <p:spPr>
+          <a:xfrm>
+            <a:off x="1463040" y="4846320"/>
+            <a:ext cx="4297680" cy="1280160"/>
+          </a:xfrm>
+          <a:prstGeom prst="rect">
+            <a:avLst/>
+          </a:prstGeom>
+          <a:noFill/>
+        </p:spPr>
+        <p:txBody>
+          <a:bodyPr wrap="square" lIns="0" rIns="0" tIns="0" bIns="0" anchor="t">
+            <a:spAutoFit/>
+          </a:bodyPr>
+          <a:lstStyle/>
+          <a:p>
+            <a:pPr algn="l">
+              <a:spcAft>
+                <a:spcPts val="0"/>
+              </a:spcAft>
+            </a:pPr>
+            <a:r>
+              <a:rPr sz="1400" b="0" i="0">
+                <a:solidFill>
+                  <a:srgbClr val="5B6770"/>
+                </a:solidFill>
                 <a:latin typeface="Calibri"/>
               </a:rPr>
-              <a:t>Truck counts are partly assumed</a:t>
-            </a:r>
-          </a:p>
-        </p:txBody>
-      </p:sp>
-      <p:sp>
-        <p:nvSpPr>
-          <p:cNvPr id="11" name="TextBox 10"/>
-          <p:cNvSpPr txBox="1"/>
-          <p:nvPr/>
-        </p:nvSpPr>
-        <p:spPr>
-          <a:xfrm>
-            <a:off x="822960" y="4297680"/>
-            <a:ext cx="6217920" cy="502920"/>
-          </a:xfrm>
-          <a:prstGeom prst="rect">
-            <a:avLst/>
-          </a:prstGeom>
-          <a:noFill/>
-        </p:spPr>
-        <p:txBody>
-          <a:bodyPr wrap="square" lIns="0" rIns="0" tIns="0" bIns="0" anchor="t">
-            <a:spAutoFit/>
-          </a:bodyPr>
-          <a:lstStyle/>
-          <a:p>
-            <a:pPr algn="l">
-              <a:spcAft>
-                <a:spcPts val="0"/>
-              </a:spcAft>
-            </a:pPr>
-            <a:r>
-              <a:rPr sz="1400" b="0" i="0">
-                <a:solidFill>
-                  <a:srgbClr val="5B6770"/>
-                </a:solidFill>
-                <a:latin typeface="Calibri"/>
-              </a:rPr>
-              <a:t>Surveyed on the Malaba, Katuna and Bwera roads; assumed on the Elegu and Hoima roads.</a:t>
-            </a:r>
-          </a:p>
-        </p:txBody>
-      </p:sp>
-      <p:sp>
-        <p:nvSpPr>
-          <p:cNvPr id="12" name="Rounded Rectangle 11"/>
+              <a:t>Trucks take 17–93 h between Kampala and the borders, of which friction is a small share. Rest, border and administrative stops need their own reforms alongside the road.</a:t>
+            </a:r>
+          </a:p>
+        </p:txBody>
+      </p:sp>
+      <p:sp>
+        <p:nvSpPr>
+          <p:cNvPr id="16" name="Rounded Rectangle 15"/>
           <p:cNvSpPr/>
           <p:nvPr/>
         </p:nvSpPr>
         <p:spPr>
           <a:xfrm>
-            <a:off x="548640" y="4983480"/>
-            <a:ext cx="6675120" cy="1051560"/>
+            <a:off x="6172200" y="4069080"/>
+            <a:ext cx="5440680" cy="2103120"/>
           </a:xfrm>
           <a:prstGeom prst="roundRect">
             <a:avLst>
@@ -12968,100 +12834,20 @@
       </p:sp>
       <p:sp>
         <p:nvSpPr>
-          <p:cNvPr id="13" name="TextBox 12"/>
-          <p:cNvSpPr txBox="1"/>
-          <p:nvPr/>
-        </p:nvSpPr>
-        <p:spPr>
-          <a:xfrm>
-            <a:off x="822960" y="5120640"/>
-            <a:ext cx="6217920" cy="365760"/>
-          </a:xfrm>
-          <a:prstGeom prst="rect">
-            <a:avLst/>
-          </a:prstGeom>
-          <a:noFill/>
-        </p:spPr>
-        <p:txBody>
-          <a:bodyPr wrap="square" lIns="0" rIns="0" tIns="0" bIns="0" anchor="t">
-            <a:spAutoFit/>
-          </a:bodyPr>
-          <a:lstStyle/>
-          <a:p>
-            <a:pPr algn="l">
-              <a:spcAft>
-                <a:spcPts val="0"/>
-              </a:spcAft>
-            </a:pPr>
-            <a:r>
-              <a:rPr sz="1700" b="1" i="0">
-                <a:solidFill>
-                  <a:srgbClr val="1E2528"/>
-                </a:solidFill>
-                <a:latin typeface="Calibri"/>
-              </a:rPr>
-              <a:t>Growth data end in 2020</a:t>
-            </a:r>
-          </a:p>
-        </p:txBody>
-      </p:sp>
-      <p:sp>
-        <p:nvSpPr>
-          <p:cNvPr id="14" name="TextBox 13"/>
-          <p:cNvSpPr txBox="1"/>
-          <p:nvPr/>
-        </p:nvSpPr>
-        <p:spPr>
-          <a:xfrm>
-            <a:off x="822960" y="5486400"/>
-            <a:ext cx="6217920" cy="502920"/>
-          </a:xfrm>
-          <a:prstGeom prst="rect">
-            <a:avLst/>
-          </a:prstGeom>
-          <a:noFill/>
-        </p:spPr>
-        <p:txBody>
-          <a:bodyPr wrap="square" lIns="0" rIns="0" tIns="0" bIns="0" anchor="t">
-            <a:spAutoFit/>
-          </a:bodyPr>
-          <a:lstStyle/>
-          <a:p>
-            <a:pPr algn="l">
-              <a:spcAft>
-                <a:spcPts val="0"/>
-              </a:spcAft>
-            </a:pPr>
-            <a:r>
-              <a:rPr sz="1400" b="0" i="0">
-                <a:solidFill>
-                  <a:srgbClr val="5B6770"/>
-                </a:solidFill>
-                <a:latin typeface="Calibri"/>
-              </a:rPr>
-              <a:t>GHSL's projection to 2026 is slower than the observed trend.</a:t>
-            </a:r>
-          </a:p>
-        </p:txBody>
-      </p:sp>
-      <p:sp>
-        <p:nvSpPr>
-          <p:cNvPr id="15" name="Rounded Rectangle 14"/>
+          <p:cNvPr id="17" name="Oval 16"/>
           <p:cNvSpPr/>
           <p:nvPr/>
         </p:nvSpPr>
         <p:spPr>
           <a:xfrm>
-            <a:off x="7589520" y="1417320"/>
-            <a:ext cx="4023360" cy="4617720"/>
-          </a:xfrm>
-          <a:prstGeom prst="roundRect">
-            <a:avLst>
-              <a:gd name="adj" fmla="val 6000"/>
-            </a:avLst>
+            <a:off x="6446520" y="4343400"/>
+            <a:ext cx="457200" cy="457200"/>
+          </a:xfrm>
+          <a:prstGeom prst="ellipse">
+            <a:avLst/>
           </a:prstGeom>
           <a:solidFill>
-            <a:srgbClr val="17252A"/>
+            <a:srgbClr val="D9A441"/>
           </a:solidFill>
           <a:ln>
             <a:noFill/>
@@ -13083,23 +12869,32 @@
           </a:fontRef>
         </p:style>
         <p:txBody>
-          <a:bodyPr rtlCol="0" anchor="ctr"/>
+          <a:bodyPr rtlCol="0" anchor="ctr" lIns="0" rIns="0" tIns="0" bIns="0"/>
           <a:lstStyle/>
           <a:p>
             <a:pPr algn="ctr"/>
-          </a:p>
-        </p:txBody>
-      </p:sp>
-      <p:sp>
-        <p:nvSpPr>
-          <p:cNvPr id="16" name="TextBox 15"/>
-          <p:cNvSpPr txBox="1"/>
-          <p:nvPr/>
-        </p:nvSpPr>
-        <p:spPr>
-          <a:xfrm>
-            <a:off x="7909560" y="1691640"/>
-            <a:ext cx="3474720" cy="4206240"/>
+            <a:r>
+              <a:rPr sz="1500" b="1">
+                <a:solidFill>
+                  <a:srgbClr val="FFFFFF"/>
+                </a:solidFill>
+                <a:latin typeface="Calibri"/>
+              </a:rPr>
+              <a:t>4</a:t>
+            </a:r>
+          </a:p>
+        </p:txBody>
+      </p:sp>
+      <p:sp>
+        <p:nvSpPr>
+          <p:cNvPr id="18" name="TextBox 17"/>
+          <p:cNvSpPr txBox="1"/>
+          <p:nvPr/>
+        </p:nvSpPr>
+        <p:spPr>
+          <a:xfrm>
+            <a:off x="7086600" y="4370832"/>
+            <a:ext cx="4297680" cy="411480"/>
           </a:xfrm>
           <a:prstGeom prst="rect">
             <a:avLst/>
@@ -13114,97 +12909,56 @@
           <a:p>
             <a:pPr algn="l">
               <a:spcAft>
-                <a:spcPts val="1200"/>
-              </a:spcAft>
-            </a:pPr>
-            <a:r>
-              <a:rPr sz="2200" b="1" i="0">
-                <a:solidFill>
-                  <a:srgbClr val="FFFFFF"/>
+                <a:spcPts val="0"/>
+              </a:spcAft>
+            </a:pPr>
+            <a:r>
+              <a:rPr sz="1900" b="1" i="0">
+                <a:solidFill>
+                  <a:srgbClr val="1E2528"/>
                 </a:solidFill>
                 <a:latin typeface="Cambria"/>
               </a:rPr>
-              <a:t>Next steps</a:t>
-            </a:r>
-          </a:p>
-          <a:p>
-            <a:pPr algn="l">
-              <a:spcAft>
-                <a:spcPts val="1200"/>
-              </a:spcAft>
-            </a:pPr>
-            <a:r>
-              <a:rPr sz="1500" b="0" i="0">
-                <a:solidFill>
-                  <a:srgbClr val="B8C7C4"/>
+              <a:t>Growth outpaces the road</a:t>
+            </a:r>
+          </a:p>
+        </p:txBody>
+      </p:sp>
+      <p:sp>
+        <p:nvSpPr>
+          <p:cNvPr id="19" name="TextBox 18"/>
+          <p:cNvSpPr txBox="1"/>
+          <p:nvPr/>
+        </p:nvSpPr>
+        <p:spPr>
+          <a:xfrm>
+            <a:off x="7086600" y="4846320"/>
+            <a:ext cx="4297680" cy="1280160"/>
+          </a:xfrm>
+          <a:prstGeom prst="rect">
+            <a:avLst/>
+          </a:prstGeom>
+          <a:noFill/>
+        </p:spPr>
+        <p:txBody>
+          <a:bodyPr wrap="square" lIns="0" rIns="0" tIns="0" bIns="0" anchor="t">
+            <a:spAutoFit/>
+          </a:bodyPr>
+          <a:lstStyle/>
+          <a:p>
+            <a:pPr algn="l">
+              <a:spcAft>
+                <a:spcPts val="0"/>
+              </a:spcAft>
+            </a:pPr>
+            <a:r>
+              <a:rPr sz="1400" b="0" i="0">
+                <a:solidFill>
+                  <a:srgbClr val="5B6770"/>
                 </a:solidFill>
                 <a:latin typeface="Calibri"/>
               </a:rPr>
-              <a:t>Count speed humps from Mapillary street-level detections</a:t>
-            </a:r>
-          </a:p>
-          <a:p>
-            <a:pPr algn="l">
-              <a:spcAft>
-                <a:spcPts val="1200"/>
-              </a:spcAft>
-            </a:pPr>
-            <a:r>
-              <a:rPr sz="1500" b="0" i="0">
-                <a:solidFill>
-                  <a:srgbClr val="B8C7C4"/>
-                </a:solidFill>
-                <a:latin typeface="Calibri"/>
-              </a:rPr>
-              <a:t>Observe 2016–2023 growth with Open Buildings 2.5D Temporal</a:t>
-            </a:r>
-          </a:p>
-          <a:p>
-            <a:pPr algn="l">
-              <a:spcAft>
-                <a:spcPts val="1200"/>
-              </a:spcAft>
-            </a:pPr>
-            <a:r>
-              <a:rPr sz="1500" b="0" i="0">
-                <a:solidFill>
-                  <a:srgbClr val="B8C7C4"/>
-                </a:solidFill>
-                <a:latin typeface="Calibri"/>
-              </a:rPr>
-              <a:t>Swap GLO-30 for FABDEM terrain</a:t>
-            </a:r>
-          </a:p>
-          <a:p>
-            <a:pPr algn="l">
-              <a:spcAft>
-                <a:spcPts val="1200"/>
-              </a:spcAft>
-            </a:pPr>
-            <a:r>
-              <a:rPr sz="1500" b="0" i="0">
-                <a:solidFill>
-                  <a:srgbClr val="B8C7C4"/>
-                </a:solidFill>
-                <a:latin typeface="Calibri"/>
-              </a:rPr>
-              <a:t>Apply the method to eleven capitals (regional paper)</a:t>
-            </a:r>
-          </a:p>
-          <a:p>
-            <a:pPr algn="l">
-              <a:spcAft>
-                <a:spcPts val="1200"/>
-              </a:spcAft>
-            </a:pPr>
-            <a:r>
-              <a:rPr sz="1500" b="0" i="0">
-                <a:solidFill>
-                  <a:srgbClr val="B8C7C4"/>
-                </a:solidFill>
-                <a:latin typeface="Calibri"/>
-              </a:rPr>
-              <a:t>Write up the paper</a:t>
+              <a:t>At 27–68% in 20 years, today's open road is tomorrow's settlement. Land-use control along the corridors is time-critical.</a:t>
             </a:r>
           </a:p>
         </p:txBody>
@@ -13218,6 +12972,716 @@
 </file>
 
 <file path=ppt/slides/slide23.xml><?xml version="1.0" encoding="utf-8"?>
+<p:sld xmlns:a="http://schemas.openxmlformats.org/drawingml/2006/main" xmlns:p="http://schemas.openxmlformats.org/presentationml/2006/main" xmlns:r="http://schemas.openxmlformats.org/officeDocument/2006/relationships">
+  <p:cSld>
+    <p:bg>
+      <p:bgPr>
+        <a:solidFill>
+          <a:srgbClr val="FFFFFF"/>
+        </a:solidFill>
+        <a:effectLst/>
+      </p:bgPr>
+    </p:bg>
+    <p:spTree>
+      <p:nvGrpSpPr>
+        <p:cNvPr id="1" name=""/>
+        <p:cNvGrpSpPr/>
+        <p:nvPr/>
+      </p:nvGrpSpPr>
+      <p:grpSpPr/>
+      <p:sp>
+        <p:nvSpPr>
+          <p:cNvPr id="2" name="TextBox 1"/>
+          <p:cNvSpPr txBox="1"/>
+          <p:nvPr/>
+        </p:nvSpPr>
+        <p:spPr>
+          <a:xfrm>
+            <a:off x="548640" y="411480"/>
+            <a:ext cx="11064240" cy="731520"/>
+          </a:xfrm>
+          <a:prstGeom prst="rect">
+            <a:avLst/>
+          </a:prstGeom>
+          <a:noFill/>
+        </p:spPr>
+        <p:txBody>
+          <a:bodyPr wrap="square" lIns="0" rIns="0" tIns="0" bIns="0" anchor="t">
+            <a:spAutoFit/>
+          </a:bodyPr>
+          <a:lstStyle/>
+          <a:p>
+            <a:pPr algn="l">
+              <a:spcAft>
+                <a:spcPts val="0"/>
+              </a:spcAft>
+            </a:pPr>
+            <a:r>
+              <a:rPr sz="3400" b="1" i="0">
+                <a:solidFill>
+                  <a:srgbClr val="1E2528"/>
+                </a:solidFill>
+                <a:latin typeface="Cambria"/>
+              </a:rPr>
+              <a:t>Limitations and next steps</a:t>
+            </a:r>
+          </a:p>
+        </p:txBody>
+      </p:sp>
+      <p:sp>
+        <p:nvSpPr>
+          <p:cNvPr id="3" name="Rounded Rectangle 2"/>
+          <p:cNvSpPr/>
+          <p:nvPr/>
+        </p:nvSpPr>
+        <p:spPr>
+          <a:xfrm>
+            <a:off x="548640" y="1417320"/>
+            <a:ext cx="6675120" cy="1051560"/>
+          </a:xfrm>
+          <a:prstGeom prst="roundRect">
+            <a:avLst>
+              <a:gd name="adj" fmla="val 6000"/>
+            </a:avLst>
+          </a:prstGeom>
+          <a:solidFill>
+            <a:srgbClr val="EEF2F0"/>
+          </a:solidFill>
+          <a:ln>
+            <a:noFill/>
+          </a:ln>
+          <a:effectLst/>
+        </p:spPr>
+        <p:style>
+          <a:lnRef idx="1">
+            <a:schemeClr val="accent1"/>
+          </a:lnRef>
+          <a:fillRef idx="3">
+            <a:schemeClr val="accent1"/>
+          </a:fillRef>
+          <a:effectRef idx="2">
+            <a:schemeClr val="accent1"/>
+          </a:effectRef>
+          <a:fontRef idx="minor">
+            <a:schemeClr val="lt1"/>
+          </a:fontRef>
+        </p:style>
+        <p:txBody>
+          <a:bodyPr rtlCol="0" anchor="ctr"/>
+          <a:lstStyle/>
+          <a:p>
+            <a:pPr algn="ctr"/>
+          </a:p>
+        </p:txBody>
+      </p:sp>
+      <p:sp>
+        <p:nvSpPr>
+          <p:cNvPr id="4" name="TextBox 3"/>
+          <p:cNvSpPr txBox="1"/>
+          <p:nvPr/>
+        </p:nvSpPr>
+        <p:spPr>
+          <a:xfrm>
+            <a:off x="822960" y="1554480"/>
+            <a:ext cx="6217920" cy="365760"/>
+          </a:xfrm>
+          <a:prstGeom prst="rect">
+            <a:avLst/>
+          </a:prstGeom>
+          <a:noFill/>
+        </p:spPr>
+        <p:txBody>
+          <a:bodyPr wrap="square" lIns="0" rIns="0" tIns="0" bIns="0" anchor="t">
+            <a:spAutoFit/>
+          </a:bodyPr>
+          <a:lstStyle/>
+          <a:p>
+            <a:pPr algn="l">
+              <a:spcAft>
+                <a:spcPts val="0"/>
+              </a:spcAft>
+            </a:pPr>
+            <a:r>
+              <a:rPr sz="1700" b="1" i="0">
+                <a:solidFill>
+                  <a:srgbClr val="1E2528"/>
+                </a:solidFill>
+                <a:latin typeface="Calibri"/>
+              </a:rPr>
+              <a:t>Congestion is not modelled</a:t>
+            </a:r>
+          </a:p>
+        </p:txBody>
+      </p:sp>
+      <p:sp>
+        <p:nvSpPr>
+          <p:cNvPr id="5" name="TextBox 4"/>
+          <p:cNvSpPr txBox="1"/>
+          <p:nvPr/>
+        </p:nvSpPr>
+        <p:spPr>
+          <a:xfrm>
+            <a:off x="822960" y="1920240"/>
+            <a:ext cx="6217920" cy="502920"/>
+          </a:xfrm>
+          <a:prstGeom prst="rect">
+            <a:avLst/>
+          </a:prstGeom>
+          <a:noFill/>
+        </p:spPr>
+        <p:txBody>
+          <a:bodyPr wrap="square" lIns="0" rIns="0" tIns="0" bIns="0" anchor="t">
+            <a:spAutoFit/>
+          </a:bodyPr>
+          <a:lstStyle/>
+          <a:p>
+            <a:pPr algn="l">
+              <a:spcAft>
+                <a:spcPts val="0"/>
+              </a:spcAft>
+            </a:pPr>
+            <a:r>
+              <a:rPr sz="1400" b="0" i="0">
+                <a:solidFill>
+                  <a:srgbClr val="5B6770"/>
+                </a:solidFill>
+                <a:latin typeface="Calibri"/>
+              </a:rPr>
+              <a:t>Results describe light traffic; peak-hour delay near Kampala is larger.</a:t>
+            </a:r>
+          </a:p>
+        </p:txBody>
+      </p:sp>
+      <p:sp>
+        <p:nvSpPr>
+          <p:cNvPr id="6" name="Rounded Rectangle 5"/>
+          <p:cNvSpPr/>
+          <p:nvPr/>
+        </p:nvSpPr>
+        <p:spPr>
+          <a:xfrm>
+            <a:off x="548640" y="2606040"/>
+            <a:ext cx="6675120" cy="1051560"/>
+          </a:xfrm>
+          <a:prstGeom prst="roundRect">
+            <a:avLst>
+              <a:gd name="adj" fmla="val 6000"/>
+            </a:avLst>
+          </a:prstGeom>
+          <a:solidFill>
+            <a:srgbClr val="EEF2F0"/>
+          </a:solidFill>
+          <a:ln>
+            <a:noFill/>
+          </a:ln>
+          <a:effectLst/>
+        </p:spPr>
+        <p:style>
+          <a:lnRef idx="1">
+            <a:schemeClr val="accent1"/>
+          </a:lnRef>
+          <a:fillRef idx="3">
+            <a:schemeClr val="accent1"/>
+          </a:fillRef>
+          <a:effectRef idx="2">
+            <a:schemeClr val="accent1"/>
+          </a:effectRef>
+          <a:fontRef idx="minor">
+            <a:schemeClr val="lt1"/>
+          </a:fontRef>
+        </p:style>
+        <p:txBody>
+          <a:bodyPr rtlCol="0" anchor="ctr"/>
+          <a:lstStyle/>
+          <a:p>
+            <a:pPr algn="ctr"/>
+          </a:p>
+        </p:txBody>
+      </p:sp>
+      <p:sp>
+        <p:nvSpPr>
+          <p:cNvPr id="7" name="TextBox 6"/>
+          <p:cNvSpPr txBox="1"/>
+          <p:nvPr/>
+        </p:nvSpPr>
+        <p:spPr>
+          <a:xfrm>
+            <a:off x="822960" y="2743200"/>
+            <a:ext cx="6217920" cy="365760"/>
+          </a:xfrm>
+          <a:prstGeom prst="rect">
+            <a:avLst/>
+          </a:prstGeom>
+          <a:noFill/>
+        </p:spPr>
+        <p:txBody>
+          <a:bodyPr wrap="square" lIns="0" rIns="0" tIns="0" bIns="0" anchor="t">
+            <a:spAutoFit/>
+          </a:bodyPr>
+          <a:lstStyle/>
+          <a:p>
+            <a:pPr algn="l">
+              <a:spcAft>
+                <a:spcPts val="0"/>
+              </a:spcAft>
+            </a:pPr>
+            <a:r>
+              <a:rPr sz="1700" b="1" i="0">
+                <a:solidFill>
+                  <a:srgbClr val="1E2528"/>
+                </a:solidFill>
+                <a:latin typeface="Calibri"/>
+              </a:rPr>
+              <a:t>Speed humps are under-mapped</a:t>
+            </a:r>
+          </a:p>
+        </p:txBody>
+      </p:sp>
+      <p:sp>
+        <p:nvSpPr>
+          <p:cNvPr id="8" name="TextBox 7"/>
+          <p:cNvSpPr txBox="1"/>
+          <p:nvPr/>
+        </p:nvSpPr>
+        <p:spPr>
+          <a:xfrm>
+            <a:off x="822960" y="3108960"/>
+            <a:ext cx="6217920" cy="502920"/>
+          </a:xfrm>
+          <a:prstGeom prst="rect">
+            <a:avLst/>
+          </a:prstGeom>
+          <a:noFill/>
+        </p:spPr>
+        <p:txBody>
+          <a:bodyPr wrap="square" lIns="0" rIns="0" tIns="0" bIns="0" anchor="t">
+            <a:spAutoFit/>
+          </a:bodyPr>
+          <a:lstStyle/>
+          <a:p>
+            <a:pPr algn="l">
+              <a:spcAft>
+                <a:spcPts val="0"/>
+              </a:spcAft>
+            </a:pPr>
+            <a:r>
+              <a:rPr sz="1400" b="0" i="0">
+                <a:solidFill>
+                  <a:srgbClr val="5B6770"/>
+                </a:solidFill>
+                <a:latin typeface="Calibri"/>
+              </a:rPr>
+              <a:t>One per town piece is assumed (range 0–2); they drive the Malaba fuel figure.</a:t>
+            </a:r>
+          </a:p>
+        </p:txBody>
+      </p:sp>
+      <p:sp>
+        <p:nvSpPr>
+          <p:cNvPr id="9" name="Rounded Rectangle 8"/>
+          <p:cNvSpPr/>
+          <p:nvPr/>
+        </p:nvSpPr>
+        <p:spPr>
+          <a:xfrm>
+            <a:off x="548640" y="3794760"/>
+            <a:ext cx="6675120" cy="1051560"/>
+          </a:xfrm>
+          <a:prstGeom prst="roundRect">
+            <a:avLst>
+              <a:gd name="adj" fmla="val 6000"/>
+            </a:avLst>
+          </a:prstGeom>
+          <a:solidFill>
+            <a:srgbClr val="EEF2F0"/>
+          </a:solidFill>
+          <a:ln>
+            <a:noFill/>
+          </a:ln>
+          <a:effectLst/>
+        </p:spPr>
+        <p:style>
+          <a:lnRef idx="1">
+            <a:schemeClr val="accent1"/>
+          </a:lnRef>
+          <a:fillRef idx="3">
+            <a:schemeClr val="accent1"/>
+          </a:fillRef>
+          <a:effectRef idx="2">
+            <a:schemeClr val="accent1"/>
+          </a:effectRef>
+          <a:fontRef idx="minor">
+            <a:schemeClr val="lt1"/>
+          </a:fontRef>
+        </p:style>
+        <p:txBody>
+          <a:bodyPr rtlCol="0" anchor="ctr"/>
+          <a:lstStyle/>
+          <a:p>
+            <a:pPr algn="ctr"/>
+          </a:p>
+        </p:txBody>
+      </p:sp>
+      <p:sp>
+        <p:nvSpPr>
+          <p:cNvPr id="10" name="TextBox 9"/>
+          <p:cNvSpPr txBox="1"/>
+          <p:nvPr/>
+        </p:nvSpPr>
+        <p:spPr>
+          <a:xfrm>
+            <a:off x="822960" y="3931920"/>
+            <a:ext cx="6217920" cy="365760"/>
+          </a:xfrm>
+          <a:prstGeom prst="rect">
+            <a:avLst/>
+          </a:prstGeom>
+          <a:noFill/>
+        </p:spPr>
+        <p:txBody>
+          <a:bodyPr wrap="square" lIns="0" rIns="0" tIns="0" bIns="0" anchor="t">
+            <a:spAutoFit/>
+          </a:bodyPr>
+          <a:lstStyle/>
+          <a:p>
+            <a:pPr algn="l">
+              <a:spcAft>
+                <a:spcPts val="0"/>
+              </a:spcAft>
+            </a:pPr>
+            <a:r>
+              <a:rPr sz="1700" b="1" i="0">
+                <a:solidFill>
+                  <a:srgbClr val="1E2528"/>
+                </a:solidFill>
+                <a:latin typeface="Calibri"/>
+              </a:rPr>
+              <a:t>Truck counts are partly assumed</a:t>
+            </a:r>
+          </a:p>
+        </p:txBody>
+      </p:sp>
+      <p:sp>
+        <p:nvSpPr>
+          <p:cNvPr id="11" name="TextBox 10"/>
+          <p:cNvSpPr txBox="1"/>
+          <p:nvPr/>
+        </p:nvSpPr>
+        <p:spPr>
+          <a:xfrm>
+            <a:off x="822960" y="4297680"/>
+            <a:ext cx="6217920" cy="502920"/>
+          </a:xfrm>
+          <a:prstGeom prst="rect">
+            <a:avLst/>
+          </a:prstGeom>
+          <a:noFill/>
+        </p:spPr>
+        <p:txBody>
+          <a:bodyPr wrap="square" lIns="0" rIns="0" tIns="0" bIns="0" anchor="t">
+            <a:spAutoFit/>
+          </a:bodyPr>
+          <a:lstStyle/>
+          <a:p>
+            <a:pPr algn="l">
+              <a:spcAft>
+                <a:spcPts val="0"/>
+              </a:spcAft>
+            </a:pPr>
+            <a:r>
+              <a:rPr sz="1400" b="0" i="0">
+                <a:solidFill>
+                  <a:srgbClr val="5B6770"/>
+                </a:solidFill>
+                <a:latin typeface="Calibri"/>
+              </a:rPr>
+              <a:t>Surveyed on the Malaba, Katuna and Bwera roads; assumed on the Elegu and Hoima roads.</a:t>
+            </a:r>
+          </a:p>
+        </p:txBody>
+      </p:sp>
+      <p:sp>
+        <p:nvSpPr>
+          <p:cNvPr id="12" name="Rounded Rectangle 11"/>
+          <p:cNvSpPr/>
+          <p:nvPr/>
+        </p:nvSpPr>
+        <p:spPr>
+          <a:xfrm>
+            <a:off x="548640" y="4983480"/>
+            <a:ext cx="6675120" cy="1051560"/>
+          </a:xfrm>
+          <a:prstGeom prst="roundRect">
+            <a:avLst>
+              <a:gd name="adj" fmla="val 6000"/>
+            </a:avLst>
+          </a:prstGeom>
+          <a:solidFill>
+            <a:srgbClr val="EEF2F0"/>
+          </a:solidFill>
+          <a:ln>
+            <a:noFill/>
+          </a:ln>
+          <a:effectLst/>
+        </p:spPr>
+        <p:style>
+          <a:lnRef idx="1">
+            <a:schemeClr val="accent1"/>
+          </a:lnRef>
+          <a:fillRef idx="3">
+            <a:schemeClr val="accent1"/>
+          </a:fillRef>
+          <a:effectRef idx="2">
+            <a:schemeClr val="accent1"/>
+          </a:effectRef>
+          <a:fontRef idx="minor">
+            <a:schemeClr val="lt1"/>
+          </a:fontRef>
+        </p:style>
+        <p:txBody>
+          <a:bodyPr rtlCol="0" anchor="ctr"/>
+          <a:lstStyle/>
+          <a:p>
+            <a:pPr algn="ctr"/>
+          </a:p>
+        </p:txBody>
+      </p:sp>
+      <p:sp>
+        <p:nvSpPr>
+          <p:cNvPr id="13" name="TextBox 12"/>
+          <p:cNvSpPr txBox="1"/>
+          <p:nvPr/>
+        </p:nvSpPr>
+        <p:spPr>
+          <a:xfrm>
+            <a:off x="822960" y="5120640"/>
+            <a:ext cx="6217920" cy="365760"/>
+          </a:xfrm>
+          <a:prstGeom prst="rect">
+            <a:avLst/>
+          </a:prstGeom>
+          <a:noFill/>
+        </p:spPr>
+        <p:txBody>
+          <a:bodyPr wrap="square" lIns="0" rIns="0" tIns="0" bIns="0" anchor="t">
+            <a:spAutoFit/>
+          </a:bodyPr>
+          <a:lstStyle/>
+          <a:p>
+            <a:pPr algn="l">
+              <a:spcAft>
+                <a:spcPts val="0"/>
+              </a:spcAft>
+            </a:pPr>
+            <a:r>
+              <a:rPr sz="1700" b="1" i="0">
+                <a:solidFill>
+                  <a:srgbClr val="1E2528"/>
+                </a:solidFill>
+                <a:latin typeface="Calibri"/>
+              </a:rPr>
+              <a:t>Growth after 2020 is modelled</a:t>
+            </a:r>
+          </a:p>
+        </p:txBody>
+      </p:sp>
+      <p:sp>
+        <p:nvSpPr>
+          <p:cNvPr id="14" name="TextBox 13"/>
+          <p:cNvSpPr txBox="1"/>
+          <p:nvPr/>
+        </p:nvSpPr>
+        <p:spPr>
+          <a:xfrm>
+            <a:off x="822960" y="5486400"/>
+            <a:ext cx="6217920" cy="502920"/>
+          </a:xfrm>
+          <a:prstGeom prst="rect">
+            <a:avLst/>
+          </a:prstGeom>
+          <a:noFill/>
+        </p:spPr>
+        <p:txBody>
+          <a:bodyPr wrap="square" lIns="0" rIns="0" tIns="0" bIns="0" anchor="t">
+            <a:spAutoFit/>
+          </a:bodyPr>
+          <a:lstStyle/>
+          <a:p>
+            <a:pPr algn="l">
+              <a:spcAft>
+                <a:spcPts val="0"/>
+              </a:spcAft>
+            </a:pPr>
+            <a:r>
+              <a:rPr sz="1400" b="0" i="0">
+                <a:solidFill>
+                  <a:srgbClr val="5B6770"/>
+                </a:solidFill>
+                <a:latin typeface="Calibri"/>
+              </a:rPr>
+              <a:t>Open Buildings Temporal is a Sentinel-2 model, noisy year to year; trends are fitted.</a:t>
+            </a:r>
+          </a:p>
+        </p:txBody>
+      </p:sp>
+      <p:sp>
+        <p:nvSpPr>
+          <p:cNvPr id="15" name="Rounded Rectangle 14"/>
+          <p:cNvSpPr/>
+          <p:nvPr/>
+        </p:nvSpPr>
+        <p:spPr>
+          <a:xfrm>
+            <a:off x="7589520" y="1417320"/>
+            <a:ext cx="4023360" cy="4617720"/>
+          </a:xfrm>
+          <a:prstGeom prst="roundRect">
+            <a:avLst>
+              <a:gd name="adj" fmla="val 6000"/>
+            </a:avLst>
+          </a:prstGeom>
+          <a:solidFill>
+            <a:srgbClr val="17252A"/>
+          </a:solidFill>
+          <a:ln>
+            <a:noFill/>
+          </a:ln>
+          <a:effectLst/>
+        </p:spPr>
+        <p:style>
+          <a:lnRef idx="1">
+            <a:schemeClr val="accent1"/>
+          </a:lnRef>
+          <a:fillRef idx="3">
+            <a:schemeClr val="accent1"/>
+          </a:fillRef>
+          <a:effectRef idx="2">
+            <a:schemeClr val="accent1"/>
+          </a:effectRef>
+          <a:fontRef idx="minor">
+            <a:schemeClr val="lt1"/>
+          </a:fontRef>
+        </p:style>
+        <p:txBody>
+          <a:bodyPr rtlCol="0" anchor="ctr"/>
+          <a:lstStyle/>
+          <a:p>
+            <a:pPr algn="ctr"/>
+          </a:p>
+        </p:txBody>
+      </p:sp>
+      <p:sp>
+        <p:nvSpPr>
+          <p:cNvPr id="16" name="TextBox 15"/>
+          <p:cNvSpPr txBox="1"/>
+          <p:nvPr/>
+        </p:nvSpPr>
+        <p:spPr>
+          <a:xfrm>
+            <a:off x="7909560" y="1691640"/>
+            <a:ext cx="3474720" cy="4206240"/>
+          </a:xfrm>
+          <a:prstGeom prst="rect">
+            <a:avLst/>
+          </a:prstGeom>
+          <a:noFill/>
+        </p:spPr>
+        <p:txBody>
+          <a:bodyPr wrap="square" lIns="0" rIns="0" tIns="0" bIns="0" anchor="t">
+            <a:spAutoFit/>
+          </a:bodyPr>
+          <a:lstStyle/>
+          <a:p>
+            <a:pPr algn="l">
+              <a:spcAft>
+                <a:spcPts val="1200"/>
+              </a:spcAft>
+            </a:pPr>
+            <a:r>
+              <a:rPr sz="2200" b="1" i="0">
+                <a:solidFill>
+                  <a:srgbClr val="FFFFFF"/>
+                </a:solidFill>
+                <a:latin typeface="Cambria"/>
+              </a:rPr>
+              <a:t>Next steps</a:t>
+            </a:r>
+          </a:p>
+          <a:p>
+            <a:pPr algn="l">
+              <a:spcAft>
+                <a:spcPts val="1200"/>
+              </a:spcAft>
+            </a:pPr>
+            <a:r>
+              <a:rPr sz="1500" b="0" i="0">
+                <a:solidFill>
+                  <a:srgbClr val="B8C7C4"/>
+                </a:solidFill>
+                <a:latin typeface="Calibri"/>
+              </a:rPr>
+              <a:t>Count speed humps (UNRA asset inventory or street-level imagery)</a:t>
+            </a:r>
+          </a:p>
+          <a:p>
+            <a:pPr algn="l">
+              <a:spcAft>
+                <a:spcPts val="1200"/>
+              </a:spcAft>
+            </a:pPr>
+            <a:r>
+              <a:rPr sz="1500" b="0" i="0">
+                <a:solidFill>
+                  <a:srgbClr val="B8C7C4"/>
+                </a:solidFill>
+                <a:latin typeface="Calibri"/>
+              </a:rPr>
+              <a:t>Swap GLO-30 for FABDEM terrain</a:t>
+            </a:r>
+          </a:p>
+          <a:p>
+            <a:pPr algn="l">
+              <a:spcAft>
+                <a:spcPts val="1200"/>
+              </a:spcAft>
+            </a:pPr>
+            <a:r>
+              <a:rPr sz="1500" b="0" i="0">
+                <a:solidFill>
+                  <a:srgbClr val="B8C7C4"/>
+                </a:solidFill>
+                <a:latin typeface="Calibri"/>
+              </a:rPr>
+              <a:t>Apply the method to eleven capitals (regional paper)</a:t>
+            </a:r>
+          </a:p>
+          <a:p>
+            <a:pPr algn="l">
+              <a:spcAft>
+                <a:spcPts val="1200"/>
+              </a:spcAft>
+            </a:pPr>
+            <a:r>
+              <a:rPr sz="1500" b="0" i="0">
+                <a:solidFill>
+                  <a:srgbClr val="B8C7C4"/>
+                </a:solidFill>
+                <a:latin typeface="Calibri"/>
+              </a:rPr>
+              <a:t>Write up the paper</a:t>
+            </a:r>
+          </a:p>
+        </p:txBody>
+      </p:sp>
+    </p:spTree>
+  </p:cSld>
+  <p:clrMapOvr>
+    <a:masterClrMapping/>
+  </p:clrMapOvr>
+</p:sld>
+</file>
+
+<file path=ppt/slides/slide24.xml><?xml version="1.0" encoding="utf-8"?>
 <p:sld xmlns:a="http://schemas.openxmlformats.org/drawingml/2006/main" xmlns:p="http://schemas.openxmlformats.org/presentationml/2006/main" xmlns:r="http://schemas.openxmlformats.org/officeDocument/2006/relationships">
   <p:cSld>
     <p:bg>
